--- a/presentation_oct20/output/UART_SPIFlash_2차발표_1020_코드검증.pptx
+++ b/presentation_oct20/output/UART_SPIFlash_2차발표_1020_코드검증.pptx
@@ -121,38 +121,38 @@
   <p:extLst>
     <p:ext uri="{521415D9-36F7-43E2-AB2F-B90AF26B5E84}">
       <p14:sectionLst xmlns:p14="http://schemas.microsoft.com/office/powerpoint/2010/main">
-        <p14:section name="개요" id="{afe36e2a-95dc-5d1e-fc9d-7c57d80af970}">
+        <p14:section name="개요" id="{3f3eddb3-34d4-25c8-5a7b-dc5c9c1fb9c5}">
           <p14:sldIdLst>
             <p14:sldId id="256"/>
             <p14:sldId id="257"/>
             <p14:sldId id="258"/>
           </p14:sldIdLst>
         </p14:section>
-        <p14:section name="구조와 구현" id="{594e57b7-a5b2-c14d-5b49-3695a9e6d8dc}">
+        <p14:section name="구조와 구현" id="{726ce063-2b0c-b494-c086-0a8c4ef1d963}">
           <p14:sldIdLst>
             <p14:sldId id="259"/>
             <p14:sldId id="260"/>
             <p14:sldId id="261"/>
           </p14:sldIdLst>
         </p14:section>
-        <p14:section name="검증" id="{9d0014cc-8f6c-14b5-09ea-aa7b626ba81c}">
+        <p14:section name="검증" id="{2fba95b9-7902-db69-1432-d8e2348a93ce}">
           <p14:sldIdLst>
             <p14:sldId id="262"/>
             <p14:sldId id="263"/>
             <p14:sldId id="264"/>
             <p14:sldId id="265"/>
             <p14:sldId id="266"/>
+            <p14:sldId id="267"/>
           </p14:sldIdLst>
         </p14:section>
-        <p14:section name="최적화" id="{ff54626b-b27a-82b5-ac28-42eb90d2c006}">
+        <p14:section name="최적화" id="{27237ec9-6d83-a0c7-6574-4a09548b87e9}">
           <p14:sldIdLst>
-            <p14:sldId id="267"/>
             <p14:sldId id="268"/>
+            <p14:sldId id="269"/>
           </p14:sldIdLst>
         </p14:section>
-        <p14:section name="Demo와 남은 항목" id="{06f70f87-5e2c-127d-d1ce-2a6f179e6a3d}">
+        <p14:section name="Demo" id="{57b6e2a6-f035-6974-f343-c78fe093a68c}">
           <p14:sldIdLst>
-            <p14:sldId id="269"/>
             <p14:sldId id="270"/>
           </p14:sldIdLst>
         </p14:section>
@@ -927,10 +927,10 @@
             <a:r>
               <a:rPr lang="en-US" dirty="0"/>
               <a:t>4번, 종단 간 확인 코드입니다.
-PC는 30, 31행에서 원본의 CRC32와 SHA-256을 먼저 계산합니다. 51행에서 --read-only가 아니면 파일을 보내 저장하고, --read-only이면 이 줄을 건너뛰고 Flash에서 읽기만 합니다. RESET 후 이 모드로 실행해 같은 결과가 나오면 데이터가 Flash에 남아 있다는 증거가 됩니다.
-Flash에서 읽어 보낼 때 MCU는 226행에서 실제로 읽은 데이터로 CRC를 계산해 233행에서 마지막 줄로 보고하고, PC는 88행에서 자기가 받은 데이터의 CRC와 비교합니다. 전송 중 손상을 여기서 잡습니다.
-마지막으로 56, 57행에서 원본과 복원 파일을 바이트 단위로 비교하고 CRC32와 SHA-256도 비교해서 하나라도 다르면 실패합니다. 통과하면 PASS와 함께 JSON 보고서를 남깁니다.
-출처: pc/demo_roundtrip.py, pc/bmp_store.py, Core/Src/uart_flash_test.c</a:t>
+PC는 30, 31행에서 원본의 CRC32와 SHA-256을 먼저 계산합니다. 45행에서 --read-only가 아니면 파일을 보내 저장하고, --read-only이면 이 줄을 건너뛰고 Flash에서 읽기만 합니다. 다음 장에서 RAM을 모두 덮어쓴 뒤 이 모드로 복원한 결과를 보여드리겠습니다.
+Flash에서 읽어 보낼 때 MCU는 221행에서 실제로 읽은 데이터로 CRC를 계산해 228행에서 마지막 줄로 보고하고, PC는 85행에서 자기가 받은 데이터의 CRC와 비교합니다. 전송 중 손상을 여기서 잡습니다.
+마지막으로 50, 51행에서 원본과 복원 파일을 바이트 단위로 비교하고 CRC32와 SHA-256도 비교해서 하나라도 다르면 실패합니다. 통과하면 PASS와 함께 JSON 보고서를 남깁니다.
+출처: pc/demo_roundtrip.py, pc/bmp_store.py, Core/Src/uart_flash_test.c (커밋 926d3fc)</a:t>
             </a:r>
             <a:endParaRPr lang="en-US" dirty="0"/>
           </a:p>
@@ -1018,10 +1018,11 @@
           <a:p>
             <a:r>
               <a:rPr lang="en-US" dirty="0"/>
-              <a:t>왼쪽은 PC 원본, 오른쪽은 기존 보드에서 Flash를 다시 읽어 만든 파일입니다. 화면으로 보면 같고, 데이터로도 파일 크기 3,145,782바이트, CRC32 978AB7D9, SHA-256이 모두 같으며 전체 바이트 비교도 일치했습니다.
-SHA-256 전체 값: 0bfd1da377908544c1b1d2c0e10f8a3b53434448786bcac53d12b27c50f1dd8c
-이 비교는 발표 자료를 만들면서 기존 결과 파일로 다시 수행한 것입니다. 최신 펌웨어로 하는 Demo는 별도로 실행해 새 보고서를 남깁니다.
-출처: evidence_existing.json</a:t>
+              <a:t>Flash에 정말 저장되어 있는지를 두 가지 방법으로 확인했습니다. 둘 다 run_all.sh의 마지막 단계입니다.
+증명 1은 우리 펌웨어를 전혀 거치지 않는 방법입니다. STM32CubeProgrammer의 ST 외부 로더로 QSPI Flash 칩을 0x90000000 메모리 맵 주소부터 원본 크기만큼 직접 덤프하고, 86행에서 cmp로 원본 BMP와 바이트 단위로 비교합니다. 일치했습니다. 우리 읽기 코드에 버그가 있어도 이 비교는 영향을 받지 않습니다.
+증명 2는 RAM에 남은 데이터로 복원했을 가능성을 지우는 방법입니다. 90행에서 SWD로 RAM 0x20000000부터 0x50000바이트, 즉 320 KB 전체를 0xA5로 채우고, 92행에서 처음·중간·끝 세 위치를 다시 읽어 확인합니다. 그 뒤 펌웨어를 재시작하고 96행에서 --read-only로 원본 재전송 없이 Flash에서만 복원했고, 원본과 전체 바이트가 일치했습니다. 시간은 34.6초였습니다. Gray 변환만 따로 실행해도 기준 변환과 일치했습니다.
+이미지 자체가 3 MB가 넘어서 320 KB RAM에 들어갈 수 없고, 보드의 SDRAM은 초기화하지 않으며 MPU로 접근을 막아 두었다는 점도 함께 말씀드립니다.
+출처: run_all.sh 82–97행, README.md 보드 검증 결과(2026-10-15)</a:t>
             </a:r>
             <a:endParaRPr lang="en-US" dirty="0"/>
           </a:p>
@@ -1109,13 +1110,10 @@
           <a:p>
             <a:r>
               <a:rPr lang="en-US" dirty="0"/>
-              <a:t>최적화는 크게 두 방향입니다. 하나는 UART 회선을 쉬지 않게 하는 것, 다른 하나는 작은 SRAM으로 큰 파일을 처리하는 것입니다.
-첫째, Flash에 쓰는 동안에도 UART 바이트는 계속 들어오기 때문에 수신을 하드웨어 이중 버퍼로 받았습니다. 이전 실험에서 버퍼 초과는 0회였습니다.
-둘째, 청크마다 ACK를 기다리면 그동안 회선이 쉬기 때문에 PC가 최대 두 청크까지 먼저 보낼 수 있게 했습니다. 이 방식이 한 청크씩 보내는 방식보다 얼마나 빠른지는 아직 비교 측정 자료가 없습니다.
-셋째, 복원 데이터를 PC로 보낼 때도 TX DMA 이중 버퍼를 써서 CPU가 송신을 기다리지 않게 했습니다. 이 부분은 오늘 수정한 펌웨어라 실측 자료가 아직 없습니다.
-넷째, SRAM이 320 KiB라 이미지 전체를 올릴 수 없어 청크 버퍼를 재사용합니다.
-마지막으로 추가 기능인 Gray 출력은 8비트로 고정해 시간을 줄였고, 다음 장에서 측정값으로 보여드리겠습니다.
-출처: uart_dma_rx.c, uart_dma_tx.c, uart_flash_test.c, evidence_existing.json</a:t>
+              <a:t>10월 15일 최신 펌웨어로 Demo 프로그램을 모두 10번 실행한 결과입니다. 원본을 보내 저장한 뒤 다시 읽는 실행이 5번, 원본을 보내지 않고 Flash에서만 읽는 실행이 5번이며, 10번 모두 3,145,782바이트 전체가 일치했고 CRC32 978AB7D9, SHA-256도 같았습니다.
+SHA-256 전체 값: 0bfd1da377908544c1b1d2c0e10f8a3b53434448786bcac53d12b27c50f1dd8c
+저장하는 5번 모두 DMA 은행 M0과 M1이 각각 384번 채워졌고 버퍼 초과는 0회였습니다. 시간은 저장과 복원을 포함해 86.4초에서 87.2초, 읽기 전용 복원은 34.6초에서 35.3초였습니다. 이 중 MCU가 저장에 쓴 시간은 51.4초에서 51.9초였습니다.
+출처: pc/results/demo_report_20261015_185152 ~ 200453 (10개 JSON)</a:t>
             </a:r>
             <a:endParaRPr lang="en-US" dirty="0"/>
           </a:p>
@@ -1203,10 +1201,14 @@
           <a:p>
             <a:r>
               <a:rPr lang="en-US" dirty="0"/>
-              <a:t>필수 기능은 원본 그대로의 복원이고, Gray 출력은 추가 기능입니다. 이전 버전에서 같은 입력, 921600 baud로 24비트 Gray와 8비트 Gray 출력을 각각 한 번 측정했습니다. 입력 전송 시작부터 Gray 마지막 바이트를 받을 때까지 95.60초가 72.77초로 줄었습니다. 감소율은 (95.600607 − 72.772918) / 95.600607 = 23.878%입니다.
-줄어든 이유를 확인하려고 계산해 보았습니다. 8N1은 바이트당 10비트이므로, 줄어든 2,096,128바이트를 921,600 bps로 보내는 시간은 22.74초입니다. 측정된 감소 22.83초와 거의 같아서, 시간 감소는 대부분 UART로 보내는 바이트가 줄어든 효과로 볼 수 있습니다. 즉 현재 처리 시간은 UART 회선 속도의 영향이 큽니다.
-다만 각 1회 측정이고 이전 버전 기록이므로 새 버전의 반복 측정 결과로 일반화하지는 않겠습니다. 백업 준비 44.18초는 이 시간에 포함하지 않았습니다. 현재 운용 출력은 8비트 Gray로 고정했습니다.
-출처: pc/results/timings.csv, evidence_existing.json</a:t>
+              <a:t>최적화는 UART 회선을 쉬지 않게 하는 것과, 필요 없는 단계를 없애는 것, 작은 SRAM으로 큰 파일을 처리하는 것입니다.
+첫째, Flash에 쓰는 동안에도 UART 바이트는 계속 들어오기 때문에 수신을 하드웨어 이중 버퍼로 받았습니다. 10월 15일 저장 5회 모두 버퍼 초과는 0회였습니다.
+둘째, 청크마다 ACK를 기다리면 그동안 회선이 쉬기 때문에 PC가 최대 두 청크까지 먼저 보낼 수 있게 했습니다. 한 청크씩 보내는 방식과 비교한 측정은 아직 없습니다.
+셋째, 복원 데이터를 보낼 때 TX DMA 이중 버퍼를 써서 CPU가 송신을 기다리지 않게 했습니다. 읽기 전용 복원이 34.6초인데, 3,145,782바이트를 921600 baud 8N1로 보내는 데 필요한 계산값이 34.13초라서 거의 회선 속도로 보내고 있다고 볼 수 있습니다. 이 34.6초에는 PC 비교 시간도 들어 있습니다. 적용 전과 직접 비교한 측정은 없습니다.
+넷째, 10월 15일에 저장 전 백업 단계를 없앴습니다. 10월 13일 기록에서 백업까지 포함한 Gray 전체 과정은 116.96초였고, 백업이 없어진 지금은 72.8초입니다. 대신 삭제 범위에 있던 기존 Flash 내용은 그대로 덮어씁니다.
+다섯째, SRAM이 320 KiB라 이미지 전체를 올릴 수 없어 청크 버퍼를 재사용합니다. 마지막으로 Gray 출력을 8비트로 고정한 효과는 다음 장에서 보여드리겠습니다.
+참고로 저장 구간은 MCU 기준 약 51.8초로, 같은 양을 보내는 회선 계산값 34.1초보다 깁니다. 저장 쪽은 회선보다 Flash 삭제·쓰기·재읽기 검증이 시간을 더 쓰고 있습니다.
+출처: demo_report_20261015_*.json, pc/results/timings.csv, evidence_existing.json, README.md</a:t>
             </a:r>
             <a:endParaRPr lang="en-US" dirty="0"/>
           </a:p>
@@ -1294,10 +1296,10 @@
           <a:p>
             <a:r>
               <a:rPr lang="en-US" dirty="0"/>
-              <a:t>Demo는 프로젝트 폴더에서 명령 하나로 진행합니다. 먼저 원본 BMP의 크기와 이미지를 보여드립니다. Serial Monitor가 포트를 잡고 있으면 실행이 안 되므로 먼저 종료하고 새 펌웨어를 실행합니다.
-python3 pc/demo_roundtrip.py를 실행하면 백업, 저장 진행률이 표시되고, 끝나면 PASS와 CRC32, SHA-256이 나옵니다. 칩 ID, 크기, CRC32, SHA-256, 전체 바이트 비교 결과는 JSON 보고서로 저장됩니다. 복원된 BMP를 열어 원본과 비교합니다.
-마지막으로 MCU를 RESET한 뒤 같은 명령에 --read-only를 붙여 실행합니다. 이때는 PC가 원본을 다시 보내지 않고 Flash에서만 읽기 때문에, 저장된 데이터가 남아 있다는 것을 보여줄 수 있습니다.
-출처: pc/demo_roundtrip.py</a:t>
+              <a:t>필수 기능은 원본 그대로의 복원이고, Gray 출력은 추가 기능입니다. 이전 버전에서 같은 입력, 921600 baud로 24비트 Gray와 8비트 Gray 출력을 각각 한 번 측정했습니다. 입력 전송 시작부터 Gray 마지막 바이트를 받을 때까지 95.60초가 72.77초로 줄었습니다. 감소율은 (95.600607 − 72.772918) / 95.600607 = 23.878%입니다.
+줄어든 이유를 확인하려고 계산해 보았습니다. 8N1은 바이트당 10비트이므로, 줄어든 2,096,128바이트를 921,600 bps로 보내는 시간은 22.74초입니다. 측정된 감소 22.83초와 거의 같아서, 시간 감소는 대부분 UART로 보내는 바이트가 줄어든 효과로 볼 수 있습니다. 즉 현재 처리 시간은 UART 회선 속도의 영향이 큽니다.
+막대 그래프는 10월 13일 각 1회 측정이고, 당시 있던 백업 준비 44.18초는 포함하지 않았습니다. 10월 15일 최신 펌웨어로 8비트 전체 과정을 6번 다시 측정하니 72.20초에서 72.78초, 중앙값 72.58초로 같은 수준이었습니다. 24비트 출력은 다시 측정하지 않았습니다. 현재 운용 출력은 8비트 Gray로 고정했습니다.
+출처: pc/results/timings.csv, evidence_existing.json</a:t>
             </a:r>
             <a:endParaRPr lang="en-US" dirty="0"/>
           </a:p>
@@ -1385,10 +1387,11 @@
           <a:p>
             <a:r>
               <a:rPr lang="en-US" dirty="0"/>
-              <a:t>마지막으로 발표 전까지 남은 항목입니다.
-오늘 수정한 최신 펌웨어는 빌드와 프로그램 검사를 통과했지만 실물 Demo는 다시 돌려야 하고, 새 JSON 보고서로 결과를 갱신하겠습니다. RESET 후 저장 유지는 현장에서 보여드리겠습니다. W25Q32 조건은 대체가 허용되는지 확인이 필요하고, 허용되지 않으면 외부 W25Q32로 실물 시험을 하겠습니다.
-성능 측면에서는 Gray 출력 시간이 이전 버전 1회 측정이라 새 버전에서 반복 측정이 필요하고, 2청크 전송 방식의 효과도 1청크 방식과 비교한 자료가 아직 없습니다.
-이상입니다. 특히 W25Q128 대체 허용 여부에 대해 의견 주시면 감사하겠습니다.</a:t>
+              <a:t>현장 Demo는 run_all.sh 하나로 진행합니다. Serial Monitor와 VS Code 디버그 세션이 포트나 ST-LINK를 잡고 있으면 스크립트가 처음에 멈추므로 먼저 닫습니다.
+스크립트는 PC 단위 테스트, C 모의 테스트, 펌웨어 빌드, 다운로드와 검증, 원본 저장과 복원, Gray 전체 과정, 1 KiB 반복 저장, Flash 칩 직접 덤프, RAM 덮어쓰기 후 복원까지 9단계를 차례로 실행하고, 어느 단계든 실패하면 그 자리에서 멈춥니다. 10월 15일 실행에서는 247초 만에 모든 단계를 통과했습니다.
+시간이 부족하면 5단계 demo_roundtrip.py와 9단계의 --read-only 복원만 따로 보여드리겠습니다.
+남은 확인 항목은 Flash 칩 모델입니다. W25Q128 대체가 허용되는지 의견 주시면 감사하겠습니다. 이상입니다.
+출처: run_all.sh, README.md 보드 검증 결과(2026-10-15)</a:t>
             </a:r>
             <a:endParaRPr lang="en-US" dirty="0"/>
           </a:p>
@@ -1476,10 +1479,10 @@
           <a:p>
             <a:r>
               <a:rPr lang="en-US" dirty="0"/>
-              <a:t>결론부터 말씀드리면, 과제에서 요구한 UART 통신, SPI Flash 통신, Flash 읽기·쓰기, 3 MB 이상 저장, 복원, 무결성 확인은 기존 실물 결과 파일로 확인했습니다.
-남은 것은 두 가지입니다. 첫째, RESET 후에도 Flash에 데이터가 남아 있다는 것을 원본 재전송 없이 읽어서 보이는 것인데, 이는 현장 Demo에서 --read-only 모드로 보여드리겠습니다. 둘째, 과제 조건의 W25Q32가 아니라 W25Q128로 실물 시험을 했기 때문에 칩 대체가 허용되는지 확인이 필요합니다.
-표의 "확인"은 기존 실물 출력 파일과 구현 근거에 대한 상태입니다. 오늘 수정한 TX DMA 및 8비트 고정 펌웨어는 빌드와 프로그램 검사를 통과했고, 발표 전에 최신 펌웨어로 실물 Demo를 다시 실행해 새 보고서를 남기겠습니다.
-출처: evidence_existing.json, f746_bmp_gray/docs/hardware_setup.md</a:t>
+              <a:t>결론부터 말씀드리면, 과제에서 요구한 UART 통신, SPI Flash 통신, Flash 읽기·쓰기, 3 MB 이상 저장, 복원, 무결성 확인은 10월 15일 최신 펌웨어로 보드에서 다시 실행해 확인했습니다. 저장·복원은 5번 실행해 5번 모두 원본과 전체 바이트가 일치했습니다.
+지난번에 남아 있던 RESET 후 저장 유지도 이번에 확인했습니다. MCU RAM 320 KB 전체를 0xA5로 덮어쓴 뒤 원본을 다시 보내지 않고 Flash에서만 읽어 복원했고, 펌웨어를 거치지 않는 ST 외부 로더로 Flash 칩을 직접 덤프해도 원본과 같았습니다.
+남은 것은 Flash 칩 모델 하나입니다. 과제 조건은 W25Q32이고 실물 시험은 W25Q128로 했기 때문에 대체가 허용되는지 확인이 필요합니다.
+출처: README.md 보드 검증 결과(2026-10-15), pc/results/demo_report_20261015_*.json, run_all.sh</a:t>
             </a:r>
             <a:endParaRPr lang="en-US" dirty="0"/>
           </a:p>
@@ -1842,7 +1845,7 @@
               <a:rPr lang="en-US" dirty="0"/>
               <a:t>주소 지도입니다. 막대 전체가 W25Q32 용량과 같은 4 MiB입니다.
 입력 파일은 3,145,782바이트로 3 MB와 3 MiB(3,145,728바이트)를 모두 넘습니다. 헤더부터 마지막 바이트까지 0x000000부터 저장하므로 파일 끝은 0x300035입니다. 삭제는 64 KiB 블록 단위라 경계를 올려 49개 블록, 3,211,264바이트를 지웁니다. 별도 단계로 한 번에 지우는 것이 아니라, 수신 중 64 KiB 경계에 닿을 때마다 그 블록을 지웁니다. 쓰기는 256바이트 페이지 단위로 12,289번입니다. 이미지 영역은 0x3EFFFF까지로 잡아 두었습니다.
-MCU의 SRAM은 320 KiB라 이미지 전체를 RAM에 올릴 수 없습니다. 그래서 4 KiB 청크 버퍼를 재사용하며 바로 Flash에 씁니다. 그리고 지우기 전에 삭제 대상 영역 전체를 PC에 백업합니다. 백업한 크기가 삭제 범위보다 작으면 펌웨어가 저장 명령을 거부합니다.
+MCU의 SRAM은 320 KiB라 이미지 전체를 RAM에 올릴 수 없습니다. 그래서 4 KiB 청크 버퍼를 재사용하며 바로 Flash에 씁니다. 10월 15일 수정으로 저장 전 백업 단계는 없앴습니다. 따라서 삭제 범위에 있던 기존 Flash 내용은 그대로 덮어씁니다.
 주소 0x300035, 0x30FFFF는 파일 크기와 블록 수로 계산한 값입니다.
 출처: evidence_existing.json, Core/Src/uart_flash_test.c, STM32F746NG 데이터시트</a:t>
             </a:r>
@@ -1932,10 +1935,10 @@
           <a:p>
             <a:r>
               <a:rPr lang="en-US" dirty="0"/>
-              <a:t>블록 다이어그램의 1번과 3번 구간을 확인하는 펌웨어 코드입니다. 파일 수신 함수 receive_file에서 4 KiB 청크 하나를 처리하는 순서를 그대로 가져왔고, 색이 들어간 줄이 확인 조건입니다.
-먼저 256행에서, PC가 삭제 범위 전체를 백업하지 않았으면 저장 자체를 거부합니다. 청크가 들어오면 277행에서 PC가 붙여 보낸 CRC와 비교하고, 다르면 Flash를 건드리기 전에 멈춥니다. 282행에서 64 KiB 경계일 때만 블록을 지우고, 293행에서 256바이트 페이지 단위로 씁니다.
-가장 중요한 부분은 299, 300행입니다. 방금 쓴 영역을 Flash에서 다시 읽어 받은 데이터와 memcmp로 비교합니다. 그래서 PC가 받는 ACK는 "받았다"가 아니라 "Flash에 쓰고 다시 읽어 같았다"는 뜻입니다. 305행에서 다시 읽은 데이터로 CRC를 누적하고, 루프가 끝나면 311행에서 파일 전체 CRC를 비교해 FILE STORED를 보냅니다.
-출처: Core/Src/uart_flash_test.c 255–320행</a:t>
+              <a:t>블록 다이어그램의 1번과 3번 구간을 확인하는 펌웨어 코드입니다. 파일 수신 함수 receive_file에서 4 KiB 청크 하나를 처리하는 순서를 그대로 가져왔고, 색이 들어간 줄이 확인 조건입니다. 10월 15일 수정으로 저장 전 백업 단계는 없어졌고, 저장 요청이 오면 바로 이 루프가 시작됩니다.
+257, 258행에서 CRC 헤더와 청크를 DMA 버퍼에서 읽는데, 시간 초과나 버퍼 초과가 있으면 그 자리에서 중단합니다. 263행에서 PC가 붙여 보낸 CRC와 비교하고, 다르면 Flash를 건드리기 전에 멈춥니다. 268행에서 64 KiB 경계일 때만 블록을 지우고, 279행에서 256바이트 페이지 단위로 씁니다.
+가장 중요한 부분은 285, 286행입니다. 방금 쓴 영역을 Flash에서 다시 읽어 받은 데이터와 memcmp로 비교합니다. 그래서 PC가 받는 ACK는 "받았다"가 아니라 "Flash에 쓰고 다시 읽어 같았다"는 뜻입니다. 291행에서 다시 읽은 데이터로 CRC를 누적하고, 루프가 끝나면 297행에서 파일 전체 CRC를 비교해 FILE STORED를 보냅니다.
+출처: Core/Src/uart_flash_test.c 233–307행 (커밋 926d3fc)</a:t>
             </a:r>
             <a:endParaRPr lang="en-US" dirty="0"/>
           </a:p>
@@ -2024,10 +2027,10 @@
             <a:r>
               <a:rPr lang="en-US" dirty="0"/>
               <a:t>2번 구간, DMA 이중 버퍼와 펌웨어 사이의 확인 코드입니다.
-PC 쪽 send_file은 107행에서 ACK를 받지 않은 청크를 최대 두 개까지만 보냅니다. 수신 버퍼가 두 개라서, 한쪽을 Flash에 쓰는 동안 다른 쪽이 차도록 맞춘 것입니다. 114행에서 ACK의 바이트 위치가 기대값과 다르면 바로 실패합니다.
+PC 쪽 send_file은 104행에서 ACK를 받지 않은 청크를 최대 두 개까지만 보냅니다. 수신 버퍼가 두 개라서, 한쪽을 Flash에 쓰는 동안 다른 쪽이 차도록 맞춘 것입니다. 111행에서 ACK의 바이트 위치가 기대값과 다르면 바로 실패합니다.
 펌웨어 쪽 uart_dma_rx.c에서는 두 가지로 초과를 감지합니다. 54행은 DMA 완료 인터럽트가 M0, M1 순서대로 오지 않으면, 즉 한 은행을 처리하기 전에 다음 은행이 또 찼다면 초과로 셉니다. 134행과 152행은 DMA가 쓴 바이트 수에서 CPU가 읽은 바이트 수를 뺀 값이 버퍼 전체 8 KiB를 넘는지 봅니다. 152행은 memcpy 이후에 다시 확인해서, 복사하는 동안 DMA가 덮어쓴 데이터를 받아들이지 않게 합니다.
-Demo 프로그램은 61행에서 마지막에 통계를 받아 초과가 있으면 실패로 처리합니다. 10월 13일 전체 실행 기록에서 M0 384회, M1 384회, 초과 0회였습니다.
-출처: pc/bmp_store.py, Core/Src/uart_dma_rx.c, pc/demo_roundtrip.py, evidence_existing.json</a:t>
+Demo 프로그램은 55행에서 마지막에 통계를 받아 초과가 있으면 실패로 처리합니다. 10월 15일 저장 실행 5번 모두 M0 384회, M1 384회, 초과 0회였습니다.
+출처: pc/bmp_store.py, Core/Src/uart_dma_rx.c, pc/demo_roundtrip.py, pc/results/demo_report_20261015_*.json</a:t>
             </a:r>
             <a:endParaRPr lang="en-US" dirty="0"/>
           </a:p>
@@ -2120,7 +2123,7 @@
 write_enable은 06h를 보내는 것에서 끝나지 않고, 86행에서 상태를 다시 읽어 WEL이 1이고 BUSY가 0인지 확인합니다. Write Enable이 실제로 걸렸는지 확인한 뒤에만 쓰기나 삭제 명령을 보냅니다.
 페이지 쓰기 함수는 104행에서 256바이트 페이지 경계를 넘는 요청을 거부하고, 쓰기 후 118행에서 완료를 기다립니다. 64 KiB 블록 삭제는 231행부터 삭제 전 대기, WREN, D8h, 삭제 후 대기 순서입니다.
 칩 ID는 main.c에서 0x9F로 읽고, 펌웨어와 PC 프로그램 모두 EF4018과 EF4016만 허용합니다. QSPI는 prescaler 7로 216 MHz를 8분주해 27 MHz, Clock Mode 0입니다.
-출처: Core/Src/flash_test.c, Core/Src/main.c, Core/Src/uart_flash_test.c 370–373행</a:t>
+출처: Core/Src/flash_test.c, Core/Src/main.c, Core/Src/uart_flash_test.c 356–358행</a:t>
             </a:r>
             <a:endParaRPr lang="en-US" dirty="0"/>
           </a:p>
@@ -3235,7 +3238,7 @@
                 <a:ea typeface="Consolas" pitchFamily="34" charset="-122"/>
                 <a:cs typeface="Consolas" pitchFamily="34" charset="-120"/>
               </a:rPr>
-              <a:t>  51  </a:t>
+              <a:t>  45  </a:t>
             </a:r>
             <a:pPr indent="0" marL="0">
               <a:lnSpc>
@@ -3272,7 +3275,7 @@
                 <a:ea typeface="Consolas" pitchFamily="34" charset="-122"/>
                 <a:cs typeface="Consolas" pitchFamily="34" charset="-120"/>
               </a:rPr>
-              <a:t>  53  </a:t>
+              <a:t>  47  </a:t>
             </a:r>
             <a:pPr indent="0" marL="0">
               <a:lnSpc>
@@ -3309,7 +3312,7 @@
                 <a:ea typeface="Consolas" pitchFamily="34" charset="-122"/>
                 <a:cs typeface="Consolas" pitchFamily="34" charset="-120"/>
               </a:rPr>
-              <a:t>  54  </a:t>
+              <a:t>  48  </a:t>
             </a:r>
             <a:pPr indent="0" marL="0">
               <a:lnSpc>
@@ -3346,7 +3349,7 @@
                 <a:ea typeface="Consolas" pitchFamily="34" charset="-122"/>
                 <a:cs typeface="Consolas" pitchFamily="34" charset="-120"/>
               </a:rPr>
-              <a:t>  55  </a:t>
+              <a:t>  49  </a:t>
             </a:r>
             <a:pPr indent="0" marL="0">
               <a:lnSpc>
@@ -3383,7 +3386,7 @@
                 <a:ea typeface="Consolas" pitchFamily="34" charset="-122"/>
                 <a:cs typeface="Consolas" pitchFamily="34" charset="-120"/>
               </a:rPr>
-              <a:t>  56  </a:t>
+              <a:t>  50  </a:t>
             </a:r>
             <a:pPr indent="0" marL="0">
               <a:lnSpc>
@@ -3420,7 +3423,7 @@
                 <a:ea typeface="Consolas" pitchFamily="34" charset="-122"/>
                 <a:cs typeface="Consolas" pitchFamily="34" charset="-120"/>
               </a:rPr>
-              <a:t>  57  </a:t>
+              <a:t>  51  </a:t>
             </a:r>
             <a:pPr indent="0" marL="0">
               <a:lnSpc>
@@ -3457,7 +3460,7 @@
                 <a:ea typeface="Consolas" pitchFamily="34" charset="-122"/>
                 <a:cs typeface="Consolas" pitchFamily="34" charset="-120"/>
               </a:rPr>
-              <a:t>  58  </a:t>
+              <a:t>  52  </a:t>
             </a:r>
             <a:pPr indent="0" marL="0">
               <a:lnSpc>
@@ -3531,7 +3534,7 @@
                 <a:ea typeface="Consolas" pitchFamily="34" charset="-122"/>
                 <a:cs typeface="Consolas" pitchFamily="34" charset="-120"/>
               </a:rPr>
-              <a:t> 226  </a:t>
+              <a:t> 221  </a:t>
             </a:r>
             <a:pPr indent="0" marL="0">
               <a:lnSpc>
@@ -3588,7 +3591,7 @@
                 <a:ea typeface="Consolas" pitchFamily="34" charset="-122"/>
                 <a:cs typeface="Consolas" pitchFamily="34" charset="-120"/>
               </a:rPr>
-              <a:t> 233  </a:t>
+              <a:t> 228  </a:t>
             </a:r>
             <a:pPr indent="0" marL="0">
               <a:lnSpc>
@@ -3605,7 +3608,7 @@
                 <a:ea typeface="Consolas" pitchFamily="34" charset="-122"/>
                 <a:cs typeface="Consolas" pitchFamily="34" charset="-120"/>
               </a:rPr>
-              <a:t>snprintf(line, sizeof(line), "%s DONE %08lX\n", backup ? "BACKUP" : "FILE DATA",</a:t>
+              <a:t>snprintf(line, sizeof(line), "FILE DATA DONE %08lX\n",</a:t>
             </a:r>
             <a:endParaRPr lang="en-US" sz="1100" dirty="0"/>
           </a:p>
@@ -3625,7 +3628,7 @@
                 <a:ea typeface="Consolas" pitchFamily="34" charset="-122"/>
                 <a:cs typeface="Consolas" pitchFamily="34" charset="-120"/>
               </a:rPr>
-              <a:t> 234  </a:t>
+              <a:t> 229  </a:t>
             </a:r>
             <a:pPr indent="0" marL="0">
               <a:lnSpc>
@@ -3699,7 +3702,7 @@
                 <a:ea typeface="Consolas" pitchFamily="34" charset="-122"/>
                 <a:cs typeface="Consolas" pitchFamily="34" charset="-120"/>
               </a:rPr>
-              <a:t>  88  </a:t>
+              <a:t>  85  </a:t>
             </a:r>
             <a:pPr indent="0" marL="0">
               <a:lnSpc>
@@ -3716,7 +3719,7 @@
                 <a:ea typeface="Consolas" pitchFamily="34" charset="-122"/>
                 <a:cs typeface="Consolas" pitchFamily="34" charset="-120"/>
               </a:rPr>
-              <a:t>if line != f"{label} DONE {crc &amp; 0xFFFFFFFF:08X}":</a:t>
+              <a:t>if line != f"FILE DATA DONE {crc &amp; 0xFFFFFFFF:08X}":</a:t>
             </a:r>
             <a:endParaRPr lang="en-US" sz="1100" dirty="0"/>
           </a:p>
@@ -3736,7 +3739,7 @@
                 <a:ea typeface="Consolas" pitchFamily="34" charset="-122"/>
                 <a:cs typeface="Consolas" pitchFamily="34" charset="-120"/>
               </a:rPr>
-              <a:t>  89  </a:t>
+              <a:t>  86  </a:t>
             </a:r>
             <a:pPr indent="0" marL="0">
               <a:lnSpc>
@@ -3795,7 +3798,7 @@
                 <a:ea typeface="Malgun Gothic" pitchFamily="34" charset="-122"/>
                 <a:cs typeface="Malgun Gothic" pitchFamily="34" charset="-120"/>
               </a:rPr>
-              <a:t>51행</a:t>
+              <a:t>45행</a:t>
             </a:r>
             <a:endParaRPr lang="en-US" sz="1600" dirty="0"/>
           </a:p>
@@ -3818,7 +3821,7 @@
                 <a:ea typeface="Malgun Gothic" pitchFamily="34" charset="-122"/>
                 <a:cs typeface="Malgun Gothic" pitchFamily="34" charset="-120"/>
               </a:rPr>
-              <a:t>--read-only면 원본을 보내지 않고 Flash만 읽음 → RESET 후 저장 유지 확인</a:t>
+              <a:t>--read-only면 원본을 보내지 않고 Flash만 읽음</a:t>
             </a:r>
             <a:endParaRPr lang="en-US" sz="1600" dirty="0"/>
           </a:p>
@@ -3838,7 +3841,7 @@
                 <a:ea typeface="Malgun Gothic" pitchFamily="34" charset="-122"/>
                 <a:cs typeface="Malgun Gothic" pitchFamily="34" charset="-120"/>
               </a:rPr>
-              <a:t>226 · 233행</a:t>
+              <a:t>221 · 228행</a:t>
             </a:r>
             <a:endParaRPr lang="en-US" sz="1600" dirty="0"/>
           </a:p>
@@ -3881,7 +3884,7 @@
                 <a:ea typeface="Malgun Gothic" pitchFamily="34" charset="-122"/>
                 <a:cs typeface="Malgun Gothic" pitchFamily="34" charset="-120"/>
               </a:rPr>
-              <a:t>88행</a:t>
+              <a:t>85행</a:t>
             </a:r>
             <a:endParaRPr lang="en-US" sz="1600" dirty="0"/>
           </a:p>
@@ -3924,7 +3927,7 @@
                 <a:ea typeface="Malgun Gothic" pitchFamily="34" charset="-122"/>
                 <a:cs typeface="Malgun Gothic" pitchFamily="34" charset="-120"/>
               </a:rPr>
-              <a:t>56–57행</a:t>
+              <a:t>50–51행</a:t>
             </a:r>
             <a:endParaRPr lang="en-US" sz="1600" dirty="0"/>
           </a:p>
@@ -4100,7 +4103,7 @@
                 <a:ea typeface="Malgun Gothic" pitchFamily="34" charset="-122"/>
                 <a:cs typeface="Malgun Gothic" pitchFamily="34" charset="-120"/>
               </a:rPr>
-              <a:t>원본과 Flash 재읽기 파일의 3,145,782 B가 모두 일치합니다</a:t>
+              <a:t>칩 직접 덤프와 RAM을 덮어쓴 뒤 복원 모두 원본과 일치했습니다</a:t>
             </a:r>
             <a:endParaRPr lang="en-US" sz="2600" dirty="0"/>
           </a:p>
@@ -4108,14 +4111,39 @@
       </p:sp>
       <p:sp>
         <p:nvSpPr>
-          <p:cNvPr id="3" name="Text 1"/>
+          <p:cNvPr id="3" name="Shape 1"/>
+          <p:cNvSpPr/>
+          <p:nvPr/>
+        </p:nvSpPr>
+        <p:spPr>
+          <a:xfrm>
+            <a:off x="548640" y="1325880"/>
+            <a:ext cx="11091672" cy="2788920"/>
+          </a:xfrm>
+          <a:prstGeom prst="rect">
+            <a:avLst/>
+          </a:prstGeom>
+          <a:solidFill>
+            <a:srgbClr val="F3F5F7"/>
+          </a:solidFill>
+          <a:ln w="12700">
+            <a:solidFill>
+              <a:srgbClr val="F3F5F7"/>
+            </a:solidFill>
+            <a:prstDash val="solid"/>
+          </a:ln>
+        </p:spPr>
+      </p:sp>
+      <p:sp>
+        <p:nvSpPr>
+          <p:cNvPr id="4" name="code"/>
           <p:cNvSpPr txBox="1"/>
           <p:nvPr/>
         </p:nvSpPr>
         <p:spPr>
           <a:xfrm>
-            <a:off x="548640" y="1417320"/>
-            <a:ext cx="2743200" cy="320040"/>
+            <a:off x="685800" y="1435608"/>
+            <a:ext cx="10817352" cy="2569464"/>
           </a:xfrm>
           <a:prstGeom prst="rect">
             <a:avLst/>
@@ -4124,114 +4152,420 @@
           <a:ln/>
         </p:spPr>
         <p:txBody>
-          <a:bodyPr wrap="square" lIns="0" tIns="0" rIns="0" bIns="0" rtlCol="0" anchor="t"/>
+          <a:bodyPr wrap="none" lIns="0" tIns="0" rIns="0" bIns="0" rtlCol="0" anchor="t"/>
           <a:lstStyle/>
           <a:p>
             <a:pPr indent="0" marL="0">
-              <a:buNone/>
-            </a:pPr>
-            <a:r>
-              <a:rPr lang="en-US" sz="1500" b="1" dirty="0">
-                <a:solidFill>
-                  <a:srgbClr val="1F2933"/>
+              <a:lnSpc>
+                <a:spcPct val="120000"/>
+              </a:lnSpc>
+              <a:buNone/>
+            </a:pPr>
+            <a:r>
+              <a:rPr lang="en-US" sz="1100" b="1" dirty="0">
+                <a:solidFill>
+                  <a:srgbClr val="5F6B7A"/>
                 </a:solidFill>
                 <a:latin typeface="Malgun Gothic" pitchFamily="34" charset="0"/>
                 <a:ea typeface="Malgun Gothic" pitchFamily="34" charset="-122"/>
                 <a:cs typeface="Malgun Gothic" pitchFamily="34" charset="-120"/>
               </a:rPr>
-              <a:t>PC 원본</a:t>
-            </a:r>
-            <a:endParaRPr lang="en-US" sz="1500" dirty="0"/>
-          </a:p>
-        </p:txBody>
-      </p:sp>
-      <p:sp>
-        <p:nvSpPr>
-          <p:cNvPr id="4" name="Text 2"/>
-          <p:cNvSpPr txBox="1"/>
-          <p:nvPr/>
-        </p:nvSpPr>
-        <p:spPr>
-          <a:xfrm>
-            <a:off x="3794760" y="1417320"/>
-            <a:ext cx="2743200" cy="320040"/>
-          </a:xfrm>
-          <a:prstGeom prst="rect">
-            <a:avLst/>
-          </a:prstGeom>
-          <a:noFill/>
-          <a:ln/>
-        </p:spPr>
-        <p:txBody>
-          <a:bodyPr wrap="square" lIns="0" tIns="0" rIns="0" bIns="0" rtlCol="0" anchor="t"/>
-          <a:lstStyle/>
-          <a:p>
-            <a:pPr indent="0" marL="0">
-              <a:buNone/>
-            </a:pPr>
-            <a:r>
-              <a:rPr lang="en-US" sz="1500" b="1" dirty="0">
+              <a:t>run_all.sh — 증명 1: ST 외부 로더로 QSPI Flash 칩 직접 덤프</a:t>
+            </a:r>
+            <a:endParaRPr lang="en-US" sz="1100" dirty="0"/>
+          </a:p>
+          <a:p>
+            <a:pPr indent="0" marL="0">
+              <a:lnSpc>
+                <a:spcPct val="120000"/>
+              </a:lnSpc>
+              <a:buNone/>
+            </a:pPr>
+            <a:r>
+              <a:rPr lang="en-US" sz="1100" dirty="0">
+                <a:solidFill>
+                  <a:srgbClr val="8A94A3"/>
+                </a:solidFill>
+                <a:latin typeface="Consolas" pitchFamily="34" charset="0"/>
+                <a:ea typeface="Consolas" pitchFamily="34" charset="-122"/>
+                <a:cs typeface="Consolas" pitchFamily="34" charset="-120"/>
+              </a:rPr>
+              <a:t>  84  </a:t>
+            </a:r>
+            <a:pPr indent="0" marL="0">
+              <a:lnSpc>
+                <a:spcPct val="120000"/>
+              </a:lnSpc>
+              <a:buNone/>
+            </a:pPr>
+            <a:r>
+              <a:rPr lang="en-US" sz="1100" b="1" dirty="0">
+                <a:solidFill>
+                  <a:srgbClr val="0F766E"/>
+                </a:solidFill>
+                <a:latin typeface="Consolas" pitchFamily="34" charset="0"/>
+                <a:ea typeface="Consolas" pitchFamily="34" charset="-122"/>
+                <a:cs typeface="Consolas" pitchFamily="34" charset="-120"/>
+              </a:rPr>
+              <a:t>prog -c port=SWD mode=UR -el "$LOADER" -u 0x90000000 "$SIZE" "$TMP/qspi_dump.bin"</a:t>
+            </a:r>
+            <a:endParaRPr lang="en-US" sz="1100" dirty="0"/>
+          </a:p>
+          <a:p>
+            <a:pPr indent="0" marL="0">
+              <a:lnSpc>
+                <a:spcPct val="120000"/>
+              </a:lnSpc>
+              <a:buNone/>
+            </a:pPr>
+            <a:r>
+              <a:rPr lang="en-US" sz="1100" dirty="0">
+                <a:solidFill>
+                  <a:srgbClr val="8A94A3"/>
+                </a:solidFill>
+                <a:latin typeface="Consolas" pitchFamily="34" charset="0"/>
+                <a:ea typeface="Consolas" pitchFamily="34" charset="-122"/>
+                <a:cs typeface="Consolas" pitchFamily="34" charset="-120"/>
+              </a:rPr>
+              <a:t>  85  </a:t>
+            </a:r>
+            <a:pPr indent="0" marL="0">
+              <a:lnSpc>
+                <a:spcPct val="120000"/>
+              </a:lnSpc>
+              <a:buNone/>
+            </a:pPr>
+            <a:r>
+              <a:rPr lang="en-US" sz="1100" dirty="0">
                 <a:solidFill>
                   <a:srgbClr val="1F2933"/>
+                </a:solidFill>
+                <a:latin typeface="Consolas" pitchFamily="34" charset="0"/>
+                <a:ea typeface="Consolas" pitchFamily="34" charset="-122"/>
+                <a:cs typeface="Consolas" pitchFamily="34" charset="-120"/>
+              </a:rPr>
+              <a:t>shasum -a 256 "$TMP/qspi_dump.bin" "$INPUT"</a:t>
+            </a:r>
+            <a:endParaRPr lang="en-US" sz="1100" dirty="0"/>
+          </a:p>
+          <a:p>
+            <a:pPr indent="0" marL="0">
+              <a:lnSpc>
+                <a:spcPct val="120000"/>
+              </a:lnSpc>
+              <a:buNone/>
+            </a:pPr>
+            <a:r>
+              <a:rPr lang="en-US" sz="1100" dirty="0">
+                <a:solidFill>
+                  <a:srgbClr val="8A94A3"/>
+                </a:solidFill>
+                <a:latin typeface="Consolas" pitchFamily="34" charset="0"/>
+                <a:ea typeface="Consolas" pitchFamily="34" charset="-122"/>
+                <a:cs typeface="Consolas" pitchFamily="34" charset="-120"/>
+              </a:rPr>
+              <a:t>  86  </a:t>
+            </a:r>
+            <a:pPr indent="0" marL="0">
+              <a:lnSpc>
+                <a:spcPct val="120000"/>
+              </a:lnSpc>
+              <a:buNone/>
+            </a:pPr>
+            <a:r>
+              <a:rPr lang="en-US" sz="1100" b="1" dirty="0">
+                <a:solidFill>
+                  <a:srgbClr val="0F766E"/>
+                </a:solidFill>
+                <a:latin typeface="Consolas" pitchFamily="34" charset="0"/>
+                <a:ea typeface="Consolas" pitchFamily="34" charset="-122"/>
+                <a:cs typeface="Consolas" pitchFamily="34" charset="-120"/>
+              </a:rPr>
+              <a:t>cmp "$TMP/qspi_dump.bin" "$INPUT" || fail "Flash 칩 내용이 원본과 다릅니다"</a:t>
+            </a:r>
+            <a:endParaRPr lang="en-US" sz="1100" dirty="0"/>
+          </a:p>
+          <a:p>
+            <a:pPr indent="0" marL="0">
+              <a:lnSpc>
+                <a:spcPct val="120000"/>
+              </a:lnSpc>
+              <a:buNone/>
+            </a:pPr>
+            <a:r>
+              <a:rPr lang="en-US" sz="600" dirty="0">
+                <a:solidFill>
+                  <a:srgbClr val="000000"/>
+                </a:solidFill>
+              </a:rPr>
+              <a:t> </a:t>
+            </a:r>
+            <a:endParaRPr lang="en-US" sz="1100" dirty="0"/>
+          </a:p>
+          <a:p>
+            <a:pPr indent="0" marL="0">
+              <a:lnSpc>
+                <a:spcPct val="120000"/>
+              </a:lnSpc>
+              <a:buNone/>
+            </a:pPr>
+            <a:r>
+              <a:rPr lang="en-US" sz="1100" b="1" dirty="0">
+                <a:solidFill>
+                  <a:srgbClr val="5F6B7A"/>
                 </a:solidFill>
                 <a:latin typeface="Malgun Gothic" pitchFamily="34" charset="0"/>
                 <a:ea typeface="Malgun Gothic" pitchFamily="34" charset="-122"/>
                 <a:cs typeface="Malgun Gothic" pitchFamily="34" charset="-120"/>
               </a:rPr>
-              <a:t>Flash 재읽기 파일</a:t>
-            </a:r>
-            <a:endParaRPr lang="en-US" sz="1500" dirty="0"/>
+              <a:t>run_all.sh — 증명 2: RAM 320 KB를 0xA5로 덮어쓴 뒤 Flash에서만 복원</a:t>
+            </a:r>
+            <a:endParaRPr lang="en-US" sz="1100" dirty="0"/>
+          </a:p>
+          <a:p>
+            <a:pPr indent="0" marL="0">
+              <a:lnSpc>
+                <a:spcPct val="120000"/>
+              </a:lnSpc>
+              <a:buNone/>
+            </a:pPr>
+            <a:r>
+              <a:rPr lang="en-US" sz="1100" dirty="0">
+                <a:solidFill>
+                  <a:srgbClr val="8A94A3"/>
+                </a:solidFill>
+                <a:latin typeface="Consolas" pitchFamily="34" charset="0"/>
+                <a:ea typeface="Consolas" pitchFamily="34" charset="-122"/>
+                <a:cs typeface="Consolas" pitchFamily="34" charset="-120"/>
+              </a:rPr>
+              <a:t>  90  </a:t>
+            </a:r>
+            <a:pPr indent="0" marL="0">
+              <a:lnSpc>
+                <a:spcPct val="120000"/>
+              </a:lnSpc>
+              <a:buNone/>
+            </a:pPr>
+            <a:r>
+              <a:rPr lang="en-US" sz="1100" b="1" dirty="0">
+                <a:solidFill>
+                  <a:srgbClr val="0F766E"/>
+                </a:solidFill>
+                <a:latin typeface="Consolas" pitchFamily="34" charset="0"/>
+                <a:ea typeface="Consolas" pitchFamily="34" charset="-122"/>
+                <a:cs typeface="Consolas" pitchFamily="34" charset="-120"/>
+              </a:rPr>
+              <a:t>prog -c port=SWD mode=UR -fillmemory 0x20000000 size=0x50000 pattern=0xA5A5A5A5 dataWidth=32 \</a:t>
+            </a:r>
+            <a:endParaRPr lang="en-US" sz="1100" dirty="0"/>
+          </a:p>
+          <a:p>
+            <a:pPr indent="0" marL="0">
+              <a:lnSpc>
+                <a:spcPct val="120000"/>
+              </a:lnSpc>
+              <a:buNone/>
+            </a:pPr>
+            <a:r>
+              <a:rPr lang="en-US" sz="1100" dirty="0">
+                <a:solidFill>
+                  <a:srgbClr val="8A94A3"/>
+                </a:solidFill>
+                <a:latin typeface="Consolas" pitchFamily="34" charset="0"/>
+                <a:ea typeface="Consolas" pitchFamily="34" charset="-122"/>
+                <a:cs typeface="Consolas" pitchFamily="34" charset="-120"/>
+              </a:rPr>
+              <a:t>  91  </a:t>
+            </a:r>
+            <a:pPr indent="0" marL="0">
+              <a:lnSpc>
+                <a:spcPct val="120000"/>
+              </a:lnSpc>
+              <a:buNone/>
+            </a:pPr>
+            <a:r>
+              <a:rPr lang="en-US" sz="1100" dirty="0">
+                <a:solidFill>
+                  <a:srgbClr val="1F2933"/>
+                </a:solidFill>
+                <a:latin typeface="Consolas" pitchFamily="34" charset="0"/>
+                <a:ea typeface="Consolas" pitchFamily="34" charset="-122"/>
+                <a:cs typeface="Consolas" pitchFamily="34" charset="-120"/>
+              </a:rPr>
+              <a:t>  -r32 0x20000000 0x10 -r32 0x20027FF0 0x10 -r32 0x2004FFF0 0x10</a:t>
+            </a:r>
+            <a:endParaRPr lang="en-US" sz="1100" dirty="0"/>
+          </a:p>
+          <a:p>
+            <a:pPr indent="0" marL="0">
+              <a:lnSpc>
+                <a:spcPct val="120000"/>
+              </a:lnSpc>
+              <a:buNone/>
+            </a:pPr>
+            <a:r>
+              <a:rPr lang="en-US" sz="1100" dirty="0">
+                <a:solidFill>
+                  <a:srgbClr val="8A94A3"/>
+                </a:solidFill>
+                <a:latin typeface="Consolas" pitchFamily="34" charset="0"/>
+                <a:ea typeface="Consolas" pitchFamily="34" charset="-122"/>
+                <a:cs typeface="Consolas" pitchFamily="34" charset="-120"/>
+              </a:rPr>
+              <a:t>  92  </a:t>
+            </a:r>
+            <a:pPr indent="0" marL="0">
+              <a:lnSpc>
+                <a:spcPct val="120000"/>
+              </a:lnSpc>
+              <a:buNone/>
+            </a:pPr>
+            <a:r>
+              <a:rPr lang="en-US" sz="1100" b="1" dirty="0">
+                <a:solidFill>
+                  <a:srgbClr val="0F766E"/>
+                </a:solidFill>
+                <a:latin typeface="Consolas" pitchFamily="34" charset="0"/>
+                <a:ea typeface="Consolas" pitchFamily="34" charset="-122"/>
+                <a:cs typeface="Consolas" pitchFamily="34" charset="-120"/>
+              </a:rPr>
+              <a:t>[[ $(grep -c "A5A5A5A5 A5A5A5A5 A5A5A5A5 A5A5A5A5" "$LOG") -eq 3 ]] || fail "RAM 덮어쓰기 확인"</a:t>
+            </a:r>
+            <a:endParaRPr lang="en-US" sz="1100" dirty="0"/>
+          </a:p>
+          <a:p>
+            <a:pPr indent="0" marL="0">
+              <a:lnSpc>
+                <a:spcPct val="120000"/>
+              </a:lnSpc>
+              <a:buNone/>
+            </a:pPr>
+            <a:r>
+              <a:rPr lang="en-US" sz="1100" dirty="0">
+                <a:solidFill>
+                  <a:srgbClr val="8A94A3"/>
+                </a:solidFill>
+                <a:latin typeface="Consolas" pitchFamily="34" charset="0"/>
+                <a:ea typeface="Consolas" pitchFamily="34" charset="-122"/>
+                <a:cs typeface="Consolas" pitchFamily="34" charset="-120"/>
+              </a:rPr>
+              <a:t>      ⋮</a:t>
+            </a:r>
+            <a:endParaRPr lang="en-US" sz="1100" dirty="0"/>
+          </a:p>
+          <a:p>
+            <a:pPr indent="0" marL="0">
+              <a:lnSpc>
+                <a:spcPct val="120000"/>
+              </a:lnSpc>
+              <a:buNone/>
+            </a:pPr>
+            <a:r>
+              <a:rPr lang="en-US" sz="1100" dirty="0">
+                <a:solidFill>
+                  <a:srgbClr val="8A94A3"/>
+                </a:solidFill>
+                <a:latin typeface="Consolas" pitchFamily="34" charset="0"/>
+                <a:ea typeface="Consolas" pitchFamily="34" charset="-122"/>
+                <a:cs typeface="Consolas" pitchFamily="34" charset="-120"/>
+              </a:rPr>
+              <a:t>  94  </a:t>
+            </a:r>
+            <a:pPr indent="0" marL="0">
+              <a:lnSpc>
+                <a:spcPct val="120000"/>
+              </a:lnSpc>
+              <a:buNone/>
+            </a:pPr>
+            <a:r>
+              <a:rPr lang="en-US" sz="1100" dirty="0">
+                <a:solidFill>
+                  <a:srgbClr val="1F2933"/>
+                </a:solidFill>
+                <a:latin typeface="Consolas" pitchFamily="34" charset="0"/>
+                <a:ea typeface="Consolas" pitchFamily="34" charset="-122"/>
+                <a:cs typeface="Consolas" pitchFamily="34" charset="-120"/>
+              </a:rPr>
+              <a:t>prog -c port=SWD mode=HOTPLUG -rst</a:t>
+            </a:r>
+            <a:endParaRPr lang="en-US" sz="1100" dirty="0"/>
+          </a:p>
+          <a:p>
+            <a:pPr indent="0" marL="0">
+              <a:lnSpc>
+                <a:spcPct val="120000"/>
+              </a:lnSpc>
+              <a:buNone/>
+            </a:pPr>
+            <a:r>
+              <a:rPr lang="en-US" sz="1100" dirty="0">
+                <a:solidFill>
+                  <a:srgbClr val="8A94A3"/>
+                </a:solidFill>
+                <a:latin typeface="Consolas" pitchFamily="34" charset="0"/>
+                <a:ea typeface="Consolas" pitchFamily="34" charset="-122"/>
+                <a:cs typeface="Consolas" pitchFamily="34" charset="-120"/>
+              </a:rPr>
+              <a:t>  96  </a:t>
+            </a:r>
+            <a:pPr indent="0" marL="0">
+              <a:lnSpc>
+                <a:spcPct val="120000"/>
+              </a:lnSpc>
+              <a:buNone/>
+            </a:pPr>
+            <a:r>
+              <a:rPr lang="en-US" sz="1100" b="1" dirty="0">
+                <a:solidFill>
+                  <a:srgbClr val="0F766E"/>
+                </a:solidFill>
+                <a:latin typeface="Consolas" pitchFamily="34" charset="0"/>
+                <a:ea typeface="Consolas" pitchFamily="34" charset="-122"/>
+                <a:cs typeface="Consolas" pitchFamily="34" charset="-120"/>
+              </a:rPr>
+              <a:t>python3 pc/demo_roundtrip.py --read-only</a:t>
+            </a:r>
+            <a:endParaRPr lang="en-US" sz="1100" dirty="0"/>
+          </a:p>
+          <a:p>
+            <a:pPr indent="0" marL="0">
+              <a:lnSpc>
+                <a:spcPct val="120000"/>
+              </a:lnSpc>
+              <a:buNone/>
+            </a:pPr>
+            <a:r>
+              <a:rPr lang="en-US" sz="1100" dirty="0">
+                <a:solidFill>
+                  <a:srgbClr val="8A94A3"/>
+                </a:solidFill>
+                <a:latin typeface="Consolas" pitchFamily="34" charset="0"/>
+                <a:ea typeface="Consolas" pitchFamily="34" charset="-122"/>
+                <a:cs typeface="Consolas" pitchFamily="34" charset="-120"/>
+              </a:rPr>
+              <a:t>  97  </a:t>
+            </a:r>
+            <a:pPr indent="0" marL="0">
+              <a:lnSpc>
+                <a:spcPct val="120000"/>
+              </a:lnSpc>
+              <a:buNone/>
+            </a:pPr>
+            <a:r>
+              <a:rPr lang="en-US" sz="1100" dirty="0">
+                <a:solidFill>
+                  <a:srgbClr val="1F2933"/>
+                </a:solidFill>
+                <a:latin typeface="Consolas" pitchFamily="34" charset="0"/>
+                <a:ea typeface="Consolas" pitchFamily="34" charset="-122"/>
+                <a:cs typeface="Consolas" pitchFamily="34" charset="-120"/>
+              </a:rPr>
+              <a:t>python3 pc/bmp_gray.py --convert-only</a:t>
+            </a:r>
+            <a:endParaRPr lang="en-US" sz="1100" dirty="0"/>
           </a:p>
         </p:txBody>
       </p:sp>
-      <p:pic>
-        <p:nvPicPr>
-          <p:cNvPr id="5" name="Image 0" descr="PC 원본 BMP">    </p:cNvPr>
-          <p:cNvPicPr>
-            <a:picLocks noChangeAspect="1"/>
-          </p:cNvPicPr>
-          <p:nvPr/>
-        </p:nvPicPr>
-        <p:blipFill>
-          <a:blip r:embed="rId1"/>
-          <a:stretch>
-            <a:fillRect/>
-          </a:stretch>
-        </p:blipFill>
-        <p:spPr>
-          <a:xfrm>
-            <a:off x="548640" y="1828800"/>
-            <a:ext cx="3017520" cy="3017520"/>
-          </a:xfrm>
-          <a:prstGeom prst="rect">
-            <a:avLst/>
-          </a:prstGeom>
-        </p:spPr>
-      </p:pic>
-      <p:pic>
-        <p:nvPicPr>
-          <p:cNvPr id="6" name="Image 1" descr="Flash에서 재읽기한 BMP">    </p:cNvPr>
-          <p:cNvPicPr>
-            <a:picLocks noChangeAspect="1"/>
-          </p:cNvPicPr>
-          <p:nvPr/>
-        </p:nvPicPr>
-        <p:blipFill>
-          <a:blip r:embed="rId2"/>
-          <a:stretch>
-            <a:fillRect/>
-          </a:stretch>
-        </p:blipFill>
-        <p:spPr>
-          <a:xfrm>
-            <a:off x="3794760" y="1828800"/>
-            <a:ext cx="3017520" cy="3017520"/>
-          </a:xfrm>
-          <a:prstGeom prst="rect">
-            <a:avLst/>
-          </a:prstGeom>
-        </p:spPr>
-      </p:pic>
       <p:graphicFrame>
         <p:nvGraphicFramePr>
           <p:cNvPr id="12" name="Table 0"/>
@@ -4247,19 +4581,18 @@
           </p:nvPr>
         </p:nvGraphicFramePr>
         <p:xfrm>
-          <a:off x="7269480" y="1828800"/>
-          <a:ext cx="4370832" cy="914400"/>
+          <a:off x="548640" y="4297680"/>
+          <a:ext cx="6949440" cy="914400"/>
         </p:xfrm>
         <a:graphic>
           <a:graphicData uri="http://schemas.openxmlformats.org/drawingml/2006/table">
             <a:tbl>
               <a:tblPr/>
               <a:tblGrid>
-                <a:gridCol w="1371600"/>
-                <a:gridCol w="1499616"/>
-                <a:gridCol w="1499616"/>
+                <a:gridCol w="1828800"/>
+                <a:gridCol w="5120640"/>
               </a:tblGrid>
-              <a:tr h="566928">
+              <a:tr h="384048">
                 <a:tc>
                   <a:txBody>
                     <a:bodyPr/>
@@ -4269,7 +4602,7 @@
                         <a:buNone/>
                       </a:pPr>
                       <a:r>
-                        <a:rPr lang="en-US" sz="1500" b="1" dirty="0">
+                        <a:rPr lang="en-US" sz="1400" b="1" dirty="0">
                           <a:solidFill>
                             <a:srgbClr val="1F2933"/>
                           </a:solidFill>
@@ -4277,9 +4610,9 @@
                           <a:ea typeface="Malgun Gothic" pitchFamily="34" charset="-122"/>
                           <a:cs typeface="Malgun Gothic" pitchFamily="34" charset="-120"/>
                         </a:rPr>
-                        <a:t>항목</a:t>
+                        <a:t>확인</a:t>
                       </a:r>
-                      <a:endParaRPr lang="en-US" sz="1500" dirty="0">
+                      <a:endParaRPr lang="en-US" sz="1400" dirty="0">
                         <a:latin typeface="Malgun Gothic" charset="0"/>
                         <a:ea typeface="Malgun Gothic" charset="0"/>
                         <a:cs typeface="Malgun Gothic" charset="0"/>
@@ -4337,7 +4670,7 @@
                         <a:buNone/>
                       </a:pPr>
                       <a:r>
-                        <a:rPr lang="en-US" sz="1500" b="1" dirty="0">
+                        <a:rPr lang="en-US" sz="1400" b="1" dirty="0">
                           <a:solidFill>
                             <a:srgbClr val="1F2933"/>
                           </a:solidFill>
@@ -4345,9 +4678,9 @@
                           <a:ea typeface="Malgun Gothic" pitchFamily="34" charset="-122"/>
                           <a:cs typeface="Malgun Gothic" pitchFamily="34" charset="-120"/>
                         </a:rPr>
-                        <a:t>원본</a:t>
+                        <a:t>결과</a:t>
                       </a:r>
-                      <a:endParaRPr lang="en-US" sz="1500" dirty="0">
+                      <a:endParaRPr lang="en-US" sz="1400" dirty="0">
                         <a:latin typeface="Malgun Gothic" charset="0"/>
                         <a:ea typeface="Malgun Gothic" charset="0"/>
                         <a:cs typeface="Malgun Gothic" charset="0"/>
@@ -4396,6 +4729,8 @@
                     </a:solidFill>
                   </a:tcPr>
                 </a:tc>
+              </a:tr>
+              <a:tr h="384048">
                 <a:tc>
                   <a:txBody>
                     <a:bodyPr/>
@@ -4405,7 +4740,7 @@
                         <a:buNone/>
                       </a:pPr>
                       <a:r>
-                        <a:rPr lang="en-US" sz="1500" b="1" dirty="0">
+                        <a:rPr lang="en-US" sz="1400" dirty="0">
                           <a:solidFill>
                             <a:srgbClr val="1F2933"/>
                           </a:solidFill>
@@ -4413,79 +4748,9 @@
                           <a:ea typeface="Malgun Gothic" pitchFamily="34" charset="-122"/>
                           <a:cs typeface="Malgun Gothic" pitchFamily="34" charset="-120"/>
                         </a:rPr>
-                        <a:t>복원</a:t>
+                        <a:t>칩 직접 덤프</a:t>
                       </a:r>
-                      <a:endParaRPr lang="en-US" sz="1500" dirty="0">
-                        <a:latin typeface="Malgun Gothic" charset="0"/>
-                        <a:ea typeface="Malgun Gothic" charset="0"/>
-                        <a:cs typeface="Malgun Gothic" charset="0"/>
-                      </a:endParaRPr>
-                    </a:p>
-                  </a:txBody>
-                  <a:tcPr marL="109728" marR="109728" marT="54864" marB="54864" anchor="ctr">
-                    <a:lnL w="9525" cap="flat" cmpd="sng" algn="ctr">
-                      <a:solidFill>
-                        <a:srgbClr val="D5DAE0"/>
-                      </a:solidFill>
-                      <a:prstDash val="solid"/>
-                      <a:round/>
-                      <a:headEnd type="none" w="med" len="med"/>
-                      <a:tailEnd type="none" w="med" len="med"/>
-                    </a:lnL>
-                    <a:lnR w="9525" cap="flat" cmpd="sng" algn="ctr">
-                      <a:solidFill>
-                        <a:srgbClr val="D5DAE0"/>
-                      </a:solidFill>
-                      <a:prstDash val="solid"/>
-                      <a:round/>
-                      <a:headEnd type="none" w="med" len="med"/>
-                      <a:tailEnd type="none" w="med" len="med"/>
-                    </a:lnR>
-                    <a:lnT w="9525" cap="flat" cmpd="sng" algn="ctr">
-                      <a:solidFill>
-                        <a:srgbClr val="D5DAE0"/>
-                      </a:solidFill>
-                      <a:prstDash val="solid"/>
-                      <a:round/>
-                      <a:headEnd type="none" w="med" len="med"/>
-                      <a:tailEnd type="none" w="med" len="med"/>
-                    </a:lnT>
-                    <a:lnB w="9525" cap="flat" cmpd="sng" algn="ctr">
-                      <a:solidFill>
-                        <a:srgbClr val="D5DAE0"/>
-                      </a:solidFill>
-                      <a:prstDash val="solid"/>
-                      <a:round/>
-                      <a:headEnd type="none" w="med" len="med"/>
-                      <a:tailEnd type="none" w="med" len="med"/>
-                    </a:lnB>
-                    <a:solidFill>
-                      <a:srgbClr val="F3F5F7"/>
-                    </a:solidFill>
-                  </a:tcPr>
-                </a:tc>
-              </a:tr>
-              <a:tr h="566928">
-                <a:tc>
-                  <a:txBody>
-                    <a:bodyPr/>
-                    <a:lstStyle/>
-                    <a:p>
-                      <a:pPr indent="0" marL="0">
-                        <a:buNone/>
-                      </a:pPr>
-                      <a:r>
-                        <a:rPr lang="en-US" sz="1500" dirty="0">
-                          <a:solidFill>
-                            <a:srgbClr val="1F2933"/>
-                          </a:solidFill>
-                          <a:latin typeface="Malgun Gothic" pitchFamily="34" charset="0"/>
-                          <a:ea typeface="Malgun Gothic" pitchFamily="34" charset="-122"/>
-                          <a:cs typeface="Malgun Gothic" pitchFamily="34" charset="-120"/>
-                        </a:rPr>
-                        <a:t>파일 크기</a:t>
-                      </a:r>
-                      <a:endParaRPr lang="en-US" sz="1500" dirty="0">
+                      <a:endParaRPr lang="en-US" sz="1400" dirty="0">
                         <a:latin typeface="Malgun Gothic" charset="0"/>
                         <a:ea typeface="Malgun Gothic" charset="0"/>
                         <a:cs typeface="Malgun Gothic" charset="0"/>
@@ -4540,7 +4805,7 @@
                         <a:buNone/>
                       </a:pPr>
                       <a:r>
-                        <a:rPr lang="en-US" sz="1500" dirty="0">
+                        <a:rPr lang="en-US" sz="1400" dirty="0">
                           <a:solidFill>
                             <a:srgbClr val="1F2933"/>
                           </a:solidFill>
@@ -4548,9 +4813,76 @@
                           <a:ea typeface="Malgun Gothic" pitchFamily="34" charset="-122"/>
                           <a:cs typeface="Malgun Gothic" pitchFamily="34" charset="-120"/>
                         </a:rPr>
-                        <a:t>3,145,782 B</a:t>
+                        <a:t>0x90000000부터 3,145,782 B = 원본 BMP</a:t>
                       </a:r>
-                      <a:endParaRPr lang="en-US" sz="1500" dirty="0">
+                      <a:endParaRPr lang="en-US" sz="1400" dirty="0">
+                        <a:latin typeface="Malgun Gothic" charset="0"/>
+                        <a:ea typeface="Malgun Gothic" charset="0"/>
+                        <a:cs typeface="Malgun Gothic" charset="0"/>
+                      </a:endParaRPr>
+                    </a:p>
+                  </a:txBody>
+                  <a:tcPr marL="109728" marR="109728" marT="54864" marB="54864" anchor="ctr">
+                    <a:lnL w="9525" cap="flat" cmpd="sng" algn="ctr">
+                      <a:solidFill>
+                        <a:srgbClr val="D5DAE0"/>
+                      </a:solidFill>
+                      <a:prstDash val="solid"/>
+                      <a:round/>
+                      <a:headEnd type="none" w="med" len="med"/>
+                      <a:tailEnd type="none" w="med" len="med"/>
+                    </a:lnL>
+                    <a:lnR w="9525" cap="flat" cmpd="sng" algn="ctr">
+                      <a:solidFill>
+                        <a:srgbClr val="D5DAE0"/>
+                      </a:solidFill>
+                      <a:prstDash val="solid"/>
+                      <a:round/>
+                      <a:headEnd type="none" w="med" len="med"/>
+                      <a:tailEnd type="none" w="med" len="med"/>
+                    </a:lnR>
+                    <a:lnT w="9525" cap="flat" cmpd="sng" algn="ctr">
+                      <a:solidFill>
+                        <a:srgbClr val="D5DAE0"/>
+                      </a:solidFill>
+                      <a:prstDash val="solid"/>
+                      <a:round/>
+                      <a:headEnd type="none" w="med" len="med"/>
+                      <a:tailEnd type="none" w="med" len="med"/>
+                    </a:lnT>
+                    <a:lnB w="9525" cap="flat" cmpd="sng" algn="ctr">
+                      <a:solidFill>
+                        <a:srgbClr val="D5DAE0"/>
+                      </a:solidFill>
+                      <a:prstDash val="solid"/>
+                      <a:round/>
+                      <a:headEnd type="none" w="med" len="med"/>
+                      <a:tailEnd type="none" w="med" len="med"/>
+                    </a:lnB>
+                  </a:tcPr>
+                </a:tc>
+              </a:tr>
+              <a:tr h="384048">
+                <a:tc>
+                  <a:txBody>
+                    <a:bodyPr/>
+                    <a:lstStyle/>
+                    <a:p>
+                      <a:pPr indent="0" marL="0">
+                        <a:buNone/>
+                      </a:pPr>
+                      <a:r>
+                        <a:rPr lang="en-US" sz="1400" dirty="0">
+                          <a:solidFill>
+                            <a:srgbClr val="1F2933"/>
+                          </a:solidFill>
+                          <a:latin typeface="Malgun Gothic" pitchFamily="34" charset="0"/>
+                          <a:ea typeface="Malgun Gothic" pitchFamily="34" charset="-122"/>
+                          <a:cs typeface="Malgun Gothic" pitchFamily="34" charset="-120"/>
+                        </a:rPr>
+                        <a:t>RAM 덮어쓰기</a:t>
+                      </a:r>
+                      <a:endParaRPr lang="en-US" sz="1400" dirty="0">
                         <a:latin typeface="Malgun Gothic" charset="0"/>
                         <a:ea typeface="Malgun Gothic" charset="0"/>
                         <a:cs typeface="Malgun Gothic" charset="0"/>
@@ -4605,7 +4937,7 @@
                         <a:buNone/>
                       </a:pPr>
                       <a:r>
-                        <a:rPr lang="en-US" sz="1500" dirty="0">
+                        <a:rPr lang="en-US" sz="1400" dirty="0">
                           <a:solidFill>
                             <a:srgbClr val="1F2933"/>
                           </a:solidFill>
@@ -4613,9 +4945,9 @@
                           <a:ea typeface="Malgun Gothic" pitchFamily="34" charset="-122"/>
                           <a:cs typeface="Malgun Gothic" pitchFamily="34" charset="-120"/>
                         </a:rPr>
-                        <a:t>3,145,782 B</a:t>
+                        <a:t>처음·중간·끝 모두 0xA5 확인</a:t>
                       </a:r>
-                      <a:endParaRPr lang="en-US" sz="1500" dirty="0">
+                      <a:endParaRPr lang="en-US" sz="1400" dirty="0">
                         <a:latin typeface="Malgun Gothic" charset="0"/>
                         <a:ea typeface="Malgun Gothic" charset="0"/>
                         <a:cs typeface="Malgun Gothic" charset="0"/>
@@ -4662,7 +4994,7 @@
                   </a:tcPr>
                 </a:tc>
               </a:tr>
-              <a:tr h="566928">
+              <a:tr h="384048">
                 <a:tc>
                   <a:txBody>
                     <a:bodyPr/>
@@ -4672,7 +5004,7 @@
                         <a:buNone/>
                       </a:pPr>
                       <a:r>
-                        <a:rPr lang="en-US" sz="1500" dirty="0">
+                        <a:rPr lang="en-US" sz="1400" dirty="0">
                           <a:solidFill>
                             <a:srgbClr val="1F2933"/>
                           </a:solidFill>
@@ -4680,9 +5012,9 @@
                           <a:ea typeface="Malgun Gothic" pitchFamily="34" charset="-122"/>
                           <a:cs typeface="Malgun Gothic" pitchFamily="34" charset="-120"/>
                         </a:rPr>
-                        <a:t>CRC32</a:t>
+                        <a:t>읽기 전용 복원</a:t>
                       </a:r>
-                      <a:endParaRPr lang="en-US" sz="1500" dirty="0">
+                      <a:endParaRPr lang="en-US" sz="1400" dirty="0">
                         <a:latin typeface="Malgun Gothic" charset="0"/>
                         <a:ea typeface="Malgun Gothic" charset="0"/>
                         <a:cs typeface="Malgun Gothic" charset="0"/>
@@ -4737,20 +5069,87 @@
                         <a:buNone/>
                       </a:pPr>
                       <a:r>
-                        <a:rPr lang="en-US" sz="1500" dirty="0">
+                        <a:rPr lang="en-US" sz="1400" dirty="0">
                           <a:solidFill>
                             <a:srgbClr val="1F2933"/>
                           </a:solidFill>
-                          <a:latin typeface="Consolas" pitchFamily="34" charset="0"/>
-                          <a:ea typeface="Consolas" pitchFamily="34" charset="-122"/>
-                          <a:cs typeface="Consolas" pitchFamily="34" charset="-120"/>
+                          <a:latin typeface="Malgun Gothic" pitchFamily="34" charset="0"/>
+                          <a:ea typeface="Malgun Gothic" pitchFamily="34" charset="-122"/>
+                          <a:cs typeface="Malgun Gothic" pitchFamily="34" charset="-120"/>
                         </a:rPr>
-                        <a:t>978AB7D9</a:t>
+                        <a:t>전체 바이트 일치, 34.6 s</a:t>
                       </a:r>
-                      <a:endParaRPr lang="en-US" sz="1500" dirty="0">
-                        <a:latin typeface="Consolas" charset="0"/>
-                        <a:ea typeface="Consolas" charset="0"/>
-                        <a:cs typeface="Consolas" charset="0"/>
+                      <a:endParaRPr lang="en-US" sz="1400" dirty="0">
+                        <a:latin typeface="Malgun Gothic" charset="0"/>
+                        <a:ea typeface="Malgun Gothic" charset="0"/>
+                        <a:cs typeface="Malgun Gothic" charset="0"/>
+                      </a:endParaRPr>
+                    </a:p>
+                  </a:txBody>
+                  <a:tcPr marL="109728" marR="109728" marT="54864" marB="54864" anchor="ctr">
+                    <a:lnL w="9525" cap="flat" cmpd="sng" algn="ctr">
+                      <a:solidFill>
+                        <a:srgbClr val="D5DAE0"/>
+                      </a:solidFill>
+                      <a:prstDash val="solid"/>
+                      <a:round/>
+                      <a:headEnd type="none" w="med" len="med"/>
+                      <a:tailEnd type="none" w="med" len="med"/>
+                    </a:lnL>
+                    <a:lnR w="9525" cap="flat" cmpd="sng" algn="ctr">
+                      <a:solidFill>
+                        <a:srgbClr val="D5DAE0"/>
+                      </a:solidFill>
+                      <a:prstDash val="solid"/>
+                      <a:round/>
+                      <a:headEnd type="none" w="med" len="med"/>
+                      <a:tailEnd type="none" w="med" len="med"/>
+                    </a:lnR>
+                    <a:lnT w="9525" cap="flat" cmpd="sng" algn="ctr">
+                      <a:solidFill>
+                        <a:srgbClr val="D5DAE0"/>
+                      </a:solidFill>
+                      <a:prstDash val="solid"/>
+                      <a:round/>
+                      <a:headEnd type="none" w="med" len="med"/>
+                      <a:tailEnd type="none" w="med" len="med"/>
+                    </a:lnT>
+                    <a:lnB w="9525" cap="flat" cmpd="sng" algn="ctr">
+                      <a:solidFill>
+                        <a:srgbClr val="D5DAE0"/>
+                      </a:solidFill>
+                      <a:prstDash val="solid"/>
+                      <a:round/>
+                      <a:headEnd type="none" w="med" len="med"/>
+                      <a:tailEnd type="none" w="med" len="med"/>
+                    </a:lnB>
+                  </a:tcPr>
+                </a:tc>
+              </a:tr>
+              <a:tr h="384048">
+                <a:tc>
+                  <a:txBody>
+                    <a:bodyPr/>
+                    <a:lstStyle/>
+                    <a:p>
+                      <a:pPr indent="0" marL="0">
+                        <a:buNone/>
+                      </a:pPr>
+                      <a:r>
+                        <a:rPr lang="en-US" sz="1400" dirty="0">
+                          <a:solidFill>
+                            <a:srgbClr val="1F2933"/>
+                          </a:solidFill>
+                          <a:latin typeface="Malgun Gothic" pitchFamily="34" charset="0"/>
+                          <a:ea typeface="Malgun Gothic" pitchFamily="34" charset="-122"/>
+                          <a:cs typeface="Malgun Gothic" pitchFamily="34" charset="-120"/>
+                        </a:rPr>
+                        <a:t>Gray 변환만</a:t>
+                      </a:r>
+                      <a:endParaRPr lang="en-US" sz="1400" dirty="0">
+                        <a:latin typeface="Malgun Gothic" charset="0"/>
+                        <a:ea typeface="Malgun Gothic" charset="0"/>
+                        <a:cs typeface="Malgun Gothic" charset="0"/>
                       </a:endParaRPr>
                     </a:p>
                   </a:txBody>
@@ -4802,74 +5201,7 @@
                         <a:buNone/>
                       </a:pPr>
                       <a:r>
-                        <a:rPr lang="en-US" sz="1500" dirty="0">
-                          <a:solidFill>
-                            <a:srgbClr val="1F2933"/>
-                          </a:solidFill>
-                          <a:latin typeface="Consolas" pitchFamily="34" charset="0"/>
-                          <a:ea typeface="Consolas" pitchFamily="34" charset="-122"/>
-                          <a:cs typeface="Consolas" pitchFamily="34" charset="-120"/>
-                        </a:rPr>
-                        <a:t>978AB7D9</a:t>
-                      </a:r>
-                      <a:endParaRPr lang="en-US" sz="1500" dirty="0">
-                        <a:latin typeface="Consolas" charset="0"/>
-                        <a:ea typeface="Consolas" charset="0"/>
-                        <a:cs typeface="Consolas" charset="0"/>
-                      </a:endParaRPr>
-                    </a:p>
-                  </a:txBody>
-                  <a:tcPr marL="109728" marR="109728" marT="54864" marB="54864" anchor="ctr">
-                    <a:lnL w="9525" cap="flat" cmpd="sng" algn="ctr">
-                      <a:solidFill>
-                        <a:srgbClr val="D5DAE0"/>
-                      </a:solidFill>
-                      <a:prstDash val="solid"/>
-                      <a:round/>
-                      <a:headEnd type="none" w="med" len="med"/>
-                      <a:tailEnd type="none" w="med" len="med"/>
-                    </a:lnL>
-                    <a:lnR w="9525" cap="flat" cmpd="sng" algn="ctr">
-                      <a:solidFill>
-                        <a:srgbClr val="D5DAE0"/>
-                      </a:solidFill>
-                      <a:prstDash val="solid"/>
-                      <a:round/>
-                      <a:headEnd type="none" w="med" len="med"/>
-                      <a:tailEnd type="none" w="med" len="med"/>
-                    </a:lnR>
-                    <a:lnT w="9525" cap="flat" cmpd="sng" algn="ctr">
-                      <a:solidFill>
-                        <a:srgbClr val="D5DAE0"/>
-                      </a:solidFill>
-                      <a:prstDash val="solid"/>
-                      <a:round/>
-                      <a:headEnd type="none" w="med" len="med"/>
-                      <a:tailEnd type="none" w="med" len="med"/>
-                    </a:lnT>
-                    <a:lnB w="9525" cap="flat" cmpd="sng" algn="ctr">
-                      <a:solidFill>
-                        <a:srgbClr val="D5DAE0"/>
-                      </a:solidFill>
-                      <a:prstDash val="solid"/>
-                      <a:round/>
-                      <a:headEnd type="none" w="med" len="med"/>
-                      <a:tailEnd type="none" w="med" len="med"/>
-                    </a:lnB>
-                  </a:tcPr>
-                </a:tc>
-              </a:tr>
-              <a:tr h="566928">
-                <a:tc>
-                  <a:txBody>
-                    <a:bodyPr/>
-                    <a:lstStyle/>
-                    <a:p>
-                      <a:pPr indent="0" marL="0">
-                        <a:buNone/>
-                      </a:pPr>
-                      <a:r>
-                        <a:rPr lang="en-US" sz="1500" dirty="0">
+                        <a:rPr lang="en-US" sz="1400" dirty="0">
                           <a:solidFill>
                             <a:srgbClr val="1F2933"/>
                           </a:solidFill>
@@ -4877,142 +5209,12 @@
                           <a:ea typeface="Malgun Gothic" pitchFamily="34" charset="-122"/>
                           <a:cs typeface="Malgun Gothic" pitchFamily="34" charset="-120"/>
                         </a:rPr>
-                        <a:t>SHA-256 *</a:t>
+                        <a:t>기준 변환과 일치, 20.9 s</a:t>
                       </a:r>
-                      <a:endParaRPr lang="en-US" sz="1500" dirty="0">
+                      <a:endParaRPr lang="en-US" sz="1400" dirty="0">
                         <a:latin typeface="Malgun Gothic" charset="0"/>
                         <a:ea typeface="Malgun Gothic" charset="0"/>
                         <a:cs typeface="Malgun Gothic" charset="0"/>
-                      </a:endParaRPr>
-                    </a:p>
-                  </a:txBody>
-                  <a:tcPr marL="109728" marR="109728" marT="54864" marB="54864" anchor="ctr">
-                    <a:lnL w="9525" cap="flat" cmpd="sng" algn="ctr">
-                      <a:solidFill>
-                        <a:srgbClr val="D5DAE0"/>
-                      </a:solidFill>
-                      <a:prstDash val="solid"/>
-                      <a:round/>
-                      <a:headEnd type="none" w="med" len="med"/>
-                      <a:tailEnd type="none" w="med" len="med"/>
-                    </a:lnL>
-                    <a:lnR w="9525" cap="flat" cmpd="sng" algn="ctr">
-                      <a:solidFill>
-                        <a:srgbClr val="D5DAE0"/>
-                      </a:solidFill>
-                      <a:prstDash val="solid"/>
-                      <a:round/>
-                      <a:headEnd type="none" w="med" len="med"/>
-                      <a:tailEnd type="none" w="med" len="med"/>
-                    </a:lnR>
-                    <a:lnT w="9525" cap="flat" cmpd="sng" algn="ctr">
-                      <a:solidFill>
-                        <a:srgbClr val="D5DAE0"/>
-                      </a:solidFill>
-                      <a:prstDash val="solid"/>
-                      <a:round/>
-                      <a:headEnd type="none" w="med" len="med"/>
-                      <a:tailEnd type="none" w="med" len="med"/>
-                    </a:lnT>
-                    <a:lnB w="9525" cap="flat" cmpd="sng" algn="ctr">
-                      <a:solidFill>
-                        <a:srgbClr val="D5DAE0"/>
-                      </a:solidFill>
-                      <a:prstDash val="solid"/>
-                      <a:round/>
-                      <a:headEnd type="none" w="med" len="med"/>
-                      <a:tailEnd type="none" w="med" len="med"/>
-                    </a:lnB>
-                  </a:tcPr>
-                </a:tc>
-                <a:tc>
-                  <a:txBody>
-                    <a:bodyPr/>
-                    <a:lstStyle/>
-                    <a:p>
-                      <a:pPr indent="0" marL="0">
-                        <a:buNone/>
-                      </a:pPr>
-                      <a:r>
-                        <a:rPr lang="en-US" sz="1500" dirty="0">
-                          <a:solidFill>
-                            <a:srgbClr val="1F2933"/>
-                          </a:solidFill>
-                          <a:latin typeface="Consolas" pitchFamily="34" charset="0"/>
-                          <a:ea typeface="Consolas" pitchFamily="34" charset="-122"/>
-                          <a:cs typeface="Consolas" pitchFamily="34" charset="-120"/>
-                        </a:rPr>
-                        <a:t>0bfd1da3…</a:t>
-                      </a:r>
-                      <a:endParaRPr lang="en-US" sz="1500" dirty="0">
-                        <a:latin typeface="Consolas" charset="0"/>
-                        <a:ea typeface="Consolas" charset="0"/>
-                        <a:cs typeface="Consolas" charset="0"/>
-                      </a:endParaRPr>
-                    </a:p>
-                  </a:txBody>
-                  <a:tcPr marL="109728" marR="109728" marT="54864" marB="54864" anchor="ctr">
-                    <a:lnL w="9525" cap="flat" cmpd="sng" algn="ctr">
-                      <a:solidFill>
-                        <a:srgbClr val="D5DAE0"/>
-                      </a:solidFill>
-                      <a:prstDash val="solid"/>
-                      <a:round/>
-                      <a:headEnd type="none" w="med" len="med"/>
-                      <a:tailEnd type="none" w="med" len="med"/>
-                    </a:lnL>
-                    <a:lnR w="9525" cap="flat" cmpd="sng" algn="ctr">
-                      <a:solidFill>
-                        <a:srgbClr val="D5DAE0"/>
-                      </a:solidFill>
-                      <a:prstDash val="solid"/>
-                      <a:round/>
-                      <a:headEnd type="none" w="med" len="med"/>
-                      <a:tailEnd type="none" w="med" len="med"/>
-                    </a:lnR>
-                    <a:lnT w="9525" cap="flat" cmpd="sng" algn="ctr">
-                      <a:solidFill>
-                        <a:srgbClr val="D5DAE0"/>
-                      </a:solidFill>
-                      <a:prstDash val="solid"/>
-                      <a:round/>
-                      <a:headEnd type="none" w="med" len="med"/>
-                      <a:tailEnd type="none" w="med" len="med"/>
-                    </a:lnT>
-                    <a:lnB w="9525" cap="flat" cmpd="sng" algn="ctr">
-                      <a:solidFill>
-                        <a:srgbClr val="D5DAE0"/>
-                      </a:solidFill>
-                      <a:prstDash val="solid"/>
-                      <a:round/>
-                      <a:headEnd type="none" w="med" len="med"/>
-                      <a:tailEnd type="none" w="med" len="med"/>
-                    </a:lnB>
-                  </a:tcPr>
-                </a:tc>
-                <a:tc>
-                  <a:txBody>
-                    <a:bodyPr/>
-                    <a:lstStyle/>
-                    <a:p>
-                      <a:pPr indent="0" marL="0">
-                        <a:buNone/>
-                      </a:pPr>
-                      <a:r>
-                        <a:rPr lang="en-US" sz="1500" dirty="0">
-                          <a:solidFill>
-                            <a:srgbClr val="1F2933"/>
-                          </a:solidFill>
-                          <a:latin typeface="Consolas" pitchFamily="34" charset="0"/>
-                          <a:ea typeface="Consolas" pitchFamily="34" charset="-122"/>
-                          <a:cs typeface="Consolas" pitchFamily="34" charset="-120"/>
-                        </a:rPr>
-                        <a:t>0bfd1da3…</a:t>
-                      </a:r>
-                      <a:endParaRPr lang="en-US" sz="1500" dirty="0">
-                        <a:latin typeface="Consolas" charset="0"/>
-                        <a:ea typeface="Consolas" charset="0"/>
-                        <a:cs typeface="Consolas" charset="0"/>
                       </a:endParaRPr>
                     </a:p>
                   </a:txBody>
@@ -5062,14 +5264,14 @@
       </p:graphicFrame>
       <p:sp>
         <p:nvSpPr>
-          <p:cNvPr id="8" name="Text 3"/>
+          <p:cNvPr id="6" name="Text 3"/>
           <p:cNvSpPr txBox="1"/>
           <p:nvPr/>
         </p:nvSpPr>
         <p:spPr>
           <a:xfrm>
-            <a:off x="7269480" y="4343400"/>
-            <a:ext cx="4370832" cy="457200"/>
+            <a:off x="7863840" y="4297680"/>
+            <a:ext cx="3776472" cy="1005840"/>
           </a:xfrm>
           <a:prstGeom prst="rect">
             <a:avLst/>
@@ -5082,10 +5284,13 @@
           <a:lstStyle/>
           <a:p>
             <a:pPr indent="0" marL="0">
-              <a:buNone/>
-            </a:pPr>
-            <a:r>
-              <a:rPr lang="en-US" sz="2200" b="1" dirty="0">
+              <a:lnSpc>
+                <a:spcPct val="120000"/>
+              </a:lnSpc>
+              <a:buNone/>
+            </a:pPr>
+            <a:r>
+              <a:rPr lang="en-US" sz="1400" dirty="0">
                 <a:solidFill>
                   <a:srgbClr val="1F2933"/>
                 </a:solidFill>
@@ -5093,36 +5298,22 @@
                 <a:ea typeface="Malgun Gothic" pitchFamily="34" charset="-122"/>
                 <a:cs typeface="Malgun Gothic" pitchFamily="34" charset="-120"/>
               </a:rPr>
-              <a:t>전체 바이트 비교: </a:t>
-            </a:r>
-            <a:pPr indent="0" marL="0">
-              <a:buNone/>
-            </a:pPr>
-            <a:r>
-              <a:rPr lang="en-US" sz="2200" b="1" dirty="0">
-                <a:solidFill>
-                  <a:srgbClr val="0F766E"/>
-                </a:solidFill>
-                <a:latin typeface="Malgun Gothic" pitchFamily="34" charset="0"/>
-                <a:ea typeface="Malgun Gothic" pitchFamily="34" charset="-122"/>
-                <a:cs typeface="Malgun Gothic" pitchFamily="34" charset="-120"/>
-              </a:rPr>
-              <a:t>일치</a:t>
-            </a:r>
-            <a:endParaRPr lang="en-US" sz="2200" dirty="0"/>
+              <a:t>이미지 3,145,782 B는 MCU RAM 320 KB보다 큽니다. 보드의 SDRAM은 초기화하지 않으며 MPU로 막혀 있습니다.</a:t>
+            </a:r>
+            <a:endParaRPr lang="en-US" sz="1400" dirty="0"/>
           </a:p>
         </p:txBody>
       </p:sp>
       <p:sp>
         <p:nvSpPr>
-          <p:cNvPr id="9" name="Text 4"/>
+          <p:cNvPr id="7" name="Text 4"/>
           <p:cNvSpPr txBox="1"/>
           <p:nvPr/>
         </p:nvSpPr>
         <p:spPr>
           <a:xfrm>
-            <a:off x="548640" y="5257800"/>
-            <a:ext cx="11091672" cy="548640"/>
+            <a:off x="7863840" y="5806440"/>
+            <a:ext cx="3776472" cy="274320"/>
           </a:xfrm>
           <a:prstGeom prst="rect">
             <a:avLst/>
@@ -5135,13 +5326,10 @@
           <a:lstStyle/>
           <a:p>
             <a:pPr indent="0" marL="0">
-              <a:lnSpc>
-                <a:spcPct val="120000"/>
-              </a:lnSpc>
-              <a:buNone/>
-            </a:pPr>
-            <a:r>
-              <a:rPr lang="en-US" sz="1200" dirty="0">
+              <a:buNone/>
+            </a:pPr>
+            <a:r>
+              <a:rPr lang="en-US" sz="1100" dirty="0">
                 <a:solidFill>
                   <a:srgbClr val="5F6B7A"/>
                 </a:solidFill>
@@ -5149,29 +5337,9 @@
                 <a:ea typeface="Malgun Gothic" pitchFamily="34" charset="-122"/>
                 <a:cs typeface="Malgun Gothic" pitchFamily="34" charset="-120"/>
               </a:rPr>
-              <a:t>* SHA-256 앞 8자리 표시, 전체 값은 발표자 노트 · 기존 보드 재읽기 파일을 자료 작성 시 다시 비교</a:t>
-            </a:r>
-            <a:endParaRPr lang="en-US" sz="1200" dirty="0"/>
-          </a:p>
-          <a:p>
-            <a:pPr indent="0" marL="0">
-              <a:lnSpc>
-                <a:spcPct val="120000"/>
-              </a:lnSpc>
-              <a:buNone/>
-            </a:pPr>
-            <a:r>
-              <a:rPr lang="en-US" sz="1200" dirty="0">
-                <a:solidFill>
-                  <a:srgbClr val="5F6B7A"/>
-                </a:solidFill>
-                <a:latin typeface="Malgun Gothic" pitchFamily="34" charset="0"/>
-                <a:ea typeface="Malgun Gothic" pitchFamily="34" charset="-122"/>
-                <a:cs typeface="Malgun Gothic" pitchFamily="34" charset="-120"/>
-              </a:rPr>
-              <a:t>출처: presentation_oct20/output/evidence_existing.json</a:t>
-            </a:r>
-            <a:endParaRPr lang="en-US" sz="1200" dirty="0"/>
+              <a:t>2026-10-15 run_all.sh 실행 · 출처: README.md</a:t>
+            </a:r>
+            <a:endParaRPr lang="en-US" sz="1100" dirty="0"/>
           </a:p>
         </p:txBody>
       </p:sp>
@@ -5283,9 +5451,231 @@
                 <a:ea typeface="Malgun Gothic" pitchFamily="34" charset="-122"/>
                 <a:cs typeface="Malgun Gothic" pitchFamily="34" charset="-120"/>
               </a:rPr>
-              <a:t>전송 최적화: 수신과 Flash 쓰기를 겹치고, RAM은 청크 단위로 씁니다</a:t>
+              <a:t>10월 15일 보드 실행 10회 모두 원본과 3,145,782 B가 일치했습니다</a:t>
             </a:r>
             <a:endParaRPr lang="en-US" sz="2600" dirty="0"/>
+          </a:p>
+        </p:txBody>
+      </p:sp>
+      <p:sp>
+        <p:nvSpPr>
+          <p:cNvPr id="3" name="Text 1"/>
+          <p:cNvSpPr txBox="1"/>
+          <p:nvPr/>
+        </p:nvSpPr>
+        <p:spPr>
+          <a:xfrm>
+            <a:off x="548640" y="1417320"/>
+            <a:ext cx="2743200" cy="320040"/>
+          </a:xfrm>
+          <a:prstGeom prst="rect">
+            <a:avLst/>
+          </a:prstGeom>
+          <a:noFill/>
+          <a:ln/>
+        </p:spPr>
+        <p:txBody>
+          <a:bodyPr wrap="square" lIns="0" tIns="0" rIns="0" bIns="0" rtlCol="0" anchor="t"/>
+          <a:lstStyle/>
+          <a:p>
+            <a:pPr indent="0" marL="0">
+              <a:buNone/>
+            </a:pPr>
+            <a:r>
+              <a:rPr lang="en-US" sz="1500" b="1" dirty="0">
+                <a:solidFill>
+                  <a:srgbClr val="1F2933"/>
+                </a:solidFill>
+                <a:latin typeface="Malgun Gothic" pitchFamily="34" charset="0"/>
+                <a:ea typeface="Malgun Gothic" pitchFamily="34" charset="-122"/>
+                <a:cs typeface="Malgun Gothic" pitchFamily="34" charset="-120"/>
+              </a:rPr>
+              <a:t>PC 원본</a:t>
+            </a:r>
+            <a:endParaRPr lang="en-US" sz="1500" dirty="0"/>
+          </a:p>
+        </p:txBody>
+      </p:sp>
+      <p:sp>
+        <p:nvSpPr>
+          <p:cNvPr id="4" name="Text 2"/>
+          <p:cNvSpPr txBox="1"/>
+          <p:nvPr/>
+        </p:nvSpPr>
+        <p:spPr>
+          <a:xfrm>
+            <a:off x="3291840" y="1417320"/>
+            <a:ext cx="2743200" cy="320040"/>
+          </a:xfrm>
+          <a:prstGeom prst="rect">
+            <a:avLst/>
+          </a:prstGeom>
+          <a:noFill/>
+          <a:ln/>
+        </p:spPr>
+        <p:txBody>
+          <a:bodyPr wrap="square" lIns="0" tIns="0" rIns="0" bIns="0" rtlCol="0" anchor="t"/>
+          <a:lstStyle/>
+          <a:p>
+            <a:pPr indent="0" marL="0">
+              <a:buNone/>
+            </a:pPr>
+            <a:r>
+              <a:rPr lang="en-US" sz="1500" b="1" dirty="0">
+                <a:solidFill>
+                  <a:srgbClr val="1F2933"/>
+                </a:solidFill>
+                <a:latin typeface="Malgun Gothic" pitchFamily="34" charset="0"/>
+                <a:ea typeface="Malgun Gothic" pitchFamily="34" charset="-122"/>
+                <a:cs typeface="Malgun Gothic" pitchFamily="34" charset="-120"/>
+              </a:rPr>
+              <a:t>Flash 재읽기 파일</a:t>
+            </a:r>
+            <a:endParaRPr lang="en-US" sz="1500" dirty="0"/>
+          </a:p>
+        </p:txBody>
+      </p:sp>
+      <p:pic>
+        <p:nvPicPr>
+          <p:cNvPr id="5" name="Image 0" descr="PC 원본 BMP">    </p:cNvPr>
+          <p:cNvPicPr>
+            <a:picLocks noChangeAspect="1"/>
+          </p:cNvPicPr>
+          <p:nvPr/>
+        </p:nvPicPr>
+        <p:blipFill>
+          <a:blip r:embed="rId1"/>
+          <a:stretch>
+            <a:fillRect/>
+          </a:stretch>
+        </p:blipFill>
+        <p:spPr>
+          <a:xfrm>
+            <a:off x="548640" y="1828800"/>
+            <a:ext cx="2560320" cy="2560320"/>
+          </a:xfrm>
+          <a:prstGeom prst="rect">
+            <a:avLst/>
+          </a:prstGeom>
+        </p:spPr>
+      </p:pic>
+      <p:pic>
+        <p:nvPicPr>
+          <p:cNvPr id="6" name="Image 1" descr="Flash에서 재읽기한 BMP">    </p:cNvPr>
+          <p:cNvPicPr>
+            <a:picLocks noChangeAspect="1"/>
+          </p:cNvPicPr>
+          <p:nvPr/>
+        </p:nvPicPr>
+        <p:blipFill>
+          <a:blip r:embed="rId2"/>
+          <a:stretch>
+            <a:fillRect/>
+          </a:stretch>
+        </p:blipFill>
+        <p:spPr>
+          <a:xfrm>
+            <a:off x="3291840" y="1828800"/>
+            <a:ext cx="2560320" cy="2560320"/>
+          </a:xfrm>
+          <a:prstGeom prst="rect">
+            <a:avLst/>
+          </a:prstGeom>
+        </p:spPr>
+      </p:pic>
+      <p:sp>
+        <p:nvSpPr>
+          <p:cNvPr id="7" name="Text 3"/>
+          <p:cNvSpPr txBox="1"/>
+          <p:nvPr/>
+        </p:nvSpPr>
+        <p:spPr>
+          <a:xfrm>
+            <a:off x="548640" y="4572000"/>
+            <a:ext cx="5303520" cy="685800"/>
+          </a:xfrm>
+          <a:prstGeom prst="rect">
+            <a:avLst/>
+          </a:prstGeom>
+          <a:noFill/>
+          <a:ln/>
+        </p:spPr>
+        <p:txBody>
+          <a:bodyPr wrap="square" lIns="0" tIns="0" rIns="0" bIns="0" rtlCol="0" anchor="t"/>
+          <a:lstStyle/>
+          <a:p>
+            <a:pPr indent="0" marL="0">
+              <a:lnSpc>
+                <a:spcPct val="130000"/>
+              </a:lnSpc>
+              <a:buNone/>
+            </a:pPr>
+            <a:r>
+              <a:rPr lang="en-US" sz="1400" b="1" dirty="0">
+                <a:solidFill>
+                  <a:srgbClr val="1F2933"/>
+                </a:solidFill>
+                <a:latin typeface="Malgun Gothic" pitchFamily="34" charset="0"/>
+                <a:ea typeface="Malgun Gothic" pitchFamily="34" charset="-122"/>
+                <a:cs typeface="Malgun Gothic" pitchFamily="34" charset="-120"/>
+              </a:rPr>
+              <a:t>CRC32  </a:t>
+            </a:r>
+            <a:pPr indent="0" marL="0">
+              <a:lnSpc>
+                <a:spcPct val="130000"/>
+              </a:lnSpc>
+              <a:buNone/>
+            </a:pPr>
+            <a:r>
+              <a:rPr lang="en-US" sz="1400" dirty="0">
+                <a:solidFill>
+                  <a:srgbClr val="1F2933"/>
+                </a:solidFill>
+                <a:latin typeface="Consolas" pitchFamily="34" charset="0"/>
+                <a:ea typeface="Consolas" pitchFamily="34" charset="-122"/>
+                <a:cs typeface="Consolas" pitchFamily="34" charset="-120"/>
+              </a:rPr>
+              <a:t>978AB7D9 = 978AB7D9</a:t>
+            </a:r>
+            <a:endParaRPr lang="en-US" sz="1400" dirty="0"/>
+          </a:p>
+          <a:p>
+            <a:pPr indent="0" marL="0">
+              <a:lnSpc>
+                <a:spcPct val="130000"/>
+              </a:lnSpc>
+              <a:buNone/>
+            </a:pPr>
+            <a:r>
+              <a:rPr lang="en-US" sz="1400" b="1" dirty="0">
+                <a:solidFill>
+                  <a:srgbClr val="1F2933"/>
+                </a:solidFill>
+                <a:latin typeface="Malgun Gothic" pitchFamily="34" charset="0"/>
+                <a:ea typeface="Malgun Gothic" pitchFamily="34" charset="-122"/>
+                <a:cs typeface="Malgun Gothic" pitchFamily="34" charset="-120"/>
+              </a:rPr>
+              <a:t>SHA-256  </a:t>
+            </a:r>
+            <a:pPr indent="0" marL="0">
+              <a:lnSpc>
+                <a:spcPct val="130000"/>
+              </a:lnSpc>
+              <a:buNone/>
+            </a:pPr>
+            <a:r>
+              <a:rPr lang="en-US" sz="1400" dirty="0">
+                <a:solidFill>
+                  <a:srgbClr val="1F2933"/>
+                </a:solidFill>
+                <a:latin typeface="Consolas" pitchFamily="34" charset="0"/>
+                <a:ea typeface="Consolas" pitchFamily="34" charset="-122"/>
+                <a:cs typeface="Consolas" pitchFamily="34" charset="-120"/>
+              </a:rPr>
+              <a:t>0bfd1da3… = 0bfd1da3…</a:t>
+            </a:r>
+            <a:endParaRPr lang="en-US" sz="1400" dirty="0"/>
           </a:p>
         </p:txBody>
       </p:sp>
@@ -5304,19 +5694,20 @@
           </p:nvPr>
         </p:nvGraphicFramePr>
         <p:xfrm>
-          <a:off x="548640" y="1463040"/>
-          <a:ext cx="11091672" cy="914400"/>
+          <a:off x="6263640" y="1828800"/>
+          <a:ext cx="5376672" cy="914400"/>
         </p:xfrm>
         <a:graphic>
           <a:graphicData uri="http://schemas.openxmlformats.org/drawingml/2006/table">
             <a:tbl>
               <a:tblPr/>
               <a:tblGrid>
-                <a:gridCol w="3429000"/>
-                <a:gridCol w="3931920"/>
-                <a:gridCol w="3730752"/>
+                <a:gridCol w="1508760"/>
+                <a:gridCol w="914400"/>
+                <a:gridCol w="1444752"/>
+                <a:gridCol w="1508760"/>
               </a:tblGrid>
-              <a:tr h="731520">
+              <a:tr h="566928">
                 <a:tc>
                   <a:txBody>
                     <a:bodyPr/>
@@ -5326,7 +5717,7 @@
                         <a:buNone/>
                       </a:pPr>
                       <a:r>
-                        <a:rPr lang="en-US" sz="1600" b="1" dirty="0">
+                        <a:rPr lang="en-US" sz="1400" b="1" dirty="0">
                           <a:solidFill>
                             <a:srgbClr val="1F2933"/>
                           </a:solidFill>
@@ -5334,9 +5725,9 @@
                           <a:ea typeface="Malgun Gothic" pitchFamily="34" charset="-122"/>
                           <a:cs typeface="Malgun Gothic" pitchFamily="34" charset="-120"/>
                         </a:rPr>
-                        <a:t>제약</a:t>
+                        <a:t>실행</a:t>
                       </a:r>
-                      <a:endParaRPr lang="en-US" sz="1600" dirty="0">
+                      <a:endParaRPr lang="en-US" sz="1400" dirty="0">
                         <a:latin typeface="Malgun Gothic" charset="0"/>
                         <a:ea typeface="Malgun Gothic" charset="0"/>
                         <a:cs typeface="Malgun Gothic" charset="0"/>
@@ -5394,7 +5785,7 @@
                         <a:buNone/>
                       </a:pPr>
                       <a:r>
-                        <a:rPr lang="en-US" sz="1600" b="1" dirty="0">
+                        <a:rPr lang="en-US" sz="1400" b="1" dirty="0">
                           <a:solidFill>
                             <a:srgbClr val="1F2933"/>
                           </a:solidFill>
@@ -5402,9 +5793,9 @@
                           <a:ea typeface="Malgun Gothic" pitchFamily="34" charset="-122"/>
                           <a:cs typeface="Malgun Gothic" pitchFamily="34" charset="-120"/>
                         </a:rPr>
-                        <a:t>적용한 방법</a:t>
+                        <a:t>횟수</a:t>
                       </a:r>
-                      <a:endParaRPr lang="en-US" sz="1600" dirty="0">
+                      <a:endParaRPr lang="en-US" sz="1400" dirty="0">
                         <a:latin typeface="Malgun Gothic" charset="0"/>
                         <a:ea typeface="Malgun Gothic" charset="0"/>
                         <a:cs typeface="Malgun Gothic" charset="0"/>
@@ -5462,7 +5853,7 @@
                         <a:buNone/>
                       </a:pPr>
                       <a:r>
-                        <a:rPr lang="en-US" sz="1600" b="1" dirty="0">
+                        <a:rPr lang="en-US" sz="1400" b="1" dirty="0">
                           <a:solidFill>
                             <a:srgbClr val="1F2933"/>
                           </a:solidFill>
@@ -5470,9 +5861,9 @@
                           <a:ea typeface="Malgun Gothic" pitchFamily="34" charset="-122"/>
                           <a:cs typeface="Malgun Gothic" pitchFamily="34" charset="-120"/>
                         </a:rPr>
-                        <a:t>확인된 효과</a:t>
+                        <a:t>결과</a:t>
                       </a:r>
-                      <a:endParaRPr lang="en-US" sz="1600" dirty="0">
+                      <a:endParaRPr lang="en-US" sz="1400" dirty="0">
                         <a:latin typeface="Malgun Gothic" charset="0"/>
                         <a:ea typeface="Malgun Gothic" charset="0"/>
                         <a:cs typeface="Malgun Gothic" charset="0"/>
@@ -5521,8 +5912,6 @@
                     </a:solidFill>
                   </a:tcPr>
                 </a:tc>
-              </a:tr>
-              <a:tr h="731520">
                 <a:tc>
                   <a:txBody>
                     <a:bodyPr/>
@@ -5532,7 +5921,7 @@
                         <a:buNone/>
                       </a:pPr>
                       <a:r>
-                        <a:rPr lang="en-US" sz="1600" dirty="0">
+                        <a:rPr lang="en-US" sz="1400" b="1" dirty="0">
                           <a:solidFill>
                             <a:srgbClr val="1F2933"/>
                           </a:solidFill>
@@ -5540,9 +5929,79 @@
                           <a:ea typeface="Malgun Gothic" pitchFamily="34" charset="-122"/>
                           <a:cs typeface="Malgun Gothic" pitchFamily="34" charset="-120"/>
                         </a:rPr>
-                        <a:t>Flash 쓰기 중에도 UART 바이트가 계속 도착</a:t>
+                        <a:t>시간</a:t>
                       </a:r>
-                      <a:endParaRPr lang="en-US" sz="1600" dirty="0">
+                      <a:endParaRPr lang="en-US" sz="1400" dirty="0">
+                        <a:latin typeface="Malgun Gothic" charset="0"/>
+                        <a:ea typeface="Malgun Gothic" charset="0"/>
+                        <a:cs typeface="Malgun Gothic" charset="0"/>
+                      </a:endParaRPr>
+                    </a:p>
+                  </a:txBody>
+                  <a:tcPr marL="109728" marR="109728" marT="54864" marB="54864" anchor="ctr">
+                    <a:lnL w="9525" cap="flat" cmpd="sng" algn="ctr">
+                      <a:solidFill>
+                        <a:srgbClr val="D5DAE0"/>
+                      </a:solidFill>
+                      <a:prstDash val="solid"/>
+                      <a:round/>
+                      <a:headEnd type="none" w="med" len="med"/>
+                      <a:tailEnd type="none" w="med" len="med"/>
+                    </a:lnL>
+                    <a:lnR w="9525" cap="flat" cmpd="sng" algn="ctr">
+                      <a:solidFill>
+                        <a:srgbClr val="D5DAE0"/>
+                      </a:solidFill>
+                      <a:prstDash val="solid"/>
+                      <a:round/>
+                      <a:headEnd type="none" w="med" len="med"/>
+                      <a:tailEnd type="none" w="med" len="med"/>
+                    </a:lnR>
+                    <a:lnT w="9525" cap="flat" cmpd="sng" algn="ctr">
+                      <a:solidFill>
+                        <a:srgbClr val="D5DAE0"/>
+                      </a:solidFill>
+                      <a:prstDash val="solid"/>
+                      <a:round/>
+                      <a:headEnd type="none" w="med" len="med"/>
+                      <a:tailEnd type="none" w="med" len="med"/>
+                    </a:lnT>
+                    <a:lnB w="9525" cap="flat" cmpd="sng" algn="ctr">
+                      <a:solidFill>
+                        <a:srgbClr val="D5DAE0"/>
+                      </a:solidFill>
+                      <a:prstDash val="solid"/>
+                      <a:round/>
+                      <a:headEnd type="none" w="med" len="med"/>
+                      <a:tailEnd type="none" w="med" len="med"/>
+                    </a:lnB>
+                    <a:solidFill>
+                      <a:srgbClr val="F3F5F7"/>
+                    </a:solidFill>
+                  </a:tcPr>
+                </a:tc>
+              </a:tr>
+              <a:tr h="566928">
+                <a:tc>
+                  <a:txBody>
+                    <a:bodyPr/>
+                    <a:lstStyle/>
+                    <a:p>
+                      <a:pPr indent="0" marL="0">
+                        <a:buNone/>
+                      </a:pPr>
+                      <a:r>
+                        <a:rPr lang="en-US" sz="1400" dirty="0">
+                          <a:solidFill>
+                            <a:srgbClr val="1F2933"/>
+                          </a:solidFill>
+                          <a:latin typeface="Malgun Gothic" pitchFamily="34" charset="0"/>
+                          <a:ea typeface="Malgun Gothic" pitchFamily="34" charset="-122"/>
+                          <a:cs typeface="Malgun Gothic" pitchFamily="34" charset="-120"/>
+                        </a:rPr>
+                        <a:t>저장 → 복원</a:t>
+                      </a:r>
+                      <a:endParaRPr lang="en-US" sz="1400" dirty="0">
                         <a:latin typeface="Malgun Gothic" charset="0"/>
                         <a:ea typeface="Malgun Gothic" charset="0"/>
                         <a:cs typeface="Malgun Gothic" charset="0"/>
@@ -5597,7 +6056,7 @@
                         <a:buNone/>
                       </a:pPr>
                       <a:r>
-                        <a:rPr lang="en-US" sz="1600" dirty="0">
+                        <a:rPr lang="en-US" sz="1400" dirty="0">
                           <a:solidFill>
                             <a:srgbClr val="1F2933"/>
                           </a:solidFill>
@@ -5605,9 +6064,9 @@
                           <a:ea typeface="Malgun Gothic" pitchFamily="34" charset="-122"/>
                           <a:cs typeface="Malgun Gothic" pitchFamily="34" charset="-120"/>
                         </a:rPr>
-                        <a:t>RX DMA 하드웨어 이중 버퍼 (4 KiB × 2)</a:t>
+                        <a:t>5회</a:t>
                       </a:r>
-                      <a:endParaRPr lang="en-US" sz="1600" dirty="0">
+                      <a:endParaRPr lang="en-US" sz="1400" dirty="0">
                         <a:latin typeface="Malgun Gothic" charset="0"/>
                         <a:ea typeface="Malgun Gothic" charset="0"/>
                         <a:cs typeface="Malgun Gothic" charset="0"/>
@@ -5662,84 +6121,17 @@
                         <a:buNone/>
                       </a:pPr>
                       <a:r>
-                        <a:rPr lang="en-US" sz="1600" dirty="0">
+                        <a:rPr lang="en-US" sz="1400" b="1" dirty="0">
                           <a:solidFill>
-                            <a:srgbClr val="1F2933"/>
+                            <a:srgbClr val="0F766E"/>
                           </a:solidFill>
                           <a:latin typeface="Malgun Gothic" pitchFamily="34" charset="0"/>
                           <a:ea typeface="Malgun Gothic" pitchFamily="34" charset="-122"/>
                           <a:cs typeface="Malgun Gothic" pitchFamily="34" charset="-120"/>
                         </a:rPr>
-                        <a:t>M0 384회 · M1 384회, 초과 0회</a:t>
+                        <a:t>5회 모두 일치</a:t>
                       </a:r>
-                      <a:endParaRPr lang="en-US" sz="1600" dirty="0">
-                        <a:latin typeface="Malgun Gothic" charset="0"/>
-                        <a:ea typeface="Malgun Gothic" charset="0"/>
-                        <a:cs typeface="Malgun Gothic" charset="0"/>
-                      </a:endParaRPr>
-                    </a:p>
-                  </a:txBody>
-                  <a:tcPr marL="109728" marR="109728" marT="54864" marB="54864" anchor="ctr">
-                    <a:lnL w="9525" cap="flat" cmpd="sng" algn="ctr">
-                      <a:solidFill>
-                        <a:srgbClr val="D5DAE0"/>
-                      </a:solidFill>
-                      <a:prstDash val="solid"/>
-                      <a:round/>
-                      <a:headEnd type="none" w="med" len="med"/>
-                      <a:tailEnd type="none" w="med" len="med"/>
-                    </a:lnL>
-                    <a:lnR w="9525" cap="flat" cmpd="sng" algn="ctr">
-                      <a:solidFill>
-                        <a:srgbClr val="D5DAE0"/>
-                      </a:solidFill>
-                      <a:prstDash val="solid"/>
-                      <a:round/>
-                      <a:headEnd type="none" w="med" len="med"/>
-                      <a:tailEnd type="none" w="med" len="med"/>
-                    </a:lnR>
-                    <a:lnT w="9525" cap="flat" cmpd="sng" algn="ctr">
-                      <a:solidFill>
-                        <a:srgbClr val="D5DAE0"/>
-                      </a:solidFill>
-                      <a:prstDash val="solid"/>
-                      <a:round/>
-                      <a:headEnd type="none" w="med" len="med"/>
-                      <a:tailEnd type="none" w="med" len="med"/>
-                    </a:lnT>
-                    <a:lnB w="9525" cap="flat" cmpd="sng" algn="ctr">
-                      <a:solidFill>
-                        <a:srgbClr val="D5DAE0"/>
-                      </a:solidFill>
-                      <a:prstDash val="solid"/>
-                      <a:round/>
-                      <a:headEnd type="none" w="med" len="med"/>
-                      <a:tailEnd type="none" w="med" len="med"/>
-                    </a:lnB>
-                  </a:tcPr>
-                </a:tc>
-              </a:tr>
-              <a:tr h="731520">
-                <a:tc>
-                  <a:txBody>
-                    <a:bodyPr/>
-                    <a:lstStyle/>
-                    <a:p>
-                      <a:pPr indent="0" marL="0">
-                        <a:buNone/>
-                      </a:pPr>
-                      <a:r>
-                        <a:rPr lang="en-US" sz="1600" dirty="0">
-                          <a:solidFill>
-                            <a:srgbClr val="1F2933"/>
-                          </a:solidFill>
-                          <a:latin typeface="Malgun Gothic" pitchFamily="34" charset="0"/>
-                          <a:ea typeface="Malgun Gothic" pitchFamily="34" charset="-122"/>
-                          <a:cs typeface="Malgun Gothic" pitchFamily="34" charset="-120"/>
-                        </a:rPr>
-                        <a:t>청크마다 ACK를 기다리면 회선이 멈춤</a:t>
-                      </a:r>
-                      <a:endParaRPr lang="en-US" sz="1600" dirty="0">
+                      <a:endParaRPr lang="en-US" sz="1400" dirty="0">
                         <a:latin typeface="Malgun Gothic" charset="0"/>
                         <a:ea typeface="Malgun Gothic" charset="0"/>
                         <a:cs typeface="Malgun Gothic" charset="0"/>
@@ -5794,7 +6186,7 @@
                         <a:buNone/>
                       </a:pPr>
                       <a:r>
-                        <a:rPr lang="en-US" sz="1600" dirty="0">
+                        <a:rPr lang="en-US" sz="1400" dirty="0">
                           <a:solidFill>
                             <a:srgbClr val="1F2933"/>
                           </a:solidFill>
@@ -5802,9 +6194,76 @@
                           <a:ea typeface="Malgun Gothic" pitchFamily="34" charset="-122"/>
                           <a:cs typeface="Malgun Gothic" pitchFamily="34" charset="-120"/>
                         </a:rPr>
-                        <a:t>ACK 전에 다음 청크까지 전송 (최대 2청크)</a:t>
+                        <a:t>86.4–87.2 s</a:t>
                       </a:r>
-                      <a:endParaRPr lang="en-US" sz="1600" dirty="0">
+                      <a:endParaRPr lang="en-US" sz="1400" dirty="0">
+                        <a:latin typeface="Malgun Gothic" charset="0"/>
+                        <a:ea typeface="Malgun Gothic" charset="0"/>
+                        <a:cs typeface="Malgun Gothic" charset="0"/>
+                      </a:endParaRPr>
+                    </a:p>
+                  </a:txBody>
+                  <a:tcPr marL="109728" marR="109728" marT="54864" marB="54864" anchor="ctr">
+                    <a:lnL w="9525" cap="flat" cmpd="sng" algn="ctr">
+                      <a:solidFill>
+                        <a:srgbClr val="D5DAE0"/>
+                      </a:solidFill>
+                      <a:prstDash val="solid"/>
+                      <a:round/>
+                      <a:headEnd type="none" w="med" len="med"/>
+                      <a:tailEnd type="none" w="med" len="med"/>
+                    </a:lnL>
+                    <a:lnR w="9525" cap="flat" cmpd="sng" algn="ctr">
+                      <a:solidFill>
+                        <a:srgbClr val="D5DAE0"/>
+                      </a:solidFill>
+                      <a:prstDash val="solid"/>
+                      <a:round/>
+                      <a:headEnd type="none" w="med" len="med"/>
+                      <a:tailEnd type="none" w="med" len="med"/>
+                    </a:lnR>
+                    <a:lnT w="9525" cap="flat" cmpd="sng" algn="ctr">
+                      <a:solidFill>
+                        <a:srgbClr val="D5DAE0"/>
+                      </a:solidFill>
+                      <a:prstDash val="solid"/>
+                      <a:round/>
+                      <a:headEnd type="none" w="med" len="med"/>
+                      <a:tailEnd type="none" w="med" len="med"/>
+                    </a:lnT>
+                    <a:lnB w="9525" cap="flat" cmpd="sng" algn="ctr">
+                      <a:solidFill>
+                        <a:srgbClr val="D5DAE0"/>
+                      </a:solidFill>
+                      <a:prstDash val="solid"/>
+                      <a:round/>
+                      <a:headEnd type="none" w="med" len="med"/>
+                      <a:tailEnd type="none" w="med" len="med"/>
+                    </a:lnB>
+                  </a:tcPr>
+                </a:tc>
+              </a:tr>
+              <a:tr h="566928">
+                <a:tc>
+                  <a:txBody>
+                    <a:bodyPr/>
+                    <a:lstStyle/>
+                    <a:p>
+                      <a:pPr indent="0" marL="0">
+                        <a:buNone/>
+                      </a:pPr>
+                      <a:r>
+                        <a:rPr lang="en-US" sz="1400" dirty="0">
+                          <a:solidFill>
+                            <a:srgbClr val="1F2933"/>
+                          </a:solidFill>
+                          <a:latin typeface="Malgun Gothic" pitchFamily="34" charset="0"/>
+                          <a:ea typeface="Malgun Gothic" pitchFamily="34" charset="-122"/>
+                          <a:cs typeface="Malgun Gothic" pitchFamily="34" charset="-120"/>
+                        </a:rPr>
+                        <a:t>읽기 전용 복원</a:t>
+                      </a:r>
+                      <a:endParaRPr lang="en-US" sz="1400" dirty="0">
                         <a:latin typeface="Malgun Gothic" charset="0"/>
                         <a:ea typeface="Malgun Gothic" charset="0"/>
                         <a:cs typeface="Malgun Gothic" charset="0"/>
@@ -5859,74 +6318,7 @@
                         <a:buNone/>
                       </a:pPr>
                       <a:r>
-                        <a:rPr lang="en-US" sz="1600" i="1" dirty="0">
-                          <a:solidFill>
-                            <a:srgbClr val="5F6B7A"/>
-                          </a:solidFill>
-                          <a:latin typeface="Malgun Gothic" pitchFamily="34" charset="0"/>
-                          <a:ea typeface="Malgun Gothic" pitchFamily="34" charset="-122"/>
-                          <a:cs typeface="Malgun Gothic" pitchFamily="34" charset="-120"/>
-                        </a:rPr>
-                        <a:t>[자료 필요: 1청크 방식 대비 전송 시간]</a:t>
-                      </a:r>
-                      <a:endParaRPr lang="en-US" sz="1600" dirty="0">
-                        <a:latin typeface="Malgun Gothic" charset="0"/>
-                        <a:ea typeface="Malgun Gothic" charset="0"/>
-                        <a:cs typeface="Malgun Gothic" charset="0"/>
-                      </a:endParaRPr>
-                    </a:p>
-                  </a:txBody>
-                  <a:tcPr marL="109728" marR="109728" marT="54864" marB="54864" anchor="ctr">
-                    <a:lnL w="9525" cap="flat" cmpd="sng" algn="ctr">
-                      <a:solidFill>
-                        <a:srgbClr val="D5DAE0"/>
-                      </a:solidFill>
-                      <a:prstDash val="solid"/>
-                      <a:round/>
-                      <a:headEnd type="none" w="med" len="med"/>
-                      <a:tailEnd type="none" w="med" len="med"/>
-                    </a:lnL>
-                    <a:lnR w="9525" cap="flat" cmpd="sng" algn="ctr">
-                      <a:solidFill>
-                        <a:srgbClr val="D5DAE0"/>
-                      </a:solidFill>
-                      <a:prstDash val="solid"/>
-                      <a:round/>
-                      <a:headEnd type="none" w="med" len="med"/>
-                      <a:tailEnd type="none" w="med" len="med"/>
-                    </a:lnR>
-                    <a:lnT w="9525" cap="flat" cmpd="sng" algn="ctr">
-                      <a:solidFill>
-                        <a:srgbClr val="D5DAE0"/>
-                      </a:solidFill>
-                      <a:prstDash val="solid"/>
-                      <a:round/>
-                      <a:headEnd type="none" w="med" len="med"/>
-                      <a:tailEnd type="none" w="med" len="med"/>
-                    </a:lnT>
-                    <a:lnB w="9525" cap="flat" cmpd="sng" algn="ctr">
-                      <a:solidFill>
-                        <a:srgbClr val="D5DAE0"/>
-                      </a:solidFill>
-                      <a:prstDash val="solid"/>
-                      <a:round/>
-                      <a:headEnd type="none" w="med" len="med"/>
-                      <a:tailEnd type="none" w="med" len="med"/>
-                    </a:lnB>
-                  </a:tcPr>
-                </a:tc>
-              </a:tr>
-              <a:tr h="731520">
-                <a:tc>
-                  <a:txBody>
-                    <a:bodyPr/>
-                    <a:lstStyle/>
-                    <a:p>
-                      <a:pPr indent="0" marL="0">
-                        <a:buNone/>
-                      </a:pPr>
-                      <a:r>
-                        <a:rPr lang="en-US" sz="1600" dirty="0">
+                        <a:rPr lang="en-US" sz="1400" dirty="0">
                           <a:solidFill>
                             <a:srgbClr val="1F2933"/>
                           </a:solidFill>
@@ -5934,9 +6326,9 @@
                           <a:ea typeface="Malgun Gothic" pitchFamily="34" charset="-122"/>
                           <a:cs typeface="Malgun Gothic" pitchFamily="34" charset="-120"/>
                         </a:rPr>
-                        <a:t>복원 데이터 송신 중 CPU 대기</a:t>
+                        <a:t>5회</a:t>
                       </a:r>
-                      <a:endParaRPr lang="en-US" sz="1600" dirty="0">
+                      <a:endParaRPr lang="en-US" sz="1400" dirty="0">
                         <a:latin typeface="Malgun Gothic" charset="0"/>
                         <a:ea typeface="Malgun Gothic" charset="0"/>
                         <a:cs typeface="Malgun Gothic" charset="0"/>
@@ -5991,17 +6383,17 @@
                         <a:buNone/>
                       </a:pPr>
                       <a:r>
-                        <a:rPr lang="en-US" sz="1600" dirty="0">
+                        <a:rPr lang="en-US" sz="1400" b="1" dirty="0">
                           <a:solidFill>
-                            <a:srgbClr val="1F2933"/>
+                            <a:srgbClr val="0F766E"/>
                           </a:solidFill>
                           <a:latin typeface="Malgun Gothic" pitchFamily="34" charset="0"/>
                           <a:ea typeface="Malgun Gothic" pitchFamily="34" charset="-122"/>
                           <a:cs typeface="Malgun Gothic" pitchFamily="34" charset="-120"/>
                         </a:rPr>
-                        <a:t>UART TX DMA 이중 버퍼 (4 KiB × 2)</a:t>
+                        <a:t>5회 모두 일치</a:t>
                       </a:r>
-                      <a:endParaRPr lang="en-US" sz="1600" dirty="0">
+                      <a:endParaRPr lang="en-US" sz="1400" dirty="0">
                         <a:latin typeface="Malgun Gothic" charset="0"/>
                         <a:ea typeface="Malgun Gothic" charset="0"/>
                         <a:cs typeface="Malgun Gothic" charset="0"/>
@@ -6056,17 +6448,17 @@
                         <a:buNone/>
                       </a:pPr>
                       <a:r>
-                        <a:rPr lang="en-US" sz="1600" i="1" dirty="0">
+                        <a:rPr lang="en-US" sz="1400" dirty="0">
                           <a:solidFill>
-                            <a:srgbClr val="5F6B7A"/>
+                            <a:srgbClr val="1F2933"/>
                           </a:solidFill>
                           <a:latin typeface="Malgun Gothic" pitchFamily="34" charset="0"/>
                           <a:ea typeface="Malgun Gothic" pitchFamily="34" charset="-122"/>
                           <a:cs typeface="Malgun Gothic" pitchFamily="34" charset="-120"/>
                         </a:rPr>
-                        <a:t>[자료 필요: 최신 펌웨어 측정]</a:t>
+                        <a:t>34.6–35.3 s</a:t>
                       </a:r>
-                      <a:endParaRPr lang="en-US" sz="1600" dirty="0">
+                      <a:endParaRPr lang="en-US" sz="1400" dirty="0">
                         <a:latin typeface="Malgun Gothic" charset="0"/>
                         <a:ea typeface="Malgun Gothic" charset="0"/>
                         <a:cs typeface="Malgun Gothic" charset="0"/>
@@ -6113,7 +6505,7 @@
                   </a:tcPr>
                 </a:tc>
               </a:tr>
-              <a:tr h="731520">
+              <a:tr h="566928">
                 <a:tc>
                   <a:txBody>
                     <a:bodyPr/>
@@ -6123,7 +6515,7 @@
                         <a:buNone/>
                       </a:pPr>
                       <a:r>
-                        <a:rPr lang="en-US" sz="1600" dirty="0">
+                        <a:rPr lang="en-US" sz="1400" dirty="0">
                           <a:solidFill>
                             <a:srgbClr val="1F2933"/>
                           </a:solidFill>
@@ -6131,9 +6523,9 @@
                           <a:ea typeface="Malgun Gothic" pitchFamily="34" charset="-122"/>
                           <a:cs typeface="Malgun Gothic" pitchFamily="34" charset="-120"/>
                         </a:rPr>
-                        <a:t>이미지 3 MiB &gt; SRAM 320 KiB</a:t>
+                        <a:t>DMA 버퍼 초과</a:t>
                       </a:r>
-                      <a:endParaRPr lang="en-US" sz="1600" dirty="0">
+                      <a:endParaRPr lang="en-US" sz="1400" dirty="0">
                         <a:latin typeface="Malgun Gothic" charset="0"/>
                         <a:ea typeface="Malgun Gothic" charset="0"/>
                         <a:cs typeface="Malgun Gothic" charset="0"/>
@@ -6188,7 +6580,7 @@
                         <a:buNone/>
                       </a:pPr>
                       <a:r>
-                        <a:rPr lang="en-US" sz="1600" dirty="0">
+                        <a:rPr lang="en-US" sz="1400" dirty="0">
                           <a:solidFill>
                             <a:srgbClr val="1F2933"/>
                           </a:solidFill>
@@ -6196,9 +6588,9 @@
                           <a:ea typeface="Malgun Gothic" pitchFamily="34" charset="-122"/>
                           <a:cs typeface="Malgun Gothic" pitchFamily="34" charset="-120"/>
                         </a:rPr>
-                        <a:t>청크 버퍼 재사용, 이미지 전체를 RAM에 두지 않음</a:t>
+                        <a:t>5회</a:t>
                       </a:r>
-                      <a:endParaRPr lang="en-US" sz="1600" dirty="0">
+                      <a:endParaRPr lang="en-US" sz="1400" dirty="0">
                         <a:latin typeface="Malgun Gothic" charset="0"/>
                         <a:ea typeface="Malgun Gothic" charset="0"/>
                         <a:cs typeface="Malgun Gothic" charset="0"/>
@@ -6253,84 +6645,17 @@
                         <a:buNone/>
                       </a:pPr>
                       <a:r>
-                        <a:rPr lang="en-US" sz="1600" dirty="0">
+                        <a:rPr lang="en-US" sz="1400" b="1" dirty="0">
                           <a:solidFill>
-                            <a:srgbClr val="1F2933"/>
+                            <a:srgbClr val="0F766E"/>
                           </a:solidFill>
                           <a:latin typeface="Malgun Gothic" pitchFamily="34" charset="0"/>
                           <a:ea typeface="Malgun Gothic" pitchFamily="34" charset="-122"/>
                           <a:cs typeface="Malgun Gothic" pitchFamily="34" charset="-120"/>
                         </a:rPr>
-                        <a:t>3,145,782 B 저장·복원 완료</a:t>
+                        <a:t>0회</a:t>
                       </a:r>
-                      <a:endParaRPr lang="en-US" sz="1600" dirty="0">
-                        <a:latin typeface="Malgun Gothic" charset="0"/>
-                        <a:ea typeface="Malgun Gothic" charset="0"/>
-                        <a:cs typeface="Malgun Gothic" charset="0"/>
-                      </a:endParaRPr>
-                    </a:p>
-                  </a:txBody>
-                  <a:tcPr marL="109728" marR="109728" marT="54864" marB="54864" anchor="ctr">
-                    <a:lnL w="9525" cap="flat" cmpd="sng" algn="ctr">
-                      <a:solidFill>
-                        <a:srgbClr val="D5DAE0"/>
-                      </a:solidFill>
-                      <a:prstDash val="solid"/>
-                      <a:round/>
-                      <a:headEnd type="none" w="med" len="med"/>
-                      <a:tailEnd type="none" w="med" len="med"/>
-                    </a:lnL>
-                    <a:lnR w="9525" cap="flat" cmpd="sng" algn="ctr">
-                      <a:solidFill>
-                        <a:srgbClr val="D5DAE0"/>
-                      </a:solidFill>
-                      <a:prstDash val="solid"/>
-                      <a:round/>
-                      <a:headEnd type="none" w="med" len="med"/>
-                      <a:tailEnd type="none" w="med" len="med"/>
-                    </a:lnR>
-                    <a:lnT w="9525" cap="flat" cmpd="sng" algn="ctr">
-                      <a:solidFill>
-                        <a:srgbClr val="D5DAE0"/>
-                      </a:solidFill>
-                      <a:prstDash val="solid"/>
-                      <a:round/>
-                      <a:headEnd type="none" w="med" len="med"/>
-                      <a:tailEnd type="none" w="med" len="med"/>
-                    </a:lnT>
-                    <a:lnB w="9525" cap="flat" cmpd="sng" algn="ctr">
-                      <a:solidFill>
-                        <a:srgbClr val="D5DAE0"/>
-                      </a:solidFill>
-                      <a:prstDash val="solid"/>
-                      <a:round/>
-                      <a:headEnd type="none" w="med" len="med"/>
-                      <a:tailEnd type="none" w="med" len="med"/>
-                    </a:lnB>
-                  </a:tcPr>
-                </a:tc>
-              </a:tr>
-              <a:tr h="731520">
-                <a:tc>
-                  <a:txBody>
-                    <a:bodyPr/>
-                    <a:lstStyle/>
-                    <a:p>
-                      <a:pPr indent="0" marL="0">
-                        <a:buNone/>
-                      </a:pPr>
-                      <a:r>
-                        <a:rPr lang="en-US" sz="1600" dirty="0">
-                          <a:solidFill>
-                            <a:srgbClr val="1F2933"/>
-                          </a:solidFill>
-                          <a:latin typeface="Malgun Gothic" pitchFamily="34" charset="0"/>
-                          <a:ea typeface="Malgun Gothic" pitchFamily="34" charset="-122"/>
-                          <a:cs typeface="Malgun Gothic" pitchFamily="34" charset="-120"/>
-                        </a:rPr>
-                        <a:t>Gray 출력의 UART 전송량</a:t>
-                      </a:r>
-                      <a:endParaRPr lang="en-US" sz="1600" dirty="0">
+                      <a:endParaRPr lang="en-US" sz="1400" dirty="0">
                         <a:latin typeface="Malgun Gothic" charset="0"/>
                         <a:ea typeface="Malgun Gothic" charset="0"/>
                         <a:cs typeface="Malgun Gothic" charset="0"/>
@@ -6385,7 +6710,7 @@
                         <a:buNone/>
                       </a:pPr>
                       <a:r>
-                        <a:rPr lang="en-US" sz="1600" dirty="0">
+                        <a:rPr lang="en-US" sz="1400" dirty="0">
                           <a:solidFill>
                             <a:srgbClr val="1F2933"/>
                           </a:solidFill>
@@ -6393,9 +6718,9 @@
                           <a:ea typeface="Malgun Gothic" pitchFamily="34" charset="-122"/>
                           <a:cs typeface="Malgun Gothic" pitchFamily="34" charset="-120"/>
                         </a:rPr>
-                        <a:t>출력을 8비트 Gray로 고정</a:t>
+                        <a:t>M0·M1 각 384</a:t>
                       </a:r>
-                      <a:endParaRPr lang="en-US" sz="1600" dirty="0">
+                      <a:endParaRPr lang="en-US" sz="1400" dirty="0">
                         <a:latin typeface="Malgun Gothic" charset="0"/>
                         <a:ea typeface="Malgun Gothic" charset="0"/>
                         <a:cs typeface="Malgun Gothic" charset="0"/>
@@ -6441,76 +6766,112 @@
                     </a:lnB>
                   </a:tcPr>
                 </a:tc>
-                <a:tc>
-                  <a:txBody>
-                    <a:bodyPr/>
-                    <a:lstStyle/>
-                    <a:p>
-                      <a:pPr indent="0" marL="0">
-                        <a:buNone/>
-                      </a:pPr>
-                      <a:r>
-                        <a:rPr lang="en-US" sz="1600" dirty="0">
-                          <a:solidFill>
-                            <a:srgbClr val="1F2933"/>
-                          </a:solidFill>
-                          <a:latin typeface="Malgun Gothic" pitchFamily="34" charset="0"/>
-                          <a:ea typeface="Malgun Gothic" pitchFamily="34" charset="-122"/>
-                          <a:cs typeface="Malgun Gothic" pitchFamily="34" charset="-120"/>
-                        </a:rPr>
-                        <a:t>전체 시간 23.9% 감소 (다음 장)</a:t>
-                      </a:r>
-                      <a:endParaRPr lang="en-US" sz="1600" dirty="0">
-                        <a:latin typeface="Malgun Gothic" charset="0"/>
-                        <a:ea typeface="Malgun Gothic" charset="0"/>
-                        <a:cs typeface="Malgun Gothic" charset="0"/>
-                      </a:endParaRPr>
-                    </a:p>
-                  </a:txBody>
-                  <a:tcPr marL="109728" marR="109728" marT="54864" marB="54864" anchor="ctr">
-                    <a:lnL w="9525" cap="flat" cmpd="sng" algn="ctr">
-                      <a:solidFill>
-                        <a:srgbClr val="D5DAE0"/>
-                      </a:solidFill>
-                      <a:prstDash val="solid"/>
-                      <a:round/>
-                      <a:headEnd type="none" w="med" len="med"/>
-                      <a:tailEnd type="none" w="med" len="med"/>
-                    </a:lnL>
-                    <a:lnR w="9525" cap="flat" cmpd="sng" algn="ctr">
-                      <a:solidFill>
-                        <a:srgbClr val="D5DAE0"/>
-                      </a:solidFill>
-                      <a:prstDash val="solid"/>
-                      <a:round/>
-                      <a:headEnd type="none" w="med" len="med"/>
-                      <a:tailEnd type="none" w="med" len="med"/>
-                    </a:lnR>
-                    <a:lnT w="9525" cap="flat" cmpd="sng" algn="ctr">
-                      <a:solidFill>
-                        <a:srgbClr val="D5DAE0"/>
-                      </a:solidFill>
-                      <a:prstDash val="solid"/>
-                      <a:round/>
-                      <a:headEnd type="none" w="med" len="med"/>
-                      <a:tailEnd type="none" w="med" len="med"/>
-                    </a:lnT>
-                    <a:lnB w="9525" cap="flat" cmpd="sng" algn="ctr">
-                      <a:solidFill>
-                        <a:srgbClr val="D5DAE0"/>
-                      </a:solidFill>
-                      <a:prstDash val="solid"/>
-                      <a:round/>
-                      <a:headEnd type="none" w="med" len="med"/>
-                      <a:tailEnd type="none" w="med" len="med"/>
-                    </a:lnB>
-                  </a:tcPr>
-                </a:tc>
               </a:tr>
             </a:tbl>
           </a:graphicData>
         </a:graphic>
       </p:graphicFrame>
+      <p:sp>
+        <p:nvSpPr>
+          <p:cNvPr id="9" name="Text 4"/>
+          <p:cNvSpPr txBox="1"/>
+          <p:nvPr/>
+        </p:nvSpPr>
+        <p:spPr>
+          <a:xfrm>
+            <a:off x="6263640" y="4251960"/>
+            <a:ext cx="5376672" cy="640080"/>
+          </a:xfrm>
+          <a:prstGeom prst="rect">
+            <a:avLst/>
+          </a:prstGeom>
+          <a:noFill/>
+          <a:ln/>
+        </p:spPr>
+        <p:txBody>
+          <a:bodyPr wrap="square" lIns="0" tIns="0" rIns="0" bIns="0" rtlCol="0" anchor="t"/>
+          <a:lstStyle/>
+          <a:p>
+            <a:pPr indent="0" marL="0">
+              <a:lnSpc>
+                <a:spcPct val="120000"/>
+              </a:lnSpc>
+              <a:buNone/>
+            </a:pPr>
+            <a:r>
+              <a:rPr lang="en-US" sz="1300" dirty="0">
+                <a:solidFill>
+                  <a:srgbClr val="5F6B7A"/>
+                </a:solidFill>
+                <a:latin typeface="Malgun Gothic" pitchFamily="34" charset="0"/>
+                <a:ea typeface="Malgun Gothic" pitchFamily="34" charset="-122"/>
+                <a:cs typeface="Malgun Gothic" pitchFamily="34" charset="-120"/>
+              </a:rPr>
+              <a:t>시간: 전송 시작부터 PC 비교 완료까지, 921600 baud</a:t>
+            </a:r>
+            <a:endParaRPr lang="en-US" sz="1300" dirty="0"/>
+          </a:p>
+          <a:p>
+            <a:pPr indent="0" marL="0">
+              <a:lnSpc>
+                <a:spcPct val="120000"/>
+              </a:lnSpc>
+              <a:buNone/>
+            </a:pPr>
+            <a:r>
+              <a:rPr lang="en-US" sz="1300" dirty="0">
+                <a:solidFill>
+                  <a:srgbClr val="5F6B7A"/>
+                </a:solidFill>
+                <a:latin typeface="Malgun Gothic" pitchFamily="34" charset="0"/>
+                <a:ea typeface="Malgun Gothic" pitchFamily="34" charset="-122"/>
+                <a:cs typeface="Malgun Gothic" pitchFamily="34" charset="-120"/>
+              </a:rPr>
+              <a:t>저장 → 복원 86.4 s 중 MCU 저장 구간 51.4–51.9 s</a:t>
+            </a:r>
+            <a:endParaRPr lang="en-US" sz="1300" dirty="0"/>
+          </a:p>
+        </p:txBody>
+      </p:sp>
+      <p:sp>
+        <p:nvSpPr>
+          <p:cNvPr id="10" name="Text 5"/>
+          <p:cNvSpPr txBox="1"/>
+          <p:nvPr/>
+        </p:nvSpPr>
+        <p:spPr>
+          <a:xfrm>
+            <a:off x="548640" y="5669280"/>
+            <a:ext cx="11091672" cy="320040"/>
+          </a:xfrm>
+          <a:prstGeom prst="rect">
+            <a:avLst/>
+          </a:prstGeom>
+          <a:noFill/>
+          <a:ln/>
+        </p:spPr>
+        <p:txBody>
+          <a:bodyPr wrap="square" lIns="0" tIns="0" rIns="0" bIns="0" rtlCol="0" anchor="t"/>
+          <a:lstStyle/>
+          <a:p>
+            <a:pPr indent="0" marL="0">
+              <a:buNone/>
+            </a:pPr>
+            <a:r>
+              <a:rPr lang="en-US" sz="1200" dirty="0">
+                <a:solidFill>
+                  <a:srgbClr val="5F6B7A"/>
+                </a:solidFill>
+                <a:latin typeface="Malgun Gothic" pitchFamily="34" charset="0"/>
+                <a:ea typeface="Malgun Gothic" pitchFamily="34" charset="-122"/>
+                <a:cs typeface="Malgun Gothic" pitchFamily="34" charset="-120"/>
+              </a:rPr>
+              <a:t>SHA-256 앞 8자리 표시, 전체 값은 발표자 노트 · 출처: pc/results/demo_report_20261015_*.json (10개)</a:t>
+            </a:r>
+            <a:endParaRPr lang="en-US" sz="1200" dirty="0"/>
+          </a:p>
+        </p:txBody>
+      </p:sp>
       <p:sp>
         <p:nvSpPr>
           <p:cNvPr id="25" name="Slide Number Placeholder 0"/>
@@ -6619,6 +6980,1578 @@
                 <a:ea typeface="Malgun Gothic" pitchFamily="34" charset="-122"/>
                 <a:cs typeface="Malgun Gothic" pitchFamily="34" charset="-120"/>
               </a:rPr>
+              <a:t>전송 최적화: 수신과 Flash 쓰기를 겹치고, 백업 단계를 없앴습니다</a:t>
+            </a:r>
+            <a:endParaRPr lang="en-US" sz="2600" dirty="0"/>
+          </a:p>
+        </p:txBody>
+      </p:sp>
+      <p:graphicFrame>
+        <p:nvGraphicFramePr>
+          <p:cNvPr id="14" name="Table 0"/>
+          <p:cNvGraphicFramePr>
+            <a:graphicFrameLocks noGrp="1"/>
+          </p:cNvGraphicFramePr>
+          <p:nvPr>
+            <p:extLst>
+              <p:ext uri="{D42A27DB-BD31-4B8C-83A1-F6EECF244321}">
+                <p14:modId xmlns:p14="http://schemas.microsoft.com/office/powerpoint/2010/main" val="1579011935"/>
+              </p:ext>
+            </p:extLst>
+          </p:nvPr>
+        </p:nvGraphicFramePr>
+        <p:xfrm>
+          <a:off x="548640" y="1417320"/>
+          <a:ext cx="11091672" cy="914400"/>
+        </p:xfrm>
+        <a:graphic>
+          <a:graphicData uri="http://schemas.openxmlformats.org/drawingml/2006/table">
+            <a:tbl>
+              <a:tblPr/>
+              <a:tblGrid>
+                <a:gridCol w="3429000"/>
+                <a:gridCol w="3931920"/>
+                <a:gridCol w="3730752"/>
+              </a:tblGrid>
+              <a:tr h="640080">
+                <a:tc>
+                  <a:txBody>
+                    <a:bodyPr/>
+                    <a:lstStyle/>
+                    <a:p>
+                      <a:pPr indent="0" marL="0">
+                        <a:buNone/>
+                      </a:pPr>
+                      <a:r>
+                        <a:rPr lang="en-US" sz="1500" b="1" dirty="0">
+                          <a:solidFill>
+                            <a:srgbClr val="1F2933"/>
+                          </a:solidFill>
+                          <a:latin typeface="Malgun Gothic" pitchFamily="34" charset="0"/>
+                          <a:ea typeface="Malgun Gothic" pitchFamily="34" charset="-122"/>
+                          <a:cs typeface="Malgun Gothic" pitchFamily="34" charset="-120"/>
+                        </a:rPr>
+                        <a:t>제약</a:t>
+                      </a:r>
+                      <a:endParaRPr lang="en-US" sz="1500" dirty="0">
+                        <a:latin typeface="Malgun Gothic" charset="0"/>
+                        <a:ea typeface="Malgun Gothic" charset="0"/>
+                        <a:cs typeface="Malgun Gothic" charset="0"/>
+                      </a:endParaRPr>
+                    </a:p>
+                  </a:txBody>
+                  <a:tcPr marL="109728" marR="109728" marT="54864" marB="54864" anchor="ctr">
+                    <a:lnL w="9525" cap="flat" cmpd="sng" algn="ctr">
+                      <a:solidFill>
+                        <a:srgbClr val="D5DAE0"/>
+                      </a:solidFill>
+                      <a:prstDash val="solid"/>
+                      <a:round/>
+                      <a:headEnd type="none" w="med" len="med"/>
+                      <a:tailEnd type="none" w="med" len="med"/>
+                    </a:lnL>
+                    <a:lnR w="9525" cap="flat" cmpd="sng" algn="ctr">
+                      <a:solidFill>
+                        <a:srgbClr val="D5DAE0"/>
+                      </a:solidFill>
+                      <a:prstDash val="solid"/>
+                      <a:round/>
+                      <a:headEnd type="none" w="med" len="med"/>
+                      <a:tailEnd type="none" w="med" len="med"/>
+                    </a:lnR>
+                    <a:lnT w="9525" cap="flat" cmpd="sng" algn="ctr">
+                      <a:solidFill>
+                        <a:srgbClr val="D5DAE0"/>
+                      </a:solidFill>
+                      <a:prstDash val="solid"/>
+                      <a:round/>
+                      <a:headEnd type="none" w="med" len="med"/>
+                      <a:tailEnd type="none" w="med" len="med"/>
+                    </a:lnT>
+                    <a:lnB w="9525" cap="flat" cmpd="sng" algn="ctr">
+                      <a:solidFill>
+                        <a:srgbClr val="D5DAE0"/>
+                      </a:solidFill>
+                      <a:prstDash val="solid"/>
+                      <a:round/>
+                      <a:headEnd type="none" w="med" len="med"/>
+                      <a:tailEnd type="none" w="med" len="med"/>
+                    </a:lnB>
+                    <a:solidFill>
+                      <a:srgbClr val="F3F5F7"/>
+                    </a:solidFill>
+                  </a:tcPr>
+                </a:tc>
+                <a:tc>
+                  <a:txBody>
+                    <a:bodyPr/>
+                    <a:lstStyle/>
+                    <a:p>
+                      <a:pPr indent="0" marL="0">
+                        <a:buNone/>
+                      </a:pPr>
+                      <a:r>
+                        <a:rPr lang="en-US" sz="1500" b="1" dirty="0">
+                          <a:solidFill>
+                            <a:srgbClr val="1F2933"/>
+                          </a:solidFill>
+                          <a:latin typeface="Malgun Gothic" pitchFamily="34" charset="0"/>
+                          <a:ea typeface="Malgun Gothic" pitchFamily="34" charset="-122"/>
+                          <a:cs typeface="Malgun Gothic" pitchFamily="34" charset="-120"/>
+                        </a:rPr>
+                        <a:t>적용한 방법</a:t>
+                      </a:r>
+                      <a:endParaRPr lang="en-US" sz="1500" dirty="0">
+                        <a:latin typeface="Malgun Gothic" charset="0"/>
+                        <a:ea typeface="Malgun Gothic" charset="0"/>
+                        <a:cs typeface="Malgun Gothic" charset="0"/>
+                      </a:endParaRPr>
+                    </a:p>
+                  </a:txBody>
+                  <a:tcPr marL="109728" marR="109728" marT="54864" marB="54864" anchor="ctr">
+                    <a:lnL w="9525" cap="flat" cmpd="sng" algn="ctr">
+                      <a:solidFill>
+                        <a:srgbClr val="D5DAE0"/>
+                      </a:solidFill>
+                      <a:prstDash val="solid"/>
+                      <a:round/>
+                      <a:headEnd type="none" w="med" len="med"/>
+                      <a:tailEnd type="none" w="med" len="med"/>
+                    </a:lnL>
+                    <a:lnR w="9525" cap="flat" cmpd="sng" algn="ctr">
+                      <a:solidFill>
+                        <a:srgbClr val="D5DAE0"/>
+                      </a:solidFill>
+                      <a:prstDash val="solid"/>
+                      <a:round/>
+                      <a:headEnd type="none" w="med" len="med"/>
+                      <a:tailEnd type="none" w="med" len="med"/>
+                    </a:lnR>
+                    <a:lnT w="9525" cap="flat" cmpd="sng" algn="ctr">
+                      <a:solidFill>
+                        <a:srgbClr val="D5DAE0"/>
+                      </a:solidFill>
+                      <a:prstDash val="solid"/>
+                      <a:round/>
+                      <a:headEnd type="none" w="med" len="med"/>
+                      <a:tailEnd type="none" w="med" len="med"/>
+                    </a:lnT>
+                    <a:lnB w="9525" cap="flat" cmpd="sng" algn="ctr">
+                      <a:solidFill>
+                        <a:srgbClr val="D5DAE0"/>
+                      </a:solidFill>
+                      <a:prstDash val="solid"/>
+                      <a:round/>
+                      <a:headEnd type="none" w="med" len="med"/>
+                      <a:tailEnd type="none" w="med" len="med"/>
+                    </a:lnB>
+                    <a:solidFill>
+                      <a:srgbClr val="F3F5F7"/>
+                    </a:solidFill>
+                  </a:tcPr>
+                </a:tc>
+                <a:tc>
+                  <a:txBody>
+                    <a:bodyPr/>
+                    <a:lstStyle/>
+                    <a:p>
+                      <a:pPr indent="0" marL="0">
+                        <a:buNone/>
+                      </a:pPr>
+                      <a:r>
+                        <a:rPr lang="en-US" sz="1500" b="1" dirty="0">
+                          <a:solidFill>
+                            <a:srgbClr val="1F2933"/>
+                          </a:solidFill>
+                          <a:latin typeface="Malgun Gothic" pitchFamily="34" charset="0"/>
+                          <a:ea typeface="Malgun Gothic" pitchFamily="34" charset="-122"/>
+                          <a:cs typeface="Malgun Gothic" pitchFamily="34" charset="-120"/>
+                        </a:rPr>
+                        <a:t>확인된 효과</a:t>
+                      </a:r>
+                      <a:endParaRPr lang="en-US" sz="1500" dirty="0">
+                        <a:latin typeface="Malgun Gothic" charset="0"/>
+                        <a:ea typeface="Malgun Gothic" charset="0"/>
+                        <a:cs typeface="Malgun Gothic" charset="0"/>
+                      </a:endParaRPr>
+                    </a:p>
+                  </a:txBody>
+                  <a:tcPr marL="109728" marR="109728" marT="54864" marB="54864" anchor="ctr">
+                    <a:lnL w="9525" cap="flat" cmpd="sng" algn="ctr">
+                      <a:solidFill>
+                        <a:srgbClr val="D5DAE0"/>
+                      </a:solidFill>
+                      <a:prstDash val="solid"/>
+                      <a:round/>
+                      <a:headEnd type="none" w="med" len="med"/>
+                      <a:tailEnd type="none" w="med" len="med"/>
+                    </a:lnL>
+                    <a:lnR w="9525" cap="flat" cmpd="sng" algn="ctr">
+                      <a:solidFill>
+                        <a:srgbClr val="D5DAE0"/>
+                      </a:solidFill>
+                      <a:prstDash val="solid"/>
+                      <a:round/>
+                      <a:headEnd type="none" w="med" len="med"/>
+                      <a:tailEnd type="none" w="med" len="med"/>
+                    </a:lnR>
+                    <a:lnT w="9525" cap="flat" cmpd="sng" algn="ctr">
+                      <a:solidFill>
+                        <a:srgbClr val="D5DAE0"/>
+                      </a:solidFill>
+                      <a:prstDash val="solid"/>
+                      <a:round/>
+                      <a:headEnd type="none" w="med" len="med"/>
+                      <a:tailEnd type="none" w="med" len="med"/>
+                    </a:lnT>
+                    <a:lnB w="9525" cap="flat" cmpd="sng" algn="ctr">
+                      <a:solidFill>
+                        <a:srgbClr val="D5DAE0"/>
+                      </a:solidFill>
+                      <a:prstDash val="solid"/>
+                      <a:round/>
+                      <a:headEnd type="none" w="med" len="med"/>
+                      <a:tailEnd type="none" w="med" len="med"/>
+                    </a:lnB>
+                    <a:solidFill>
+                      <a:srgbClr val="F3F5F7"/>
+                    </a:solidFill>
+                  </a:tcPr>
+                </a:tc>
+              </a:tr>
+              <a:tr h="640080">
+                <a:tc>
+                  <a:txBody>
+                    <a:bodyPr/>
+                    <a:lstStyle/>
+                    <a:p>
+                      <a:pPr indent="0" marL="0">
+                        <a:buNone/>
+                      </a:pPr>
+                      <a:r>
+                        <a:rPr lang="en-US" sz="1500" dirty="0">
+                          <a:solidFill>
+                            <a:srgbClr val="1F2933"/>
+                          </a:solidFill>
+                          <a:latin typeface="Malgun Gothic" pitchFamily="34" charset="0"/>
+                          <a:ea typeface="Malgun Gothic" pitchFamily="34" charset="-122"/>
+                          <a:cs typeface="Malgun Gothic" pitchFamily="34" charset="-120"/>
+                        </a:rPr>
+                        <a:t>Flash 쓰기 중에도 UART 바이트가 계속 도착</a:t>
+                      </a:r>
+                      <a:endParaRPr lang="en-US" sz="1500" dirty="0">
+                        <a:latin typeface="Malgun Gothic" charset="0"/>
+                        <a:ea typeface="Malgun Gothic" charset="0"/>
+                        <a:cs typeface="Malgun Gothic" charset="0"/>
+                      </a:endParaRPr>
+                    </a:p>
+                  </a:txBody>
+                  <a:tcPr marL="109728" marR="109728" marT="54864" marB="54864" anchor="ctr">
+                    <a:lnL w="9525" cap="flat" cmpd="sng" algn="ctr">
+                      <a:solidFill>
+                        <a:srgbClr val="D5DAE0"/>
+                      </a:solidFill>
+                      <a:prstDash val="solid"/>
+                      <a:round/>
+                      <a:headEnd type="none" w="med" len="med"/>
+                      <a:tailEnd type="none" w="med" len="med"/>
+                    </a:lnL>
+                    <a:lnR w="9525" cap="flat" cmpd="sng" algn="ctr">
+                      <a:solidFill>
+                        <a:srgbClr val="D5DAE0"/>
+                      </a:solidFill>
+                      <a:prstDash val="solid"/>
+                      <a:round/>
+                      <a:headEnd type="none" w="med" len="med"/>
+                      <a:tailEnd type="none" w="med" len="med"/>
+                    </a:lnR>
+                    <a:lnT w="9525" cap="flat" cmpd="sng" algn="ctr">
+                      <a:solidFill>
+                        <a:srgbClr val="D5DAE0"/>
+                      </a:solidFill>
+                      <a:prstDash val="solid"/>
+                      <a:round/>
+                      <a:headEnd type="none" w="med" len="med"/>
+                      <a:tailEnd type="none" w="med" len="med"/>
+                    </a:lnT>
+                    <a:lnB w="9525" cap="flat" cmpd="sng" algn="ctr">
+                      <a:solidFill>
+                        <a:srgbClr val="D5DAE0"/>
+                      </a:solidFill>
+                      <a:prstDash val="solid"/>
+                      <a:round/>
+                      <a:headEnd type="none" w="med" len="med"/>
+                      <a:tailEnd type="none" w="med" len="med"/>
+                    </a:lnB>
+                  </a:tcPr>
+                </a:tc>
+                <a:tc>
+                  <a:txBody>
+                    <a:bodyPr/>
+                    <a:lstStyle/>
+                    <a:p>
+                      <a:pPr indent="0" marL="0">
+                        <a:buNone/>
+                      </a:pPr>
+                      <a:r>
+                        <a:rPr lang="en-US" sz="1500" dirty="0">
+                          <a:solidFill>
+                            <a:srgbClr val="1F2933"/>
+                          </a:solidFill>
+                          <a:latin typeface="Malgun Gothic" pitchFamily="34" charset="0"/>
+                          <a:ea typeface="Malgun Gothic" pitchFamily="34" charset="-122"/>
+                          <a:cs typeface="Malgun Gothic" pitchFamily="34" charset="-120"/>
+                        </a:rPr>
+                        <a:t>RX DMA 하드웨어 이중 버퍼 (4 KiB × 2)</a:t>
+                      </a:r>
+                      <a:endParaRPr lang="en-US" sz="1500" dirty="0">
+                        <a:latin typeface="Malgun Gothic" charset="0"/>
+                        <a:ea typeface="Malgun Gothic" charset="0"/>
+                        <a:cs typeface="Malgun Gothic" charset="0"/>
+                      </a:endParaRPr>
+                    </a:p>
+                  </a:txBody>
+                  <a:tcPr marL="109728" marR="109728" marT="54864" marB="54864" anchor="ctr">
+                    <a:lnL w="9525" cap="flat" cmpd="sng" algn="ctr">
+                      <a:solidFill>
+                        <a:srgbClr val="D5DAE0"/>
+                      </a:solidFill>
+                      <a:prstDash val="solid"/>
+                      <a:round/>
+                      <a:headEnd type="none" w="med" len="med"/>
+                      <a:tailEnd type="none" w="med" len="med"/>
+                    </a:lnL>
+                    <a:lnR w="9525" cap="flat" cmpd="sng" algn="ctr">
+                      <a:solidFill>
+                        <a:srgbClr val="D5DAE0"/>
+                      </a:solidFill>
+                      <a:prstDash val="solid"/>
+                      <a:round/>
+                      <a:headEnd type="none" w="med" len="med"/>
+                      <a:tailEnd type="none" w="med" len="med"/>
+                    </a:lnR>
+                    <a:lnT w="9525" cap="flat" cmpd="sng" algn="ctr">
+                      <a:solidFill>
+                        <a:srgbClr val="D5DAE0"/>
+                      </a:solidFill>
+                      <a:prstDash val="solid"/>
+                      <a:round/>
+                      <a:headEnd type="none" w="med" len="med"/>
+                      <a:tailEnd type="none" w="med" len="med"/>
+                    </a:lnT>
+                    <a:lnB w="9525" cap="flat" cmpd="sng" algn="ctr">
+                      <a:solidFill>
+                        <a:srgbClr val="D5DAE0"/>
+                      </a:solidFill>
+                      <a:prstDash val="solid"/>
+                      <a:round/>
+                      <a:headEnd type="none" w="med" len="med"/>
+                      <a:tailEnd type="none" w="med" len="med"/>
+                    </a:lnB>
+                  </a:tcPr>
+                </a:tc>
+                <a:tc>
+                  <a:txBody>
+                    <a:bodyPr/>
+                    <a:lstStyle/>
+                    <a:p>
+                      <a:pPr indent="0" marL="0">
+                        <a:buNone/>
+                      </a:pPr>
+                      <a:r>
+                        <a:rPr lang="en-US" sz="1500" dirty="0">
+                          <a:solidFill>
+                            <a:srgbClr val="1F2933"/>
+                          </a:solidFill>
+                          <a:latin typeface="Malgun Gothic" pitchFamily="34" charset="0"/>
+                          <a:ea typeface="Malgun Gothic" pitchFamily="34" charset="-122"/>
+                          <a:cs typeface="Malgun Gothic" pitchFamily="34" charset="-120"/>
+                        </a:rPr>
+                        <a:t>저장 5회 모두 버퍼 초과 0회</a:t>
+                      </a:r>
+                      <a:endParaRPr lang="en-US" sz="1500" dirty="0">
+                        <a:latin typeface="Malgun Gothic" charset="0"/>
+                        <a:ea typeface="Malgun Gothic" charset="0"/>
+                        <a:cs typeface="Malgun Gothic" charset="0"/>
+                      </a:endParaRPr>
+                    </a:p>
+                  </a:txBody>
+                  <a:tcPr marL="109728" marR="109728" marT="54864" marB="54864" anchor="ctr">
+                    <a:lnL w="9525" cap="flat" cmpd="sng" algn="ctr">
+                      <a:solidFill>
+                        <a:srgbClr val="D5DAE0"/>
+                      </a:solidFill>
+                      <a:prstDash val="solid"/>
+                      <a:round/>
+                      <a:headEnd type="none" w="med" len="med"/>
+                      <a:tailEnd type="none" w="med" len="med"/>
+                    </a:lnL>
+                    <a:lnR w="9525" cap="flat" cmpd="sng" algn="ctr">
+                      <a:solidFill>
+                        <a:srgbClr val="D5DAE0"/>
+                      </a:solidFill>
+                      <a:prstDash val="solid"/>
+                      <a:round/>
+                      <a:headEnd type="none" w="med" len="med"/>
+                      <a:tailEnd type="none" w="med" len="med"/>
+                    </a:lnR>
+                    <a:lnT w="9525" cap="flat" cmpd="sng" algn="ctr">
+                      <a:solidFill>
+                        <a:srgbClr val="D5DAE0"/>
+                      </a:solidFill>
+                      <a:prstDash val="solid"/>
+                      <a:round/>
+                      <a:headEnd type="none" w="med" len="med"/>
+                      <a:tailEnd type="none" w="med" len="med"/>
+                    </a:lnT>
+                    <a:lnB w="9525" cap="flat" cmpd="sng" algn="ctr">
+                      <a:solidFill>
+                        <a:srgbClr val="D5DAE0"/>
+                      </a:solidFill>
+                      <a:prstDash val="solid"/>
+                      <a:round/>
+                      <a:headEnd type="none" w="med" len="med"/>
+                      <a:tailEnd type="none" w="med" len="med"/>
+                    </a:lnB>
+                  </a:tcPr>
+                </a:tc>
+              </a:tr>
+              <a:tr h="640080">
+                <a:tc>
+                  <a:txBody>
+                    <a:bodyPr/>
+                    <a:lstStyle/>
+                    <a:p>
+                      <a:pPr indent="0" marL="0">
+                        <a:buNone/>
+                      </a:pPr>
+                      <a:r>
+                        <a:rPr lang="en-US" sz="1500" dirty="0">
+                          <a:solidFill>
+                            <a:srgbClr val="1F2933"/>
+                          </a:solidFill>
+                          <a:latin typeface="Malgun Gothic" pitchFamily="34" charset="0"/>
+                          <a:ea typeface="Malgun Gothic" pitchFamily="34" charset="-122"/>
+                          <a:cs typeface="Malgun Gothic" pitchFamily="34" charset="-120"/>
+                        </a:rPr>
+                        <a:t>청크마다 ACK를 기다리면 회선이 멈춤</a:t>
+                      </a:r>
+                      <a:endParaRPr lang="en-US" sz="1500" dirty="0">
+                        <a:latin typeface="Malgun Gothic" charset="0"/>
+                        <a:ea typeface="Malgun Gothic" charset="0"/>
+                        <a:cs typeface="Malgun Gothic" charset="0"/>
+                      </a:endParaRPr>
+                    </a:p>
+                  </a:txBody>
+                  <a:tcPr marL="109728" marR="109728" marT="54864" marB="54864" anchor="ctr">
+                    <a:lnL w="9525" cap="flat" cmpd="sng" algn="ctr">
+                      <a:solidFill>
+                        <a:srgbClr val="D5DAE0"/>
+                      </a:solidFill>
+                      <a:prstDash val="solid"/>
+                      <a:round/>
+                      <a:headEnd type="none" w="med" len="med"/>
+                      <a:tailEnd type="none" w="med" len="med"/>
+                    </a:lnL>
+                    <a:lnR w="9525" cap="flat" cmpd="sng" algn="ctr">
+                      <a:solidFill>
+                        <a:srgbClr val="D5DAE0"/>
+                      </a:solidFill>
+                      <a:prstDash val="solid"/>
+                      <a:round/>
+                      <a:headEnd type="none" w="med" len="med"/>
+                      <a:tailEnd type="none" w="med" len="med"/>
+                    </a:lnR>
+                    <a:lnT w="9525" cap="flat" cmpd="sng" algn="ctr">
+                      <a:solidFill>
+                        <a:srgbClr val="D5DAE0"/>
+                      </a:solidFill>
+                      <a:prstDash val="solid"/>
+                      <a:round/>
+                      <a:headEnd type="none" w="med" len="med"/>
+                      <a:tailEnd type="none" w="med" len="med"/>
+                    </a:lnT>
+                    <a:lnB w="9525" cap="flat" cmpd="sng" algn="ctr">
+                      <a:solidFill>
+                        <a:srgbClr val="D5DAE0"/>
+                      </a:solidFill>
+                      <a:prstDash val="solid"/>
+                      <a:round/>
+                      <a:headEnd type="none" w="med" len="med"/>
+                      <a:tailEnd type="none" w="med" len="med"/>
+                    </a:lnB>
+                  </a:tcPr>
+                </a:tc>
+                <a:tc>
+                  <a:txBody>
+                    <a:bodyPr/>
+                    <a:lstStyle/>
+                    <a:p>
+                      <a:pPr indent="0" marL="0">
+                        <a:buNone/>
+                      </a:pPr>
+                      <a:r>
+                        <a:rPr lang="en-US" sz="1500" dirty="0">
+                          <a:solidFill>
+                            <a:srgbClr val="1F2933"/>
+                          </a:solidFill>
+                          <a:latin typeface="Malgun Gothic" pitchFamily="34" charset="0"/>
+                          <a:ea typeface="Malgun Gothic" pitchFamily="34" charset="-122"/>
+                          <a:cs typeface="Malgun Gothic" pitchFamily="34" charset="-120"/>
+                        </a:rPr>
+                        <a:t>ACK 전에 다음 청크까지 전송 (최대 2청크)</a:t>
+                      </a:r>
+                      <a:endParaRPr lang="en-US" sz="1500" dirty="0">
+                        <a:latin typeface="Malgun Gothic" charset="0"/>
+                        <a:ea typeface="Malgun Gothic" charset="0"/>
+                        <a:cs typeface="Malgun Gothic" charset="0"/>
+                      </a:endParaRPr>
+                    </a:p>
+                  </a:txBody>
+                  <a:tcPr marL="109728" marR="109728" marT="54864" marB="54864" anchor="ctr">
+                    <a:lnL w="9525" cap="flat" cmpd="sng" algn="ctr">
+                      <a:solidFill>
+                        <a:srgbClr val="D5DAE0"/>
+                      </a:solidFill>
+                      <a:prstDash val="solid"/>
+                      <a:round/>
+                      <a:headEnd type="none" w="med" len="med"/>
+                      <a:tailEnd type="none" w="med" len="med"/>
+                    </a:lnL>
+                    <a:lnR w="9525" cap="flat" cmpd="sng" algn="ctr">
+                      <a:solidFill>
+                        <a:srgbClr val="D5DAE0"/>
+                      </a:solidFill>
+                      <a:prstDash val="solid"/>
+                      <a:round/>
+                      <a:headEnd type="none" w="med" len="med"/>
+                      <a:tailEnd type="none" w="med" len="med"/>
+                    </a:lnR>
+                    <a:lnT w="9525" cap="flat" cmpd="sng" algn="ctr">
+                      <a:solidFill>
+                        <a:srgbClr val="D5DAE0"/>
+                      </a:solidFill>
+                      <a:prstDash val="solid"/>
+                      <a:round/>
+                      <a:headEnd type="none" w="med" len="med"/>
+                      <a:tailEnd type="none" w="med" len="med"/>
+                    </a:lnT>
+                    <a:lnB w="9525" cap="flat" cmpd="sng" algn="ctr">
+                      <a:solidFill>
+                        <a:srgbClr val="D5DAE0"/>
+                      </a:solidFill>
+                      <a:prstDash val="solid"/>
+                      <a:round/>
+                      <a:headEnd type="none" w="med" len="med"/>
+                      <a:tailEnd type="none" w="med" len="med"/>
+                    </a:lnB>
+                  </a:tcPr>
+                </a:tc>
+                <a:tc>
+                  <a:txBody>
+                    <a:bodyPr/>
+                    <a:lstStyle/>
+                    <a:p>
+                      <a:pPr indent="0" marL="0">
+                        <a:buNone/>
+                      </a:pPr>
+                      <a:r>
+                        <a:rPr lang="en-US" sz="1500" i="1" dirty="0">
+                          <a:solidFill>
+                            <a:srgbClr val="5F6B7A"/>
+                          </a:solidFill>
+                          <a:latin typeface="Malgun Gothic" pitchFamily="34" charset="0"/>
+                          <a:ea typeface="Malgun Gothic" pitchFamily="34" charset="-122"/>
+                          <a:cs typeface="Malgun Gothic" pitchFamily="34" charset="-120"/>
+                        </a:rPr>
+                        <a:t>[자료 필요: 1청크 방식 대비 전송 시간]</a:t>
+                      </a:r>
+                      <a:endParaRPr lang="en-US" sz="1500" dirty="0">
+                        <a:latin typeface="Malgun Gothic" charset="0"/>
+                        <a:ea typeface="Malgun Gothic" charset="0"/>
+                        <a:cs typeface="Malgun Gothic" charset="0"/>
+                      </a:endParaRPr>
+                    </a:p>
+                  </a:txBody>
+                  <a:tcPr marL="109728" marR="109728" marT="54864" marB="54864" anchor="ctr">
+                    <a:lnL w="9525" cap="flat" cmpd="sng" algn="ctr">
+                      <a:solidFill>
+                        <a:srgbClr val="D5DAE0"/>
+                      </a:solidFill>
+                      <a:prstDash val="solid"/>
+                      <a:round/>
+                      <a:headEnd type="none" w="med" len="med"/>
+                      <a:tailEnd type="none" w="med" len="med"/>
+                    </a:lnL>
+                    <a:lnR w="9525" cap="flat" cmpd="sng" algn="ctr">
+                      <a:solidFill>
+                        <a:srgbClr val="D5DAE0"/>
+                      </a:solidFill>
+                      <a:prstDash val="solid"/>
+                      <a:round/>
+                      <a:headEnd type="none" w="med" len="med"/>
+                      <a:tailEnd type="none" w="med" len="med"/>
+                    </a:lnR>
+                    <a:lnT w="9525" cap="flat" cmpd="sng" algn="ctr">
+                      <a:solidFill>
+                        <a:srgbClr val="D5DAE0"/>
+                      </a:solidFill>
+                      <a:prstDash val="solid"/>
+                      <a:round/>
+                      <a:headEnd type="none" w="med" len="med"/>
+                      <a:tailEnd type="none" w="med" len="med"/>
+                    </a:lnT>
+                    <a:lnB w="9525" cap="flat" cmpd="sng" algn="ctr">
+                      <a:solidFill>
+                        <a:srgbClr val="D5DAE0"/>
+                      </a:solidFill>
+                      <a:prstDash val="solid"/>
+                      <a:round/>
+                      <a:headEnd type="none" w="med" len="med"/>
+                      <a:tailEnd type="none" w="med" len="med"/>
+                    </a:lnB>
+                  </a:tcPr>
+                </a:tc>
+              </a:tr>
+              <a:tr h="640080">
+                <a:tc>
+                  <a:txBody>
+                    <a:bodyPr/>
+                    <a:lstStyle/>
+                    <a:p>
+                      <a:pPr indent="0" marL="0">
+                        <a:buNone/>
+                      </a:pPr>
+                      <a:r>
+                        <a:rPr lang="en-US" sz="1500" dirty="0">
+                          <a:solidFill>
+                            <a:srgbClr val="1F2933"/>
+                          </a:solidFill>
+                          <a:latin typeface="Malgun Gothic" pitchFamily="34" charset="0"/>
+                          <a:ea typeface="Malgun Gothic" pitchFamily="34" charset="-122"/>
+                          <a:cs typeface="Malgun Gothic" pitchFamily="34" charset="-120"/>
+                        </a:rPr>
+                        <a:t>복원 데이터 송신 중 CPU 대기</a:t>
+                      </a:r>
+                      <a:endParaRPr lang="en-US" sz="1500" dirty="0">
+                        <a:latin typeface="Malgun Gothic" charset="0"/>
+                        <a:ea typeface="Malgun Gothic" charset="0"/>
+                        <a:cs typeface="Malgun Gothic" charset="0"/>
+                      </a:endParaRPr>
+                    </a:p>
+                  </a:txBody>
+                  <a:tcPr marL="109728" marR="109728" marT="54864" marB="54864" anchor="ctr">
+                    <a:lnL w="9525" cap="flat" cmpd="sng" algn="ctr">
+                      <a:solidFill>
+                        <a:srgbClr val="D5DAE0"/>
+                      </a:solidFill>
+                      <a:prstDash val="solid"/>
+                      <a:round/>
+                      <a:headEnd type="none" w="med" len="med"/>
+                      <a:tailEnd type="none" w="med" len="med"/>
+                    </a:lnL>
+                    <a:lnR w="9525" cap="flat" cmpd="sng" algn="ctr">
+                      <a:solidFill>
+                        <a:srgbClr val="D5DAE0"/>
+                      </a:solidFill>
+                      <a:prstDash val="solid"/>
+                      <a:round/>
+                      <a:headEnd type="none" w="med" len="med"/>
+                      <a:tailEnd type="none" w="med" len="med"/>
+                    </a:lnR>
+                    <a:lnT w="9525" cap="flat" cmpd="sng" algn="ctr">
+                      <a:solidFill>
+                        <a:srgbClr val="D5DAE0"/>
+                      </a:solidFill>
+                      <a:prstDash val="solid"/>
+                      <a:round/>
+                      <a:headEnd type="none" w="med" len="med"/>
+                      <a:tailEnd type="none" w="med" len="med"/>
+                    </a:lnT>
+                    <a:lnB w="9525" cap="flat" cmpd="sng" algn="ctr">
+                      <a:solidFill>
+                        <a:srgbClr val="D5DAE0"/>
+                      </a:solidFill>
+                      <a:prstDash val="solid"/>
+                      <a:round/>
+                      <a:headEnd type="none" w="med" len="med"/>
+                      <a:tailEnd type="none" w="med" len="med"/>
+                    </a:lnB>
+                  </a:tcPr>
+                </a:tc>
+                <a:tc>
+                  <a:txBody>
+                    <a:bodyPr/>
+                    <a:lstStyle/>
+                    <a:p>
+                      <a:pPr indent="0" marL="0">
+                        <a:buNone/>
+                      </a:pPr>
+                      <a:r>
+                        <a:rPr lang="en-US" sz="1500" dirty="0">
+                          <a:solidFill>
+                            <a:srgbClr val="1F2933"/>
+                          </a:solidFill>
+                          <a:latin typeface="Malgun Gothic" pitchFamily="34" charset="0"/>
+                          <a:ea typeface="Malgun Gothic" pitchFamily="34" charset="-122"/>
+                          <a:cs typeface="Malgun Gothic" pitchFamily="34" charset="-120"/>
+                        </a:rPr>
+                        <a:t>UART TX DMA 이중 버퍼 (4 KiB × 2)</a:t>
+                      </a:r>
+                      <a:endParaRPr lang="en-US" sz="1500" dirty="0">
+                        <a:latin typeface="Malgun Gothic" charset="0"/>
+                        <a:ea typeface="Malgun Gothic" charset="0"/>
+                        <a:cs typeface="Malgun Gothic" charset="0"/>
+                      </a:endParaRPr>
+                    </a:p>
+                  </a:txBody>
+                  <a:tcPr marL="109728" marR="109728" marT="54864" marB="54864" anchor="ctr">
+                    <a:lnL w="9525" cap="flat" cmpd="sng" algn="ctr">
+                      <a:solidFill>
+                        <a:srgbClr val="D5DAE0"/>
+                      </a:solidFill>
+                      <a:prstDash val="solid"/>
+                      <a:round/>
+                      <a:headEnd type="none" w="med" len="med"/>
+                      <a:tailEnd type="none" w="med" len="med"/>
+                    </a:lnL>
+                    <a:lnR w="9525" cap="flat" cmpd="sng" algn="ctr">
+                      <a:solidFill>
+                        <a:srgbClr val="D5DAE0"/>
+                      </a:solidFill>
+                      <a:prstDash val="solid"/>
+                      <a:round/>
+                      <a:headEnd type="none" w="med" len="med"/>
+                      <a:tailEnd type="none" w="med" len="med"/>
+                    </a:lnR>
+                    <a:lnT w="9525" cap="flat" cmpd="sng" algn="ctr">
+                      <a:solidFill>
+                        <a:srgbClr val="D5DAE0"/>
+                      </a:solidFill>
+                      <a:prstDash val="solid"/>
+                      <a:round/>
+                      <a:headEnd type="none" w="med" len="med"/>
+                      <a:tailEnd type="none" w="med" len="med"/>
+                    </a:lnT>
+                    <a:lnB w="9525" cap="flat" cmpd="sng" algn="ctr">
+                      <a:solidFill>
+                        <a:srgbClr val="D5DAE0"/>
+                      </a:solidFill>
+                      <a:prstDash val="solid"/>
+                      <a:round/>
+                      <a:headEnd type="none" w="med" len="med"/>
+                      <a:tailEnd type="none" w="med" len="med"/>
+                    </a:lnB>
+                  </a:tcPr>
+                </a:tc>
+                <a:tc>
+                  <a:txBody>
+                    <a:bodyPr/>
+                    <a:lstStyle/>
+                    <a:p>
+                      <a:pPr indent="0" marL="0">
+                        <a:buNone/>
+                      </a:pPr>
+                      <a:r>
+                        <a:rPr lang="en-US" sz="1500" dirty="0">
+                          <a:solidFill>
+                            <a:srgbClr val="1F2933"/>
+                          </a:solidFill>
+                          <a:latin typeface="Malgun Gothic" pitchFamily="34" charset="0"/>
+                          <a:ea typeface="Malgun Gothic" pitchFamily="34" charset="-122"/>
+                          <a:cs typeface="Malgun Gothic" pitchFamily="34" charset="-120"/>
+                        </a:rPr>
+                        <a:t>읽기 전용 복원 34.6 s, 회선 계산값 34.1 s</a:t>
+                      </a:r>
+                      <a:endParaRPr lang="en-US" sz="1500" dirty="0">
+                        <a:latin typeface="Malgun Gothic" charset="0"/>
+                        <a:ea typeface="Malgun Gothic" charset="0"/>
+                        <a:cs typeface="Malgun Gothic" charset="0"/>
+                      </a:endParaRPr>
+                    </a:p>
+                  </a:txBody>
+                  <a:tcPr marL="109728" marR="109728" marT="54864" marB="54864" anchor="ctr">
+                    <a:lnL w="9525" cap="flat" cmpd="sng" algn="ctr">
+                      <a:solidFill>
+                        <a:srgbClr val="D5DAE0"/>
+                      </a:solidFill>
+                      <a:prstDash val="solid"/>
+                      <a:round/>
+                      <a:headEnd type="none" w="med" len="med"/>
+                      <a:tailEnd type="none" w="med" len="med"/>
+                    </a:lnL>
+                    <a:lnR w="9525" cap="flat" cmpd="sng" algn="ctr">
+                      <a:solidFill>
+                        <a:srgbClr val="D5DAE0"/>
+                      </a:solidFill>
+                      <a:prstDash val="solid"/>
+                      <a:round/>
+                      <a:headEnd type="none" w="med" len="med"/>
+                      <a:tailEnd type="none" w="med" len="med"/>
+                    </a:lnR>
+                    <a:lnT w="9525" cap="flat" cmpd="sng" algn="ctr">
+                      <a:solidFill>
+                        <a:srgbClr val="D5DAE0"/>
+                      </a:solidFill>
+                      <a:prstDash val="solid"/>
+                      <a:round/>
+                      <a:headEnd type="none" w="med" len="med"/>
+                      <a:tailEnd type="none" w="med" len="med"/>
+                    </a:lnT>
+                    <a:lnB w="9525" cap="flat" cmpd="sng" algn="ctr">
+                      <a:solidFill>
+                        <a:srgbClr val="D5DAE0"/>
+                      </a:solidFill>
+                      <a:prstDash val="solid"/>
+                      <a:round/>
+                      <a:headEnd type="none" w="med" len="med"/>
+                      <a:tailEnd type="none" w="med" len="med"/>
+                    </a:lnB>
+                  </a:tcPr>
+                </a:tc>
+              </a:tr>
+              <a:tr h="640080">
+                <a:tc>
+                  <a:txBody>
+                    <a:bodyPr/>
+                    <a:lstStyle/>
+                    <a:p>
+                      <a:pPr indent="0" marL="0">
+                        <a:buNone/>
+                      </a:pPr>
+                      <a:r>
+                        <a:rPr lang="en-US" sz="1500" dirty="0">
+                          <a:solidFill>
+                            <a:srgbClr val="1F2933"/>
+                          </a:solidFill>
+                          <a:latin typeface="Malgun Gothic" pitchFamily="34" charset="0"/>
+                          <a:ea typeface="Malgun Gothic" pitchFamily="34" charset="-122"/>
+                          <a:cs typeface="Malgun Gothic" pitchFamily="34" charset="-120"/>
+                        </a:rPr>
+                        <a:t>저장 전 Flash 백업 읽기</a:t>
+                      </a:r>
+                      <a:endParaRPr lang="en-US" sz="1500" dirty="0">
+                        <a:latin typeface="Malgun Gothic" charset="0"/>
+                        <a:ea typeface="Malgun Gothic" charset="0"/>
+                        <a:cs typeface="Malgun Gothic" charset="0"/>
+                      </a:endParaRPr>
+                    </a:p>
+                  </a:txBody>
+                  <a:tcPr marL="109728" marR="109728" marT="54864" marB="54864" anchor="ctr">
+                    <a:lnL w="9525" cap="flat" cmpd="sng" algn="ctr">
+                      <a:solidFill>
+                        <a:srgbClr val="D5DAE0"/>
+                      </a:solidFill>
+                      <a:prstDash val="solid"/>
+                      <a:round/>
+                      <a:headEnd type="none" w="med" len="med"/>
+                      <a:tailEnd type="none" w="med" len="med"/>
+                    </a:lnL>
+                    <a:lnR w="9525" cap="flat" cmpd="sng" algn="ctr">
+                      <a:solidFill>
+                        <a:srgbClr val="D5DAE0"/>
+                      </a:solidFill>
+                      <a:prstDash val="solid"/>
+                      <a:round/>
+                      <a:headEnd type="none" w="med" len="med"/>
+                      <a:tailEnd type="none" w="med" len="med"/>
+                    </a:lnR>
+                    <a:lnT w="9525" cap="flat" cmpd="sng" algn="ctr">
+                      <a:solidFill>
+                        <a:srgbClr val="D5DAE0"/>
+                      </a:solidFill>
+                      <a:prstDash val="solid"/>
+                      <a:round/>
+                      <a:headEnd type="none" w="med" len="med"/>
+                      <a:tailEnd type="none" w="med" len="med"/>
+                    </a:lnT>
+                    <a:lnB w="9525" cap="flat" cmpd="sng" algn="ctr">
+                      <a:solidFill>
+                        <a:srgbClr val="D5DAE0"/>
+                      </a:solidFill>
+                      <a:prstDash val="solid"/>
+                      <a:round/>
+                      <a:headEnd type="none" w="med" len="med"/>
+                      <a:tailEnd type="none" w="med" len="med"/>
+                    </a:lnB>
+                  </a:tcPr>
+                </a:tc>
+                <a:tc>
+                  <a:txBody>
+                    <a:bodyPr/>
+                    <a:lstStyle/>
+                    <a:p>
+                      <a:pPr indent="0" marL="0">
+                        <a:buNone/>
+                      </a:pPr>
+                      <a:r>
+                        <a:rPr lang="en-US" sz="1500" dirty="0">
+                          <a:solidFill>
+                            <a:srgbClr val="1F2933"/>
+                          </a:solidFill>
+                          <a:latin typeface="Malgun Gothic" pitchFamily="34" charset="0"/>
+                          <a:ea typeface="Malgun Gothic" pitchFamily="34" charset="-122"/>
+                          <a:cs typeface="Malgun Gothic" pitchFamily="34" charset="-120"/>
+                        </a:rPr>
+                        <a:t>백업 단계 제거, 바로 삭제·쓰기</a:t>
+                      </a:r>
+                      <a:endParaRPr lang="en-US" sz="1500" dirty="0">
+                        <a:latin typeface="Malgun Gothic" charset="0"/>
+                        <a:ea typeface="Malgun Gothic" charset="0"/>
+                        <a:cs typeface="Malgun Gothic" charset="0"/>
+                      </a:endParaRPr>
+                    </a:p>
+                  </a:txBody>
+                  <a:tcPr marL="109728" marR="109728" marT="54864" marB="54864" anchor="ctr">
+                    <a:lnL w="9525" cap="flat" cmpd="sng" algn="ctr">
+                      <a:solidFill>
+                        <a:srgbClr val="D5DAE0"/>
+                      </a:solidFill>
+                      <a:prstDash val="solid"/>
+                      <a:round/>
+                      <a:headEnd type="none" w="med" len="med"/>
+                      <a:tailEnd type="none" w="med" len="med"/>
+                    </a:lnL>
+                    <a:lnR w="9525" cap="flat" cmpd="sng" algn="ctr">
+                      <a:solidFill>
+                        <a:srgbClr val="D5DAE0"/>
+                      </a:solidFill>
+                      <a:prstDash val="solid"/>
+                      <a:round/>
+                      <a:headEnd type="none" w="med" len="med"/>
+                      <a:tailEnd type="none" w="med" len="med"/>
+                    </a:lnR>
+                    <a:lnT w="9525" cap="flat" cmpd="sng" algn="ctr">
+                      <a:solidFill>
+                        <a:srgbClr val="D5DAE0"/>
+                      </a:solidFill>
+                      <a:prstDash val="solid"/>
+                      <a:round/>
+                      <a:headEnd type="none" w="med" len="med"/>
+                      <a:tailEnd type="none" w="med" len="med"/>
+                    </a:lnT>
+                    <a:lnB w="9525" cap="flat" cmpd="sng" algn="ctr">
+                      <a:solidFill>
+                        <a:srgbClr val="D5DAE0"/>
+                      </a:solidFill>
+                      <a:prstDash val="solid"/>
+                      <a:round/>
+                      <a:headEnd type="none" w="med" len="med"/>
+                      <a:tailEnd type="none" w="med" len="med"/>
+                    </a:lnB>
+                  </a:tcPr>
+                </a:tc>
+                <a:tc>
+                  <a:txBody>
+                    <a:bodyPr/>
+                    <a:lstStyle/>
+                    <a:p>
+                      <a:pPr indent="0" marL="0">
+                        <a:buNone/>
+                      </a:pPr>
+                      <a:r>
+                        <a:rPr lang="en-US" sz="1500" dirty="0">
+                          <a:solidFill>
+                            <a:srgbClr val="1F2933"/>
+                          </a:solidFill>
+                          <a:latin typeface="Malgun Gothic" pitchFamily="34" charset="0"/>
+                          <a:ea typeface="Malgun Gothic" pitchFamily="34" charset="-122"/>
+                          <a:cs typeface="Malgun Gothic" pitchFamily="34" charset="-120"/>
+                        </a:rPr>
+                        <a:t>Gray 전체 과정 116.96 s → 72.8 s</a:t>
+                      </a:r>
+                      <a:endParaRPr lang="en-US" sz="1500" dirty="0">
+                        <a:latin typeface="Malgun Gothic" charset="0"/>
+                        <a:ea typeface="Malgun Gothic" charset="0"/>
+                        <a:cs typeface="Malgun Gothic" charset="0"/>
+                      </a:endParaRPr>
+                    </a:p>
+                  </a:txBody>
+                  <a:tcPr marL="109728" marR="109728" marT="54864" marB="54864" anchor="ctr">
+                    <a:lnL w="9525" cap="flat" cmpd="sng" algn="ctr">
+                      <a:solidFill>
+                        <a:srgbClr val="D5DAE0"/>
+                      </a:solidFill>
+                      <a:prstDash val="solid"/>
+                      <a:round/>
+                      <a:headEnd type="none" w="med" len="med"/>
+                      <a:tailEnd type="none" w="med" len="med"/>
+                    </a:lnL>
+                    <a:lnR w="9525" cap="flat" cmpd="sng" algn="ctr">
+                      <a:solidFill>
+                        <a:srgbClr val="D5DAE0"/>
+                      </a:solidFill>
+                      <a:prstDash val="solid"/>
+                      <a:round/>
+                      <a:headEnd type="none" w="med" len="med"/>
+                      <a:tailEnd type="none" w="med" len="med"/>
+                    </a:lnR>
+                    <a:lnT w="9525" cap="flat" cmpd="sng" algn="ctr">
+                      <a:solidFill>
+                        <a:srgbClr val="D5DAE0"/>
+                      </a:solidFill>
+                      <a:prstDash val="solid"/>
+                      <a:round/>
+                      <a:headEnd type="none" w="med" len="med"/>
+                      <a:tailEnd type="none" w="med" len="med"/>
+                    </a:lnT>
+                    <a:lnB w="9525" cap="flat" cmpd="sng" algn="ctr">
+                      <a:solidFill>
+                        <a:srgbClr val="D5DAE0"/>
+                      </a:solidFill>
+                      <a:prstDash val="solid"/>
+                      <a:round/>
+                      <a:headEnd type="none" w="med" len="med"/>
+                      <a:tailEnd type="none" w="med" len="med"/>
+                    </a:lnB>
+                  </a:tcPr>
+                </a:tc>
+              </a:tr>
+              <a:tr h="640080">
+                <a:tc>
+                  <a:txBody>
+                    <a:bodyPr/>
+                    <a:lstStyle/>
+                    <a:p>
+                      <a:pPr indent="0" marL="0">
+                        <a:buNone/>
+                      </a:pPr>
+                      <a:r>
+                        <a:rPr lang="en-US" sz="1500" dirty="0">
+                          <a:solidFill>
+                            <a:srgbClr val="1F2933"/>
+                          </a:solidFill>
+                          <a:latin typeface="Malgun Gothic" pitchFamily="34" charset="0"/>
+                          <a:ea typeface="Malgun Gothic" pitchFamily="34" charset="-122"/>
+                          <a:cs typeface="Malgun Gothic" pitchFamily="34" charset="-120"/>
+                        </a:rPr>
+                        <a:t>이미지 3 MiB &gt; SRAM 320 KiB</a:t>
+                      </a:r>
+                      <a:endParaRPr lang="en-US" sz="1500" dirty="0">
+                        <a:latin typeface="Malgun Gothic" charset="0"/>
+                        <a:ea typeface="Malgun Gothic" charset="0"/>
+                        <a:cs typeface="Malgun Gothic" charset="0"/>
+                      </a:endParaRPr>
+                    </a:p>
+                  </a:txBody>
+                  <a:tcPr marL="109728" marR="109728" marT="54864" marB="54864" anchor="ctr">
+                    <a:lnL w="9525" cap="flat" cmpd="sng" algn="ctr">
+                      <a:solidFill>
+                        <a:srgbClr val="D5DAE0"/>
+                      </a:solidFill>
+                      <a:prstDash val="solid"/>
+                      <a:round/>
+                      <a:headEnd type="none" w="med" len="med"/>
+                      <a:tailEnd type="none" w="med" len="med"/>
+                    </a:lnL>
+                    <a:lnR w="9525" cap="flat" cmpd="sng" algn="ctr">
+                      <a:solidFill>
+                        <a:srgbClr val="D5DAE0"/>
+                      </a:solidFill>
+                      <a:prstDash val="solid"/>
+                      <a:round/>
+                      <a:headEnd type="none" w="med" len="med"/>
+                      <a:tailEnd type="none" w="med" len="med"/>
+                    </a:lnR>
+                    <a:lnT w="9525" cap="flat" cmpd="sng" algn="ctr">
+                      <a:solidFill>
+                        <a:srgbClr val="D5DAE0"/>
+                      </a:solidFill>
+                      <a:prstDash val="solid"/>
+                      <a:round/>
+                      <a:headEnd type="none" w="med" len="med"/>
+                      <a:tailEnd type="none" w="med" len="med"/>
+                    </a:lnT>
+                    <a:lnB w="9525" cap="flat" cmpd="sng" algn="ctr">
+                      <a:solidFill>
+                        <a:srgbClr val="D5DAE0"/>
+                      </a:solidFill>
+                      <a:prstDash val="solid"/>
+                      <a:round/>
+                      <a:headEnd type="none" w="med" len="med"/>
+                      <a:tailEnd type="none" w="med" len="med"/>
+                    </a:lnB>
+                  </a:tcPr>
+                </a:tc>
+                <a:tc>
+                  <a:txBody>
+                    <a:bodyPr/>
+                    <a:lstStyle/>
+                    <a:p>
+                      <a:pPr indent="0" marL="0">
+                        <a:buNone/>
+                      </a:pPr>
+                      <a:r>
+                        <a:rPr lang="en-US" sz="1500" dirty="0">
+                          <a:solidFill>
+                            <a:srgbClr val="1F2933"/>
+                          </a:solidFill>
+                          <a:latin typeface="Malgun Gothic" pitchFamily="34" charset="0"/>
+                          <a:ea typeface="Malgun Gothic" pitchFamily="34" charset="-122"/>
+                          <a:cs typeface="Malgun Gothic" pitchFamily="34" charset="-120"/>
+                        </a:rPr>
+                        <a:t>청크 버퍼 재사용, 이미지 전체를 RAM에 두지 않음</a:t>
+                      </a:r>
+                      <a:endParaRPr lang="en-US" sz="1500" dirty="0">
+                        <a:latin typeface="Malgun Gothic" charset="0"/>
+                        <a:ea typeface="Malgun Gothic" charset="0"/>
+                        <a:cs typeface="Malgun Gothic" charset="0"/>
+                      </a:endParaRPr>
+                    </a:p>
+                  </a:txBody>
+                  <a:tcPr marL="109728" marR="109728" marT="54864" marB="54864" anchor="ctr">
+                    <a:lnL w="9525" cap="flat" cmpd="sng" algn="ctr">
+                      <a:solidFill>
+                        <a:srgbClr val="D5DAE0"/>
+                      </a:solidFill>
+                      <a:prstDash val="solid"/>
+                      <a:round/>
+                      <a:headEnd type="none" w="med" len="med"/>
+                      <a:tailEnd type="none" w="med" len="med"/>
+                    </a:lnL>
+                    <a:lnR w="9525" cap="flat" cmpd="sng" algn="ctr">
+                      <a:solidFill>
+                        <a:srgbClr val="D5DAE0"/>
+                      </a:solidFill>
+                      <a:prstDash val="solid"/>
+                      <a:round/>
+                      <a:headEnd type="none" w="med" len="med"/>
+                      <a:tailEnd type="none" w="med" len="med"/>
+                    </a:lnR>
+                    <a:lnT w="9525" cap="flat" cmpd="sng" algn="ctr">
+                      <a:solidFill>
+                        <a:srgbClr val="D5DAE0"/>
+                      </a:solidFill>
+                      <a:prstDash val="solid"/>
+                      <a:round/>
+                      <a:headEnd type="none" w="med" len="med"/>
+                      <a:tailEnd type="none" w="med" len="med"/>
+                    </a:lnT>
+                    <a:lnB w="9525" cap="flat" cmpd="sng" algn="ctr">
+                      <a:solidFill>
+                        <a:srgbClr val="D5DAE0"/>
+                      </a:solidFill>
+                      <a:prstDash val="solid"/>
+                      <a:round/>
+                      <a:headEnd type="none" w="med" len="med"/>
+                      <a:tailEnd type="none" w="med" len="med"/>
+                    </a:lnB>
+                  </a:tcPr>
+                </a:tc>
+                <a:tc>
+                  <a:txBody>
+                    <a:bodyPr/>
+                    <a:lstStyle/>
+                    <a:p>
+                      <a:pPr indent="0" marL="0">
+                        <a:buNone/>
+                      </a:pPr>
+                      <a:r>
+                        <a:rPr lang="en-US" sz="1500" dirty="0">
+                          <a:solidFill>
+                            <a:srgbClr val="1F2933"/>
+                          </a:solidFill>
+                          <a:latin typeface="Malgun Gothic" pitchFamily="34" charset="0"/>
+                          <a:ea typeface="Malgun Gothic" pitchFamily="34" charset="-122"/>
+                          <a:cs typeface="Malgun Gothic" pitchFamily="34" charset="-120"/>
+                        </a:rPr>
+                        <a:t>3,145,782 B 저장·복원 일치</a:t>
+                      </a:r>
+                      <a:endParaRPr lang="en-US" sz="1500" dirty="0">
+                        <a:latin typeface="Malgun Gothic" charset="0"/>
+                        <a:ea typeface="Malgun Gothic" charset="0"/>
+                        <a:cs typeface="Malgun Gothic" charset="0"/>
+                      </a:endParaRPr>
+                    </a:p>
+                  </a:txBody>
+                  <a:tcPr marL="109728" marR="109728" marT="54864" marB="54864" anchor="ctr">
+                    <a:lnL w="9525" cap="flat" cmpd="sng" algn="ctr">
+                      <a:solidFill>
+                        <a:srgbClr val="D5DAE0"/>
+                      </a:solidFill>
+                      <a:prstDash val="solid"/>
+                      <a:round/>
+                      <a:headEnd type="none" w="med" len="med"/>
+                      <a:tailEnd type="none" w="med" len="med"/>
+                    </a:lnL>
+                    <a:lnR w="9525" cap="flat" cmpd="sng" algn="ctr">
+                      <a:solidFill>
+                        <a:srgbClr val="D5DAE0"/>
+                      </a:solidFill>
+                      <a:prstDash val="solid"/>
+                      <a:round/>
+                      <a:headEnd type="none" w="med" len="med"/>
+                      <a:tailEnd type="none" w="med" len="med"/>
+                    </a:lnR>
+                    <a:lnT w="9525" cap="flat" cmpd="sng" algn="ctr">
+                      <a:solidFill>
+                        <a:srgbClr val="D5DAE0"/>
+                      </a:solidFill>
+                      <a:prstDash val="solid"/>
+                      <a:round/>
+                      <a:headEnd type="none" w="med" len="med"/>
+                      <a:tailEnd type="none" w="med" len="med"/>
+                    </a:lnT>
+                    <a:lnB w="9525" cap="flat" cmpd="sng" algn="ctr">
+                      <a:solidFill>
+                        <a:srgbClr val="D5DAE0"/>
+                      </a:solidFill>
+                      <a:prstDash val="solid"/>
+                      <a:round/>
+                      <a:headEnd type="none" w="med" len="med"/>
+                      <a:tailEnd type="none" w="med" len="med"/>
+                    </a:lnB>
+                  </a:tcPr>
+                </a:tc>
+              </a:tr>
+              <a:tr h="640080">
+                <a:tc>
+                  <a:txBody>
+                    <a:bodyPr/>
+                    <a:lstStyle/>
+                    <a:p>
+                      <a:pPr indent="0" marL="0">
+                        <a:buNone/>
+                      </a:pPr>
+                      <a:r>
+                        <a:rPr lang="en-US" sz="1500" dirty="0">
+                          <a:solidFill>
+                            <a:srgbClr val="1F2933"/>
+                          </a:solidFill>
+                          <a:latin typeface="Malgun Gothic" pitchFamily="34" charset="0"/>
+                          <a:ea typeface="Malgun Gothic" pitchFamily="34" charset="-122"/>
+                          <a:cs typeface="Malgun Gothic" pitchFamily="34" charset="-120"/>
+                        </a:rPr>
+                        <a:t>Gray 출력의 UART 전송량</a:t>
+                      </a:r>
+                      <a:endParaRPr lang="en-US" sz="1500" dirty="0">
+                        <a:latin typeface="Malgun Gothic" charset="0"/>
+                        <a:ea typeface="Malgun Gothic" charset="0"/>
+                        <a:cs typeface="Malgun Gothic" charset="0"/>
+                      </a:endParaRPr>
+                    </a:p>
+                  </a:txBody>
+                  <a:tcPr marL="109728" marR="109728" marT="54864" marB="54864" anchor="ctr">
+                    <a:lnL w="9525" cap="flat" cmpd="sng" algn="ctr">
+                      <a:solidFill>
+                        <a:srgbClr val="D5DAE0"/>
+                      </a:solidFill>
+                      <a:prstDash val="solid"/>
+                      <a:round/>
+                      <a:headEnd type="none" w="med" len="med"/>
+                      <a:tailEnd type="none" w="med" len="med"/>
+                    </a:lnL>
+                    <a:lnR w="9525" cap="flat" cmpd="sng" algn="ctr">
+                      <a:solidFill>
+                        <a:srgbClr val="D5DAE0"/>
+                      </a:solidFill>
+                      <a:prstDash val="solid"/>
+                      <a:round/>
+                      <a:headEnd type="none" w="med" len="med"/>
+                      <a:tailEnd type="none" w="med" len="med"/>
+                    </a:lnR>
+                    <a:lnT w="9525" cap="flat" cmpd="sng" algn="ctr">
+                      <a:solidFill>
+                        <a:srgbClr val="D5DAE0"/>
+                      </a:solidFill>
+                      <a:prstDash val="solid"/>
+                      <a:round/>
+                      <a:headEnd type="none" w="med" len="med"/>
+                      <a:tailEnd type="none" w="med" len="med"/>
+                    </a:lnT>
+                    <a:lnB w="9525" cap="flat" cmpd="sng" algn="ctr">
+                      <a:solidFill>
+                        <a:srgbClr val="D5DAE0"/>
+                      </a:solidFill>
+                      <a:prstDash val="solid"/>
+                      <a:round/>
+                      <a:headEnd type="none" w="med" len="med"/>
+                      <a:tailEnd type="none" w="med" len="med"/>
+                    </a:lnB>
+                  </a:tcPr>
+                </a:tc>
+                <a:tc>
+                  <a:txBody>
+                    <a:bodyPr/>
+                    <a:lstStyle/>
+                    <a:p>
+                      <a:pPr indent="0" marL="0">
+                        <a:buNone/>
+                      </a:pPr>
+                      <a:r>
+                        <a:rPr lang="en-US" sz="1500" dirty="0">
+                          <a:solidFill>
+                            <a:srgbClr val="1F2933"/>
+                          </a:solidFill>
+                          <a:latin typeface="Malgun Gothic" pitchFamily="34" charset="0"/>
+                          <a:ea typeface="Malgun Gothic" pitchFamily="34" charset="-122"/>
+                          <a:cs typeface="Malgun Gothic" pitchFamily="34" charset="-120"/>
+                        </a:rPr>
+                        <a:t>출력을 8비트 Gray로 고정</a:t>
+                      </a:r>
+                      <a:endParaRPr lang="en-US" sz="1500" dirty="0">
+                        <a:latin typeface="Malgun Gothic" charset="0"/>
+                        <a:ea typeface="Malgun Gothic" charset="0"/>
+                        <a:cs typeface="Malgun Gothic" charset="0"/>
+                      </a:endParaRPr>
+                    </a:p>
+                  </a:txBody>
+                  <a:tcPr marL="109728" marR="109728" marT="54864" marB="54864" anchor="ctr">
+                    <a:lnL w="9525" cap="flat" cmpd="sng" algn="ctr">
+                      <a:solidFill>
+                        <a:srgbClr val="D5DAE0"/>
+                      </a:solidFill>
+                      <a:prstDash val="solid"/>
+                      <a:round/>
+                      <a:headEnd type="none" w="med" len="med"/>
+                      <a:tailEnd type="none" w="med" len="med"/>
+                    </a:lnL>
+                    <a:lnR w="9525" cap="flat" cmpd="sng" algn="ctr">
+                      <a:solidFill>
+                        <a:srgbClr val="D5DAE0"/>
+                      </a:solidFill>
+                      <a:prstDash val="solid"/>
+                      <a:round/>
+                      <a:headEnd type="none" w="med" len="med"/>
+                      <a:tailEnd type="none" w="med" len="med"/>
+                    </a:lnR>
+                    <a:lnT w="9525" cap="flat" cmpd="sng" algn="ctr">
+                      <a:solidFill>
+                        <a:srgbClr val="D5DAE0"/>
+                      </a:solidFill>
+                      <a:prstDash val="solid"/>
+                      <a:round/>
+                      <a:headEnd type="none" w="med" len="med"/>
+                      <a:tailEnd type="none" w="med" len="med"/>
+                    </a:lnT>
+                    <a:lnB w="9525" cap="flat" cmpd="sng" algn="ctr">
+                      <a:solidFill>
+                        <a:srgbClr val="D5DAE0"/>
+                      </a:solidFill>
+                      <a:prstDash val="solid"/>
+                      <a:round/>
+                      <a:headEnd type="none" w="med" len="med"/>
+                      <a:tailEnd type="none" w="med" len="med"/>
+                    </a:lnB>
+                  </a:tcPr>
+                </a:tc>
+                <a:tc>
+                  <a:txBody>
+                    <a:bodyPr/>
+                    <a:lstStyle/>
+                    <a:p>
+                      <a:pPr indent="0" marL="0">
+                        <a:buNone/>
+                      </a:pPr>
+                      <a:r>
+                        <a:rPr lang="en-US" sz="1500" dirty="0">
+                          <a:solidFill>
+                            <a:srgbClr val="1F2933"/>
+                          </a:solidFill>
+                          <a:latin typeface="Malgun Gothic" pitchFamily="34" charset="0"/>
+                          <a:ea typeface="Malgun Gothic" pitchFamily="34" charset="-122"/>
+                          <a:cs typeface="Malgun Gothic" pitchFamily="34" charset="-120"/>
+                        </a:rPr>
+                        <a:t>전체 시간 23.9% 감소 (다음 장)</a:t>
+                      </a:r>
+                      <a:endParaRPr lang="en-US" sz="1500" dirty="0">
+                        <a:latin typeface="Malgun Gothic" charset="0"/>
+                        <a:ea typeface="Malgun Gothic" charset="0"/>
+                        <a:cs typeface="Malgun Gothic" charset="0"/>
+                      </a:endParaRPr>
+                    </a:p>
+                  </a:txBody>
+                  <a:tcPr marL="109728" marR="109728" marT="54864" marB="54864" anchor="ctr">
+                    <a:lnL w="9525" cap="flat" cmpd="sng" algn="ctr">
+                      <a:solidFill>
+                        <a:srgbClr val="D5DAE0"/>
+                      </a:solidFill>
+                      <a:prstDash val="solid"/>
+                      <a:round/>
+                      <a:headEnd type="none" w="med" len="med"/>
+                      <a:tailEnd type="none" w="med" len="med"/>
+                    </a:lnL>
+                    <a:lnR w="9525" cap="flat" cmpd="sng" algn="ctr">
+                      <a:solidFill>
+                        <a:srgbClr val="D5DAE0"/>
+                      </a:solidFill>
+                      <a:prstDash val="solid"/>
+                      <a:round/>
+                      <a:headEnd type="none" w="med" len="med"/>
+                      <a:tailEnd type="none" w="med" len="med"/>
+                    </a:lnR>
+                    <a:lnT w="9525" cap="flat" cmpd="sng" algn="ctr">
+                      <a:solidFill>
+                        <a:srgbClr val="D5DAE0"/>
+                      </a:solidFill>
+                      <a:prstDash val="solid"/>
+                      <a:round/>
+                      <a:headEnd type="none" w="med" len="med"/>
+                      <a:tailEnd type="none" w="med" len="med"/>
+                    </a:lnT>
+                    <a:lnB w="9525" cap="flat" cmpd="sng" algn="ctr">
+                      <a:solidFill>
+                        <a:srgbClr val="D5DAE0"/>
+                      </a:solidFill>
+                      <a:prstDash val="solid"/>
+                      <a:round/>
+                      <a:headEnd type="none" w="med" len="med"/>
+                      <a:tailEnd type="none" w="med" len="med"/>
+                    </a:lnB>
+                  </a:tcPr>
+                </a:tc>
+              </a:tr>
+            </a:tbl>
+          </a:graphicData>
+        </a:graphic>
+      </p:graphicFrame>
+      <p:sp>
+        <p:nvSpPr>
+          <p:cNvPr id="4" name="Text 1"/>
+          <p:cNvSpPr txBox="1"/>
+          <p:nvPr/>
+        </p:nvSpPr>
+        <p:spPr>
+          <a:xfrm>
+            <a:off x="548640" y="5989320"/>
+            <a:ext cx="11091672" cy="320040"/>
+          </a:xfrm>
+          <a:prstGeom prst="rect">
+            <a:avLst/>
+          </a:prstGeom>
+          <a:noFill/>
+          <a:ln/>
+        </p:spPr>
+        <p:txBody>
+          <a:bodyPr wrap="square" lIns="0" tIns="0" rIns="0" bIns="0" rtlCol="0" anchor="t"/>
+          <a:lstStyle/>
+          <a:p>
+            <a:pPr indent="0" marL="0">
+              <a:buNone/>
+            </a:pPr>
+            <a:r>
+              <a:rPr lang="en-US" sz="1200" dirty="0">
+                <a:solidFill>
+                  <a:srgbClr val="5F6B7A"/>
+                </a:solidFill>
+                <a:latin typeface="Malgun Gothic" pitchFamily="34" charset="0"/>
+                <a:ea typeface="Malgun Gothic" pitchFamily="34" charset="-122"/>
+                <a:cs typeface="Malgun Gothic" pitchFamily="34" charset="-120"/>
+              </a:rPr>
+              <a:t>회선 계산값: 3,145,782 B × 10 bit ÷ 921,600 bps = 34.13 s · 백업 제거 대가: 삭제 범위의 기존 Flash 내용은 덮어씀</a:t>
+            </a:r>
+            <a:endParaRPr lang="en-US" sz="1200" dirty="0"/>
+          </a:p>
+        </p:txBody>
+      </p:sp>
+      <p:sp>
+        <p:nvSpPr>
+          <p:cNvPr id="25" name="Slide Number Placeholder 0"/>
+          <p:cNvSpPr>
+            <a:spLocks noGrp="1"/>
+          </p:cNvSpPr>
+          <p:nvPr>
+            <p:ph type="sldNum" sz="quarter" idx="4294967295"/>
+          </p:nvPr>
+        </p:nvSpPr>
+        <p:spPr>
+          <a:xfrm>
+            <a:off x="11091672" y="6400800"/>
+            <a:ext cx="548640" cy="274320"/>
+          </a:xfrm>
+          <a:prstGeom prst="rect">
+            <a:avLst/>
+          </a:prstGeom>
+          <a:extLst>
+            <a:ext uri="{C572A759-6A51-4108-AA02-DFA0A04FC94B}">
+              <ma14:wrappingTextBoxFlag xmlns:ma14="http://schemas.microsoft.com/office/mac/drawingml/2011/main" val="0"/>
+            </a:ext>
+          </a:extLst>
+        </p:spPr>
+        <p:txBody>
+          <a:bodyPr/>
+          <a:lstStyle>
+            <a:lvl1pPr>
+              <a:defRPr sz="1000">
+                <a:solidFill>
+                  <a:srgbClr val="8A94A3"/>
+                </a:solidFill>
+                <a:latin typeface="Malgun Gothic"/>
+                <a:ea typeface="Malgun Gothic"/>
+                <a:cs typeface="Malgun Gothic"/>
+              </a:defRPr>
+            </a:lvl1pPr>
+          </a:lstStyle>
+          <a:p>
+            <a:pPr algn="r"/>
+            <a:fld id="{F7021451-1387-4CA6-816F-3879F97B5CBC}" type="slidenum">
+              <a:rPr b="0" lang="en-US"/>
+              <a:t>13</a:t>
+            </a:fld>
+            <a:endParaRPr lang="en-US"/>
+          </a:p>
+        </p:txBody>
+      </p:sp>
+    </p:spTree>
+  </p:cSld>
+  <p:clrMapOvr>
+    <a:masterClrMapping/>
+  </p:clrMapOvr>
+</p:sld>
+</file>
+
+<file path=ppt/slides/slide14.xml><?xml version="1.0" encoding="utf-8"?>
+<p:sld xmlns:a="http://schemas.openxmlformats.org/drawingml/2006/main" xmlns:r="http://schemas.openxmlformats.org/officeDocument/2006/relationships" xmlns:p="http://schemas.openxmlformats.org/presentationml/2006/main">
+  <p:cSld name="Slide 14">
+    <p:spTree>
+      <p:nvGrpSpPr>
+        <p:cNvPr id="1" name=""/>
+        <p:cNvGrpSpPr/>
+        <p:nvPr/>
+      </p:nvGrpSpPr>
+      <p:grpSpPr>
+        <a:xfrm>
+          <a:off x="0" y="0"/>
+          <a:ext cx="0" cy="0"/>
+          <a:chOff x="0" y="0"/>
+          <a:chExt cx="0" cy="0"/>
+        </a:xfrm>
+      </p:grpSpPr>
+      <p:sp>
+        <p:nvSpPr>
+          <p:cNvPr id="2" name="Text 0"/>
+          <p:cNvSpPr/>
+          <p:nvPr>
+            <p:ph idx="100" type="title" hasCustomPrompt="1"/>
+          </p:nvPr>
+        </p:nvSpPr>
+        <p:spPr>
+          <a:xfrm>
+            <a:off x="548640" y="320040"/>
+            <a:ext cx="11091672" cy="868680"/>
+          </a:xfrm>
+          <a:prstGeom prst="rect">
+            <a:avLst/>
+          </a:prstGeom>
+          <a:noFill/>
+          <a:ln/>
+        </p:spPr>
+        <p:txBody>
+          <a:bodyPr wrap="square" lIns="0" tIns="0" rIns="0" bIns="0" rtlCol="0" anchor="ctr"/>
+          <a:lstStyle/>
+          <a:p>
+            <a:pPr algn="l" indent="0" marL="0">
+              <a:buNone/>
+            </a:pPr>
+            <a:r>
+              <a:rPr lang="en-US" sz="2600" b="1" dirty="0">
+                <a:solidFill>
+                  <a:srgbClr val="1F2933"/>
+                </a:solidFill>
+                <a:latin typeface="Malgun Gothic" pitchFamily="34" charset="0"/>
+                <a:ea typeface="Malgun Gothic" pitchFamily="34" charset="-122"/>
+                <a:cs typeface="Malgun Gothic" pitchFamily="34" charset="-120"/>
+              </a:rPr>
               <a:t>8비트 Gray 출력으로 전체 시간이 95.60 s에서 72.77 s로 줄었습니다</a:t>
             </a:r>
             <a:endParaRPr lang="en-US" sz="2600" dirty="0"/>
@@ -6760,7 +8693,7 @@
       </p:sp>
       <p:graphicFrame>
         <p:nvGraphicFramePr>
-          <p:cNvPr id="14" name="Table 0"/>
+          <p:cNvPr id="15" name="Table 0"/>
           <p:cNvGraphicFramePr>
             <a:graphicFrameLocks noGrp="1"/>
           </p:cNvGraphicFramePr>
@@ -7108,7 +9041,46 @@
         </p:nvSpPr>
         <p:spPr>
           <a:xfrm>
-            <a:off x="7315200" y="4343400"/>
+            <a:off x="7315200" y="4160520"/>
+            <a:ext cx="4325112" cy="365760"/>
+          </a:xfrm>
+          <a:prstGeom prst="rect">
+            <a:avLst/>
+          </a:prstGeom>
+          <a:noFill/>
+          <a:ln/>
+        </p:spPr>
+        <p:txBody>
+          <a:bodyPr wrap="square" lIns="0" tIns="0" rIns="0" bIns="0" rtlCol="0" anchor="t"/>
+          <a:lstStyle/>
+          <a:p>
+            <a:pPr indent="0" marL="0">
+              <a:buNone/>
+            </a:pPr>
+            <a:r>
+              <a:rPr lang="en-US" sz="1500" b="1" dirty="0">
+                <a:solidFill>
+                  <a:srgbClr val="1F2933"/>
+                </a:solidFill>
+                <a:latin typeface="Malgun Gothic" pitchFamily="34" charset="0"/>
+                <a:ea typeface="Malgun Gothic" pitchFamily="34" charset="-122"/>
+                <a:cs typeface="Malgun Gothic" pitchFamily="34" charset="-120"/>
+              </a:rPr>
+              <a:t>감소분 대부분이 UART 전송량 감소로 설명됩니다.</a:t>
+            </a:r>
+            <a:endParaRPr lang="en-US" sz="1500" dirty="0"/>
+          </a:p>
+        </p:txBody>
+      </p:sp>
+      <p:sp>
+        <p:nvSpPr>
+          <p:cNvPr id="9" name="Text 5"/>
+          <p:cNvSpPr txBox="1"/>
+          <p:nvPr/>
+        </p:nvSpPr>
+        <p:spPr>
+          <a:xfrm>
+            <a:off x="7315200" y="4617720"/>
             <a:ext cx="4325112" cy="548640"/>
           </a:xfrm>
           <a:prstGeom prst="rect">
@@ -7125,7 +9097,7 @@
               <a:buNone/>
             </a:pPr>
             <a:r>
-              <a:rPr lang="en-US" sz="1500" b="1" dirty="0">
+              <a:rPr lang="en-US" sz="1300" dirty="0">
                 <a:solidFill>
                   <a:srgbClr val="1F2933"/>
                 </a:solidFill>
@@ -7133,15 +9105,15 @@
                 <a:ea typeface="Malgun Gothic" pitchFamily="34" charset="-122"/>
                 <a:cs typeface="Malgun Gothic" pitchFamily="34" charset="-120"/>
               </a:rPr>
-              <a:t>감소분 대부분이 UART 전송량 감소로 설명됩니다.</a:t>
-            </a:r>
-            <a:endParaRPr lang="en-US" sz="1500" dirty="0"/>
+              <a:t>10-15 재측정 (8비트, 전체 과정 6회): 72.20–72.78 s, 중앙값 72.58 s</a:t>
+            </a:r>
+            <a:endParaRPr lang="en-US" sz="1300" dirty="0"/>
           </a:p>
         </p:txBody>
       </p:sp>
       <p:sp>
         <p:nvSpPr>
-          <p:cNvPr id="9" name="Text 5"/>
+          <p:cNvPr id="10" name="Text 6"/>
           <p:cNvSpPr txBox="1"/>
           <p:nvPr/>
         </p:nvSpPr>
@@ -7175,7 +9147,7 @@
                 <a:ea typeface="Malgun Gothic" pitchFamily="34" charset="-122"/>
                 <a:cs typeface="Malgun Gothic" pitchFamily="34" charset="-120"/>
               </a:rPr>
-              <a:t>각 1회 측정 · 921600 baud · 입력 전송 시작부터 Gray 마지막 바이트 수신까지 · 백업 준비 44.18 s 제외 · 이전 버전 기록</a:t>
+              <a:t>막대: 2026-10-13 각 1회 측정 · 921600 baud · 입력 전송 시작부터 Gray 마지막 바이트 수신까지 · 당시 백업 준비 44.18 s 제외</a:t>
             </a:r>
             <a:endParaRPr lang="en-US" sz="1200" dirty="0"/>
           </a:p>
@@ -7198,998 +9170,6 @@
               <a:t>출처: pc/results/timings.csv</a:t>
             </a:r>
             <a:endParaRPr lang="en-US" sz="1200" dirty="0"/>
-          </a:p>
-        </p:txBody>
-      </p:sp>
-      <p:sp>
-        <p:nvSpPr>
-          <p:cNvPr id="25" name="Slide Number Placeholder 0"/>
-          <p:cNvSpPr>
-            <a:spLocks noGrp="1"/>
-          </p:cNvSpPr>
-          <p:nvPr>
-            <p:ph type="sldNum" sz="quarter" idx="4294967295"/>
-          </p:nvPr>
-        </p:nvSpPr>
-        <p:spPr>
-          <a:xfrm>
-            <a:off x="11091672" y="6400800"/>
-            <a:ext cx="548640" cy="274320"/>
-          </a:xfrm>
-          <a:prstGeom prst="rect">
-            <a:avLst/>
-          </a:prstGeom>
-          <a:extLst>
-            <a:ext uri="{C572A759-6A51-4108-AA02-DFA0A04FC94B}">
-              <ma14:wrappingTextBoxFlag xmlns:ma14="http://schemas.microsoft.com/office/mac/drawingml/2011/main" val="0"/>
-            </a:ext>
-          </a:extLst>
-        </p:spPr>
-        <p:txBody>
-          <a:bodyPr/>
-          <a:lstStyle>
-            <a:lvl1pPr>
-              <a:defRPr sz="1000">
-                <a:solidFill>
-                  <a:srgbClr val="8A94A3"/>
-                </a:solidFill>
-                <a:latin typeface="Malgun Gothic"/>
-                <a:ea typeface="Malgun Gothic"/>
-                <a:cs typeface="Malgun Gothic"/>
-              </a:defRPr>
-            </a:lvl1pPr>
-          </a:lstStyle>
-          <a:p>
-            <a:pPr algn="r"/>
-            <a:fld id="{F7021451-1387-4CA6-816F-3879F97B5CBC}" type="slidenum">
-              <a:rPr b="0" lang="en-US"/>
-              <a:t>13</a:t>
-            </a:fld>
-            <a:endParaRPr lang="en-US"/>
-          </a:p>
-        </p:txBody>
-      </p:sp>
-    </p:spTree>
-  </p:cSld>
-  <p:clrMapOvr>
-    <a:masterClrMapping/>
-  </p:clrMapOvr>
-</p:sld>
-</file>
-
-<file path=ppt/slides/slide14.xml><?xml version="1.0" encoding="utf-8"?>
-<p:sld xmlns:a="http://schemas.openxmlformats.org/drawingml/2006/main" xmlns:r="http://schemas.openxmlformats.org/officeDocument/2006/relationships" xmlns:p="http://schemas.openxmlformats.org/presentationml/2006/main">
-  <p:cSld name="Slide 14">
-    <p:spTree>
-      <p:nvGrpSpPr>
-        <p:cNvPr id="1" name=""/>
-        <p:cNvGrpSpPr/>
-        <p:nvPr/>
-      </p:nvGrpSpPr>
-      <p:grpSpPr>
-        <a:xfrm>
-          <a:off x="0" y="0"/>
-          <a:ext cx="0" cy="0"/>
-          <a:chOff x="0" y="0"/>
-          <a:chExt cx="0" cy="0"/>
-        </a:xfrm>
-      </p:grpSpPr>
-      <p:sp>
-        <p:nvSpPr>
-          <p:cNvPr id="2" name="Text 0"/>
-          <p:cNvSpPr/>
-          <p:nvPr>
-            <p:ph idx="100" type="title" hasCustomPrompt="1"/>
-          </p:nvPr>
-        </p:nvSpPr>
-        <p:spPr>
-          <a:xfrm>
-            <a:off x="548640" y="320040"/>
-            <a:ext cx="11091672" cy="868680"/>
-          </a:xfrm>
-          <a:prstGeom prst="rect">
-            <a:avLst/>
-          </a:prstGeom>
-          <a:noFill/>
-          <a:ln/>
-        </p:spPr>
-        <p:txBody>
-          <a:bodyPr wrap="square" lIns="0" tIns="0" rIns="0" bIns="0" rtlCol="0" anchor="ctr"/>
-          <a:lstStyle/>
-          <a:p>
-            <a:pPr algn="l" indent="0" marL="0">
-              <a:buNone/>
-            </a:pPr>
-            <a:r>
-              <a:rPr lang="en-US" sz="2600" b="1" dirty="0">
-                <a:solidFill>
-                  <a:srgbClr val="1F2933"/>
-                </a:solidFill>
-                <a:latin typeface="Malgun Gothic" pitchFamily="34" charset="0"/>
-                <a:ea typeface="Malgun Gothic" pitchFamily="34" charset="-122"/>
-                <a:cs typeface="Malgun Gothic" pitchFamily="34" charset="-120"/>
-              </a:rPr>
-              <a:t>현장 Demo 순서</a:t>
-            </a:r>
-            <a:endParaRPr lang="en-US" sz="2600" dirty="0"/>
-          </a:p>
-        </p:txBody>
-      </p:sp>
-      <p:sp>
-        <p:nvSpPr>
-          <p:cNvPr id="3" name="Shape 1"/>
-          <p:cNvSpPr/>
-          <p:nvPr/>
-        </p:nvSpPr>
-        <p:spPr>
-          <a:xfrm>
-            <a:off x="548640" y="1600200"/>
-            <a:ext cx="411480" cy="411480"/>
-          </a:xfrm>
-          <a:prstGeom prst="ellipse">
-            <a:avLst/>
-          </a:prstGeom>
-          <a:solidFill>
-            <a:srgbClr val="0F766E"/>
-          </a:solidFill>
-          <a:ln w="19050">
-            <a:solidFill>
-              <a:srgbClr val="0F766E"/>
-            </a:solidFill>
-            <a:prstDash val="solid"/>
-          </a:ln>
-        </p:spPr>
-      </p:sp>
-      <p:sp>
-        <p:nvSpPr>
-          <p:cNvPr id="4" name="Text 2"/>
-          <p:cNvSpPr txBox="1"/>
-          <p:nvPr/>
-        </p:nvSpPr>
-        <p:spPr>
-          <a:xfrm>
-            <a:off x="548640" y="1600200"/>
-            <a:ext cx="411480" cy="411480"/>
-          </a:xfrm>
-          <a:prstGeom prst="rect">
-            <a:avLst/>
-          </a:prstGeom>
-          <a:noFill/>
-          <a:ln/>
-        </p:spPr>
-        <p:txBody>
-          <a:bodyPr wrap="square" lIns="0" tIns="0" rIns="0" bIns="0" rtlCol="0" anchor="ctr"/>
-          <a:lstStyle/>
-          <a:p>
-            <a:pPr algn="ctr" indent="0" marL="0">
-              <a:buNone/>
-            </a:pPr>
-            <a:r>
-              <a:rPr lang="en-US" sz="1500" b="1" dirty="0">
-                <a:solidFill>
-                  <a:srgbClr val="FFFFFF"/>
-                </a:solidFill>
-                <a:latin typeface="Malgun Gothic" pitchFamily="34" charset="0"/>
-                <a:ea typeface="Malgun Gothic" pitchFamily="34" charset="-122"/>
-                <a:cs typeface="Malgun Gothic" pitchFamily="34" charset="-120"/>
-              </a:rPr>
-              <a:t>1</a:t>
-            </a:r>
-            <a:endParaRPr lang="en-US" sz="1500" dirty="0"/>
-          </a:p>
-        </p:txBody>
-      </p:sp>
-      <p:sp>
-        <p:nvSpPr>
-          <p:cNvPr id="5" name="Text 3"/>
-          <p:cNvSpPr txBox="1"/>
-          <p:nvPr/>
-        </p:nvSpPr>
-        <p:spPr>
-          <a:xfrm>
-            <a:off x="1188720" y="1600200"/>
-            <a:ext cx="5394960" cy="411480"/>
-          </a:xfrm>
-          <a:prstGeom prst="rect">
-            <a:avLst/>
-          </a:prstGeom>
-          <a:noFill/>
-          <a:ln/>
-        </p:spPr>
-        <p:txBody>
-          <a:bodyPr wrap="square" lIns="0" tIns="0" rIns="0" bIns="0" rtlCol="0" anchor="ctr"/>
-          <a:lstStyle/>
-          <a:p>
-            <a:pPr indent="0" marL="0">
-              <a:buNone/>
-            </a:pPr>
-            <a:r>
-              <a:rPr lang="en-US" sz="1800" dirty="0">
-                <a:solidFill>
-                  <a:srgbClr val="1F2933"/>
-                </a:solidFill>
-                <a:latin typeface="Malgun Gothic" pitchFamily="34" charset="0"/>
-                <a:ea typeface="Malgun Gothic" pitchFamily="34" charset="-122"/>
-                <a:cs typeface="Malgun Gothic" pitchFamily="34" charset="-120"/>
-              </a:rPr>
-              <a:t>원본 BMP를 열어 크기와 이미지 확인</a:t>
-            </a:r>
-            <a:endParaRPr lang="en-US" sz="1800" dirty="0"/>
-          </a:p>
-        </p:txBody>
-      </p:sp>
-      <p:sp>
-        <p:nvSpPr>
-          <p:cNvPr id="6" name="Shape 4"/>
-          <p:cNvSpPr/>
-          <p:nvPr/>
-        </p:nvSpPr>
-        <p:spPr>
-          <a:xfrm>
-            <a:off x="548640" y="2350008"/>
-            <a:ext cx="411480" cy="411480"/>
-          </a:xfrm>
-          <a:prstGeom prst="ellipse">
-            <a:avLst/>
-          </a:prstGeom>
-          <a:solidFill>
-            <a:srgbClr val="0F766E"/>
-          </a:solidFill>
-          <a:ln w="19050">
-            <a:solidFill>
-              <a:srgbClr val="0F766E"/>
-            </a:solidFill>
-            <a:prstDash val="solid"/>
-          </a:ln>
-        </p:spPr>
-      </p:sp>
-      <p:sp>
-        <p:nvSpPr>
-          <p:cNvPr id="7" name="Text 5"/>
-          <p:cNvSpPr txBox="1"/>
-          <p:nvPr/>
-        </p:nvSpPr>
-        <p:spPr>
-          <a:xfrm>
-            <a:off x="548640" y="2350008"/>
-            <a:ext cx="411480" cy="411480"/>
-          </a:xfrm>
-          <a:prstGeom prst="rect">
-            <a:avLst/>
-          </a:prstGeom>
-          <a:noFill/>
-          <a:ln/>
-        </p:spPr>
-        <p:txBody>
-          <a:bodyPr wrap="square" lIns="0" tIns="0" rIns="0" bIns="0" rtlCol="0" anchor="ctr"/>
-          <a:lstStyle/>
-          <a:p>
-            <a:pPr algn="ctr" indent="0" marL="0">
-              <a:buNone/>
-            </a:pPr>
-            <a:r>
-              <a:rPr lang="en-US" sz="1500" b="1" dirty="0">
-                <a:solidFill>
-                  <a:srgbClr val="FFFFFF"/>
-                </a:solidFill>
-                <a:latin typeface="Malgun Gothic" pitchFamily="34" charset="0"/>
-                <a:ea typeface="Malgun Gothic" pitchFamily="34" charset="-122"/>
-                <a:cs typeface="Malgun Gothic" pitchFamily="34" charset="-120"/>
-              </a:rPr>
-              <a:t>2</a:t>
-            </a:r>
-            <a:endParaRPr lang="en-US" sz="1500" dirty="0"/>
-          </a:p>
-        </p:txBody>
-      </p:sp>
-      <p:sp>
-        <p:nvSpPr>
-          <p:cNvPr id="8" name="Text 6"/>
-          <p:cNvSpPr txBox="1"/>
-          <p:nvPr/>
-        </p:nvSpPr>
-        <p:spPr>
-          <a:xfrm>
-            <a:off x="1188720" y="2350008"/>
-            <a:ext cx="5394960" cy="411480"/>
-          </a:xfrm>
-          <a:prstGeom prst="rect">
-            <a:avLst/>
-          </a:prstGeom>
-          <a:noFill/>
-          <a:ln/>
-        </p:spPr>
-        <p:txBody>
-          <a:bodyPr wrap="square" lIns="0" tIns="0" rIns="0" bIns="0" rtlCol="0" anchor="ctr"/>
-          <a:lstStyle/>
-          <a:p>
-            <a:pPr indent="0" marL="0">
-              <a:buNone/>
-            </a:pPr>
-            <a:r>
-              <a:rPr lang="en-US" sz="1800" dirty="0">
-                <a:solidFill>
-                  <a:srgbClr val="1F2933"/>
-                </a:solidFill>
-                <a:latin typeface="Malgun Gothic" pitchFamily="34" charset="0"/>
-                <a:ea typeface="Malgun Gothic" pitchFamily="34" charset="-122"/>
-                <a:cs typeface="Malgun Gothic" pitchFamily="34" charset="-120"/>
-              </a:rPr>
-              <a:t>Serial Monitor 종료, 새 펌웨어 실행</a:t>
-            </a:r>
-            <a:endParaRPr lang="en-US" sz="1800" dirty="0"/>
-          </a:p>
-        </p:txBody>
-      </p:sp>
-      <p:sp>
-        <p:nvSpPr>
-          <p:cNvPr id="9" name="Shape 7"/>
-          <p:cNvSpPr/>
-          <p:nvPr/>
-        </p:nvSpPr>
-        <p:spPr>
-          <a:xfrm>
-            <a:off x="548640" y="3099816"/>
-            <a:ext cx="411480" cy="411480"/>
-          </a:xfrm>
-          <a:prstGeom prst="ellipse">
-            <a:avLst/>
-          </a:prstGeom>
-          <a:solidFill>
-            <a:srgbClr val="0F766E"/>
-          </a:solidFill>
-          <a:ln w="19050">
-            <a:solidFill>
-              <a:srgbClr val="0F766E"/>
-            </a:solidFill>
-            <a:prstDash val="solid"/>
-          </a:ln>
-        </p:spPr>
-      </p:sp>
-      <p:sp>
-        <p:nvSpPr>
-          <p:cNvPr id="10" name="Text 8"/>
-          <p:cNvSpPr txBox="1"/>
-          <p:nvPr/>
-        </p:nvSpPr>
-        <p:spPr>
-          <a:xfrm>
-            <a:off x="548640" y="3099816"/>
-            <a:ext cx="411480" cy="411480"/>
-          </a:xfrm>
-          <a:prstGeom prst="rect">
-            <a:avLst/>
-          </a:prstGeom>
-          <a:noFill/>
-          <a:ln/>
-        </p:spPr>
-        <p:txBody>
-          <a:bodyPr wrap="square" lIns="0" tIns="0" rIns="0" bIns="0" rtlCol="0" anchor="ctr"/>
-          <a:lstStyle/>
-          <a:p>
-            <a:pPr algn="ctr" indent="0" marL="0">
-              <a:buNone/>
-            </a:pPr>
-            <a:r>
-              <a:rPr lang="en-US" sz="1500" b="1" dirty="0">
-                <a:solidFill>
-                  <a:srgbClr val="FFFFFF"/>
-                </a:solidFill>
-                <a:latin typeface="Malgun Gothic" pitchFamily="34" charset="0"/>
-                <a:ea typeface="Malgun Gothic" pitchFamily="34" charset="-122"/>
-                <a:cs typeface="Malgun Gothic" pitchFamily="34" charset="-120"/>
-              </a:rPr>
-              <a:t>3</a:t>
-            </a:r>
-            <a:endParaRPr lang="en-US" sz="1500" dirty="0"/>
-          </a:p>
-        </p:txBody>
-      </p:sp>
-      <p:sp>
-        <p:nvSpPr>
-          <p:cNvPr id="11" name="Text 9"/>
-          <p:cNvSpPr txBox="1"/>
-          <p:nvPr/>
-        </p:nvSpPr>
-        <p:spPr>
-          <a:xfrm>
-            <a:off x="1188720" y="3099816"/>
-            <a:ext cx="5394960" cy="411480"/>
-          </a:xfrm>
-          <a:prstGeom prst="rect">
-            <a:avLst/>
-          </a:prstGeom>
-          <a:noFill/>
-          <a:ln/>
-        </p:spPr>
-        <p:txBody>
-          <a:bodyPr wrap="square" lIns="0" tIns="0" rIns="0" bIns="0" rtlCol="0" anchor="ctr"/>
-          <a:lstStyle/>
-          <a:p>
-            <a:pPr indent="0" marL="0">
-              <a:buNone/>
-            </a:pPr>
-            <a:r>
-              <a:rPr lang="en-US" sz="1800" dirty="0">
-                <a:solidFill>
-                  <a:srgbClr val="1F2933"/>
-                </a:solidFill>
-                <a:latin typeface="Malgun Gothic" pitchFamily="34" charset="0"/>
-                <a:ea typeface="Malgun Gothic" pitchFamily="34" charset="-122"/>
-                <a:cs typeface="Malgun Gothic" pitchFamily="34" charset="-120"/>
-              </a:rPr>
-              <a:t>Demo 프로그램 실행 — 백업·저장 진행률 표시</a:t>
-            </a:r>
-            <a:endParaRPr lang="en-US" sz="1800" dirty="0"/>
-          </a:p>
-        </p:txBody>
-      </p:sp>
-      <p:sp>
-        <p:nvSpPr>
-          <p:cNvPr id="12" name="Shape 10"/>
-          <p:cNvSpPr/>
-          <p:nvPr/>
-        </p:nvSpPr>
-        <p:spPr>
-          <a:xfrm>
-            <a:off x="548640" y="3849624"/>
-            <a:ext cx="411480" cy="411480"/>
-          </a:xfrm>
-          <a:prstGeom prst="ellipse">
-            <a:avLst/>
-          </a:prstGeom>
-          <a:solidFill>
-            <a:srgbClr val="0F766E"/>
-          </a:solidFill>
-          <a:ln w="19050">
-            <a:solidFill>
-              <a:srgbClr val="0F766E"/>
-            </a:solidFill>
-            <a:prstDash val="solid"/>
-          </a:ln>
-        </p:spPr>
-      </p:sp>
-      <p:sp>
-        <p:nvSpPr>
-          <p:cNvPr id="13" name="Text 11"/>
-          <p:cNvSpPr txBox="1"/>
-          <p:nvPr/>
-        </p:nvSpPr>
-        <p:spPr>
-          <a:xfrm>
-            <a:off x="548640" y="3849624"/>
-            <a:ext cx="411480" cy="411480"/>
-          </a:xfrm>
-          <a:prstGeom prst="rect">
-            <a:avLst/>
-          </a:prstGeom>
-          <a:noFill/>
-          <a:ln/>
-        </p:spPr>
-        <p:txBody>
-          <a:bodyPr wrap="square" lIns="0" tIns="0" rIns="0" bIns="0" rtlCol="0" anchor="ctr"/>
-          <a:lstStyle/>
-          <a:p>
-            <a:pPr algn="ctr" indent="0" marL="0">
-              <a:buNone/>
-            </a:pPr>
-            <a:r>
-              <a:rPr lang="en-US" sz="1500" b="1" dirty="0">
-                <a:solidFill>
-                  <a:srgbClr val="FFFFFF"/>
-                </a:solidFill>
-                <a:latin typeface="Malgun Gothic" pitchFamily="34" charset="0"/>
-                <a:ea typeface="Malgun Gothic" pitchFamily="34" charset="-122"/>
-                <a:cs typeface="Malgun Gothic" pitchFamily="34" charset="-120"/>
-              </a:rPr>
-              <a:t>4</a:t>
-            </a:r>
-            <a:endParaRPr lang="en-US" sz="1500" dirty="0"/>
-          </a:p>
-        </p:txBody>
-      </p:sp>
-      <p:sp>
-        <p:nvSpPr>
-          <p:cNvPr id="14" name="Text 12"/>
-          <p:cNvSpPr txBox="1"/>
-          <p:nvPr/>
-        </p:nvSpPr>
-        <p:spPr>
-          <a:xfrm>
-            <a:off x="1188720" y="3849624"/>
-            <a:ext cx="5394960" cy="411480"/>
-          </a:xfrm>
-          <a:prstGeom prst="rect">
-            <a:avLst/>
-          </a:prstGeom>
-          <a:noFill/>
-          <a:ln/>
-        </p:spPr>
-        <p:txBody>
-          <a:bodyPr wrap="square" lIns="0" tIns="0" rIns="0" bIns="0" rtlCol="0" anchor="ctr"/>
-          <a:lstStyle/>
-          <a:p>
-            <a:pPr indent="0" marL="0">
-              <a:buNone/>
-            </a:pPr>
-            <a:r>
-              <a:rPr lang="en-US" sz="1800" dirty="0">
-                <a:solidFill>
-                  <a:srgbClr val="1F2933"/>
-                </a:solidFill>
-                <a:latin typeface="Malgun Gothic" pitchFamily="34" charset="0"/>
-                <a:ea typeface="Malgun Gothic" pitchFamily="34" charset="-122"/>
-                <a:cs typeface="Malgun Gothic" pitchFamily="34" charset="-120"/>
-              </a:rPr>
-              <a:t>PASS, CRC32, SHA-256 확인</a:t>
-            </a:r>
-            <a:endParaRPr lang="en-US" sz="1800" dirty="0"/>
-          </a:p>
-        </p:txBody>
-      </p:sp>
-      <p:sp>
-        <p:nvSpPr>
-          <p:cNvPr id="15" name="Shape 13"/>
-          <p:cNvSpPr/>
-          <p:nvPr/>
-        </p:nvSpPr>
-        <p:spPr>
-          <a:xfrm>
-            <a:off x="548640" y="4599432"/>
-            <a:ext cx="411480" cy="411480"/>
-          </a:xfrm>
-          <a:prstGeom prst="ellipse">
-            <a:avLst/>
-          </a:prstGeom>
-          <a:solidFill>
-            <a:srgbClr val="0F766E"/>
-          </a:solidFill>
-          <a:ln w="19050">
-            <a:solidFill>
-              <a:srgbClr val="0F766E"/>
-            </a:solidFill>
-            <a:prstDash val="solid"/>
-          </a:ln>
-        </p:spPr>
-      </p:sp>
-      <p:sp>
-        <p:nvSpPr>
-          <p:cNvPr id="16" name="Text 14"/>
-          <p:cNvSpPr txBox="1"/>
-          <p:nvPr/>
-        </p:nvSpPr>
-        <p:spPr>
-          <a:xfrm>
-            <a:off x="548640" y="4599432"/>
-            <a:ext cx="411480" cy="411480"/>
-          </a:xfrm>
-          <a:prstGeom prst="rect">
-            <a:avLst/>
-          </a:prstGeom>
-          <a:noFill/>
-          <a:ln/>
-        </p:spPr>
-        <p:txBody>
-          <a:bodyPr wrap="square" lIns="0" tIns="0" rIns="0" bIns="0" rtlCol="0" anchor="ctr"/>
-          <a:lstStyle/>
-          <a:p>
-            <a:pPr algn="ctr" indent="0" marL="0">
-              <a:buNone/>
-            </a:pPr>
-            <a:r>
-              <a:rPr lang="en-US" sz="1500" b="1" dirty="0">
-                <a:solidFill>
-                  <a:srgbClr val="FFFFFF"/>
-                </a:solidFill>
-                <a:latin typeface="Malgun Gothic" pitchFamily="34" charset="0"/>
-                <a:ea typeface="Malgun Gothic" pitchFamily="34" charset="-122"/>
-                <a:cs typeface="Malgun Gothic" pitchFamily="34" charset="-120"/>
-              </a:rPr>
-              <a:t>5</a:t>
-            </a:r>
-            <a:endParaRPr lang="en-US" sz="1500" dirty="0"/>
-          </a:p>
-        </p:txBody>
-      </p:sp>
-      <p:sp>
-        <p:nvSpPr>
-          <p:cNvPr id="17" name="Text 15"/>
-          <p:cNvSpPr txBox="1"/>
-          <p:nvPr/>
-        </p:nvSpPr>
-        <p:spPr>
-          <a:xfrm>
-            <a:off x="1188720" y="4599432"/>
-            <a:ext cx="5394960" cy="411480"/>
-          </a:xfrm>
-          <a:prstGeom prst="rect">
-            <a:avLst/>
-          </a:prstGeom>
-          <a:noFill/>
-          <a:ln/>
-        </p:spPr>
-        <p:txBody>
-          <a:bodyPr wrap="square" lIns="0" tIns="0" rIns="0" bIns="0" rtlCol="0" anchor="ctr"/>
-          <a:lstStyle/>
-          <a:p>
-            <a:pPr indent="0" marL="0">
-              <a:buNone/>
-            </a:pPr>
-            <a:r>
-              <a:rPr lang="en-US" sz="1800" dirty="0">
-                <a:solidFill>
-                  <a:srgbClr val="1F2933"/>
-                </a:solidFill>
-                <a:latin typeface="Malgun Gothic" pitchFamily="34" charset="0"/>
-                <a:ea typeface="Malgun Gothic" pitchFamily="34" charset="-122"/>
-                <a:cs typeface="Malgun Gothic" pitchFamily="34" charset="-120"/>
-              </a:rPr>
-              <a:t>복원 BMP를 열어 원본과 비교</a:t>
-            </a:r>
-            <a:endParaRPr lang="en-US" sz="1800" dirty="0"/>
-          </a:p>
-        </p:txBody>
-      </p:sp>
-      <p:sp>
-        <p:nvSpPr>
-          <p:cNvPr id="18" name="Shape 16"/>
-          <p:cNvSpPr/>
-          <p:nvPr/>
-        </p:nvSpPr>
-        <p:spPr>
-          <a:xfrm>
-            <a:off x="548640" y="5349240"/>
-            <a:ext cx="411480" cy="411480"/>
-          </a:xfrm>
-          <a:prstGeom prst="ellipse">
-            <a:avLst/>
-          </a:prstGeom>
-          <a:solidFill>
-            <a:srgbClr val="FFFFFF"/>
-          </a:solidFill>
-          <a:ln w="19050">
-            <a:solidFill>
-              <a:srgbClr val="0F766E"/>
-            </a:solidFill>
-            <a:prstDash val="solid"/>
-          </a:ln>
-        </p:spPr>
-      </p:sp>
-      <p:sp>
-        <p:nvSpPr>
-          <p:cNvPr id="19" name="Text 17"/>
-          <p:cNvSpPr txBox="1"/>
-          <p:nvPr/>
-        </p:nvSpPr>
-        <p:spPr>
-          <a:xfrm>
-            <a:off x="548640" y="5349240"/>
-            <a:ext cx="411480" cy="411480"/>
-          </a:xfrm>
-          <a:prstGeom prst="rect">
-            <a:avLst/>
-          </a:prstGeom>
-          <a:noFill/>
-          <a:ln/>
-        </p:spPr>
-        <p:txBody>
-          <a:bodyPr wrap="square" lIns="0" tIns="0" rIns="0" bIns="0" rtlCol="0" anchor="ctr"/>
-          <a:lstStyle/>
-          <a:p>
-            <a:pPr algn="ctr" indent="0" marL="0">
-              <a:buNone/>
-            </a:pPr>
-            <a:r>
-              <a:rPr lang="en-US" sz="1500" b="1" dirty="0">
-                <a:solidFill>
-                  <a:srgbClr val="0F766E"/>
-                </a:solidFill>
-                <a:latin typeface="Malgun Gothic" pitchFamily="34" charset="0"/>
-                <a:ea typeface="Malgun Gothic" pitchFamily="34" charset="-122"/>
-                <a:cs typeface="Malgun Gothic" pitchFamily="34" charset="-120"/>
-              </a:rPr>
-              <a:t>6</a:t>
-            </a:r>
-            <a:endParaRPr lang="en-US" sz="1500" dirty="0"/>
-          </a:p>
-        </p:txBody>
-      </p:sp>
-      <p:sp>
-        <p:nvSpPr>
-          <p:cNvPr id="20" name="Text 18"/>
-          <p:cNvSpPr txBox="1"/>
-          <p:nvPr/>
-        </p:nvSpPr>
-        <p:spPr>
-          <a:xfrm>
-            <a:off x="1188720" y="5349240"/>
-            <a:ext cx="5394960" cy="411480"/>
-          </a:xfrm>
-          <a:prstGeom prst="rect">
-            <a:avLst/>
-          </a:prstGeom>
-          <a:noFill/>
-          <a:ln/>
-        </p:spPr>
-        <p:txBody>
-          <a:bodyPr wrap="square" lIns="0" tIns="0" rIns="0" bIns="0" rtlCol="0" anchor="ctr"/>
-          <a:lstStyle/>
-          <a:p>
-            <a:pPr indent="0" marL="0">
-              <a:buNone/>
-            </a:pPr>
-            <a:r>
-              <a:rPr lang="en-US" sz="1800" dirty="0">
-                <a:solidFill>
-                  <a:srgbClr val="1F2933"/>
-                </a:solidFill>
-                <a:latin typeface="Malgun Gothic" pitchFamily="34" charset="0"/>
-                <a:ea typeface="Malgun Gothic" pitchFamily="34" charset="-122"/>
-                <a:cs typeface="Malgun Gothic" pitchFamily="34" charset="-120"/>
-              </a:rPr>
-              <a:t>MCU RESET 후 --read-only로 다시 실행</a:t>
-            </a:r>
-            <a:endParaRPr lang="en-US" sz="1800" dirty="0"/>
-          </a:p>
-        </p:txBody>
-      </p:sp>
-      <p:sp>
-        <p:nvSpPr>
-          <p:cNvPr id="21" name="Shape 19"/>
-          <p:cNvSpPr/>
-          <p:nvPr/>
-        </p:nvSpPr>
-        <p:spPr>
-          <a:xfrm>
-            <a:off x="6858000" y="1600200"/>
-            <a:ext cx="4782312" cy="4114800"/>
-          </a:xfrm>
-          <a:prstGeom prst="rect">
-            <a:avLst/>
-          </a:prstGeom>
-          <a:solidFill>
-            <a:srgbClr val="1F2933"/>
-          </a:solidFill>
-          <a:ln w="12700">
-            <a:solidFill>
-              <a:srgbClr val="1F2933"/>
-            </a:solidFill>
-            <a:prstDash val="solid"/>
-          </a:ln>
-        </p:spPr>
-      </p:sp>
-      <p:sp>
-        <p:nvSpPr>
-          <p:cNvPr id="22" name="Text 20"/>
-          <p:cNvSpPr txBox="1"/>
-          <p:nvPr/>
-        </p:nvSpPr>
-        <p:spPr>
-          <a:xfrm>
-            <a:off x="7132320" y="1737360"/>
-            <a:ext cx="4297680" cy="274320"/>
-          </a:xfrm>
-          <a:prstGeom prst="rect">
-            <a:avLst/>
-          </a:prstGeom>
-          <a:noFill/>
-          <a:ln/>
-        </p:spPr>
-        <p:txBody>
-          <a:bodyPr wrap="square" lIns="0" tIns="0" rIns="0" bIns="0" rtlCol="0" anchor="t"/>
-          <a:lstStyle/>
-          <a:p>
-            <a:pPr indent="0" marL="0">
-              <a:buNone/>
-            </a:pPr>
-            <a:r>
-              <a:rPr lang="en-US" sz="1300" dirty="0">
-                <a:solidFill>
-                  <a:srgbClr val="B7C2CE"/>
-                </a:solidFill>
-                <a:latin typeface="Malgun Gothic" pitchFamily="34" charset="0"/>
-                <a:ea typeface="Malgun Gothic" pitchFamily="34" charset="-122"/>
-                <a:cs typeface="Malgun Gothic" pitchFamily="34" charset="-120"/>
-              </a:rPr>
-              <a:t>저장·복원·비교</a:t>
-            </a:r>
-            <a:endParaRPr lang="en-US" sz="1300" dirty="0"/>
-          </a:p>
-        </p:txBody>
-      </p:sp>
-      <p:sp>
-        <p:nvSpPr>
-          <p:cNvPr id="23" name="Text 21"/>
-          <p:cNvSpPr txBox="1"/>
-          <p:nvPr/>
-        </p:nvSpPr>
-        <p:spPr>
-          <a:xfrm>
-            <a:off x="7132320" y="2057400"/>
-            <a:ext cx="4389120" cy="365760"/>
-          </a:xfrm>
-          <a:prstGeom prst="rect">
-            <a:avLst/>
-          </a:prstGeom>
-          <a:noFill/>
-          <a:ln/>
-        </p:spPr>
-        <p:txBody>
-          <a:bodyPr wrap="square" lIns="0" tIns="0" rIns="0" bIns="0" rtlCol="0" anchor="t"/>
-          <a:lstStyle/>
-          <a:p>
-            <a:pPr indent="0" marL="0">
-              <a:buNone/>
-            </a:pPr>
-            <a:r>
-              <a:rPr lang="en-US" sz="1500" dirty="0">
-                <a:solidFill>
-                  <a:srgbClr val="FFFFFF"/>
-                </a:solidFill>
-                <a:latin typeface="Consolas" pitchFamily="34" charset="0"/>
-                <a:ea typeface="Consolas" pitchFamily="34" charset="-122"/>
-                <a:cs typeface="Consolas" pitchFamily="34" charset="-120"/>
-              </a:rPr>
-              <a:t>$ python3 pc/demo_roundtrip.py</a:t>
-            </a:r>
-            <a:endParaRPr lang="en-US" sz="1500" dirty="0"/>
-          </a:p>
-        </p:txBody>
-      </p:sp>
-      <p:sp>
-        <p:nvSpPr>
-          <p:cNvPr id="24" name="Text 22"/>
-          <p:cNvSpPr txBox="1"/>
-          <p:nvPr/>
-        </p:nvSpPr>
-        <p:spPr>
-          <a:xfrm>
-            <a:off x="7132320" y="2743200"/>
-            <a:ext cx="4297680" cy="274320"/>
-          </a:xfrm>
-          <a:prstGeom prst="rect">
-            <a:avLst/>
-          </a:prstGeom>
-          <a:noFill/>
-          <a:ln/>
-        </p:spPr>
-        <p:txBody>
-          <a:bodyPr wrap="square" lIns="0" tIns="0" rIns="0" bIns="0" rtlCol="0" anchor="t"/>
-          <a:lstStyle/>
-          <a:p>
-            <a:pPr indent="0" marL="0">
-              <a:buNone/>
-            </a:pPr>
-            <a:r>
-              <a:rPr lang="en-US" sz="1300" dirty="0">
-                <a:solidFill>
-                  <a:srgbClr val="B7C2CE"/>
-                </a:solidFill>
-                <a:latin typeface="Malgun Gothic" pitchFamily="34" charset="0"/>
-                <a:ea typeface="Malgun Gothic" pitchFamily="34" charset="-122"/>
-                <a:cs typeface="Malgun Gothic" pitchFamily="34" charset="-120"/>
-              </a:rPr>
-              <a:t>RESET 후 읽기 전용 확인</a:t>
-            </a:r>
-            <a:endParaRPr lang="en-US" sz="1300" dirty="0"/>
-          </a:p>
-        </p:txBody>
-      </p:sp>
-      <p:sp>
-        <p:nvSpPr>
-          <p:cNvPr id="25" name="Text 23"/>
-          <p:cNvSpPr txBox="1"/>
-          <p:nvPr/>
-        </p:nvSpPr>
-        <p:spPr>
-          <a:xfrm>
-            <a:off x="7132320" y="3063240"/>
-            <a:ext cx="4389120" cy="640080"/>
-          </a:xfrm>
-          <a:prstGeom prst="rect">
-            <a:avLst/>
-          </a:prstGeom>
-          <a:noFill/>
-          <a:ln/>
-        </p:spPr>
-        <p:txBody>
-          <a:bodyPr wrap="square" lIns="0" tIns="0" rIns="0" bIns="0" rtlCol="0" anchor="t"/>
-          <a:lstStyle/>
-          <a:p>
-            <a:pPr indent="0" marL="0">
-              <a:buNone/>
-            </a:pPr>
-            <a:r>
-              <a:rPr lang="en-US" sz="1500" dirty="0">
-                <a:solidFill>
-                  <a:srgbClr val="FFFFFF"/>
-                </a:solidFill>
-                <a:latin typeface="Consolas" pitchFamily="34" charset="0"/>
-                <a:ea typeface="Consolas" pitchFamily="34" charset="-122"/>
-                <a:cs typeface="Consolas" pitchFamily="34" charset="-120"/>
-              </a:rPr>
-              <a:t>$ python3 pc/demo_roundtrip.py</a:t>
-            </a:r>
-            <a:endParaRPr lang="en-US" sz="1500" dirty="0"/>
-          </a:p>
-          <a:p>
-            <a:pPr indent="0" marL="0">
-              <a:buNone/>
-            </a:pPr>
-            <a:r>
-              <a:rPr lang="en-US" sz="1500" dirty="0">
-                <a:solidFill>
-                  <a:srgbClr val="FFFFFF"/>
-                </a:solidFill>
-                <a:latin typeface="Consolas" pitchFamily="34" charset="0"/>
-                <a:ea typeface="Consolas" pitchFamily="34" charset="-122"/>
-                <a:cs typeface="Consolas" pitchFamily="34" charset="-120"/>
-              </a:rPr>
-              <a:t>    --read-only</a:t>
-            </a:r>
-            <a:endParaRPr lang="en-US" sz="1500" dirty="0"/>
-          </a:p>
-        </p:txBody>
-      </p:sp>
-      <p:sp>
-        <p:nvSpPr>
-          <p:cNvPr id="26" name="Text 24"/>
-          <p:cNvSpPr txBox="1"/>
-          <p:nvPr/>
-        </p:nvSpPr>
-        <p:spPr>
-          <a:xfrm>
-            <a:off x="7132320" y="4069080"/>
-            <a:ext cx="4297680" cy="731520"/>
-          </a:xfrm>
-          <a:prstGeom prst="rect">
-            <a:avLst/>
-          </a:prstGeom>
-          <a:noFill/>
-          <a:ln/>
-        </p:spPr>
-        <p:txBody>
-          <a:bodyPr wrap="square" lIns="0" tIns="0" rIns="0" bIns="0" rtlCol="0" anchor="t"/>
-          <a:lstStyle/>
-          <a:p>
-            <a:pPr indent="0" marL="0">
-              <a:lnSpc>
-                <a:spcPct val="120000"/>
-              </a:lnSpc>
-              <a:buNone/>
-            </a:pPr>
-            <a:r>
-              <a:rPr lang="en-US" sz="1300" dirty="0">
-                <a:solidFill>
-                  <a:srgbClr val="B7C2CE"/>
-                </a:solidFill>
-                <a:latin typeface="Malgun Gothic" pitchFamily="34" charset="0"/>
-                <a:ea typeface="Malgun Gothic" pitchFamily="34" charset="-122"/>
-                <a:cs typeface="Malgun Gothic" pitchFamily="34" charset="-120"/>
-              </a:rPr>
-              <a:t>결과는 JSON 보고서로 저장</a:t>
-            </a:r>
-            <a:endParaRPr lang="en-US" sz="1300" dirty="0"/>
-          </a:p>
-          <a:p>
-            <a:pPr indent="0" marL="0">
-              <a:lnSpc>
-                <a:spcPct val="120000"/>
-              </a:lnSpc>
-              <a:buNone/>
-            </a:pPr>
-            <a:r>
-              <a:rPr lang="en-US" sz="1300" dirty="0">
-                <a:solidFill>
-                  <a:srgbClr val="B7C2CE"/>
-                </a:solidFill>
-                <a:latin typeface="Malgun Gothic" pitchFamily="34" charset="0"/>
-                <a:ea typeface="Malgun Gothic" pitchFamily="34" charset="-122"/>
-                <a:cs typeface="Malgun Gothic" pitchFamily="34" charset="-120"/>
-              </a:rPr>
-              <a:t>칩 ID, 크기, CRC32, SHA-256, 바이트 비교</a:t>
-            </a:r>
-            <a:endParaRPr lang="en-US" sz="1300" dirty="0"/>
           </a:p>
         </p:txBody>
       </p:sp>
@@ -8301,7 +9281,7 @@
                 <a:ea typeface="Malgun Gothic" pitchFamily="34" charset="-122"/>
                 <a:cs typeface="Malgun Gothic" pitchFamily="34" charset="-120"/>
               </a:rPr>
-              <a:t>발표 전까지 남은 확인 항목</a:t>
+              <a:t>현장 Demo: run_all.sh 한 번으로 9단계를 차례로 실행합니다</a:t>
             </a:r>
             <a:endParaRPr lang="en-US" sz="2600" dirty="0"/>
           </a:p>
@@ -8322,19 +9302,19 @@
           </p:nvPr>
         </p:nvGraphicFramePr>
         <p:xfrm>
-          <a:off x="548640" y="1463040"/>
-          <a:ext cx="11091672" cy="914400"/>
+          <a:off x="548640" y="1417320"/>
+          <a:ext cx="6949440" cy="914400"/>
         </p:xfrm>
         <a:graphic>
           <a:graphicData uri="http://schemas.openxmlformats.org/drawingml/2006/table">
             <a:tbl>
               <a:tblPr/>
               <a:tblGrid>
-                <a:gridCol w="2651760"/>
-                <a:gridCol w="4206240"/>
-                <a:gridCol w="4233672"/>
+                <a:gridCol w="685800"/>
+                <a:gridCol w="3429000"/>
+                <a:gridCol w="2834640"/>
               </a:tblGrid>
-              <a:tr h="731520">
+              <a:tr h="429768">
                 <a:tc>
                   <a:txBody>
                     <a:bodyPr/>
@@ -8344,7 +9324,7 @@
                         <a:buNone/>
                       </a:pPr>
                       <a:r>
-                        <a:rPr lang="en-US" sz="1600" b="1" dirty="0">
+                        <a:rPr lang="en-US" sz="1400" b="1" dirty="0">
                           <a:solidFill>
                             <a:srgbClr val="1F2933"/>
                           </a:solidFill>
@@ -8352,9 +9332,9 @@
                           <a:ea typeface="Malgun Gothic" pitchFamily="34" charset="-122"/>
                           <a:cs typeface="Malgun Gothic" pitchFamily="34" charset="-120"/>
                         </a:rPr>
-                        <a:t>항목</a:t>
+                        <a:t>단계</a:t>
                       </a:r>
-                      <a:endParaRPr lang="en-US" sz="1600" dirty="0">
+                      <a:endParaRPr lang="en-US" sz="1400" dirty="0">
                         <a:latin typeface="Malgun Gothic" charset="0"/>
                         <a:ea typeface="Malgun Gothic" charset="0"/>
                         <a:cs typeface="Malgun Gothic" charset="0"/>
@@ -8412,7 +9392,7 @@
                         <a:buNone/>
                       </a:pPr>
                       <a:r>
-                        <a:rPr lang="en-US" sz="1600" b="1" dirty="0">
+                        <a:rPr lang="en-US" sz="1400" b="1" dirty="0">
                           <a:solidFill>
                             <a:srgbClr val="1F2933"/>
                           </a:solidFill>
@@ -8420,9 +9400,9 @@
                           <a:ea typeface="Malgun Gothic" pitchFamily="34" charset="-122"/>
                           <a:cs typeface="Malgun Gothic" pitchFamily="34" charset="-120"/>
                         </a:rPr>
-                        <a:t>현재 상태</a:t>
+                        <a:t>내용</a:t>
                       </a:r>
-                      <a:endParaRPr lang="en-US" sz="1600" dirty="0">
+                      <a:endParaRPr lang="en-US" sz="1400" dirty="0">
                         <a:latin typeface="Malgun Gothic" charset="0"/>
                         <a:ea typeface="Malgun Gothic" charset="0"/>
                         <a:cs typeface="Malgun Gothic" charset="0"/>
@@ -8480,7 +9460,7 @@
                         <a:buNone/>
                       </a:pPr>
                       <a:r>
-                        <a:rPr lang="en-US" sz="1600" b="1" dirty="0">
+                        <a:rPr lang="en-US" sz="1400" b="1" dirty="0">
                           <a:solidFill>
                             <a:srgbClr val="1F2933"/>
                           </a:solidFill>
@@ -8488,9 +9468,9 @@
                           <a:ea typeface="Malgun Gothic" pitchFamily="34" charset="-122"/>
                           <a:cs typeface="Malgun Gothic" pitchFamily="34" charset="-120"/>
                         </a:rPr>
-                        <a:t>할 일</a:t>
+                        <a:t>10-15 결과</a:t>
                       </a:r>
-                      <a:endParaRPr lang="en-US" sz="1600" dirty="0">
+                      <a:endParaRPr lang="en-US" sz="1400" dirty="0">
                         <a:latin typeface="Malgun Gothic" charset="0"/>
                         <a:ea typeface="Malgun Gothic" charset="0"/>
                         <a:cs typeface="Malgun Gothic" charset="0"/>
@@ -8540,7 +9520,7 @@
                   </a:tcPr>
                 </a:tc>
               </a:tr>
-              <a:tr h="731520">
+              <a:tr h="429768">
                 <a:tc>
                   <a:txBody>
                     <a:bodyPr/>
@@ -8550,7 +9530,7 @@
                         <a:buNone/>
                       </a:pPr>
                       <a:r>
-                        <a:rPr lang="en-US" sz="1600" dirty="0">
+                        <a:rPr lang="en-US" sz="1400" dirty="0">
                           <a:solidFill>
                             <a:srgbClr val="1F2933"/>
                           </a:solidFill>
@@ -8558,9 +9538,9 @@
                           <a:ea typeface="Malgun Gothic" pitchFamily="34" charset="-122"/>
                           <a:cs typeface="Malgun Gothic" pitchFamily="34" charset="-120"/>
                         </a:rPr>
-                        <a:t>최신 펌웨어 실물 Demo</a:t>
+                        <a:t>1</a:t>
                       </a:r>
-                      <a:endParaRPr lang="en-US" sz="1600" dirty="0">
+                      <a:endParaRPr lang="en-US" sz="1400" dirty="0">
                         <a:latin typeface="Malgun Gothic" charset="0"/>
                         <a:ea typeface="Malgun Gothic" charset="0"/>
                         <a:cs typeface="Malgun Gothic" charset="0"/>
@@ -8615,7 +9595,7 @@
                         <a:buNone/>
                       </a:pPr>
                       <a:r>
-                        <a:rPr lang="en-US" sz="1600" dirty="0">
+                        <a:rPr lang="en-US" sz="1400" dirty="0">
                           <a:solidFill>
                             <a:srgbClr val="1F2933"/>
                           </a:solidFill>
@@ -8623,9 +9603,9 @@
                           <a:ea typeface="Malgun Gothic" pitchFamily="34" charset="-122"/>
                           <a:cs typeface="Malgun Gothic" pitchFamily="34" charset="-120"/>
                         </a:rPr>
-                        <a:t>TX DMA·8비트 Gray 고정 펌웨어, 빌드와 프로그램 검사 통과</a:t>
+                        <a:t>PC 단위 테스트</a:t>
                       </a:r>
-                      <a:endParaRPr lang="en-US" sz="1600" dirty="0">
+                      <a:endParaRPr lang="en-US" sz="1400" dirty="0">
                         <a:latin typeface="Malgun Gothic" charset="0"/>
                         <a:ea typeface="Malgun Gothic" charset="0"/>
                         <a:cs typeface="Malgun Gothic" charset="0"/>
@@ -8680,7 +9660,7 @@
                         <a:buNone/>
                       </a:pPr>
                       <a:r>
-                        <a:rPr lang="en-US" sz="1600" dirty="0">
+                        <a:rPr lang="en-US" sz="1400" dirty="0">
                           <a:solidFill>
                             <a:srgbClr val="1F2933"/>
                           </a:solidFill>
@@ -8688,9 +9668,9 @@
                           <a:ea typeface="Malgun Gothic" pitchFamily="34" charset="-122"/>
                           <a:cs typeface="Malgun Gothic" pitchFamily="34" charset="-120"/>
                         </a:rPr>
-                        <a:t>발표 전 실물 Demo 재실행, 새 JSON 보고서 저장</a:t>
+                        <a:t>18개 PASS</a:t>
                       </a:r>
-                      <a:endParaRPr lang="en-US" sz="1600" dirty="0">
+                      <a:endParaRPr lang="en-US" sz="1400" dirty="0">
                         <a:latin typeface="Malgun Gothic" charset="0"/>
                         <a:ea typeface="Malgun Gothic" charset="0"/>
                         <a:cs typeface="Malgun Gothic" charset="0"/>
@@ -8737,7 +9717,7 @@
                   </a:tcPr>
                 </a:tc>
               </a:tr>
-              <a:tr h="731520">
+              <a:tr h="429768">
                 <a:tc>
                   <a:txBody>
                     <a:bodyPr/>
@@ -8747,7 +9727,7 @@
                         <a:buNone/>
                       </a:pPr>
                       <a:r>
-                        <a:rPr lang="en-US" sz="1600" dirty="0">
+                        <a:rPr lang="en-US" sz="1400" dirty="0">
                           <a:solidFill>
                             <a:srgbClr val="1F2933"/>
                           </a:solidFill>
@@ -8755,9 +9735,9 @@
                           <a:ea typeface="Malgun Gothic" pitchFamily="34" charset="-122"/>
                           <a:cs typeface="Malgun Gothic" pitchFamily="34" charset="-120"/>
                         </a:rPr>
-                        <a:t>RESET 후 저장 유지</a:t>
+                        <a:t>2</a:t>
                       </a:r>
-                      <a:endParaRPr lang="en-US" sz="1600" dirty="0">
+                      <a:endParaRPr lang="en-US" sz="1400" dirty="0">
                         <a:latin typeface="Malgun Gothic" charset="0"/>
                         <a:ea typeface="Malgun Gothic" charset="0"/>
                         <a:cs typeface="Malgun Gothic" charset="0"/>
@@ -8812,7 +9792,7 @@
                         <a:buNone/>
                       </a:pPr>
                       <a:r>
-                        <a:rPr lang="en-US" sz="1600" dirty="0">
+                        <a:rPr lang="en-US" sz="1400" dirty="0">
                           <a:solidFill>
                             <a:srgbClr val="1F2933"/>
                           </a:solidFill>
@@ -8820,9 +9800,9 @@
                           <a:ea typeface="Malgun Gothic" pitchFamily="34" charset="-122"/>
                           <a:cs typeface="Malgun Gothic" pitchFamily="34" charset="-120"/>
                         </a:rPr>
-                        <a:t>--read-only 모드 준비</a:t>
+                        <a:t>C 모의 테스트 (DMA RX·TX, Gray)</a:t>
                       </a:r>
-                      <a:endParaRPr lang="en-US" sz="1600" dirty="0">
+                      <a:endParaRPr lang="en-US" sz="1400" dirty="0">
                         <a:latin typeface="Malgun Gothic" charset="0"/>
                         <a:ea typeface="Malgun Gothic" charset="0"/>
                         <a:cs typeface="Malgun Gothic" charset="0"/>
@@ -8877,7 +9857,7 @@
                         <a:buNone/>
                       </a:pPr>
                       <a:r>
-                        <a:rPr lang="en-US" sz="1600" dirty="0">
+                        <a:rPr lang="en-US" sz="1400" dirty="0">
                           <a:solidFill>
                             <a:srgbClr val="1F2933"/>
                           </a:solidFill>
@@ -8885,9 +9865,9 @@
                           <a:ea typeface="Malgun Gothic" pitchFamily="34" charset="-122"/>
                           <a:cs typeface="Malgun Gothic" pitchFamily="34" charset="-120"/>
                         </a:rPr>
-                        <a:t>현장에서 RESET 후 재읽기 결과 제시</a:t>
+                        <a:t>3개 PASS</a:t>
                       </a:r>
-                      <a:endParaRPr lang="en-US" sz="1600" dirty="0">
+                      <a:endParaRPr lang="en-US" sz="1400" dirty="0">
                         <a:latin typeface="Malgun Gothic" charset="0"/>
                         <a:ea typeface="Malgun Gothic" charset="0"/>
                         <a:cs typeface="Malgun Gothic" charset="0"/>
@@ -8934,7 +9914,7 @@
                   </a:tcPr>
                 </a:tc>
               </a:tr>
-              <a:tr h="731520">
+              <a:tr h="429768">
                 <a:tc>
                   <a:txBody>
                     <a:bodyPr/>
@@ -8944,7 +9924,7 @@
                         <a:buNone/>
                       </a:pPr>
                       <a:r>
-                        <a:rPr lang="en-US" sz="1600" dirty="0">
+                        <a:rPr lang="en-US" sz="1400" dirty="0">
                           <a:solidFill>
                             <a:srgbClr val="1F2933"/>
                           </a:solidFill>
@@ -8952,9 +9932,9 @@
                           <a:ea typeface="Malgun Gothic" pitchFamily="34" charset="-122"/>
                           <a:cs typeface="Malgun Gothic" pitchFamily="34" charset="-120"/>
                         </a:rPr>
-                        <a:t>W25Q32 조건</a:t>
+                        <a:t>3</a:t>
                       </a:r>
-                      <a:endParaRPr lang="en-US" sz="1600" dirty="0">
+                      <a:endParaRPr lang="en-US" sz="1400" dirty="0">
                         <a:latin typeface="Malgun Gothic" charset="0"/>
                         <a:ea typeface="Malgun Gothic" charset="0"/>
                         <a:cs typeface="Malgun Gothic" charset="0"/>
@@ -9009,7 +9989,7 @@
                         <a:buNone/>
                       </a:pPr>
                       <a:r>
-                        <a:rPr lang="en-US" sz="1600" dirty="0">
+                        <a:rPr lang="en-US" sz="1400" dirty="0">
                           <a:solidFill>
                             <a:srgbClr val="1F2933"/>
                           </a:solidFill>
@@ -9017,9 +9997,9 @@
                           <a:ea typeface="Malgun Gothic" pitchFamily="34" charset="-122"/>
                           <a:cs typeface="Malgun Gothic" pitchFamily="34" charset="-120"/>
                         </a:rPr>
-                        <a:t>W25Q128로 실물 시험, 이미지 영역은 첫 4 MiB</a:t>
+                        <a:t>펌웨어 빌드</a:t>
                       </a:r>
-                      <a:endParaRPr lang="en-US" sz="1600" dirty="0">
+                      <a:endParaRPr lang="en-US" sz="1400" dirty="0">
                         <a:latin typeface="Malgun Gothic" charset="0"/>
                         <a:ea typeface="Malgun Gothic" charset="0"/>
                         <a:cs typeface="Malgun Gothic" charset="0"/>
@@ -9074,7 +10054,7 @@
                         <a:buNone/>
                       </a:pPr>
                       <a:r>
-                        <a:rPr lang="en-US" sz="1600" dirty="0">
+                        <a:rPr lang="en-US" sz="1400" dirty="0">
                           <a:solidFill>
                             <a:srgbClr val="1F2933"/>
                           </a:solidFill>
@@ -9082,9 +10062,9 @@
                           <a:ea typeface="Malgun Gothic" pitchFamily="34" charset="-122"/>
                           <a:cs typeface="Malgun Gothic" pitchFamily="34" charset="-120"/>
                         </a:rPr>
-                        <a:t>대체 허용 확인, 불가 시 외부 W25Q32로 실물 시험</a:t>
+                        <a:t>경고 0, FLASH 38,164 B</a:t>
                       </a:r>
-                      <a:endParaRPr lang="en-US" sz="1600" dirty="0">
+                      <a:endParaRPr lang="en-US" sz="1400" dirty="0">
                         <a:latin typeface="Malgun Gothic" charset="0"/>
                         <a:ea typeface="Malgun Gothic" charset="0"/>
                         <a:cs typeface="Malgun Gothic" charset="0"/>
@@ -9131,7 +10111,7 @@
                   </a:tcPr>
                 </a:tc>
               </a:tr>
-              <a:tr h="731520">
+              <a:tr h="429768">
                 <a:tc>
                   <a:txBody>
                     <a:bodyPr/>
@@ -9141,7 +10121,7 @@
                         <a:buNone/>
                       </a:pPr>
                       <a:r>
-                        <a:rPr lang="en-US" sz="1600" dirty="0">
+                        <a:rPr lang="en-US" sz="1400" dirty="0">
                           <a:solidFill>
                             <a:srgbClr val="1F2933"/>
                           </a:solidFill>
@@ -9149,9 +10129,9 @@
                           <a:ea typeface="Malgun Gothic" pitchFamily="34" charset="-122"/>
                           <a:cs typeface="Malgun Gothic" pitchFamily="34" charset="-120"/>
                         </a:rPr>
-                        <a:t>Gray 출력 시간</a:t>
+                        <a:t>4</a:t>
                       </a:r>
-                      <a:endParaRPr lang="en-US" sz="1600" dirty="0">
+                      <a:endParaRPr lang="en-US" sz="1400" dirty="0">
                         <a:latin typeface="Malgun Gothic" charset="0"/>
                         <a:ea typeface="Malgun Gothic" charset="0"/>
                         <a:cs typeface="Malgun Gothic" charset="0"/>
@@ -9206,7 +10186,7 @@
                         <a:buNone/>
                       </a:pPr>
                       <a:r>
-                        <a:rPr lang="en-US" sz="1600" dirty="0">
+                        <a:rPr lang="en-US" sz="1400" dirty="0">
                           <a:solidFill>
                             <a:srgbClr val="1F2933"/>
                           </a:solidFill>
@@ -9214,9 +10194,9 @@
                           <a:ea typeface="Malgun Gothic" pitchFamily="34" charset="-122"/>
                           <a:cs typeface="Malgun Gothic" pitchFamily="34" charset="-120"/>
                         </a:rPr>
-                        <a:t>이전 버전 1회 측정</a:t>
+                        <a:t>보드에 다운로드</a:t>
                       </a:r>
-                      <a:endParaRPr lang="en-US" sz="1600" dirty="0">
+                      <a:endParaRPr lang="en-US" sz="1400" dirty="0">
                         <a:latin typeface="Malgun Gothic" charset="0"/>
                         <a:ea typeface="Malgun Gothic" charset="0"/>
                         <a:cs typeface="Malgun Gothic" charset="0"/>
@@ -9271,17 +10251,17 @@
                         <a:buNone/>
                       </a:pPr>
                       <a:r>
-                        <a:rPr lang="en-US" sz="1600" i="1" dirty="0">
+                        <a:rPr lang="en-US" sz="1400" dirty="0">
                           <a:solidFill>
-                            <a:srgbClr val="5F6B7A"/>
+                            <a:srgbClr val="1F2933"/>
                           </a:solidFill>
                           <a:latin typeface="Malgun Gothic" pitchFamily="34" charset="0"/>
                           <a:ea typeface="Malgun Gothic" pitchFamily="34" charset="-122"/>
                           <a:cs typeface="Malgun Gothic" pitchFamily="34" charset="-120"/>
                         </a:rPr>
-                        <a:t>[자료 필요: 새 버전 반복 측정]</a:t>
+                        <a:t>Download verified</a:t>
                       </a:r>
-                      <a:endParaRPr lang="en-US" sz="1600" dirty="0">
+                      <a:endParaRPr lang="en-US" sz="1400" dirty="0">
                         <a:latin typeface="Malgun Gothic" charset="0"/>
                         <a:ea typeface="Malgun Gothic" charset="0"/>
                         <a:cs typeface="Malgun Gothic" charset="0"/>
@@ -9328,7 +10308,7 @@
                   </a:tcPr>
                 </a:tc>
               </a:tr>
-              <a:tr h="731520">
+              <a:tr h="429768">
                 <a:tc>
                   <a:txBody>
                     <a:bodyPr/>
@@ -9338,7 +10318,7 @@
                         <a:buNone/>
                       </a:pPr>
                       <a:r>
-                        <a:rPr lang="en-US" sz="1600" dirty="0">
+                        <a:rPr lang="en-US" sz="1400" dirty="0">
                           <a:solidFill>
                             <a:srgbClr val="1F2933"/>
                           </a:solidFill>
@@ -9346,9 +10326,9 @@
                           <a:ea typeface="Malgun Gothic" pitchFamily="34" charset="-122"/>
                           <a:cs typeface="Malgun Gothic" pitchFamily="34" charset="-120"/>
                         </a:rPr>
-                        <a:t>2청크 전송 효과</a:t>
+                        <a:t>5</a:t>
                       </a:r>
-                      <a:endParaRPr lang="en-US" sz="1600" dirty="0">
+                      <a:endParaRPr lang="en-US" sz="1400" dirty="0">
                         <a:latin typeface="Malgun Gothic" charset="0"/>
                         <a:ea typeface="Malgun Gothic" charset="0"/>
                         <a:cs typeface="Malgun Gothic" charset="0"/>
@@ -9403,7 +10383,7 @@
                         <a:buNone/>
                       </a:pPr>
                       <a:r>
-                        <a:rPr lang="en-US" sz="1600" dirty="0">
+                        <a:rPr lang="en-US" sz="1400" dirty="0">
                           <a:solidFill>
                             <a:srgbClr val="1F2933"/>
                           </a:solidFill>
@@ -9411,9 +10391,9 @@
                           <a:ea typeface="Malgun Gothic" pitchFamily="34" charset="-122"/>
                           <a:cs typeface="Malgun Gothic" pitchFamily="34" charset="-120"/>
                         </a:rPr>
-                        <a:t>구현 완료, 비교 측정 없음</a:t>
+                        <a:t>원본 BMP 저장 → 복원</a:t>
                       </a:r>
-                      <a:endParaRPr lang="en-US" sz="1600" dirty="0">
+                      <a:endParaRPr lang="en-US" sz="1400" dirty="0">
                         <a:latin typeface="Malgun Gothic" charset="0"/>
                         <a:ea typeface="Malgun Gothic" charset="0"/>
                         <a:cs typeface="Malgun Gothic" charset="0"/>
@@ -9468,17 +10448,17 @@
                         <a:buNone/>
                       </a:pPr>
                       <a:r>
-                        <a:rPr lang="en-US" sz="1600" i="1" dirty="0">
+                        <a:rPr lang="en-US" sz="1400" dirty="0">
                           <a:solidFill>
-                            <a:srgbClr val="5F6B7A"/>
+                            <a:srgbClr val="1F2933"/>
                           </a:solidFill>
                           <a:latin typeface="Malgun Gothic" pitchFamily="34" charset="0"/>
                           <a:ea typeface="Malgun Gothic" pitchFamily="34" charset="-122"/>
                           <a:cs typeface="Malgun Gothic" pitchFamily="34" charset="-120"/>
                         </a:rPr>
-                        <a:t>[자료 필요: 1청크 방식 대비 시간]</a:t>
+                        <a:t>전체 일치, 86.4 s</a:t>
                       </a:r>
-                      <a:endParaRPr lang="en-US" sz="1600" dirty="0">
+                      <a:endParaRPr lang="en-US" sz="1400" dirty="0">
                         <a:latin typeface="Malgun Gothic" charset="0"/>
                         <a:ea typeface="Malgun Gothic" charset="0"/>
                         <a:cs typeface="Malgun Gothic" charset="0"/>
@@ -9525,10 +10505,1050 @@
                   </a:tcPr>
                 </a:tc>
               </a:tr>
+              <a:tr h="429768">
+                <a:tc>
+                  <a:txBody>
+                    <a:bodyPr/>
+                    <a:lstStyle/>
+                    <a:p>
+                      <a:pPr indent="0" marL="0">
+                        <a:buNone/>
+                      </a:pPr>
+                      <a:r>
+                        <a:rPr lang="en-US" sz="1400" dirty="0">
+                          <a:solidFill>
+                            <a:srgbClr val="1F2933"/>
+                          </a:solidFill>
+                          <a:latin typeface="Malgun Gothic" pitchFamily="34" charset="0"/>
+                          <a:ea typeface="Malgun Gothic" pitchFamily="34" charset="-122"/>
+                          <a:cs typeface="Malgun Gothic" pitchFamily="34" charset="-120"/>
+                        </a:rPr>
+                        <a:t>6</a:t>
+                      </a:r>
+                      <a:endParaRPr lang="en-US" sz="1400" dirty="0">
+                        <a:latin typeface="Malgun Gothic" charset="0"/>
+                        <a:ea typeface="Malgun Gothic" charset="0"/>
+                        <a:cs typeface="Malgun Gothic" charset="0"/>
+                      </a:endParaRPr>
+                    </a:p>
+                  </a:txBody>
+                  <a:tcPr marL="109728" marR="109728" marT="54864" marB="54864" anchor="ctr">
+                    <a:lnL w="9525" cap="flat" cmpd="sng" algn="ctr">
+                      <a:solidFill>
+                        <a:srgbClr val="D5DAE0"/>
+                      </a:solidFill>
+                      <a:prstDash val="solid"/>
+                      <a:round/>
+                      <a:headEnd type="none" w="med" len="med"/>
+                      <a:tailEnd type="none" w="med" len="med"/>
+                    </a:lnL>
+                    <a:lnR w="9525" cap="flat" cmpd="sng" algn="ctr">
+                      <a:solidFill>
+                        <a:srgbClr val="D5DAE0"/>
+                      </a:solidFill>
+                      <a:prstDash val="solid"/>
+                      <a:round/>
+                      <a:headEnd type="none" w="med" len="med"/>
+                      <a:tailEnd type="none" w="med" len="med"/>
+                    </a:lnR>
+                    <a:lnT w="9525" cap="flat" cmpd="sng" algn="ctr">
+                      <a:solidFill>
+                        <a:srgbClr val="D5DAE0"/>
+                      </a:solidFill>
+                      <a:prstDash val="solid"/>
+                      <a:round/>
+                      <a:headEnd type="none" w="med" len="med"/>
+                      <a:tailEnd type="none" w="med" len="med"/>
+                    </a:lnT>
+                    <a:lnB w="9525" cap="flat" cmpd="sng" algn="ctr">
+                      <a:solidFill>
+                        <a:srgbClr val="D5DAE0"/>
+                      </a:solidFill>
+                      <a:prstDash val="solid"/>
+                      <a:round/>
+                      <a:headEnd type="none" w="med" len="med"/>
+                      <a:tailEnd type="none" w="med" len="med"/>
+                    </a:lnB>
+                  </a:tcPr>
+                </a:tc>
+                <a:tc>
+                  <a:txBody>
+                    <a:bodyPr/>
+                    <a:lstStyle/>
+                    <a:p>
+                      <a:pPr indent="0" marL="0">
+                        <a:buNone/>
+                      </a:pPr>
+                      <a:r>
+                        <a:rPr lang="en-US" sz="1400" dirty="0">
+                          <a:solidFill>
+                            <a:srgbClr val="1F2933"/>
+                          </a:solidFill>
+                          <a:latin typeface="Malgun Gothic" pitchFamily="34" charset="0"/>
+                          <a:ea typeface="Malgun Gothic" pitchFamily="34" charset="-122"/>
+                          <a:cs typeface="Malgun Gothic" pitchFamily="34" charset="-120"/>
+                        </a:rPr>
+                        <a:t>Gray 전체 과정</a:t>
+                      </a:r>
+                      <a:endParaRPr lang="en-US" sz="1400" dirty="0">
+                        <a:latin typeface="Malgun Gothic" charset="0"/>
+                        <a:ea typeface="Malgun Gothic" charset="0"/>
+                        <a:cs typeface="Malgun Gothic" charset="0"/>
+                      </a:endParaRPr>
+                    </a:p>
+                  </a:txBody>
+                  <a:tcPr marL="109728" marR="109728" marT="54864" marB="54864" anchor="ctr">
+                    <a:lnL w="9525" cap="flat" cmpd="sng" algn="ctr">
+                      <a:solidFill>
+                        <a:srgbClr val="D5DAE0"/>
+                      </a:solidFill>
+                      <a:prstDash val="solid"/>
+                      <a:round/>
+                      <a:headEnd type="none" w="med" len="med"/>
+                      <a:tailEnd type="none" w="med" len="med"/>
+                    </a:lnL>
+                    <a:lnR w="9525" cap="flat" cmpd="sng" algn="ctr">
+                      <a:solidFill>
+                        <a:srgbClr val="D5DAE0"/>
+                      </a:solidFill>
+                      <a:prstDash val="solid"/>
+                      <a:round/>
+                      <a:headEnd type="none" w="med" len="med"/>
+                      <a:tailEnd type="none" w="med" len="med"/>
+                    </a:lnR>
+                    <a:lnT w="9525" cap="flat" cmpd="sng" algn="ctr">
+                      <a:solidFill>
+                        <a:srgbClr val="D5DAE0"/>
+                      </a:solidFill>
+                      <a:prstDash val="solid"/>
+                      <a:round/>
+                      <a:headEnd type="none" w="med" len="med"/>
+                      <a:tailEnd type="none" w="med" len="med"/>
+                    </a:lnT>
+                    <a:lnB w="9525" cap="flat" cmpd="sng" algn="ctr">
+                      <a:solidFill>
+                        <a:srgbClr val="D5DAE0"/>
+                      </a:solidFill>
+                      <a:prstDash val="solid"/>
+                      <a:round/>
+                      <a:headEnd type="none" w="med" len="med"/>
+                      <a:tailEnd type="none" w="med" len="med"/>
+                    </a:lnB>
+                  </a:tcPr>
+                </a:tc>
+                <a:tc>
+                  <a:txBody>
+                    <a:bodyPr/>
+                    <a:lstStyle/>
+                    <a:p>
+                      <a:pPr indent="0" marL="0">
+                        <a:buNone/>
+                      </a:pPr>
+                      <a:r>
+                        <a:rPr lang="en-US" sz="1400" dirty="0">
+                          <a:solidFill>
+                            <a:srgbClr val="1F2933"/>
+                          </a:solidFill>
+                          <a:latin typeface="Malgun Gothic" pitchFamily="34" charset="0"/>
+                          <a:ea typeface="Malgun Gothic" pitchFamily="34" charset="-122"/>
+                          <a:cs typeface="Malgun Gothic" pitchFamily="34" charset="-120"/>
+                        </a:rPr>
+                        <a:t>기준 변환 일치, 72.8 s</a:t>
+                      </a:r>
+                      <a:endParaRPr lang="en-US" sz="1400" dirty="0">
+                        <a:latin typeface="Malgun Gothic" charset="0"/>
+                        <a:ea typeface="Malgun Gothic" charset="0"/>
+                        <a:cs typeface="Malgun Gothic" charset="0"/>
+                      </a:endParaRPr>
+                    </a:p>
+                  </a:txBody>
+                  <a:tcPr marL="109728" marR="109728" marT="54864" marB="54864" anchor="ctr">
+                    <a:lnL w="9525" cap="flat" cmpd="sng" algn="ctr">
+                      <a:solidFill>
+                        <a:srgbClr val="D5DAE0"/>
+                      </a:solidFill>
+                      <a:prstDash val="solid"/>
+                      <a:round/>
+                      <a:headEnd type="none" w="med" len="med"/>
+                      <a:tailEnd type="none" w="med" len="med"/>
+                    </a:lnL>
+                    <a:lnR w="9525" cap="flat" cmpd="sng" algn="ctr">
+                      <a:solidFill>
+                        <a:srgbClr val="D5DAE0"/>
+                      </a:solidFill>
+                      <a:prstDash val="solid"/>
+                      <a:round/>
+                      <a:headEnd type="none" w="med" len="med"/>
+                      <a:tailEnd type="none" w="med" len="med"/>
+                    </a:lnR>
+                    <a:lnT w="9525" cap="flat" cmpd="sng" algn="ctr">
+                      <a:solidFill>
+                        <a:srgbClr val="D5DAE0"/>
+                      </a:solidFill>
+                      <a:prstDash val="solid"/>
+                      <a:round/>
+                      <a:headEnd type="none" w="med" len="med"/>
+                      <a:tailEnd type="none" w="med" len="med"/>
+                    </a:lnT>
+                    <a:lnB w="9525" cap="flat" cmpd="sng" algn="ctr">
+                      <a:solidFill>
+                        <a:srgbClr val="D5DAE0"/>
+                      </a:solidFill>
+                      <a:prstDash val="solid"/>
+                      <a:round/>
+                      <a:headEnd type="none" w="med" len="med"/>
+                      <a:tailEnd type="none" w="med" len="med"/>
+                    </a:lnB>
+                  </a:tcPr>
+                </a:tc>
+              </a:tr>
+              <a:tr h="429768">
+                <a:tc>
+                  <a:txBody>
+                    <a:bodyPr/>
+                    <a:lstStyle/>
+                    <a:p>
+                      <a:pPr indent="0" marL="0">
+                        <a:buNone/>
+                      </a:pPr>
+                      <a:r>
+                        <a:rPr lang="en-US" sz="1400" dirty="0">
+                          <a:solidFill>
+                            <a:srgbClr val="1F2933"/>
+                          </a:solidFill>
+                          <a:latin typeface="Malgun Gothic" pitchFamily="34" charset="0"/>
+                          <a:ea typeface="Malgun Gothic" pitchFamily="34" charset="-122"/>
+                          <a:cs typeface="Malgun Gothic" pitchFamily="34" charset="-120"/>
+                        </a:rPr>
+                        <a:t>7</a:t>
+                      </a:r>
+                      <a:endParaRPr lang="en-US" sz="1400" dirty="0">
+                        <a:latin typeface="Malgun Gothic" charset="0"/>
+                        <a:ea typeface="Malgun Gothic" charset="0"/>
+                        <a:cs typeface="Malgun Gothic" charset="0"/>
+                      </a:endParaRPr>
+                    </a:p>
+                  </a:txBody>
+                  <a:tcPr marL="109728" marR="109728" marT="54864" marB="54864" anchor="ctr">
+                    <a:lnL w="9525" cap="flat" cmpd="sng" algn="ctr">
+                      <a:solidFill>
+                        <a:srgbClr val="D5DAE0"/>
+                      </a:solidFill>
+                      <a:prstDash val="solid"/>
+                      <a:round/>
+                      <a:headEnd type="none" w="med" len="med"/>
+                      <a:tailEnd type="none" w="med" len="med"/>
+                    </a:lnL>
+                    <a:lnR w="9525" cap="flat" cmpd="sng" algn="ctr">
+                      <a:solidFill>
+                        <a:srgbClr val="D5DAE0"/>
+                      </a:solidFill>
+                      <a:prstDash val="solid"/>
+                      <a:round/>
+                      <a:headEnd type="none" w="med" len="med"/>
+                      <a:tailEnd type="none" w="med" len="med"/>
+                    </a:lnR>
+                    <a:lnT w="9525" cap="flat" cmpd="sng" algn="ctr">
+                      <a:solidFill>
+                        <a:srgbClr val="D5DAE0"/>
+                      </a:solidFill>
+                      <a:prstDash val="solid"/>
+                      <a:round/>
+                      <a:headEnd type="none" w="med" len="med"/>
+                      <a:tailEnd type="none" w="med" len="med"/>
+                    </a:lnT>
+                    <a:lnB w="9525" cap="flat" cmpd="sng" algn="ctr">
+                      <a:solidFill>
+                        <a:srgbClr val="D5DAE0"/>
+                      </a:solidFill>
+                      <a:prstDash val="solid"/>
+                      <a:round/>
+                      <a:headEnd type="none" w="med" len="med"/>
+                      <a:tailEnd type="none" w="med" len="med"/>
+                    </a:lnB>
+                  </a:tcPr>
+                </a:tc>
+                <a:tc>
+                  <a:txBody>
+                    <a:bodyPr/>
+                    <a:lstStyle/>
+                    <a:p>
+                      <a:pPr indent="0" marL="0">
+                        <a:buNone/>
+                      </a:pPr>
+                      <a:r>
+                        <a:rPr lang="en-US" sz="1400" dirty="0">
+                          <a:solidFill>
+                            <a:srgbClr val="1F2933"/>
+                          </a:solidFill>
+                          <a:latin typeface="Malgun Gothic" pitchFamily="34" charset="0"/>
+                          <a:ea typeface="Malgun Gothic" pitchFamily="34" charset="-122"/>
+                          <a:cs typeface="Malgun Gothic" pitchFamily="34" charset="-120"/>
+                        </a:rPr>
+                        <a:t>1 KiB 반복 저장·재읽기</a:t>
+                      </a:r>
+                      <a:endParaRPr lang="en-US" sz="1400" dirty="0">
+                        <a:latin typeface="Malgun Gothic" charset="0"/>
+                        <a:ea typeface="Malgun Gothic" charset="0"/>
+                        <a:cs typeface="Malgun Gothic" charset="0"/>
+                      </a:endParaRPr>
+                    </a:p>
+                  </a:txBody>
+                  <a:tcPr marL="109728" marR="109728" marT="54864" marB="54864" anchor="ctr">
+                    <a:lnL w="9525" cap="flat" cmpd="sng" algn="ctr">
+                      <a:solidFill>
+                        <a:srgbClr val="D5DAE0"/>
+                      </a:solidFill>
+                      <a:prstDash val="solid"/>
+                      <a:round/>
+                      <a:headEnd type="none" w="med" len="med"/>
+                      <a:tailEnd type="none" w="med" len="med"/>
+                    </a:lnL>
+                    <a:lnR w="9525" cap="flat" cmpd="sng" algn="ctr">
+                      <a:solidFill>
+                        <a:srgbClr val="D5DAE0"/>
+                      </a:solidFill>
+                      <a:prstDash val="solid"/>
+                      <a:round/>
+                      <a:headEnd type="none" w="med" len="med"/>
+                      <a:tailEnd type="none" w="med" len="med"/>
+                    </a:lnR>
+                    <a:lnT w="9525" cap="flat" cmpd="sng" algn="ctr">
+                      <a:solidFill>
+                        <a:srgbClr val="D5DAE0"/>
+                      </a:solidFill>
+                      <a:prstDash val="solid"/>
+                      <a:round/>
+                      <a:headEnd type="none" w="med" len="med"/>
+                      <a:tailEnd type="none" w="med" len="med"/>
+                    </a:lnT>
+                    <a:lnB w="9525" cap="flat" cmpd="sng" algn="ctr">
+                      <a:solidFill>
+                        <a:srgbClr val="D5DAE0"/>
+                      </a:solidFill>
+                      <a:prstDash val="solid"/>
+                      <a:round/>
+                      <a:headEnd type="none" w="med" len="med"/>
+                      <a:tailEnd type="none" w="med" len="med"/>
+                    </a:lnB>
+                  </a:tcPr>
+                </a:tc>
+                <a:tc>
+                  <a:txBody>
+                    <a:bodyPr/>
+                    <a:lstStyle/>
+                    <a:p>
+                      <a:pPr indent="0" marL="0">
+                        <a:buNone/>
+                      </a:pPr>
+                      <a:r>
+                        <a:rPr lang="en-US" sz="1400" dirty="0">
+                          <a:solidFill>
+                            <a:srgbClr val="1F2933"/>
+                          </a:solidFill>
+                          <a:latin typeface="Malgun Gothic" pitchFamily="34" charset="0"/>
+                          <a:ea typeface="Malgun Gothic" pitchFamily="34" charset="-122"/>
+                          <a:cs typeface="Malgun Gothic" pitchFamily="34" charset="-120"/>
+                        </a:rPr>
+                        <a:t>12회 PASS</a:t>
+                      </a:r>
+                      <a:endParaRPr lang="en-US" sz="1400" dirty="0">
+                        <a:latin typeface="Malgun Gothic" charset="0"/>
+                        <a:ea typeface="Malgun Gothic" charset="0"/>
+                        <a:cs typeface="Malgun Gothic" charset="0"/>
+                      </a:endParaRPr>
+                    </a:p>
+                  </a:txBody>
+                  <a:tcPr marL="109728" marR="109728" marT="54864" marB="54864" anchor="ctr">
+                    <a:lnL w="9525" cap="flat" cmpd="sng" algn="ctr">
+                      <a:solidFill>
+                        <a:srgbClr val="D5DAE0"/>
+                      </a:solidFill>
+                      <a:prstDash val="solid"/>
+                      <a:round/>
+                      <a:headEnd type="none" w="med" len="med"/>
+                      <a:tailEnd type="none" w="med" len="med"/>
+                    </a:lnL>
+                    <a:lnR w="9525" cap="flat" cmpd="sng" algn="ctr">
+                      <a:solidFill>
+                        <a:srgbClr val="D5DAE0"/>
+                      </a:solidFill>
+                      <a:prstDash val="solid"/>
+                      <a:round/>
+                      <a:headEnd type="none" w="med" len="med"/>
+                      <a:tailEnd type="none" w="med" len="med"/>
+                    </a:lnR>
+                    <a:lnT w="9525" cap="flat" cmpd="sng" algn="ctr">
+                      <a:solidFill>
+                        <a:srgbClr val="D5DAE0"/>
+                      </a:solidFill>
+                      <a:prstDash val="solid"/>
+                      <a:round/>
+                      <a:headEnd type="none" w="med" len="med"/>
+                      <a:tailEnd type="none" w="med" len="med"/>
+                    </a:lnT>
+                    <a:lnB w="9525" cap="flat" cmpd="sng" algn="ctr">
+                      <a:solidFill>
+                        <a:srgbClr val="D5DAE0"/>
+                      </a:solidFill>
+                      <a:prstDash val="solid"/>
+                      <a:round/>
+                      <a:headEnd type="none" w="med" len="med"/>
+                      <a:tailEnd type="none" w="med" len="med"/>
+                    </a:lnB>
+                  </a:tcPr>
+                </a:tc>
+              </a:tr>
+              <a:tr h="429768">
+                <a:tc>
+                  <a:txBody>
+                    <a:bodyPr/>
+                    <a:lstStyle/>
+                    <a:p>
+                      <a:pPr indent="0" marL="0">
+                        <a:buNone/>
+                      </a:pPr>
+                      <a:r>
+                        <a:rPr lang="en-US" sz="1400" dirty="0">
+                          <a:solidFill>
+                            <a:srgbClr val="1F2933"/>
+                          </a:solidFill>
+                          <a:latin typeface="Malgun Gothic" pitchFamily="34" charset="0"/>
+                          <a:ea typeface="Malgun Gothic" pitchFamily="34" charset="-122"/>
+                          <a:cs typeface="Malgun Gothic" pitchFamily="34" charset="-120"/>
+                        </a:rPr>
+                        <a:t>8</a:t>
+                      </a:r>
+                      <a:endParaRPr lang="en-US" sz="1400" dirty="0">
+                        <a:latin typeface="Malgun Gothic" charset="0"/>
+                        <a:ea typeface="Malgun Gothic" charset="0"/>
+                        <a:cs typeface="Malgun Gothic" charset="0"/>
+                      </a:endParaRPr>
+                    </a:p>
+                  </a:txBody>
+                  <a:tcPr marL="109728" marR="109728" marT="54864" marB="54864" anchor="ctr">
+                    <a:lnL w="9525" cap="flat" cmpd="sng" algn="ctr">
+                      <a:solidFill>
+                        <a:srgbClr val="D5DAE0"/>
+                      </a:solidFill>
+                      <a:prstDash val="solid"/>
+                      <a:round/>
+                      <a:headEnd type="none" w="med" len="med"/>
+                      <a:tailEnd type="none" w="med" len="med"/>
+                    </a:lnL>
+                    <a:lnR w="9525" cap="flat" cmpd="sng" algn="ctr">
+                      <a:solidFill>
+                        <a:srgbClr val="D5DAE0"/>
+                      </a:solidFill>
+                      <a:prstDash val="solid"/>
+                      <a:round/>
+                      <a:headEnd type="none" w="med" len="med"/>
+                      <a:tailEnd type="none" w="med" len="med"/>
+                    </a:lnR>
+                    <a:lnT w="9525" cap="flat" cmpd="sng" algn="ctr">
+                      <a:solidFill>
+                        <a:srgbClr val="D5DAE0"/>
+                      </a:solidFill>
+                      <a:prstDash val="solid"/>
+                      <a:round/>
+                      <a:headEnd type="none" w="med" len="med"/>
+                      <a:tailEnd type="none" w="med" len="med"/>
+                    </a:lnT>
+                    <a:lnB w="9525" cap="flat" cmpd="sng" algn="ctr">
+                      <a:solidFill>
+                        <a:srgbClr val="D5DAE0"/>
+                      </a:solidFill>
+                      <a:prstDash val="solid"/>
+                      <a:round/>
+                      <a:headEnd type="none" w="med" len="med"/>
+                      <a:tailEnd type="none" w="med" len="med"/>
+                    </a:lnB>
+                  </a:tcPr>
+                </a:tc>
+                <a:tc>
+                  <a:txBody>
+                    <a:bodyPr/>
+                    <a:lstStyle/>
+                    <a:p>
+                      <a:pPr indent="0" marL="0">
+                        <a:buNone/>
+                      </a:pPr>
+                      <a:r>
+                        <a:rPr lang="en-US" sz="1400" dirty="0">
+                          <a:solidFill>
+                            <a:srgbClr val="1F2933"/>
+                          </a:solidFill>
+                          <a:latin typeface="Malgun Gothic" pitchFamily="34" charset="0"/>
+                          <a:ea typeface="Malgun Gothic" pitchFamily="34" charset="-122"/>
+                          <a:cs typeface="Malgun Gothic" pitchFamily="34" charset="-120"/>
+                        </a:rPr>
+                        <a:t>Flash 칩 직접 덤프</a:t>
+                      </a:r>
+                      <a:endParaRPr lang="en-US" sz="1400" dirty="0">
+                        <a:latin typeface="Malgun Gothic" charset="0"/>
+                        <a:ea typeface="Malgun Gothic" charset="0"/>
+                        <a:cs typeface="Malgun Gothic" charset="0"/>
+                      </a:endParaRPr>
+                    </a:p>
+                  </a:txBody>
+                  <a:tcPr marL="109728" marR="109728" marT="54864" marB="54864" anchor="ctr">
+                    <a:lnL w="9525" cap="flat" cmpd="sng" algn="ctr">
+                      <a:solidFill>
+                        <a:srgbClr val="D5DAE0"/>
+                      </a:solidFill>
+                      <a:prstDash val="solid"/>
+                      <a:round/>
+                      <a:headEnd type="none" w="med" len="med"/>
+                      <a:tailEnd type="none" w="med" len="med"/>
+                    </a:lnL>
+                    <a:lnR w="9525" cap="flat" cmpd="sng" algn="ctr">
+                      <a:solidFill>
+                        <a:srgbClr val="D5DAE0"/>
+                      </a:solidFill>
+                      <a:prstDash val="solid"/>
+                      <a:round/>
+                      <a:headEnd type="none" w="med" len="med"/>
+                      <a:tailEnd type="none" w="med" len="med"/>
+                    </a:lnR>
+                    <a:lnT w="9525" cap="flat" cmpd="sng" algn="ctr">
+                      <a:solidFill>
+                        <a:srgbClr val="D5DAE0"/>
+                      </a:solidFill>
+                      <a:prstDash val="solid"/>
+                      <a:round/>
+                      <a:headEnd type="none" w="med" len="med"/>
+                      <a:tailEnd type="none" w="med" len="med"/>
+                    </a:lnT>
+                    <a:lnB w="9525" cap="flat" cmpd="sng" algn="ctr">
+                      <a:solidFill>
+                        <a:srgbClr val="D5DAE0"/>
+                      </a:solidFill>
+                      <a:prstDash val="solid"/>
+                      <a:round/>
+                      <a:headEnd type="none" w="med" len="med"/>
+                      <a:tailEnd type="none" w="med" len="med"/>
+                    </a:lnB>
+                  </a:tcPr>
+                </a:tc>
+                <a:tc>
+                  <a:txBody>
+                    <a:bodyPr/>
+                    <a:lstStyle/>
+                    <a:p>
+                      <a:pPr indent="0" marL="0">
+                        <a:buNone/>
+                      </a:pPr>
+                      <a:r>
+                        <a:rPr lang="en-US" sz="1400" dirty="0">
+                          <a:solidFill>
+                            <a:srgbClr val="1F2933"/>
+                          </a:solidFill>
+                          <a:latin typeface="Malgun Gothic" pitchFamily="34" charset="0"/>
+                          <a:ea typeface="Malgun Gothic" pitchFamily="34" charset="-122"/>
+                          <a:cs typeface="Malgun Gothic" pitchFamily="34" charset="-120"/>
+                        </a:rPr>
+                        <a:t>원본과 같음</a:t>
+                      </a:r>
+                      <a:endParaRPr lang="en-US" sz="1400" dirty="0">
+                        <a:latin typeface="Malgun Gothic" charset="0"/>
+                        <a:ea typeface="Malgun Gothic" charset="0"/>
+                        <a:cs typeface="Malgun Gothic" charset="0"/>
+                      </a:endParaRPr>
+                    </a:p>
+                  </a:txBody>
+                  <a:tcPr marL="109728" marR="109728" marT="54864" marB="54864" anchor="ctr">
+                    <a:lnL w="9525" cap="flat" cmpd="sng" algn="ctr">
+                      <a:solidFill>
+                        <a:srgbClr val="D5DAE0"/>
+                      </a:solidFill>
+                      <a:prstDash val="solid"/>
+                      <a:round/>
+                      <a:headEnd type="none" w="med" len="med"/>
+                      <a:tailEnd type="none" w="med" len="med"/>
+                    </a:lnL>
+                    <a:lnR w="9525" cap="flat" cmpd="sng" algn="ctr">
+                      <a:solidFill>
+                        <a:srgbClr val="D5DAE0"/>
+                      </a:solidFill>
+                      <a:prstDash val="solid"/>
+                      <a:round/>
+                      <a:headEnd type="none" w="med" len="med"/>
+                      <a:tailEnd type="none" w="med" len="med"/>
+                    </a:lnR>
+                    <a:lnT w="9525" cap="flat" cmpd="sng" algn="ctr">
+                      <a:solidFill>
+                        <a:srgbClr val="D5DAE0"/>
+                      </a:solidFill>
+                      <a:prstDash val="solid"/>
+                      <a:round/>
+                      <a:headEnd type="none" w="med" len="med"/>
+                      <a:tailEnd type="none" w="med" len="med"/>
+                    </a:lnT>
+                    <a:lnB w="9525" cap="flat" cmpd="sng" algn="ctr">
+                      <a:solidFill>
+                        <a:srgbClr val="D5DAE0"/>
+                      </a:solidFill>
+                      <a:prstDash val="solid"/>
+                      <a:round/>
+                      <a:headEnd type="none" w="med" len="med"/>
+                      <a:tailEnd type="none" w="med" len="med"/>
+                    </a:lnB>
+                  </a:tcPr>
+                </a:tc>
+              </a:tr>
+              <a:tr h="429768">
+                <a:tc>
+                  <a:txBody>
+                    <a:bodyPr/>
+                    <a:lstStyle/>
+                    <a:p>
+                      <a:pPr indent="0" marL="0">
+                        <a:buNone/>
+                      </a:pPr>
+                      <a:r>
+                        <a:rPr lang="en-US" sz="1400" dirty="0">
+                          <a:solidFill>
+                            <a:srgbClr val="1F2933"/>
+                          </a:solidFill>
+                          <a:latin typeface="Malgun Gothic" pitchFamily="34" charset="0"/>
+                          <a:ea typeface="Malgun Gothic" pitchFamily="34" charset="-122"/>
+                          <a:cs typeface="Malgun Gothic" pitchFamily="34" charset="-120"/>
+                        </a:rPr>
+                        <a:t>9</a:t>
+                      </a:r>
+                      <a:endParaRPr lang="en-US" sz="1400" dirty="0">
+                        <a:latin typeface="Malgun Gothic" charset="0"/>
+                        <a:ea typeface="Malgun Gothic" charset="0"/>
+                        <a:cs typeface="Malgun Gothic" charset="0"/>
+                      </a:endParaRPr>
+                    </a:p>
+                  </a:txBody>
+                  <a:tcPr marL="109728" marR="109728" marT="54864" marB="54864" anchor="ctr">
+                    <a:lnL w="9525" cap="flat" cmpd="sng" algn="ctr">
+                      <a:solidFill>
+                        <a:srgbClr val="D5DAE0"/>
+                      </a:solidFill>
+                      <a:prstDash val="solid"/>
+                      <a:round/>
+                      <a:headEnd type="none" w="med" len="med"/>
+                      <a:tailEnd type="none" w="med" len="med"/>
+                    </a:lnL>
+                    <a:lnR w="9525" cap="flat" cmpd="sng" algn="ctr">
+                      <a:solidFill>
+                        <a:srgbClr val="D5DAE0"/>
+                      </a:solidFill>
+                      <a:prstDash val="solid"/>
+                      <a:round/>
+                      <a:headEnd type="none" w="med" len="med"/>
+                      <a:tailEnd type="none" w="med" len="med"/>
+                    </a:lnR>
+                    <a:lnT w="9525" cap="flat" cmpd="sng" algn="ctr">
+                      <a:solidFill>
+                        <a:srgbClr val="D5DAE0"/>
+                      </a:solidFill>
+                      <a:prstDash val="solid"/>
+                      <a:round/>
+                      <a:headEnd type="none" w="med" len="med"/>
+                      <a:tailEnd type="none" w="med" len="med"/>
+                    </a:lnT>
+                    <a:lnB w="9525" cap="flat" cmpd="sng" algn="ctr">
+                      <a:solidFill>
+                        <a:srgbClr val="D5DAE0"/>
+                      </a:solidFill>
+                      <a:prstDash val="solid"/>
+                      <a:round/>
+                      <a:headEnd type="none" w="med" len="med"/>
+                      <a:tailEnd type="none" w="med" len="med"/>
+                    </a:lnB>
+                  </a:tcPr>
+                </a:tc>
+                <a:tc>
+                  <a:txBody>
+                    <a:bodyPr/>
+                    <a:lstStyle/>
+                    <a:p>
+                      <a:pPr indent="0" marL="0">
+                        <a:buNone/>
+                      </a:pPr>
+                      <a:r>
+                        <a:rPr lang="en-US" sz="1400" dirty="0">
+                          <a:solidFill>
+                            <a:srgbClr val="1F2933"/>
+                          </a:solidFill>
+                          <a:latin typeface="Malgun Gothic" pitchFamily="34" charset="0"/>
+                          <a:ea typeface="Malgun Gothic" pitchFamily="34" charset="-122"/>
+                          <a:cs typeface="Malgun Gothic" pitchFamily="34" charset="-120"/>
+                        </a:rPr>
+                        <a:t>RAM 덮어쓴 뒤 복원·변환</a:t>
+                      </a:r>
+                      <a:endParaRPr lang="en-US" sz="1400" dirty="0">
+                        <a:latin typeface="Malgun Gothic" charset="0"/>
+                        <a:ea typeface="Malgun Gothic" charset="0"/>
+                        <a:cs typeface="Malgun Gothic" charset="0"/>
+                      </a:endParaRPr>
+                    </a:p>
+                  </a:txBody>
+                  <a:tcPr marL="109728" marR="109728" marT="54864" marB="54864" anchor="ctr">
+                    <a:lnL w="9525" cap="flat" cmpd="sng" algn="ctr">
+                      <a:solidFill>
+                        <a:srgbClr val="D5DAE0"/>
+                      </a:solidFill>
+                      <a:prstDash val="solid"/>
+                      <a:round/>
+                      <a:headEnd type="none" w="med" len="med"/>
+                      <a:tailEnd type="none" w="med" len="med"/>
+                    </a:lnL>
+                    <a:lnR w="9525" cap="flat" cmpd="sng" algn="ctr">
+                      <a:solidFill>
+                        <a:srgbClr val="D5DAE0"/>
+                      </a:solidFill>
+                      <a:prstDash val="solid"/>
+                      <a:round/>
+                      <a:headEnd type="none" w="med" len="med"/>
+                      <a:tailEnd type="none" w="med" len="med"/>
+                    </a:lnR>
+                    <a:lnT w="9525" cap="flat" cmpd="sng" algn="ctr">
+                      <a:solidFill>
+                        <a:srgbClr val="D5DAE0"/>
+                      </a:solidFill>
+                      <a:prstDash val="solid"/>
+                      <a:round/>
+                      <a:headEnd type="none" w="med" len="med"/>
+                      <a:tailEnd type="none" w="med" len="med"/>
+                    </a:lnT>
+                    <a:lnB w="9525" cap="flat" cmpd="sng" algn="ctr">
+                      <a:solidFill>
+                        <a:srgbClr val="D5DAE0"/>
+                      </a:solidFill>
+                      <a:prstDash val="solid"/>
+                      <a:round/>
+                      <a:headEnd type="none" w="med" len="med"/>
+                      <a:tailEnd type="none" w="med" len="med"/>
+                    </a:lnB>
+                  </a:tcPr>
+                </a:tc>
+                <a:tc>
+                  <a:txBody>
+                    <a:bodyPr/>
+                    <a:lstStyle/>
+                    <a:p>
+                      <a:pPr indent="0" marL="0">
+                        <a:buNone/>
+                      </a:pPr>
+                      <a:r>
+                        <a:rPr lang="en-US" sz="1400" dirty="0">
+                          <a:solidFill>
+                            <a:srgbClr val="1F2933"/>
+                          </a:solidFill>
+                          <a:latin typeface="Malgun Gothic" pitchFamily="34" charset="0"/>
+                          <a:ea typeface="Malgun Gothic" pitchFamily="34" charset="-122"/>
+                          <a:cs typeface="Malgun Gothic" pitchFamily="34" charset="-120"/>
+                        </a:rPr>
+                        <a:t>일치, 34.6 s · 20.9 s</a:t>
+                      </a:r>
+                      <a:endParaRPr lang="en-US" sz="1400" dirty="0">
+                        <a:latin typeface="Malgun Gothic" charset="0"/>
+                        <a:ea typeface="Malgun Gothic" charset="0"/>
+                        <a:cs typeface="Malgun Gothic" charset="0"/>
+                      </a:endParaRPr>
+                    </a:p>
+                  </a:txBody>
+                  <a:tcPr marL="109728" marR="109728" marT="54864" marB="54864" anchor="ctr">
+                    <a:lnL w="9525" cap="flat" cmpd="sng" algn="ctr">
+                      <a:solidFill>
+                        <a:srgbClr val="D5DAE0"/>
+                      </a:solidFill>
+                      <a:prstDash val="solid"/>
+                      <a:round/>
+                      <a:headEnd type="none" w="med" len="med"/>
+                      <a:tailEnd type="none" w="med" len="med"/>
+                    </a:lnL>
+                    <a:lnR w="9525" cap="flat" cmpd="sng" algn="ctr">
+                      <a:solidFill>
+                        <a:srgbClr val="D5DAE0"/>
+                      </a:solidFill>
+                      <a:prstDash val="solid"/>
+                      <a:round/>
+                      <a:headEnd type="none" w="med" len="med"/>
+                      <a:tailEnd type="none" w="med" len="med"/>
+                    </a:lnR>
+                    <a:lnT w="9525" cap="flat" cmpd="sng" algn="ctr">
+                      <a:solidFill>
+                        <a:srgbClr val="D5DAE0"/>
+                      </a:solidFill>
+                      <a:prstDash val="solid"/>
+                      <a:round/>
+                      <a:headEnd type="none" w="med" len="med"/>
+                      <a:tailEnd type="none" w="med" len="med"/>
+                    </a:lnT>
+                    <a:lnB w="9525" cap="flat" cmpd="sng" algn="ctr">
+                      <a:solidFill>
+                        <a:srgbClr val="D5DAE0"/>
+                      </a:solidFill>
+                      <a:prstDash val="solid"/>
+                      <a:round/>
+                      <a:headEnd type="none" w="med" len="med"/>
+                      <a:tailEnd type="none" w="med" len="med"/>
+                    </a:lnB>
+                  </a:tcPr>
+                </a:tc>
+              </a:tr>
             </a:tbl>
           </a:graphicData>
         </a:graphic>
       </p:graphicFrame>
+      <p:sp>
+        <p:nvSpPr>
+          <p:cNvPr id="4" name="Shape 1"/>
+          <p:cNvSpPr/>
+          <p:nvPr/>
+        </p:nvSpPr>
+        <p:spPr>
+          <a:xfrm>
+            <a:off x="7863840" y="1417320"/>
+            <a:ext cx="3776472" cy="2011680"/>
+          </a:xfrm>
+          <a:prstGeom prst="rect">
+            <a:avLst/>
+          </a:prstGeom>
+          <a:solidFill>
+            <a:srgbClr val="1F2933"/>
+          </a:solidFill>
+          <a:ln w="12700">
+            <a:solidFill>
+              <a:srgbClr val="1F2933"/>
+            </a:solidFill>
+            <a:prstDash val="solid"/>
+          </a:ln>
+        </p:spPr>
+      </p:sp>
+      <p:sp>
+        <p:nvSpPr>
+          <p:cNvPr id="5" name="Text 2"/>
+          <p:cNvSpPr txBox="1"/>
+          <p:nvPr/>
+        </p:nvSpPr>
+        <p:spPr>
+          <a:xfrm>
+            <a:off x="8092440" y="1600200"/>
+            <a:ext cx="3383280" cy="365760"/>
+          </a:xfrm>
+          <a:prstGeom prst="rect">
+            <a:avLst/>
+          </a:prstGeom>
+          <a:noFill/>
+          <a:ln/>
+        </p:spPr>
+        <p:txBody>
+          <a:bodyPr wrap="square" lIns="0" tIns="0" rIns="0" bIns="0" rtlCol="0" anchor="t"/>
+          <a:lstStyle/>
+          <a:p>
+            <a:pPr indent="0" marL="0">
+              <a:buNone/>
+            </a:pPr>
+            <a:r>
+              <a:rPr lang="en-US" sz="1800" dirty="0">
+                <a:solidFill>
+                  <a:srgbClr val="FFFFFF"/>
+                </a:solidFill>
+                <a:latin typeface="Consolas" pitchFamily="34" charset="0"/>
+                <a:ea typeface="Consolas" pitchFamily="34" charset="-122"/>
+                <a:cs typeface="Consolas" pitchFamily="34" charset="-120"/>
+              </a:rPr>
+              <a:t>$ ./run_all.sh</a:t>
+            </a:r>
+            <a:endParaRPr lang="en-US" sz="1800" dirty="0"/>
+          </a:p>
+        </p:txBody>
+      </p:sp>
+      <p:sp>
+        <p:nvSpPr>
+          <p:cNvPr id="6" name="Text 3"/>
+          <p:cNvSpPr txBox="1"/>
+          <p:nvPr/>
+        </p:nvSpPr>
+        <p:spPr>
+          <a:xfrm>
+            <a:off x="8092440" y="2148840"/>
+            <a:ext cx="3383280" cy="640080"/>
+          </a:xfrm>
+          <a:prstGeom prst="rect">
+            <a:avLst/>
+          </a:prstGeom>
+          <a:noFill/>
+          <a:ln/>
+        </p:spPr>
+        <p:txBody>
+          <a:bodyPr wrap="square" lIns="0" tIns="0" rIns="0" bIns="0" rtlCol="0" anchor="t"/>
+          <a:lstStyle/>
+          <a:p>
+            <a:pPr indent="0" marL="0">
+              <a:lnSpc>
+                <a:spcPct val="120000"/>
+              </a:lnSpc>
+              <a:buNone/>
+            </a:pPr>
+            <a:r>
+              <a:rPr lang="en-US" sz="1400" dirty="0">
+                <a:solidFill>
+                  <a:srgbClr val="B7C2CE"/>
+                </a:solidFill>
+                <a:latin typeface="Malgun Gothic" pitchFamily="34" charset="0"/>
+                <a:ea typeface="Malgun Gothic" pitchFamily="34" charset="-122"/>
+                <a:cs typeface="Malgun Gothic" pitchFamily="34" charset="-120"/>
+              </a:rPr>
+              <a:t>모든 단계 PASS (247초)</a:t>
+            </a:r>
+            <a:endParaRPr lang="en-US" sz="1400" dirty="0"/>
+          </a:p>
+          <a:p>
+            <a:pPr indent="0" marL="0">
+              <a:lnSpc>
+                <a:spcPct val="120000"/>
+              </a:lnSpc>
+              <a:buNone/>
+            </a:pPr>
+            <a:r>
+              <a:rPr lang="en-US" sz="1400" dirty="0">
+                <a:solidFill>
+                  <a:srgbClr val="B7C2CE"/>
+                </a:solidFill>
+                <a:latin typeface="Malgun Gothic" pitchFamily="34" charset="0"/>
+                <a:ea typeface="Malgun Gothic" pitchFamily="34" charset="-122"/>
+                <a:cs typeface="Malgun Gothic" pitchFamily="34" charset="-120"/>
+              </a:rPr>
+              <a:t>2026-10-15</a:t>
+            </a:r>
+            <a:endParaRPr lang="en-US" sz="1400" dirty="0"/>
+          </a:p>
+        </p:txBody>
+      </p:sp>
+      <p:sp>
+        <p:nvSpPr>
+          <p:cNvPr id="7" name="Text 4"/>
+          <p:cNvSpPr txBox="1"/>
+          <p:nvPr/>
+        </p:nvSpPr>
+        <p:spPr>
+          <a:xfrm>
+            <a:off x="8092440" y="2788920"/>
+            <a:ext cx="3383280" cy="502920"/>
+          </a:xfrm>
+          <a:prstGeom prst="rect">
+            <a:avLst/>
+          </a:prstGeom>
+          <a:noFill/>
+          <a:ln/>
+        </p:spPr>
+        <p:txBody>
+          <a:bodyPr wrap="square" lIns="0" tIns="0" rIns="0" bIns="0" rtlCol="0" anchor="t"/>
+          <a:lstStyle/>
+          <a:p>
+            <a:pPr indent="0" marL="0">
+              <a:buNone/>
+            </a:pPr>
+            <a:r>
+              <a:rPr lang="en-US" sz="1200" dirty="0">
+                <a:solidFill>
+                  <a:srgbClr val="B7C2CE"/>
+                </a:solidFill>
+                <a:latin typeface="Malgun Gothic" pitchFamily="34" charset="0"/>
+                <a:ea typeface="Malgun Gothic" pitchFamily="34" charset="-122"/>
+                <a:cs typeface="Malgun Gothic" pitchFamily="34" charset="-120"/>
+              </a:rPr>
+              <a:t>실패하면 그 단계에서 멈춤 · Serial Monitor와 디버그 세션을 닫고 실행</a:t>
+            </a:r>
+            <a:endParaRPr lang="en-US" sz="1200" dirty="0"/>
+          </a:p>
+        </p:txBody>
+      </p:sp>
+      <p:sp>
+        <p:nvSpPr>
+          <p:cNvPr id="8" name="Shape 5"/>
+          <p:cNvSpPr/>
+          <p:nvPr/>
+        </p:nvSpPr>
+        <p:spPr>
+          <a:xfrm>
+            <a:off x="7863840" y="3749040"/>
+            <a:ext cx="3776472" cy="1371600"/>
+          </a:xfrm>
+          <a:prstGeom prst="rect">
+            <a:avLst/>
+          </a:prstGeom>
+          <a:solidFill>
+            <a:srgbClr val="F3F5F7"/>
+          </a:solidFill>
+          <a:ln w="12700">
+            <a:solidFill>
+              <a:srgbClr val="F3F5F7"/>
+            </a:solidFill>
+            <a:prstDash val="solid"/>
+          </a:ln>
+        </p:spPr>
+      </p:sp>
+      <p:sp>
+        <p:nvSpPr>
+          <p:cNvPr id="9" name="Text 6"/>
+          <p:cNvSpPr txBox="1"/>
+          <p:nvPr/>
+        </p:nvSpPr>
+        <p:spPr>
+          <a:xfrm>
+            <a:off x="8046720" y="3886200"/>
+            <a:ext cx="3429000" cy="1143000"/>
+          </a:xfrm>
+          <a:prstGeom prst="rect">
+            <a:avLst/>
+          </a:prstGeom>
+          <a:noFill/>
+          <a:ln/>
+        </p:spPr>
+        <p:txBody>
+          <a:bodyPr wrap="square" lIns="0" tIns="0" rIns="0" bIns="0" rtlCol="0" anchor="t"/>
+          <a:lstStyle/>
+          <a:p>
+            <a:pPr indent="0" marL="0">
+              <a:lnSpc>
+                <a:spcPct val="120000"/>
+              </a:lnSpc>
+              <a:buNone/>
+            </a:pPr>
+            <a:r>
+              <a:rPr lang="en-US" sz="1400" b="1" dirty="0">
+                <a:solidFill>
+                  <a:srgbClr val="1F2933"/>
+                </a:solidFill>
+                <a:latin typeface="Malgun Gothic" pitchFamily="34" charset="0"/>
+                <a:ea typeface="Malgun Gothic" pitchFamily="34" charset="-122"/>
+                <a:cs typeface="Malgun Gothic" pitchFamily="34" charset="-120"/>
+              </a:rPr>
+              <a:t>남은 확인</a:t>
+            </a:r>
+            <a:endParaRPr lang="en-US" sz="1400" dirty="0"/>
+          </a:p>
+          <a:p>
+            <a:pPr indent="0" marL="0">
+              <a:lnSpc>
+                <a:spcPct val="120000"/>
+              </a:lnSpc>
+              <a:buNone/>
+            </a:pPr>
+            <a:r>
+              <a:rPr lang="en-US" sz="1400" dirty="0">
+                <a:solidFill>
+                  <a:srgbClr val="1F2933"/>
+                </a:solidFill>
+                <a:latin typeface="Malgun Gothic" pitchFamily="34" charset="0"/>
+                <a:ea typeface="Malgun Gothic" pitchFamily="34" charset="-122"/>
+                <a:cs typeface="Malgun Gothic" pitchFamily="34" charset="-120"/>
+              </a:rPr>
+              <a:t>W25Q32 대체 허용 여부, 또는 외부 W25Q32 칩으로 실물 시험</a:t>
+            </a:r>
+            <a:endParaRPr lang="en-US" sz="1400" dirty="0"/>
+          </a:p>
+        </p:txBody>
+      </p:sp>
       <p:sp>
         <p:nvSpPr>
           <p:cNvPr id="25" name="Slide Number Placeholder 0"/>
@@ -9637,7 +11657,7 @@
                 <a:ea typeface="Malgun Gothic" pitchFamily="34" charset="-122"/>
                 <a:cs typeface="Malgun Gothic" pitchFamily="34" charset="-120"/>
               </a:rPr>
-              <a:t>요구 기능은 기존 실물 결과로 확인했고, 두 항목이 남아 있습니다</a:t>
+              <a:t>요구 기능은 10월 15일 보드 실행으로 확인했고, Flash 칩 모델만 남았습니다</a:t>
             </a:r>
             <a:endParaRPr lang="en-US" sz="2600" dirty="0"/>
           </a:p>
@@ -9667,8 +11687,8 @@
               <a:tblPr/>
               <a:tblGrid>
                 <a:gridCol w="2697480"/>
-                <a:gridCol w="3520440"/>
-                <a:gridCol w="3703320"/>
+                <a:gridCol w="3429000"/>
+                <a:gridCol w="3794760"/>
                 <a:gridCol w="1170432"/>
               </a:tblGrid>
               <a:tr h="457200">
@@ -10093,7 +12113,7 @@
                           <a:ea typeface="Malgun Gothic" pitchFamily="34" charset="-122"/>
                           <a:cs typeface="Malgun Gothic" pitchFamily="34" charset="-120"/>
                         </a:rPr>
-                        <a:t>청크 CRC 확인 후 ACK, 초과 0회</a:t>
+                        <a:t>청크 CRC 확인 후 ACK, 버퍼 초과 0회</a:t>
                       </a:r>
                       <a:endParaRPr lang="en-US" sz="1500" dirty="0">
                         <a:latin typeface="Malgun Gothic" charset="0"/>
@@ -11141,7 +13161,7 @@
                           <a:ea typeface="Malgun Gothic" pitchFamily="34" charset="-122"/>
                           <a:cs typeface="Malgun Gothic" pitchFamily="34" charset="-120"/>
                         </a:rPr>
-                        <a:t>원본과 전체 바이트 일치</a:t>
+                        <a:t>저장·복원 5회 모두 전체 바이트 일치</a:t>
                       </a:r>
                       <a:endParaRPr lang="en-US" sz="1500" dirty="0">
                         <a:latin typeface="Malgun Gothic" charset="0"/>
@@ -11535,7 +13555,7 @@
                           <a:ea typeface="Malgun Gothic" pitchFamily="34" charset="-122"/>
                           <a:cs typeface="Malgun Gothic" pitchFamily="34" charset="-120"/>
                         </a:rPr>
-                        <a:t>RESET 후 저장 유지</a:t>
+                        <a:t>전원·RESET 후 저장 유지</a:t>
                       </a:r>
                       <a:endParaRPr lang="en-US" sz="1500" dirty="0">
                         <a:latin typeface="Malgun Gothic" charset="0"/>
@@ -11600,7 +13620,7 @@
                           <a:ea typeface="Malgun Gothic" pitchFamily="34" charset="-122"/>
                           <a:cs typeface="Malgun Gothic" pitchFamily="34" charset="-120"/>
                         </a:rPr>
-                        <a:t>--read-only 재읽기 모드</a:t>
+                        <a:t>RAM 덮어쓰기 후 --read-only 복원</a:t>
                       </a:r>
                       <a:endParaRPr lang="en-US" sz="1500" dirty="0">
                         <a:latin typeface="Malgun Gothic" charset="0"/>
@@ -11665,7 +13685,7 @@
                           <a:ea typeface="Malgun Gothic" pitchFamily="34" charset="-122"/>
                           <a:cs typeface="Malgun Gothic" pitchFamily="34" charset="-120"/>
                         </a:rPr>
-                        <a:t>현장 Demo에서 제시 예정</a:t>
+                        <a:t>복원 일치, 칩 직접 덤프도 원본과 같음</a:t>
                       </a:r>
                       <a:endParaRPr lang="en-US" sz="1500" dirty="0">
                         <a:latin typeface="Malgun Gothic" charset="0"/>
@@ -11724,13 +13744,13 @@
                       <a:r>
                         <a:rPr lang="en-US" sz="1500" b="1" dirty="0">
                           <a:solidFill>
-                            <a:srgbClr val="1F2933"/>
+                            <a:srgbClr val="0F766E"/>
                           </a:solidFill>
                           <a:latin typeface="Malgun Gothic" pitchFamily="34" charset="0"/>
                           <a:ea typeface="Malgun Gothic" pitchFamily="34" charset="-122"/>
                           <a:cs typeface="Malgun Gothic" pitchFamily="34" charset="-120"/>
                         </a:rPr>
-                        <a:t>남음</a:t>
+                        <a:t>확인</a:t>
                       </a:r>
                       <a:endParaRPr lang="en-US" sz="1500" dirty="0">
                         <a:latin typeface="Malgun Gothic" charset="0"/>
@@ -11776,9 +13796,6 @@
                       <a:headEnd type="none" w="med" len="med"/>
                       <a:tailEnd type="none" w="med" len="med"/>
                     </a:lnB>
-                    <a:solidFill>
-                      <a:srgbClr val="F3F5F7"/>
-                    </a:solidFill>
                   </a:tcPr>
                 </a:tc>
               </a:tr>
@@ -12059,7 +14076,7 @@
         </p:nvSpPr>
         <p:spPr>
           <a:xfrm>
-            <a:off x="548640" y="5715000"/>
+            <a:off x="548640" y="5669280"/>
             <a:ext cx="11091672" cy="548640"/>
           </a:xfrm>
           <a:prstGeom prst="rect">
@@ -12073,6 +14090,9 @@
           <a:lstStyle/>
           <a:p>
             <a:pPr indent="0" marL="0">
+              <a:lnSpc>
+                <a:spcPct val="120000"/>
+              </a:lnSpc>
               <a:buNone/>
             </a:pPr>
             <a:r>
@@ -12084,7 +14104,27 @@
                 <a:ea typeface="Malgun Gothic" pitchFamily="34" charset="-122"/>
                 <a:cs typeface="Malgun Gothic" pitchFamily="34" charset="-120"/>
               </a:rPr>
-              <a:t>확인: 기존 실물 결과 파일 기준. 최신 펌웨어(TX DMA, 8비트 Gray 고정)는 빌드·프로그램 검사까지 통과했고, 실물 Demo는 발표 전에 다시 실행합니다.</a:t>
+              <a:t>확인: 2026-10-15 최신 펌웨어(백업 단계 제거)를 다운로드한 뒤 run_all.sh로 실행한 결과 기준</a:t>
+            </a:r>
+            <a:endParaRPr lang="en-US" sz="1300" dirty="0"/>
+          </a:p>
+          <a:p>
+            <a:pPr indent="0" marL="0">
+              <a:lnSpc>
+                <a:spcPct val="120000"/>
+              </a:lnSpc>
+              <a:buNone/>
+            </a:pPr>
+            <a:r>
+              <a:rPr lang="en-US" sz="1300" dirty="0">
+                <a:solidFill>
+                  <a:srgbClr val="5F6B7A"/>
+                </a:solidFill>
+                <a:latin typeface="Malgun Gothic" pitchFamily="34" charset="0"/>
+                <a:ea typeface="Malgun Gothic" pitchFamily="34" charset="-122"/>
+                <a:cs typeface="Malgun Gothic" pitchFamily="34" charset="-120"/>
+              </a:rPr>
+              <a:t>출처: README.md 보드 검증 결과, pc/results/demo_report_20261015_*.json</a:t>
             </a:r>
             <a:endParaRPr lang="en-US" sz="1300" dirty="0"/>
           </a:p>
@@ -13922,7 +15962,7 @@
                 <a:ea typeface="Malgun Gothic" pitchFamily="34" charset="-122"/>
                 <a:cs typeface="Malgun Gothic" pitchFamily="34" charset="-120"/>
               </a:rPr>
-              <a:t>백업 · 전송 · 비교</a:t>
+              <a:t>전송 · 재읽기 · 비교</a:t>
             </a:r>
             <a:endParaRPr lang="en-US" sz="1600" dirty="0"/>
           </a:p>
@@ -14686,7 +16726,7 @@
                 <a:ea typeface="Malgun Gothic" pitchFamily="34" charset="-122"/>
                 <a:cs typeface="Malgun Gothic" pitchFamily="34" charset="-120"/>
               </a:rPr>
-              <a:t>확인 코드: ① 7장 · ② 8장 · ③ 7·9장 · ④ 10장</a:t>
+              <a:t>확인 코드: ① 7장 · ② 8장 · ③ 7·9장 · ④ 10·11장</a:t>
             </a:r>
             <a:endParaRPr lang="en-US" sz="1200" dirty="0"/>
           </a:p>
@@ -17619,7 +19659,7 @@
                 <a:ea typeface="Malgun Gothic" pitchFamily="34" charset="-122"/>
                 <a:cs typeface="Malgun Gothic" pitchFamily="34" charset="-120"/>
               </a:rPr>
-              <a:t>삭제 전 백업</a:t>
+              <a:t>백업 없음</a:t>
             </a:r>
             <a:endParaRPr lang="en-US" sz="2800" dirty="0"/>
           </a:p>
@@ -17661,7 +19701,7 @@
                 <a:ea typeface="Malgun Gothic" pitchFamily="34" charset="-122"/>
                 <a:cs typeface="Malgun Gothic" pitchFamily="34" charset="-120"/>
               </a:rPr>
-              <a:t>백업이 삭제 범위보다 작으면</a:t>
+              <a:t>10-15 변경: 삭제 범위의</a:t>
             </a:r>
             <a:endParaRPr lang="en-US" sz="1400" dirty="0"/>
           </a:p>
@@ -17681,7 +19721,7 @@
                 <a:ea typeface="Malgun Gothic" pitchFamily="34" charset="-122"/>
                 <a:cs typeface="Malgun Gothic" pitchFamily="34" charset="-120"/>
               </a:rPr>
-              <a:t>펌웨어가 저장 거부</a:t>
+              <a:t>기존 내용은 덮어씀</a:t>
             </a:r>
             <a:endParaRPr lang="en-US" sz="1400" dirty="0"/>
           </a:p>
@@ -17882,7 +19922,7 @@
                 <a:ea typeface="Consolas" pitchFamily="34" charset="-122"/>
                 <a:cs typeface="Consolas" pitchFamily="34" charset="-120"/>
               </a:rPr>
-              <a:t> 255  </a:t>
+              <a:t> 257  </a:t>
             </a:r>
             <a:pPr indent="0" marL="0">
               <a:lnSpc>
@@ -17891,15 +19931,15 @@
               <a:buNone/>
             </a:pPr>
             <a:r>
-              <a:rPr lang="en-US" sz="1050" dirty="0">
-                <a:solidFill>
-                  <a:srgbClr val="1F2933"/>
+              <a:rPr lang="en-US" sz="1050" b="1" dirty="0">
+                <a:solidFill>
+                  <a:srgbClr val="0F766E"/>
                 </a:solidFill>
                 <a:latin typeface="Consolas" pitchFamily="34" charset="0"/>
                 <a:ea typeface="Consolas" pitchFamily="34" charset="-122"/>
                 <a:cs typeface="Consolas" pitchFamily="34" charset="-120"/>
               </a:rPr>
-              <a:t>uint32_t erase_length = (length + BLOCK_BYTES - 1U) &amp; ~(BLOCK_BYTES - 1U);</a:t>
+              <a:t>  if (UartDmaRx_Read(crc_header, 4, 5000) != HAL_OK ||</a:t>
             </a:r>
             <a:endParaRPr lang="en-US" sz="1050" dirty="0"/>
           </a:p>
@@ -17919,7 +19959,7 @@
                 <a:ea typeface="Consolas" pitchFamily="34" charset="-122"/>
                 <a:cs typeface="Consolas" pitchFamily="34" charset="-120"/>
               </a:rPr>
-              <a:t> 256  </a:t>
+              <a:t> 258  </a:t>
             </a:r>
             <a:pPr indent="0" marL="0">
               <a:lnSpc>
@@ -17936,7 +19976,7 @@
                 <a:ea typeface="Consolas" pitchFamily="34" charset="-122"/>
                 <a:cs typeface="Consolas" pitchFamily="34" charset="-120"/>
               </a:rPr>
-              <a:t>if (backed_up_size &lt; erase_length)</a:t>
+              <a:t>      UartDmaRx_Read(file_buffer, count, 5000) != HAL_OK)</a:t>
             </a:r>
             <a:endParaRPr lang="en-US" sz="1050" dirty="0"/>
           </a:p>
@@ -17956,7 +19996,7 @@
                 <a:ea typeface="Consolas" pitchFamily="34" charset="-122"/>
                 <a:cs typeface="Consolas" pitchFamily="34" charset="-120"/>
               </a:rPr>
-              <a:t> 258  </a:t>
+              <a:t> 260  </a:t>
             </a:r>
             <a:pPr indent="0" marL="0">
               <a:lnSpc>
@@ -17973,7 +20013,7 @@
                 <a:ea typeface="Consolas" pitchFamily="34" charset="-122"/>
                 <a:cs typeface="Consolas" pitchFamily="34" charset="-120"/>
               </a:rPr>
-              <a:t>  send_line("ERROR back up complete erase range first\n");</a:t>
+              <a:t>    send_line("ERROR file receive timeout or DMA overrun\n");</a:t>
             </a:r>
             <a:endParaRPr lang="en-US" sz="1050" dirty="0"/>
           </a:p>
@@ -18013,7 +20053,7 @@
                 <a:ea typeface="Consolas" pitchFamily="34" charset="-122"/>
                 <a:cs typeface="Consolas" pitchFamily="34" charset="-120"/>
               </a:rPr>
-              <a:t> 277  </a:t>
+              <a:t> 263  </a:t>
             </a:r>
             <a:pPr indent="0" marL="0">
               <a:lnSpc>
@@ -18050,7 +20090,7 @@
                 <a:ea typeface="Consolas" pitchFamily="34" charset="-122"/>
                 <a:cs typeface="Consolas" pitchFamily="34" charset="-120"/>
               </a:rPr>
-              <a:t> 279  </a:t>
+              <a:t> 265  </a:t>
             </a:r>
             <a:pPr indent="0" marL="0">
               <a:lnSpc>
@@ -18107,7 +20147,7 @@
                 <a:ea typeface="Consolas" pitchFamily="34" charset="-122"/>
                 <a:cs typeface="Consolas" pitchFamily="34" charset="-120"/>
               </a:rPr>
-              <a:t> 282  </a:t>
+              <a:t> 268  </a:t>
             </a:r>
             <a:pPr indent="0" marL="0">
               <a:lnSpc>
@@ -18144,7 +20184,7 @@
                 <a:ea typeface="Consolas" pitchFamily="34" charset="-122"/>
                 <a:cs typeface="Consolas" pitchFamily="34" charset="-120"/>
               </a:rPr>
-              <a:t> 283  </a:t>
+              <a:t> 269  </a:t>
             </a:r>
             <a:pPr indent="0" marL="0">
               <a:lnSpc>
@@ -18201,7 +20241,7 @@
                 <a:ea typeface="Consolas" pitchFamily="34" charset="-122"/>
                 <a:cs typeface="Consolas" pitchFamily="34" charset="-120"/>
               </a:rPr>
-              <a:t> 293  </a:t>
+              <a:t> 279  </a:t>
             </a:r>
             <a:pPr indent="0" marL="0">
               <a:lnSpc>
@@ -18258,7 +20298,7 @@
                 <a:ea typeface="Consolas" pitchFamily="34" charset="-122"/>
                 <a:cs typeface="Consolas" pitchFamily="34" charset="-120"/>
               </a:rPr>
-              <a:t> 299  </a:t>
+              <a:t> 285  </a:t>
             </a:r>
             <a:pPr indent="0" marL="0">
               <a:lnSpc>
@@ -18295,7 +20335,7 @@
                 <a:ea typeface="Consolas" pitchFamily="34" charset="-122"/>
                 <a:cs typeface="Consolas" pitchFamily="34" charset="-120"/>
               </a:rPr>
-              <a:t> 300  </a:t>
+              <a:t> 286  </a:t>
             </a:r>
             <a:pPr indent="0" marL="0">
               <a:lnSpc>
@@ -18332,7 +20372,7 @@
                 <a:ea typeface="Consolas" pitchFamily="34" charset="-122"/>
                 <a:cs typeface="Consolas" pitchFamily="34" charset="-120"/>
               </a:rPr>
-              <a:t> 302  </a:t>
+              <a:t> 288  </a:t>
             </a:r>
             <a:pPr indent="0" marL="0">
               <a:lnSpc>
@@ -18389,7 +20429,7 @@
                 <a:ea typeface="Consolas" pitchFamily="34" charset="-122"/>
                 <a:cs typeface="Consolas" pitchFamily="34" charset="-120"/>
               </a:rPr>
-              <a:t> 305  </a:t>
+              <a:t> 291  </a:t>
             </a:r>
             <a:pPr indent="0" marL="0">
               <a:lnSpc>
@@ -18426,7 +20466,7 @@
                 <a:ea typeface="Consolas" pitchFamily="34" charset="-122"/>
                 <a:cs typeface="Consolas" pitchFamily="34" charset="-120"/>
               </a:rPr>
-              <a:t> 307  </a:t>
+              <a:t> 293  </a:t>
             </a:r>
             <a:pPr indent="0" marL="0">
               <a:lnSpc>
@@ -18483,7 +20523,7 @@
                 <a:ea typeface="Consolas" pitchFamily="34" charset="-122"/>
                 <a:cs typeface="Consolas" pitchFamily="34" charset="-120"/>
               </a:rPr>
-              <a:t> 311  </a:t>
+              <a:t> 297  </a:t>
             </a:r>
             <a:pPr indent="0" marL="0">
               <a:lnSpc>
@@ -18520,7 +20560,7 @@
                 <a:ea typeface="Consolas" pitchFamily="34" charset="-122"/>
                 <a:cs typeface="Consolas" pitchFamily="34" charset="-120"/>
               </a:rPr>
-              <a:t> 313  </a:t>
+              <a:t> 299  </a:t>
             </a:r>
             <a:pPr indent="0" marL="0">
               <a:lnSpc>
@@ -18579,7 +20619,7 @@
                 <a:ea typeface="Malgun Gothic" pitchFamily="34" charset="-122"/>
                 <a:cs typeface="Malgun Gothic" pitchFamily="34" charset="-120"/>
               </a:rPr>
-              <a:t>256행</a:t>
+              <a:t>257–258행</a:t>
             </a:r>
             <a:endParaRPr lang="en-US" sz="1600" dirty="0"/>
           </a:p>
@@ -18602,7 +20642,7 @@
                 <a:ea typeface="Malgun Gothic" pitchFamily="34" charset="-122"/>
                 <a:cs typeface="Malgun Gothic" pitchFamily="34" charset="-120"/>
               </a:rPr>
-              <a:t>백업 크기가 삭제 범위보다 작으면 저장을 시작하지 않음</a:t>
+              <a:t>DMA 수신 시간 초과나 버퍼 초과면 바로 중단</a:t>
             </a:r>
             <a:endParaRPr lang="en-US" sz="1600" dirty="0"/>
           </a:p>
@@ -18622,7 +20662,7 @@
                 <a:ea typeface="Malgun Gothic" pitchFamily="34" charset="-122"/>
                 <a:cs typeface="Malgun Gothic" pitchFamily="34" charset="-120"/>
               </a:rPr>
-              <a:t>277행</a:t>
+              <a:t>263행</a:t>
             </a:r>
             <a:endParaRPr lang="en-US" sz="1600" dirty="0"/>
           </a:p>
@@ -18665,7 +20705,7 @@
                 <a:ea typeface="Malgun Gothic" pitchFamily="34" charset="-122"/>
                 <a:cs typeface="Malgun Gothic" pitchFamily="34" charset="-120"/>
               </a:rPr>
-              <a:t>282–283행</a:t>
+              <a:t>268–269행</a:t>
             </a:r>
             <a:endParaRPr lang="en-US" sz="1600" dirty="0"/>
           </a:p>
@@ -18708,7 +20748,7 @@
                 <a:ea typeface="Malgun Gothic" pitchFamily="34" charset="-122"/>
                 <a:cs typeface="Malgun Gothic" pitchFamily="34" charset="-120"/>
               </a:rPr>
-              <a:t>299–300행</a:t>
+              <a:t>285–286행</a:t>
             </a:r>
             <a:endParaRPr lang="en-US" sz="1600" dirty="0"/>
           </a:p>
@@ -18751,7 +20791,7 @@
                 <a:ea typeface="Malgun Gothic" pitchFamily="34" charset="-122"/>
                 <a:cs typeface="Malgun Gothic" pitchFamily="34" charset="-120"/>
               </a:rPr>
-              <a:t>305–307행</a:t>
+              <a:t>291–293행</a:t>
             </a:r>
             <a:endParaRPr lang="en-US" sz="1600" dirty="0"/>
           </a:p>
@@ -18794,7 +20834,7 @@
                 <a:ea typeface="Malgun Gothic" pitchFamily="34" charset="-122"/>
                 <a:cs typeface="Malgun Gothic" pitchFamily="34" charset="-120"/>
               </a:rPr>
-              <a:t>311행</a:t>
+              <a:t>297행</a:t>
             </a:r>
             <a:endParaRPr lang="en-US" sz="1600" dirty="0"/>
           </a:p>
@@ -19018,7 +21058,7 @@
                 <a:ea typeface="Consolas" pitchFamily="34" charset="-122"/>
                 <a:cs typeface="Consolas" pitchFamily="34" charset="-120"/>
               </a:rPr>
-              <a:t> 106  </a:t>
+              <a:t> 103  </a:t>
             </a:r>
             <a:pPr indent="0" marL="0">
               <a:lnSpc>
@@ -19055,7 +21095,7 @@
                 <a:ea typeface="Consolas" pitchFamily="34" charset="-122"/>
                 <a:cs typeface="Consolas" pitchFamily="34" charset="-120"/>
               </a:rPr>
-              <a:t> 107  </a:t>
+              <a:t> 104  </a:t>
             </a:r>
             <a:pPr indent="0" marL="0">
               <a:lnSpc>
@@ -19112,7 +21152,7 @@
                 <a:ea typeface="Consolas" pitchFamily="34" charset="-122"/>
                 <a:cs typeface="Consolas" pitchFamily="34" charset="-120"/>
               </a:rPr>
-              <a:t> 114  </a:t>
+              <a:t> 111  </a:t>
             </a:r>
             <a:pPr indent="0" marL="0">
               <a:lnSpc>
@@ -19522,7 +21562,7 @@
                 <a:ea typeface="Consolas" pitchFamily="34" charset="-122"/>
                 <a:cs typeface="Consolas" pitchFamily="34" charset="-120"/>
               </a:rPr>
-              <a:t>  60  </a:t>
+              <a:t>  54  </a:t>
             </a:r>
             <a:pPr indent="0" marL="0">
               <a:lnSpc>
@@ -19559,7 +21599,7 @@
                 <a:ea typeface="Consolas" pitchFamily="34" charset="-122"/>
                 <a:cs typeface="Consolas" pitchFamily="34" charset="-120"/>
               </a:rPr>
-              <a:t>  61  </a:t>
+              <a:t>  55  </a:t>
             </a:r>
             <a:pPr indent="0" marL="0">
               <a:lnSpc>
@@ -19618,7 +21658,7 @@
                 <a:ea typeface="Malgun Gothic" pitchFamily="34" charset="-122"/>
                 <a:cs typeface="Malgun Gothic" pitchFamily="34" charset="-120"/>
               </a:rPr>
-              <a:t>bmp_store.py 107행</a:t>
+              <a:t>bmp_store.py 104행</a:t>
             </a:r>
             <a:endParaRPr lang="en-US" sz="1600" dirty="0"/>
           </a:p>
@@ -19747,7 +21787,7 @@
                 <a:ea typeface="Malgun Gothic" pitchFamily="34" charset="-122"/>
                 <a:cs typeface="Malgun Gothic" pitchFamily="34" charset="-120"/>
               </a:rPr>
-              <a:t>demo_roundtrip.py 61행</a:t>
+              <a:t>demo_roundtrip.py 55행</a:t>
             </a:r>
             <a:endParaRPr lang="en-US" sz="1600" dirty="0"/>
           </a:p>
@@ -19837,7 +21877,7 @@
                 <a:ea typeface="Malgun Gothic" pitchFamily="34" charset="-122"/>
                 <a:cs typeface="Malgun Gothic" pitchFamily="34" charset="-120"/>
               </a:rPr>
-              <a:t>기록된 값 (2026-10-13 실행)</a:t>
+              <a:t>기록된 값 (2026-10-15 저장 5회)</a:t>
             </a:r>
             <a:endParaRPr lang="en-US" sz="1600" dirty="0"/>
           </a:p>
@@ -19877,7 +21917,7 @@
                 <a:ea typeface="Malgun Gothic" pitchFamily="34" charset="-122"/>
                 <a:cs typeface="Malgun Gothic" pitchFamily="34" charset="-120"/>
               </a:rPr>
-              <a:t>evidence_existing.json</a:t>
+              <a:t>demo_report_20261015_*.json</a:t>
             </a:r>
             <a:endParaRPr lang="en-US" sz="1600" dirty="0"/>
           </a:p>

--- a/presentation_oct20/output/UART_SPIFlash_2차발표_1020_코드검증.pptx
+++ b/presentation_oct20/output/UART_SPIFlash_2차발표_1020_코드검증.pptx
@@ -18,11 +18,9 @@
     <p:sldId id="266" r:id="rId12"/>
     <p:sldId id="267" r:id="rId13"/>
     <p:sldId id="268" r:id="rId14"/>
-    <p:sldId id="269" r:id="rId15"/>
-    <p:sldId id="270" r:id="rId16"/>
   </p:sldIdLst>
   <p:notesMasterIdLst>
-    <p:notesMasterId r:id="rId17"/>
+    <p:notesMasterId r:id="rId15"/>
   </p:notesMasterIdLst>
   <p:sldSz cx="12192000" cy="6858000"/>
   <p:notesSz cx="6858000" cy="12192000"/>
@@ -121,21 +119,21 @@
   <p:extLst>
     <p:ext uri="{521415D9-36F7-43E2-AB2F-B90AF26B5E84}">
       <p14:sectionLst xmlns:p14="http://schemas.microsoft.com/office/powerpoint/2010/main">
-        <p14:section name="개요" id="{3f3eddb3-34d4-25c8-5a7b-dc5c9c1fb9c5}">
+        <p14:section name="개요" id="{77fe7ce8-4a0f-ebb2-b7e3-b5ea3d10f099}">
           <p14:sldIdLst>
             <p14:sldId id="256"/>
             <p14:sldId id="257"/>
             <p14:sldId id="258"/>
           </p14:sldIdLst>
         </p14:section>
-        <p14:section name="구조와 구현" id="{726ce063-2b0c-b494-c086-0a8c4ef1d963}">
+        <p14:section name="구조와 구현" id="{a82782c5-80ca-3b8f-687a-1f437f075d4a}">
           <p14:sldIdLst>
             <p14:sldId id="259"/>
             <p14:sldId id="260"/>
             <p14:sldId id="261"/>
           </p14:sldIdLst>
         </p14:section>
-        <p14:section name="검증" id="{2fba95b9-7902-db69-1432-d8e2348a93ce}">
+        <p14:section name="검증" id="{dacc98b6-6f6c-bca4-9409-1a8273852c25}">
           <p14:sldIdLst>
             <p14:sldId id="262"/>
             <p14:sldId id="263"/>
@@ -145,15 +143,9 @@
             <p14:sldId id="267"/>
           </p14:sldIdLst>
         </p14:section>
-        <p14:section name="최적화" id="{27237ec9-6d83-a0c7-6574-4a09548b87e9}">
+        <p14:section name="Demo" id="{50de6281-f1e6-02e2-b015-297a3610f427}">
           <p14:sldIdLst>
             <p14:sldId id="268"/>
-            <p14:sldId id="269"/>
-          </p14:sldIdLst>
-        </p14:section>
-        <p14:section name="Demo" id="{57b6e2a6-f035-6974-f343-c78fe093a68c}">
-          <p14:sldIdLst>
-            <p14:sldId id="270"/>
           </p14:sldIdLst>
         </p14:section>
       </p14:sectionLst>
@@ -163,282 +155,6 @@
     </p:ext>
   </p:extLst>
 </p:presentation>
-</file>
-
-<file path=ppt/charts/chart1.xml><?xml version="1.0" encoding="utf-8"?>
-<c:chartSpace xmlns:c="http://schemas.openxmlformats.org/drawingml/2006/chart" xmlns:a="http://schemas.openxmlformats.org/drawingml/2006/main" xmlns:r="http://schemas.openxmlformats.org/officeDocument/2006/relationships">
-  <c:date1904 val="0"/>
-  <c:roundedCorners val="1"/>
-  <c:chart>
-    <c:title>
-      <c:tx>
-        <c:rich>
-          <a:bodyPr/>
-          <a:lstStyle/>
-          <a:p>
-            <a:pPr>
-              <a:defRPr sz="1400" b="0" i="0" u="none" strike="noStrike">
-                <a:solidFill>
-                  <a:srgbClr val="1F2933"/>
-                </a:solidFill>
-                <a:latin typeface="Malgun Gothic"/>
-              </a:defRPr>
-            </a:pPr>
-            <a:r>
-              <a:rPr sz="1400" b="0" i="0" u="none" strike="noStrike">
-                <a:solidFill>
-                  <a:srgbClr val="1F2933"/>
-                </a:solidFill>
-                <a:latin typeface="Malgun Gothic"/>
-              </a:rPr>
-              <a:t>전체 처리 시간 (초)</a:t>
-            </a:r>
-          </a:p>
-        </c:rich>
-      </c:tx>
-      <c:layout/>
-      <c:overlay val="0"/>
-    </c:title>
-    <c:autoTitleDeleted val="0"/>
-    <c:plotArea>
-      <c:layout/>
-      <c:barChart>
-        <c:barDir val="bar"/>
-        <c:grouping val="clustered"/>
-        <c:varyColors val="0"/>
-        <c:ser>
-          <c:idx val="0"/>
-          <c:order val="0"/>
-          <c:tx>
-            <c:strRef>
-              <c:f>Sheet1!$B$1</c:f>
-              <c:strCache>
-                <c:ptCount val="1"/>
-                <c:pt idx="0">
-                  <c:v>전체 시간</c:v>
-                </c:pt>
-              </c:strCache>
-            </c:strRef>
-          </c:tx>
-          <c:spPr>
-            <a:solidFill>
-              <a:srgbClr val="8A94A3"/>
-            </a:solidFill>
-            <a:effectLst/>
-          </c:spPr>
-          <c:invertIfNegative val="0"/>
-          <c:dLbls>
-            <c:numFmt formatCode="0.00&quot; s&quot;" sourceLinked="0"/>
-            <c:txPr>
-              <a:bodyPr/>
-              <a:lstStyle/>
-              <a:p>
-                <a:pPr>
-                  <a:defRPr b="1" i="0" strike="noStrike" sz="1400" u="none">
-                    <a:solidFill>
-                      <a:srgbClr val="1F2933"/>
-                    </a:solidFill>
-                    <a:latin typeface="Malgun Gothic"/>
-                  </a:defRPr>
-                </a:pPr>
-              </a:p>
-            </c:txPr>
-            <c:showLegendKey val="0"/>
-            <c:showVal val="1"/>
-            <c:showCatName val="0"/>
-            <c:showSerName val="0"/>
-            <c:showPercent val="0"/>
-            <c:showBubbleSize val="0"/>
-            <c:showLeaderLines val="0"/>
-          </c:dLbls>
-          <c:dPt>
-            <c:idx val="0"/>
-            <c:invertIfNegative val="0"/>
-            <c:bubble3D val="0"/>
-            <c:spPr>
-              <a:solidFill>
-                <a:srgbClr val="8A94A3"/>
-              </a:solidFill>
-              <a:effectLst/>
-            </c:spPr>
-          </c:dPt>
-          <c:dPt>
-            <c:idx val="1"/>
-            <c:invertIfNegative val="0"/>
-            <c:bubble3D val="0"/>
-            <c:spPr>
-              <a:solidFill>
-                <a:srgbClr val="0F766E"/>
-              </a:solidFill>
-              <a:effectLst/>
-            </c:spPr>
-          </c:dPt>
-          <c:cat>
-            <c:multiLvlStrRef>
-              <c:f>Sheet1!$A$2:$A$3</c:f>
-              <c:multiLvlStrCache>
-                <c:ptCount val="2"/>
-                <c:lvl>
-                  <c:pt idx="0">
-                    <c:v>24비트 Gray 출력</c:v>
-                  </c:pt>
-                  <c:pt idx="1">
-                    <c:v>8비트 Gray 출력</c:v>
-                  </c:pt>
-                </c:lvl>
-              </c:multiLvlStrCache>
-            </c:multiLvlStrRef>
-          </c:cat>
-          <c:val>
-            <c:numRef>
-              <c:f>Sheet1!$B$2:$B$3</c:f>
-              <c:numCache>
-                <c:formatCode>General</c:formatCode>
-                <c:ptCount val="2"/>
-                <c:pt idx="0">
-                  <c:v>95.6</c:v>
-                </c:pt>
-                <c:pt idx="1">
-                  <c:v>72.77</c:v>
-                </c:pt>
-              </c:numCache>
-            </c:numRef>
-          </c:val>
-        </c:ser>
-        <c:dLbls>
-          <c:numFmt formatCode="0.00&quot; s&quot;" sourceLinked="0"/>
-          <c:txPr>
-            <a:bodyPr/>
-            <a:lstStyle/>
-            <a:p>
-              <a:pPr>
-                <a:defRPr b="1" i="0" strike="noStrike" sz="1400" u="none">
-                  <a:solidFill>
-                    <a:srgbClr val="1F2933"/>
-                  </a:solidFill>
-                  <a:latin typeface="Malgun Gothic"/>
-                </a:defRPr>
-              </a:pPr>
-            </a:p>
-          </c:txPr>
-          <c:showLegendKey val="0"/>
-          <c:showVal val="1"/>
-          <c:showCatName val="0"/>
-          <c:showSerName val="0"/>
-          <c:showPercent val="0"/>
-          <c:showBubbleSize val="0"/>
-          <c:showLeaderLines val="0"/>
-        </c:dLbls>
-        <c:gapWidth val="60"/>
-        <c:overlap val="0"/>
-        <c:axId val="2094734554"/>
-        <c:axId val="2094734552"/>
-        <c:axId val="2094734556"/>
-      </c:barChart>
-      <c:catAx>
-        <c:axId val="2094734554"/>
-        <c:scaling>
-          <c:orientation val="maxMin"/>
-        </c:scaling>
-        <c:delete val="0"/>
-        <c:axPos val="l"/>
-        <c:numFmt formatCode="General" sourceLinked="1"/>
-        <c:majorTickMark val="out"/>
-        <c:minorTickMark val="none"/>
-        <c:tickLblPos val="nextTo"/>
-        <c:spPr>
-          <a:ln w="12700" cap="flat">
-            <a:solidFill>
-              <a:srgbClr val="888888"/>
-            </a:solidFill>
-            <a:prstDash val="solid"/>
-            <a:round/>
-          </a:ln>
-        </c:spPr>
-        <c:txPr>
-          <a:bodyPr/>
-          <a:lstStyle/>
-          <a:p>
-            <a:pPr>
-              <a:defRPr sz="1400" b="0" i="0" u="none" strike="noStrike">
-                <a:solidFill>
-                  <a:srgbClr val="1F2933"/>
-                </a:solidFill>
-                <a:latin typeface="Malgun Gothic"/>
-              </a:defRPr>
-            </a:pPr>
-            <a:endParaRPr lang="en-US"/>
-          </a:p>
-        </c:txPr>
-        <c:crossAx val="2094734552"/>
-        <c:crosses val="autoZero"/>
-        <c:auto val="1"/>
-        <c:lblAlgn val="ctr"/>
-        <c:noMultiLvlLbl val="1"/>
-      </c:catAx>
-      <c:valAx>
-        <c:axId val="2094734552"/>
-        <c:scaling>
-          <c:orientation val="minMax"/>
-          <c:max val="110"/>
-          <c:min val="0"/>
-        </c:scaling>
-        <c:delete val="1"/>
-        <c:axPos val="b"/>
-        <c:numFmt formatCode="General" sourceLinked="0"/>
-        <c:majorTickMark val="out"/>
-        <c:minorTickMark val="none"/>
-        <c:tickLblPos val="low"/>
-        <c:spPr>
-          <a:ln w="12700" cap="flat">
-            <a:solidFill>
-              <a:srgbClr val="888888"/>
-            </a:solidFill>
-            <a:prstDash val="solid"/>
-            <a:round/>
-          </a:ln>
-        </c:spPr>
-        <c:txPr>
-          <a:bodyPr/>
-          <a:lstStyle/>
-          <a:p>
-            <a:pPr>
-              <a:defRPr sz="1200" b="0" i="0" u="none" strike="noStrike">
-                <a:solidFill>
-                  <a:srgbClr val="000000"/>
-                </a:solidFill>
-                <a:latin typeface="Arial"/>
-              </a:defRPr>
-            </a:pPr>
-            <a:endParaRPr lang="en-US"/>
-          </a:p>
-        </c:txPr>
-        <c:crossAx val="2094734554"/>
-        <c:crosses val="autoZero"/>
-        <c:crossBetween val="between"/>
-      </c:valAx>
-      <c:spPr>
-        <a:noFill/>
-        <a:ln>
-          <a:noFill/>
-        </a:ln>
-        <a:effectLst/>
-      </c:spPr>
-    </c:plotArea>
-    <c:plotVisOnly val="1"/>
-    <c:dispBlanksAs val="span"/>
-  </c:chart>
-  <c:spPr>
-    <a:noFill/>
-    <a:ln>
-      <a:noFill/>
-    </a:ln>
-    <a:effectLst/>
-  </c:spPr>
-  <c:externalData r:id="rId1">
-    <c:autoUpdate val="0"/>
-  </c:externalData>
-</c:chartSpace>
 </file>
 
 <file path=ppt/notesMasters/notesMaster1.xml><?xml version="1.0" encoding="utf-8"?>
@@ -837,7 +553,7 @@
             <a:r>
               <a:rPr lang="en-US" dirty="0"/>
               <a:t>이번 발표는 PC에서 보낸 대용량 BMP를 SPI Flash에 저장하고, 다시 읽어 PC에서 원본과 같은 파일로 복원하는 기능입니다. 오른쪽 이미지는 실제로 사용한 테스트 입력 BMP입니다.
-발표 순서는 먼저 과제 조건을 만족했는지 결론부터 말씀드리고, 하드웨어 구성과 구현, 검증 방법, 최적화, 현장 Demo 순서로 진행하겠습니다.
+발표 순서는 먼저 과제 조건을 만족했는지 결론부터 말씀드리고, 하드웨어 구성과 구현, 검증 방법과 결과, 현장 Demo 순서로 진행하겠습니다.
 출처: presentation_oct20/output/evidence_existing.json</a:t>
             </a:r>
             <a:endParaRPr lang="en-US" dirty="0"/>
@@ -1018,11 +734,11 @@
           <a:p>
             <a:r>
               <a:rPr lang="en-US" dirty="0"/>
-              <a:t>Flash에 정말 저장되어 있는지를 두 가지 방법으로 확인했습니다. 둘 다 run_all.sh의 마지막 단계입니다.
-증명 1은 우리 펌웨어를 전혀 거치지 않는 방법입니다. STM32CubeProgrammer의 ST 외부 로더로 QSPI Flash 칩을 0x90000000 메모리 맵 주소부터 원본 크기만큼 직접 덤프하고, 86행에서 cmp로 원본 BMP와 바이트 단위로 비교합니다. 일치했습니다. 우리 읽기 코드에 버그가 있어도 이 비교는 영향을 받지 않습니다.
-증명 2는 RAM에 남은 데이터로 복원했을 가능성을 지우는 방법입니다. 90행에서 SWD로 RAM 0x20000000부터 0x50000바이트, 즉 320 KB 전체를 0xA5로 채우고, 92행에서 처음·중간·끝 세 위치를 다시 읽어 확인합니다. 그 뒤 펌웨어를 재시작하고 96행에서 --read-only로 원본 재전송 없이 Flash에서만 복원했고, 원본과 전체 바이트가 일치했습니다. 시간은 34.6초였습니다. Gray 변환만 따로 실행해도 기준 변환과 일치했습니다.
+              <a:t>Flash에 정말 저장되어 있는지를 두 가지 방법으로 확인했습니다. 둘 다 run_all.py의 마지막 두 단계입니다.
+증명 1은 우리 펌웨어를 전혀 거치지 않는 방법입니다. STM32CubeProgrammer의 ST 외부 로더로 QSPI Flash 칩을 0x90000000 메모리 맵 주소부터 원본 크기만큼 직접 덤프하고, 205행에서 원본 BMP와 바이트 단위로 비교합니다. 일치했습니다. 우리 읽기 코드에 버그가 있어도 이 비교는 영향을 받지 않습니다.
+증명 2는 RAM에 남은 데이터로 복원했을 가능성을 지우는 방법입니다. 210행에서 SWD로 RAM 0x20000000부터 0x50000바이트, 즉 320 KB 전체를 0xA5로 채우고, 213행에서 처음·중간·끝 세 위치를 다시 읽어 확인합니다. 그 뒤 보드를 리셋하고 218행에서 --read-only로 원본 재전송 없이 Flash에서만 복원했고, 원본과 전체 바이트가 일치했습니다. 시간은 34.6초였습니다. Gray 변환만 따로 실행해도 기준 변환과 일치했습니다.
 이미지 자체가 3 MB가 넘어서 320 KB RAM에 들어갈 수 없고, 보드의 SDRAM은 초기화하지 않으며 MPU로 접근을 막아 두었다는 점도 함께 말씀드립니다.
-출처: run_all.sh 82–97행, README.md 보드 검증 결과(2026-10-15)</a:t>
+출처: run_all.py 196–219행, README.md 보드 검증 결과(2026-10-15)</a:t>
             </a:r>
             <a:endParaRPr lang="en-US" dirty="0"/>
           </a:p>
@@ -1110,10 +826,10 @@
           <a:p>
             <a:r>
               <a:rPr lang="en-US" dirty="0"/>
-              <a:t>10월 15일 최신 펌웨어로 Demo 프로그램을 모두 10번 실행한 결과입니다. 원본을 보내 저장한 뒤 다시 읽는 실행이 5번, 원본을 보내지 않고 Flash에서만 읽는 실행이 5번이며, 10번 모두 3,145,782바이트 전체가 일치했고 CRC32 978AB7D9, SHA-256도 같았습니다.
+              <a:t>10월 15일 최신 펌웨어로 실행한 결과입니다. 원본을 보내 저장한 뒤 다시 읽는 실행과, 원본을 보내지 않고 Flash에서만 읽는 실행 모두 3,145,782바이트 전체가 일치했고 CRC32 978AB7D9, SHA-256도 같았습니다.
 SHA-256 전체 값: 0bfd1da377908544c1b1d2c0e10f8a3b53434448786bcac53d12b27c50f1dd8c
-저장하는 5번 모두 DMA 은행 M0과 M1이 각각 384번 채워졌고 버퍼 초과는 0회였습니다. 시간은 저장과 복원을 포함해 86.4초에서 87.2초, 읽기 전용 복원은 34.6초에서 35.3초였습니다. 이 중 MCU가 저장에 쓴 시간은 51.4초에서 51.9초였습니다.
-출처: pc/results/demo_report_20261015_185152 ~ 200453 (10개 JSON)</a:t>
+저장 실행에서 DMA 은행 M0과 M1이 각각 384번 채워졌고 버퍼 초과는 0회였습니다. 시간은 저장과 복원을 포함해 86.5초, 읽기 전용 복원은 34.6초였습니다. 프로젝트 스크립트와 별도로 shasum과 cmp로도 복원 파일을 원본과 비교해 일치함을 확인했습니다.
+출처: pc/results/demo_report_20261015_200146_452196.json, demo_report_20261015_200453_061600.json, README.md</a:t>
             </a:r>
             <a:endParaRPr lang="en-US" dirty="0"/>
           </a:p>
@@ -1201,14 +917,11 @@
           <a:p>
             <a:r>
               <a:rPr lang="en-US" dirty="0"/>
-              <a:t>최적화는 UART 회선을 쉬지 않게 하는 것과, 필요 없는 단계를 없애는 것, 작은 SRAM으로 큰 파일을 처리하는 것입니다.
-첫째, Flash에 쓰는 동안에도 UART 바이트는 계속 들어오기 때문에 수신을 하드웨어 이중 버퍼로 받았습니다. 10월 15일 저장 5회 모두 버퍼 초과는 0회였습니다.
-둘째, 청크마다 ACK를 기다리면 그동안 회선이 쉬기 때문에 PC가 최대 두 청크까지 먼저 보낼 수 있게 했습니다. 한 청크씩 보내는 방식과 비교한 측정은 아직 없습니다.
-셋째, 복원 데이터를 보낼 때 TX DMA 이중 버퍼를 써서 CPU가 송신을 기다리지 않게 했습니다. 읽기 전용 복원이 34.6초인데, 3,145,782바이트를 921600 baud 8N1로 보내는 데 필요한 계산값이 34.13초라서 거의 회선 속도로 보내고 있다고 볼 수 있습니다. 이 34.6초에는 PC 비교 시간도 들어 있습니다. 적용 전과 직접 비교한 측정은 없습니다.
-넷째, 10월 15일에 저장 전 백업 단계를 없앴습니다. 10월 13일 기록에서 백업까지 포함한 Gray 전체 과정은 116.96초였고, 백업이 없어진 지금은 72.8초입니다. 대신 삭제 범위에 있던 기존 Flash 내용은 그대로 덮어씁니다.
-다섯째, SRAM이 320 KiB라 이미지 전체를 올릴 수 없어 청크 버퍼를 재사용합니다. 마지막으로 Gray 출력을 8비트로 고정한 효과는 다음 장에서 보여드리겠습니다.
-참고로 저장 구간은 MCU 기준 약 51.8초로, 같은 양을 보내는 회선 계산값 34.1초보다 깁니다. 저장 쪽은 회선보다 Flash 삭제·쓰기·재읽기 검증이 시간을 더 쓰고 있습니다.
-출처: demo_report_20261015_*.json, pc/results/timings.csv, evidence_existing.json, README.md</a:t>
+              <a:t>현장 Demo는 run_all.py 하나로 진행합니다. macOS에서는 run_all.sh로도 같은 스크립트를 실행합니다. Serial Monitor와 VS Code 디버그 세션이 포트나 ST-LINK를 잡고 있으면 스크립트가 처음에 멈추므로 먼저 닫습니다.
+스크립트는 PC 단위 테스트, C 모의 테스트, 펌웨어 빌드, 다운로드와 검증, 원본 저장과 복원, Gray 전체 과정, 1 KiB 반복 저장, Flash 칩 직접 덤프, RAM 덮어쓰기 후 복원까지 9단계를 차례로 실행하고, 어느 단계든 실패하면 그 자리에서 멈춥니다. 10월 15일 실행에서는 약 4분 만에 모든 단계를 통과했습니다.
+시간이 부족하면 5단계 demo_roundtrip.py와 9단계의 --read-only 복원만 따로 보여드리겠습니다.
+남은 확인 항목은 Flash 칩 모델입니다. W25Q128 대체가 허용되는지 의견 주시면 감사하겠습니다. 이상입니다.
+출처: run_all.py, README.md 보드 검증 결과(2026-10-15)</a:t>
             </a:r>
             <a:endParaRPr lang="en-US" dirty="0"/>
           </a:p>
@@ -1232,189 +945,6 @@
             <a:fld id="{F7021451-1387-4CA6-816F-3879F97B5CBC}" type="slidenum">
               <a:rPr lang="en-US"/>
               <a:t>13</a:t>
-            </a:fld>
-            <a:endParaRPr lang="en-US"/>
-          </a:p>
-        </p:txBody>
-      </p:sp>
-    </p:spTree>
-    <p:extLst>
-      <p:ext uri="{BB962C8B-B14F-4D97-AF65-F5344CB8AC3E}">
-        <p14:creationId xmlns:p14="http://schemas.microsoft.com/office/powerpoint/2010/main" val="1024086991"/>
-      </p:ext>
-    </p:extLst>
-  </p:cSld>
-  <p:clrMapOvr>
-    <a:masterClrMapping/>
-  </p:clrMapOvr>
-</p:notes>
-</file>
-
-<file path=ppt/notesSlides/notesSlide14.xml><?xml version="1.0" encoding="utf-8"?>
-<p:notes xmlns:a="http://schemas.openxmlformats.org/drawingml/2006/main" xmlns:r="http://schemas.openxmlformats.org/officeDocument/2006/relationships" xmlns:p="http://schemas.openxmlformats.org/presentationml/2006/main">
-  <p:cSld>
-    <p:spTree>
-      <p:nvGrpSpPr>
-        <p:cNvPr id="1" name=""/>
-        <p:cNvGrpSpPr/>
-        <p:nvPr/>
-      </p:nvGrpSpPr>
-      <p:grpSpPr>
-        <a:xfrm>
-          <a:off x="0" y="0"/>
-          <a:ext cx="0" cy="0"/>
-          <a:chOff x="0" y="0"/>
-          <a:chExt cx="0" cy="0"/>
-        </a:xfrm>
-      </p:grpSpPr>
-      <p:sp>
-        <p:nvSpPr>
-          <p:cNvPr id="2" name="Slide Image Placeholder 1"/>
-          <p:cNvSpPr>
-            <a:spLocks noGrp="1" noRot="1" noChangeAspect="1"/>
-          </p:cNvSpPr>
-          <p:nvPr>
-            <p:ph type="sldImg"/>
-          </p:nvPr>
-        </p:nvSpPr>
-        <p:spPr/>
-      </p:sp>
-      <p:sp>
-        <p:nvSpPr>
-          <p:cNvPr id="3" name="Notes Placeholder 2"/>
-          <p:cNvSpPr>
-            <a:spLocks noGrp="1"/>
-          </p:cNvSpPr>
-          <p:nvPr>
-            <p:ph type="body" idx="1"/>
-          </p:nvPr>
-        </p:nvSpPr>
-        <p:spPr/>
-        <p:txBody>
-          <a:bodyPr/>
-          <a:lstStyle/>
-          <a:p>
-            <a:r>
-              <a:rPr lang="en-US" dirty="0"/>
-              <a:t>필수 기능은 원본 그대로의 복원이고, Gray 출력은 추가 기능입니다. 이전 버전에서 같은 입력, 921600 baud로 24비트 Gray와 8비트 Gray 출력을 각각 한 번 측정했습니다. 입력 전송 시작부터 Gray 마지막 바이트를 받을 때까지 95.60초가 72.77초로 줄었습니다. 감소율은 (95.600607 − 72.772918) / 95.600607 = 23.878%입니다.
-줄어든 이유를 확인하려고 계산해 보았습니다. 8N1은 바이트당 10비트이므로, 줄어든 2,096,128바이트를 921,600 bps로 보내는 시간은 22.74초입니다. 측정된 감소 22.83초와 거의 같아서, 시간 감소는 대부분 UART로 보내는 바이트가 줄어든 효과로 볼 수 있습니다. 즉 현재 처리 시간은 UART 회선 속도의 영향이 큽니다.
-막대 그래프는 10월 13일 각 1회 측정이고, 당시 있던 백업 준비 44.18초는 포함하지 않았습니다. 10월 15일 최신 펌웨어로 8비트 전체 과정을 6번 다시 측정하니 72.20초에서 72.78초, 중앙값 72.58초로 같은 수준이었습니다. 24비트 출력은 다시 측정하지 않았습니다. 현재 운용 출력은 8비트 Gray로 고정했습니다.
-출처: pc/results/timings.csv, evidence_existing.json</a:t>
-            </a:r>
-            <a:endParaRPr lang="en-US" dirty="0"/>
-          </a:p>
-        </p:txBody>
-      </p:sp>
-      <p:sp>
-        <p:nvSpPr>
-          <p:cNvPr id="4" name="Slide Number Placeholder 3"/>
-          <p:cNvSpPr>
-            <a:spLocks noGrp="1"/>
-          </p:cNvSpPr>
-          <p:nvPr>
-            <p:ph type="sldNum" sz="quarter" idx="10"/>
-          </p:nvPr>
-        </p:nvSpPr>
-        <p:spPr/>
-        <p:txBody>
-          <a:bodyPr/>
-          <a:lstStyle/>
-          <a:p>
-            <a:fld id="{F7021451-1387-4CA6-816F-3879F97B5CBC}" type="slidenum">
-              <a:rPr lang="en-US"/>
-              <a:t>14</a:t>
-            </a:fld>
-            <a:endParaRPr lang="en-US"/>
-          </a:p>
-        </p:txBody>
-      </p:sp>
-    </p:spTree>
-    <p:extLst>
-      <p:ext uri="{BB962C8B-B14F-4D97-AF65-F5344CB8AC3E}">
-        <p14:creationId xmlns:p14="http://schemas.microsoft.com/office/powerpoint/2010/main" val="1024086991"/>
-      </p:ext>
-    </p:extLst>
-  </p:cSld>
-  <p:clrMapOvr>
-    <a:masterClrMapping/>
-  </p:clrMapOvr>
-</p:notes>
-</file>
-
-<file path=ppt/notesSlides/notesSlide15.xml><?xml version="1.0" encoding="utf-8"?>
-<p:notes xmlns:a="http://schemas.openxmlformats.org/drawingml/2006/main" xmlns:r="http://schemas.openxmlformats.org/officeDocument/2006/relationships" xmlns:p="http://schemas.openxmlformats.org/presentationml/2006/main">
-  <p:cSld>
-    <p:spTree>
-      <p:nvGrpSpPr>
-        <p:cNvPr id="1" name=""/>
-        <p:cNvGrpSpPr/>
-        <p:nvPr/>
-      </p:nvGrpSpPr>
-      <p:grpSpPr>
-        <a:xfrm>
-          <a:off x="0" y="0"/>
-          <a:ext cx="0" cy="0"/>
-          <a:chOff x="0" y="0"/>
-          <a:chExt cx="0" cy="0"/>
-        </a:xfrm>
-      </p:grpSpPr>
-      <p:sp>
-        <p:nvSpPr>
-          <p:cNvPr id="2" name="Slide Image Placeholder 1"/>
-          <p:cNvSpPr>
-            <a:spLocks noGrp="1" noRot="1" noChangeAspect="1"/>
-          </p:cNvSpPr>
-          <p:nvPr>
-            <p:ph type="sldImg"/>
-          </p:nvPr>
-        </p:nvSpPr>
-        <p:spPr/>
-      </p:sp>
-      <p:sp>
-        <p:nvSpPr>
-          <p:cNvPr id="3" name="Notes Placeholder 2"/>
-          <p:cNvSpPr>
-            <a:spLocks noGrp="1"/>
-          </p:cNvSpPr>
-          <p:nvPr>
-            <p:ph type="body" idx="1"/>
-          </p:nvPr>
-        </p:nvSpPr>
-        <p:spPr/>
-        <p:txBody>
-          <a:bodyPr/>
-          <a:lstStyle/>
-          <a:p>
-            <a:r>
-              <a:rPr lang="en-US" dirty="0"/>
-              <a:t>현장 Demo는 run_all.sh 하나로 진행합니다. Serial Monitor와 VS Code 디버그 세션이 포트나 ST-LINK를 잡고 있으면 스크립트가 처음에 멈추므로 먼저 닫습니다.
-스크립트는 PC 단위 테스트, C 모의 테스트, 펌웨어 빌드, 다운로드와 검증, 원본 저장과 복원, Gray 전체 과정, 1 KiB 반복 저장, Flash 칩 직접 덤프, RAM 덮어쓰기 후 복원까지 9단계를 차례로 실행하고, 어느 단계든 실패하면 그 자리에서 멈춥니다. 10월 15일 실행에서는 247초 만에 모든 단계를 통과했습니다.
-시간이 부족하면 5단계 demo_roundtrip.py와 9단계의 --read-only 복원만 따로 보여드리겠습니다.
-남은 확인 항목은 Flash 칩 모델입니다. W25Q128 대체가 허용되는지 의견 주시면 감사하겠습니다. 이상입니다.
-출처: run_all.sh, README.md 보드 검증 결과(2026-10-15)</a:t>
-            </a:r>
-            <a:endParaRPr lang="en-US" dirty="0"/>
-          </a:p>
-        </p:txBody>
-      </p:sp>
-      <p:sp>
-        <p:nvSpPr>
-          <p:cNvPr id="4" name="Slide Number Placeholder 3"/>
-          <p:cNvSpPr>
-            <a:spLocks noGrp="1"/>
-          </p:cNvSpPr>
-          <p:nvPr>
-            <p:ph type="sldNum" sz="quarter" idx="10"/>
-          </p:nvPr>
-        </p:nvSpPr>
-        <p:spPr/>
-        <p:txBody>
-          <a:bodyPr/>
-          <a:lstStyle/>
-          <a:p>
-            <a:fld id="{F7021451-1387-4CA6-816F-3879F97B5CBC}" type="slidenum">
-              <a:rPr lang="en-US"/>
-              <a:t>15</a:t>
             </a:fld>
             <a:endParaRPr lang="en-US"/>
           </a:p>
@@ -1479,10 +1009,10 @@
           <a:p>
             <a:r>
               <a:rPr lang="en-US" dirty="0"/>
-              <a:t>결론부터 말씀드리면, 과제에서 요구한 UART 통신, SPI Flash 통신, Flash 읽기·쓰기, 3 MB 이상 저장, 복원, 무결성 확인은 10월 15일 최신 펌웨어로 보드에서 다시 실행해 확인했습니다. 저장·복원은 5번 실행해 5번 모두 원본과 전체 바이트가 일치했습니다.
+              <a:t>결론부터 말씀드리면, 과제에서 요구한 UART 통신, SPI Flash 통신, Flash 읽기·쓰기, 3 MB 이상 저장, 복원, 무결성 확인은 10월 15일 최신 펌웨어로 보드에서 다시 실행해 확인했습니다.
 지난번에 남아 있던 RESET 후 저장 유지도 이번에 확인했습니다. MCU RAM 320 KB 전체를 0xA5로 덮어쓴 뒤 원본을 다시 보내지 않고 Flash에서만 읽어 복원했고, 펌웨어를 거치지 않는 ST 외부 로더로 Flash 칩을 직접 덤프해도 원본과 같았습니다.
 남은 것은 Flash 칩 모델 하나입니다. 과제 조건은 W25Q32이고 실물 시험은 W25Q128로 했기 때문에 대체가 허용되는지 확인이 필요합니다.
-출처: README.md 보드 검증 결과(2026-10-15), pc/results/demo_report_20261015_*.json, run_all.sh</a:t>
+출처: README.md 보드 검증 결과(2026-10-15), pc/results/demo_report_20261015_*.json, run_all.py</a:t>
             </a:r>
             <a:endParaRPr lang="en-US" dirty="0"/>
           </a:p>
@@ -1753,9 +1283,9 @@
             <a:r>
               <a:rPr lang="en-US" dirty="0"/>
               <a:t>UART는 921600 baud, 8N1로 파일의 바이트를 그대로 보냅니다. 여기서 8비트는 UART 데이터 단위이고, BMP 픽셀 형식과는 별개입니다. 원본은 24비트 BMP입니다.
-수신은 STM32 DMA의 하드웨어 Double Buffer Mode를 썼습니다. M0와 M1이 각각 4096바이트이고, 한쪽이 차면 DMA가 자동으로 다른 쪽에 받기 시작합니다. 그 사이 CPU는 찬 버퍼의 CRC를 확인하고, 64 KiB 경계면 블록을 지우고, 페이지 단위로 쓴 뒤 다시 읽어 비교하고 나서 ACK를 보냅니다. 그래서 Flash 쓰기 중에도 다음 청크 수신이 멈추지 않습니다. 완료 콜백으로 지금 어느 은행이 채워지고 있는지 추적하고, 청크 끝처럼 버퍼가 다 차지 않은 경우는 NDTR로 받은 길이를 계산합니다.
-송신도 4 KiB 두 개의 DMA 이중 버퍼를 씁니다. PC는 ACK를 받기 전에 다음 청크까지, 최대 두 청크를 보낼 수 있습니다.
-출처: Core/Src/uart_dma_rx.c, uart_dma_tx.c, uart_flash_test.c, UM1907</a:t>
+수신은 STM32 DMA의 하드웨어 Double Buffer Mode를 썼습니다. M0와 M1이 각각 4096바이트이고, 한쪽이 차면 DMA가 자동으로 다른 쪽에 받기 시작합니다. 완료 콜백으로 지금 어느 은행이 채워지고 있는지 추적하고, 파일 끝처럼 버퍼가 다 차지 않은 경우는 NDTR로 받은 길이를 계산합니다.
+PC는 4 KiB 청크마다 앞에 CRC32 4바이트를 붙여 보냅니다. 펌웨어는 청크 하나를 받으면 CRC를 확인하고, 64 KiB 경계면 블록을 지우고, 256바이트 페이지 단위로 쓴 뒤 다시 읽어 비교하고 나서 ACK를 보냅니다. 어느 단계든 실패하면 ERROR를 보내고 멈춥니다. Flash에서 읽어 PC로 보낼 때는 TX도 4 KiB 두 개의 DMA 버퍼를 씁니다.
+출처: Core/Src/uart_dma_rx.c, uart_dma_tx.c, uart_flash_test.c, pc/bmp_store.py, UM1907</a:t>
             </a:r>
             <a:endParaRPr lang="en-US" dirty="0"/>
           </a:p>
@@ -1845,7 +1375,7 @@
               <a:rPr lang="en-US" dirty="0"/>
               <a:t>주소 지도입니다. 막대 전체가 W25Q32 용량과 같은 4 MiB입니다.
 입력 파일은 3,145,782바이트로 3 MB와 3 MiB(3,145,728바이트)를 모두 넘습니다. 헤더부터 마지막 바이트까지 0x000000부터 저장하므로 파일 끝은 0x300035입니다. 삭제는 64 KiB 블록 단위라 경계를 올려 49개 블록, 3,211,264바이트를 지웁니다. 별도 단계로 한 번에 지우는 것이 아니라, 수신 중 64 KiB 경계에 닿을 때마다 그 블록을 지웁니다. 쓰기는 256바이트 페이지 단위로 12,289번입니다. 이미지 영역은 0x3EFFFF까지로 잡아 두었습니다.
-MCU의 SRAM은 320 KiB라 이미지 전체를 RAM에 올릴 수 없습니다. 그래서 4 KiB 청크 버퍼를 재사용하며 바로 Flash에 씁니다. 10월 15일 수정으로 저장 전 백업 단계는 없앴습니다. 따라서 삭제 범위에 있던 기존 Flash 내용은 그대로 덮어씁니다.
+MCU의 SRAM은 320 KiB라 이미지 전체를 RAM에 올릴 수 없습니다. 그래서 4 KiB 청크 버퍼를 재사용하며 바로 Flash에 씁니다.
 주소 0x300035, 0x30FFFF는 파일 크기와 블록 수로 계산한 값입니다.
 출처: evidence_existing.json, Core/Src/uart_flash_test.c, STM32F746NG 데이터시트</a:t>
             </a:r>
@@ -1935,7 +1465,7 @@
           <a:p>
             <a:r>
               <a:rPr lang="en-US" dirty="0"/>
-              <a:t>블록 다이어그램의 1번과 3번 구간을 확인하는 펌웨어 코드입니다. 파일 수신 함수 receive_file에서 4 KiB 청크 하나를 처리하는 순서를 그대로 가져왔고, 색이 들어간 줄이 확인 조건입니다. 10월 15일 수정으로 저장 전 백업 단계는 없어졌고, 저장 요청이 오면 바로 이 루프가 시작됩니다.
+              <a:t>블록 다이어그램의 1번과 3번 구간을 확인하는 펌웨어 코드입니다. 파일 수신 함수 receive_file에서 4 KiB 청크 하나를 처리하는 순서를 그대로 가져왔고, 색이 들어간 줄이 확인 조건입니다.
 257, 258행에서 CRC 헤더와 청크를 DMA 버퍼에서 읽는데, 시간 초과나 버퍼 초과가 있으면 그 자리에서 중단합니다. 263행에서 PC가 붙여 보낸 CRC와 비교하고, 다르면 Flash를 건드리기 전에 멈춥니다. 268행에서 64 KiB 경계일 때만 블록을 지우고, 279행에서 256바이트 페이지 단위로 씁니다.
 가장 중요한 부분은 285, 286행입니다. 방금 쓴 영역을 Flash에서 다시 읽어 받은 데이터와 memcmp로 비교합니다. 그래서 PC가 받는 ACK는 "받았다"가 아니라 "Flash에 쓰고 다시 읽어 같았다"는 뜻입니다. 291행에서 다시 읽은 데이터로 CRC를 누적하고, 루프가 끝나면 297행에서 파일 전체 CRC를 비교해 FILE STORED를 보냅니다.
 출처: Core/Src/uart_flash_test.c 233–307행 (커밋 926d3fc)</a:t>
@@ -2027,10 +1557,9 @@
             <a:r>
               <a:rPr lang="en-US" dirty="0"/>
               <a:t>2번 구간, DMA 이중 버퍼와 펌웨어 사이의 확인 코드입니다.
-PC 쪽 send_file은 104행에서 ACK를 받지 않은 청크를 최대 두 개까지만 보냅니다. 수신 버퍼가 두 개라서, 한쪽을 Flash에 쓰는 동안 다른 쪽이 차도록 맞춘 것입니다. 111행에서 ACK의 바이트 위치가 기대값과 다르면 바로 실패합니다.
-펌웨어 쪽 uart_dma_rx.c에서는 두 가지로 초과를 감지합니다. 54행은 DMA 완료 인터럽트가 M0, M1 순서대로 오지 않으면, 즉 한 은행을 처리하기 전에 다음 은행이 또 찼다면 초과로 셉니다. 134행과 152행은 DMA가 쓴 바이트 수에서 CPU가 읽은 바이트 수를 뺀 값이 버퍼 전체 8 KiB를 넘는지 봅니다. 152행은 memcpy 이후에 다시 확인해서, 복사하는 동안 DMA가 덮어쓴 데이터를 받아들이지 않게 합니다.
-Demo 프로그램은 55행에서 마지막에 통계를 받아 초과가 있으면 실패로 처리합니다. 10월 15일 저장 실행 5번 모두 M0 384회, M1 384회, 초과 0회였습니다.
-출처: pc/bmp_store.py, Core/Src/uart_dma_rx.c, pc/demo_roundtrip.py, pc/results/demo_report_20261015_*.json</a:t>
+uart_dma_rx.c에서는 두 가지로 버퍼 초과를 감지합니다. 54행은 DMA 완료 인터럽트가 M0, M1 순서대로 오지 않으면, 즉 한 은행을 처리하기 전에 다음 은행이 또 찼다면 초과로 셉니다. 134행과 152행은 DMA가 쓴 바이트 수에서 CPU가 읽은 바이트 수를 뺀 값이 버퍼 전체 8 KiB를 넘는지 봅니다. 152행은 memcpy 이후에 다시 확인해서, 복사하는 동안 DMA가 덮어쓴 데이터를 받아들이지 않게 합니다. 초과가 생기면 rx_error가 켜지고 수신이 실패로 끝납니다.
+Demo 프로그램은 55행에서 마지막에 통계를 받아 초과가 있으면 실패로 처리합니다. 10월 15일 최신 저장 실행에서 M0 384회, M1 384회, 초과 0회였습니다.
+출처: Core/Src/uart_dma_rx.c, pc/demo_roundtrip.py, pc/results/demo_report_20261015_200146_452196.json</a:t>
             </a:r>
             <a:endParaRPr lang="en-US" dirty="0"/>
           </a:p>
@@ -4118,7 +3647,7 @@
         <p:spPr>
           <a:xfrm>
             <a:off x="548640" y="1325880"/>
-            <a:ext cx="11091672" cy="2788920"/>
+            <a:ext cx="11091672" cy="3108960"/>
           </a:xfrm>
           <a:prstGeom prst="rect">
             <a:avLst/>
@@ -4143,7 +3672,7 @@
         <p:spPr>
           <a:xfrm>
             <a:off x="685800" y="1435608"/>
-            <a:ext cx="10817352" cy="2569464"/>
+            <a:ext cx="10817352" cy="2889504"/>
           </a:xfrm>
           <a:prstGeom prst="rect">
             <a:avLst/>
@@ -4162,7 +3691,7 @@
               <a:buNone/>
             </a:pPr>
             <a:r>
-              <a:rPr lang="en-US" sz="1100" b="1" dirty="0">
+              <a:rPr lang="en-US" sz="1000" b="1" dirty="0">
                 <a:solidFill>
                   <a:srgbClr val="5F6B7A"/>
                 </a:solidFill>
@@ -4170,9 +3699,9 @@
                 <a:ea typeface="Malgun Gothic" pitchFamily="34" charset="-122"/>
                 <a:cs typeface="Malgun Gothic" pitchFamily="34" charset="-120"/>
               </a:rPr>
-              <a:t>run_all.sh — 증명 1: ST 외부 로더로 QSPI Flash 칩 직접 덤프</a:t>
-            </a:r>
-            <a:endParaRPr lang="en-US" sz="1100" dirty="0"/>
+              <a:t>run_all.py — 8단계: ST 외부 로더로 QSPI Flash 칩 직접 덤프</a:t>
+            </a:r>
+            <a:endParaRPr lang="en-US" sz="1000" dirty="0"/>
           </a:p>
           <a:p>
             <a:pPr indent="0" marL="0">
@@ -4182,7 +3711,7 @@
               <a:buNone/>
             </a:pPr>
             <a:r>
-              <a:rPr lang="en-US" sz="1100" dirty="0">
+              <a:rPr lang="en-US" sz="1000" dirty="0">
                 <a:solidFill>
                   <a:srgbClr val="8A94A3"/>
                 </a:solidFill>
@@ -4190,7 +3719,7 @@
                 <a:ea typeface="Consolas" pitchFamily="34" charset="-122"/>
                 <a:cs typeface="Consolas" pitchFamily="34" charset="-120"/>
               </a:rPr>
-              <a:t>  84  </a:t>
+              <a:t> 199  </a:t>
             </a:r>
             <a:pPr indent="0" marL="0">
               <a:lnSpc>
@@ -4199,7 +3728,7 @@
               <a:buNone/>
             </a:pPr>
             <a:r>
-              <a:rPr lang="en-US" sz="1100" b="1" dirty="0">
+              <a:rPr lang="en-US" sz="1000" b="1" dirty="0">
                 <a:solidFill>
                   <a:srgbClr val="0F766E"/>
                 </a:solidFill>
@@ -4207,9 +3736,9 @@
                 <a:ea typeface="Consolas" pitchFamily="34" charset="-122"/>
                 <a:cs typeface="Consolas" pitchFamily="34" charset="-120"/>
               </a:rPr>
-              <a:t>prog -c port=SWD mode=UR -el "$LOADER" -u 0x90000000 "$SIZE" "$TMP/qspi_dump.bin"</a:t>
-            </a:r>
-            <a:endParaRPr lang="en-US" sz="1100" dirty="0"/>
+              <a:t>capture([programmer, "-c", "port=SWD", "mode=UR", "-el", tools["ExternalLoader"],</a:t>
+            </a:r>
+            <a:endParaRPr lang="en-US" sz="1000" dirty="0"/>
           </a:p>
           <a:p>
             <a:pPr indent="0" marL="0">
@@ -4219,7 +3748,7 @@
               <a:buNone/>
             </a:pPr>
             <a:r>
-              <a:rPr lang="en-US" sz="1100" dirty="0">
+              <a:rPr lang="en-US" sz="1000" dirty="0">
                 <a:solidFill>
                   <a:srgbClr val="8A94A3"/>
                 </a:solidFill>
@@ -4227,7 +3756,7 @@
                 <a:ea typeface="Consolas" pitchFamily="34" charset="-122"/>
                 <a:cs typeface="Consolas" pitchFamily="34" charset="-120"/>
               </a:rPr>
-              <a:t>  85  </a:t>
+              <a:t> 200  </a:t>
             </a:r>
             <a:pPr indent="0" marL="0">
               <a:lnSpc>
@@ -4236,17 +3765,17 @@
               <a:buNone/>
             </a:pPr>
             <a:r>
-              <a:rPr lang="en-US" sz="1100" dirty="0">
-                <a:solidFill>
-                  <a:srgbClr val="1F2933"/>
+              <a:rPr lang="en-US" sz="1000" b="1" dirty="0">
+                <a:solidFill>
+                  <a:srgbClr val="0F766E"/>
                 </a:solidFill>
                 <a:latin typeface="Consolas" pitchFamily="34" charset="0"/>
                 <a:ea typeface="Consolas" pitchFamily="34" charset="-122"/>
                 <a:cs typeface="Consolas" pitchFamily="34" charset="-120"/>
               </a:rPr>
-              <a:t>shasum -a 256 "$TMP/qspi_dump.bin" "$INPUT"</a:t>
-            </a:r>
-            <a:endParaRPr lang="en-US" sz="1100" dirty="0"/>
+              <a:t>         "-u", "0x90000000", size, dump])</a:t>
+            </a:r>
+            <a:endParaRPr lang="en-US" sz="1000" dirty="0"/>
           </a:p>
           <a:p>
             <a:pPr indent="0" marL="0">
@@ -4256,7 +3785,7 @@
               <a:buNone/>
             </a:pPr>
             <a:r>
-              <a:rPr lang="en-US" sz="1100" dirty="0">
+              <a:rPr lang="en-US" sz="1000" dirty="0">
                 <a:solidFill>
                   <a:srgbClr val="8A94A3"/>
                 </a:solidFill>
@@ -4264,8 +3793,11 @@
                 <a:ea typeface="Consolas" pitchFamily="34" charset="-122"/>
                 <a:cs typeface="Consolas" pitchFamily="34" charset="-120"/>
               </a:rPr>
-              <a:t>  86  </a:t>
-            </a:r>
+              <a:t>      ⋮</a:t>
+            </a:r>
+            <a:endParaRPr lang="en-US" sz="1000" dirty="0"/>
+          </a:p>
+          <a:p>
             <a:pPr indent="0" marL="0">
               <a:lnSpc>
                 <a:spcPct val="120000"/>
@@ -4273,19 +3805,16 @@
               <a:buNone/>
             </a:pPr>
             <a:r>
-              <a:rPr lang="en-US" sz="1100" b="1" dirty="0">
-                <a:solidFill>
-                  <a:srgbClr val="0F766E"/>
+              <a:rPr lang="en-US" sz="1000" dirty="0">
+                <a:solidFill>
+                  <a:srgbClr val="8A94A3"/>
                 </a:solidFill>
                 <a:latin typeface="Consolas" pitchFamily="34" charset="0"/>
                 <a:ea typeface="Consolas" pitchFamily="34" charset="-122"/>
                 <a:cs typeface="Consolas" pitchFamily="34" charset="-120"/>
               </a:rPr>
-              <a:t>cmp "$TMP/qspi_dump.bin" "$INPUT" || fail "Flash 칩 내용이 원본과 다릅니다"</a:t>
-            </a:r>
-            <a:endParaRPr lang="en-US" sz="1100" dirty="0"/>
-          </a:p>
-          <a:p>
+              <a:t> 205  </a:t>
+            </a:r>
             <a:pPr indent="0" marL="0">
               <a:lnSpc>
                 <a:spcPct val="120000"/>
@@ -4293,6 +3822,63 @@
               <a:buNone/>
             </a:pPr>
             <a:r>
+              <a:rPr lang="en-US" sz="1000" b="1" dirty="0">
+                <a:solidFill>
+                  <a:srgbClr val="0F766E"/>
+                </a:solidFill>
+                <a:latin typeface="Consolas" pitchFamily="34" charset="0"/>
+                <a:ea typeface="Consolas" pitchFamily="34" charset="-122"/>
+                <a:cs typeface="Consolas" pitchFamily="34" charset="-120"/>
+              </a:rPr>
+              <a:t>if dumped != original:</a:t>
+            </a:r>
+            <a:endParaRPr lang="en-US" sz="1000" dirty="0"/>
+          </a:p>
+          <a:p>
+            <a:pPr indent="0" marL="0">
+              <a:lnSpc>
+                <a:spcPct val="120000"/>
+              </a:lnSpc>
+              <a:buNone/>
+            </a:pPr>
+            <a:r>
+              <a:rPr lang="en-US" sz="1000" dirty="0">
+                <a:solidFill>
+                  <a:srgbClr val="8A94A3"/>
+                </a:solidFill>
+                <a:latin typeface="Consolas" pitchFamily="34" charset="0"/>
+                <a:ea typeface="Consolas" pitchFamily="34" charset="-122"/>
+                <a:cs typeface="Consolas" pitchFamily="34" charset="-120"/>
+              </a:rPr>
+              <a:t> 206  </a:t>
+            </a:r>
+            <a:pPr indent="0" marL="0">
+              <a:lnSpc>
+                <a:spcPct val="120000"/>
+              </a:lnSpc>
+              <a:buNone/>
+            </a:pPr>
+            <a:r>
+              <a:rPr lang="en-US" sz="1000" dirty="0">
+                <a:solidFill>
+                  <a:srgbClr val="1F2933"/>
+                </a:solidFill>
+                <a:latin typeface="Consolas" pitchFamily="34" charset="0"/>
+                <a:ea typeface="Consolas" pitchFamily="34" charset="-122"/>
+                <a:cs typeface="Consolas" pitchFamily="34" charset="-120"/>
+              </a:rPr>
+              <a:t>    raise StepFailed("Flash 칩 내용이 원본과 다릅니다")</a:t>
+            </a:r>
+            <a:endParaRPr lang="en-US" sz="1000" dirty="0"/>
+          </a:p>
+          <a:p>
+            <a:pPr indent="0" marL="0">
+              <a:lnSpc>
+                <a:spcPct val="120000"/>
+              </a:lnSpc>
+              <a:buNone/>
+            </a:pPr>
+            <a:r>
               <a:rPr lang="en-US" sz="600" dirty="0">
                 <a:solidFill>
                   <a:srgbClr val="000000"/>
@@ -4300,7 +3886,7 @@
               </a:rPr>
               <a:t> </a:t>
             </a:r>
-            <a:endParaRPr lang="en-US" sz="1100" dirty="0"/>
+            <a:endParaRPr lang="en-US" sz="1000" dirty="0"/>
           </a:p>
           <a:p>
             <a:pPr indent="0" marL="0">
@@ -4310,7 +3896,7 @@
               <a:buNone/>
             </a:pPr>
             <a:r>
-              <a:rPr lang="en-US" sz="1100" b="1" dirty="0">
+              <a:rPr lang="en-US" sz="1000" b="1" dirty="0">
                 <a:solidFill>
                   <a:srgbClr val="5F6B7A"/>
                 </a:solidFill>
@@ -4318,9 +3904,9 @@
                 <a:ea typeface="Malgun Gothic" pitchFamily="34" charset="-122"/>
                 <a:cs typeface="Malgun Gothic" pitchFamily="34" charset="-120"/>
               </a:rPr>
-              <a:t>run_all.sh — 증명 2: RAM 320 KB를 0xA5로 덮어쓴 뒤 Flash에서만 복원</a:t>
-            </a:r>
-            <a:endParaRPr lang="en-US" sz="1100" dirty="0"/>
+              <a:t>run_all.py — 9단계: RAM 320 KB를 0xA5로 덮어쓴 뒤 Flash에서만 복원</a:t>
+            </a:r>
+            <a:endParaRPr lang="en-US" sz="1000" dirty="0"/>
           </a:p>
           <a:p>
             <a:pPr indent="0" marL="0">
@@ -4330,7 +3916,7 @@
               <a:buNone/>
             </a:pPr>
             <a:r>
-              <a:rPr lang="en-US" sz="1100" dirty="0">
+              <a:rPr lang="en-US" sz="1000" dirty="0">
                 <a:solidFill>
                   <a:srgbClr val="8A94A3"/>
                 </a:solidFill>
@@ -4338,7 +3924,7 @@
                 <a:ea typeface="Consolas" pitchFamily="34" charset="-122"/>
                 <a:cs typeface="Consolas" pitchFamily="34" charset="-120"/>
               </a:rPr>
-              <a:t>  90  </a:t>
+              <a:t> 210  </a:t>
             </a:r>
             <a:pPr indent="0" marL="0">
               <a:lnSpc>
@@ -4347,7 +3933,7 @@
               <a:buNone/>
             </a:pPr>
             <a:r>
-              <a:rPr lang="en-US" sz="1100" b="1" dirty="0">
+              <a:rPr lang="en-US" sz="1000" b="1" dirty="0">
                 <a:solidFill>
                   <a:srgbClr val="0F766E"/>
                 </a:solidFill>
@@ -4355,9 +3941,9 @@
                 <a:ea typeface="Consolas" pitchFamily="34" charset="-122"/>
                 <a:cs typeface="Consolas" pitchFamily="34" charset="-120"/>
               </a:rPr>
-              <a:t>prog -c port=SWD mode=UR -fillmemory 0x20000000 size=0x50000 pattern=0xA5A5A5A5 dataWidth=32 \</a:t>
-            </a:r>
-            <a:endParaRPr lang="en-US" sz="1100" dirty="0"/>
+              <a:t>output = capture([programmer, "-c", "port=SWD", "mode=UR", "-fillmemory", "0x20000000", "size=0x50000",</a:t>
+            </a:r>
+            <a:endParaRPr lang="en-US" sz="1000" dirty="0"/>
           </a:p>
           <a:p>
             <a:pPr indent="0" marL="0">
@@ -4367,7 +3953,7 @@
               <a:buNone/>
             </a:pPr>
             <a:r>
-              <a:rPr lang="en-US" sz="1100" dirty="0">
+              <a:rPr lang="en-US" sz="1000" dirty="0">
                 <a:solidFill>
                   <a:srgbClr val="8A94A3"/>
                 </a:solidFill>
@@ -4375,7 +3961,7 @@
                 <a:ea typeface="Consolas" pitchFamily="34" charset="-122"/>
                 <a:cs typeface="Consolas" pitchFamily="34" charset="-120"/>
               </a:rPr>
-              <a:t>  91  </a:t>
+              <a:t> 211  </a:t>
             </a:r>
             <a:pPr indent="0" marL="0">
               <a:lnSpc>
@@ -4384,7 +3970,7 @@
               <a:buNone/>
             </a:pPr>
             <a:r>
-              <a:rPr lang="en-US" sz="1100" dirty="0">
+              <a:rPr lang="en-US" sz="1000" dirty="0">
                 <a:solidFill>
                   <a:srgbClr val="1F2933"/>
                 </a:solidFill>
@@ -4392,9 +3978,9 @@
                 <a:ea typeface="Consolas" pitchFamily="34" charset="-122"/>
                 <a:cs typeface="Consolas" pitchFamily="34" charset="-120"/>
               </a:rPr>
-              <a:t>  -r32 0x20000000 0x10 -r32 0x20027FF0 0x10 -r32 0x2004FFF0 0x10</a:t>
-            </a:r>
-            <a:endParaRPr lang="en-US" sz="1100" dirty="0"/>
+              <a:t>                  "pattern=0xA5A5A5A5", "dataWidth=32", "-r32", "0x20000000", "0x10",</a:t>
+            </a:r>
+            <a:endParaRPr lang="en-US" sz="1000" dirty="0"/>
           </a:p>
           <a:p>
             <a:pPr indent="0" marL="0">
@@ -4404,7 +3990,7 @@
               <a:buNone/>
             </a:pPr>
             <a:r>
-              <a:rPr lang="en-US" sz="1100" dirty="0">
+              <a:rPr lang="en-US" sz="1000" dirty="0">
                 <a:solidFill>
                   <a:srgbClr val="8A94A3"/>
                 </a:solidFill>
@@ -4412,7 +3998,7 @@
                 <a:ea typeface="Consolas" pitchFamily="34" charset="-122"/>
                 <a:cs typeface="Consolas" pitchFamily="34" charset="-120"/>
               </a:rPr>
-              <a:t>  92  </a:t>
+              <a:t> 212  </a:t>
             </a:r>
             <a:pPr indent="0" marL="0">
               <a:lnSpc>
@@ -4421,17 +4007,17 @@
               <a:buNone/>
             </a:pPr>
             <a:r>
-              <a:rPr lang="en-US" sz="1100" b="1" dirty="0">
-                <a:solidFill>
-                  <a:srgbClr val="0F766E"/>
+              <a:rPr lang="en-US" sz="1000" dirty="0">
+                <a:solidFill>
+                  <a:srgbClr val="1F2933"/>
                 </a:solidFill>
                 <a:latin typeface="Consolas" pitchFamily="34" charset="0"/>
                 <a:ea typeface="Consolas" pitchFamily="34" charset="-122"/>
                 <a:cs typeface="Consolas" pitchFamily="34" charset="-120"/>
               </a:rPr>
-              <a:t>[[ $(grep -c "A5A5A5A5 A5A5A5A5 A5A5A5A5 A5A5A5A5" "$LOG") -eq 3 ]] || fail "RAM 덮어쓰기 확인"</a:t>
-            </a:r>
-            <a:endParaRPr lang="en-US" sz="1100" dirty="0"/>
+              <a:t>                  "-r32", "0x20027FF0", "0x10", "-r32", "0x2004FFF0", "0x10"])</a:t>
+            </a:r>
+            <a:endParaRPr lang="en-US" sz="1000" dirty="0"/>
           </a:p>
           <a:p>
             <a:pPr indent="0" marL="0">
@@ -4441,7 +4027,7 @@
               <a:buNone/>
             </a:pPr>
             <a:r>
-              <a:rPr lang="en-US" sz="1100" dirty="0">
+              <a:rPr lang="en-US" sz="1000" dirty="0">
                 <a:solidFill>
                   <a:srgbClr val="8A94A3"/>
                 </a:solidFill>
@@ -4449,11 +4035,8 @@
                 <a:ea typeface="Consolas" pitchFamily="34" charset="-122"/>
                 <a:cs typeface="Consolas" pitchFamily="34" charset="-120"/>
               </a:rPr>
-              <a:t>      ⋮</a:t>
-            </a:r>
-            <a:endParaRPr lang="en-US" sz="1100" dirty="0"/>
-          </a:p>
-          <a:p>
+              <a:t> 213  </a:t>
+            </a:r>
             <a:pPr indent="0" marL="0">
               <a:lnSpc>
                 <a:spcPct val="120000"/>
@@ -4461,16 +4044,19 @@
               <a:buNone/>
             </a:pPr>
             <a:r>
-              <a:rPr lang="en-US" sz="1100" dirty="0">
-                <a:solidFill>
-                  <a:srgbClr val="8A94A3"/>
+              <a:rPr lang="en-US" sz="1000" b="1" dirty="0">
+                <a:solidFill>
+                  <a:srgbClr val="0F766E"/>
                 </a:solidFill>
                 <a:latin typeface="Consolas" pitchFamily="34" charset="0"/>
                 <a:ea typeface="Consolas" pitchFamily="34" charset="-122"/>
                 <a:cs typeface="Consolas" pitchFamily="34" charset="-120"/>
               </a:rPr>
-              <a:t>  94  </a:t>
-            </a:r>
+              <a:t>if output.count("A5A5A5A5 A5A5A5A5 A5A5A5A5 A5A5A5A5") != 3:</a:t>
+            </a:r>
+            <a:endParaRPr lang="en-US" sz="1000" dirty="0"/>
+          </a:p>
+          <a:p>
             <a:pPr indent="0" marL="0">
               <a:lnSpc>
                 <a:spcPct val="120000"/>
@@ -4478,17 +4064,17 @@
               <a:buNone/>
             </a:pPr>
             <a:r>
-              <a:rPr lang="en-US" sz="1100" dirty="0">
-                <a:solidFill>
-                  <a:srgbClr val="1F2933"/>
+              <a:rPr lang="en-US" sz="1000" dirty="0">
+                <a:solidFill>
+                  <a:srgbClr val="8A94A3"/>
                 </a:solidFill>
                 <a:latin typeface="Consolas" pitchFamily="34" charset="0"/>
                 <a:ea typeface="Consolas" pitchFamily="34" charset="-122"/>
                 <a:cs typeface="Consolas" pitchFamily="34" charset="-120"/>
               </a:rPr>
-              <a:t>prog -c port=SWD mode=HOTPLUG -rst</a:t>
-            </a:r>
-            <a:endParaRPr lang="en-US" sz="1100" dirty="0"/>
+              <a:t>      ⋮</a:t>
+            </a:r>
+            <a:endParaRPr lang="en-US" sz="1000" dirty="0"/>
           </a:p>
           <a:p>
             <a:pPr indent="0" marL="0">
@@ -4498,7 +4084,7 @@
               <a:buNone/>
             </a:pPr>
             <a:r>
-              <a:rPr lang="en-US" sz="1100" dirty="0">
+              <a:rPr lang="en-US" sz="1000" dirty="0">
                 <a:solidFill>
                   <a:srgbClr val="8A94A3"/>
                 </a:solidFill>
@@ -4506,7 +4092,7 @@
                 <a:ea typeface="Consolas" pitchFamily="34" charset="-122"/>
                 <a:cs typeface="Consolas" pitchFamily="34" charset="-120"/>
               </a:rPr>
-              <a:t>  96  </a:t>
+              <a:t> 216  </a:t>
             </a:r>
             <a:pPr indent="0" marL="0">
               <a:lnSpc>
@@ -4515,17 +4101,17 @@
               <a:buNone/>
             </a:pPr>
             <a:r>
-              <a:rPr lang="en-US" sz="1100" b="1" dirty="0">
-                <a:solidFill>
-                  <a:srgbClr val="0F766E"/>
+              <a:rPr lang="en-US" sz="1000" dirty="0">
+                <a:solidFill>
+                  <a:srgbClr val="1F2933"/>
                 </a:solidFill>
                 <a:latin typeface="Consolas" pitchFamily="34" charset="0"/>
                 <a:ea typeface="Consolas" pitchFamily="34" charset="-122"/>
                 <a:cs typeface="Consolas" pitchFamily="34" charset="-120"/>
               </a:rPr>
-              <a:t>python3 pc/demo_roundtrip.py --read-only</a:t>
-            </a:r>
-            <a:endParaRPr lang="en-US" sz="1100" dirty="0"/>
+              <a:t>capture([programmer, "-c", "port=SWD", "mode=HOTPLUG", "-rst"])</a:t>
+            </a:r>
+            <a:endParaRPr lang="en-US" sz="1000" dirty="0"/>
           </a:p>
           <a:p>
             <a:pPr indent="0" marL="0">
@@ -4535,7 +4121,7 @@
               <a:buNone/>
             </a:pPr>
             <a:r>
-              <a:rPr lang="en-US" sz="1100" dirty="0">
+              <a:rPr lang="en-US" sz="1000" dirty="0">
                 <a:solidFill>
                   <a:srgbClr val="8A94A3"/>
                 </a:solidFill>
@@ -4543,7 +4129,7 @@
                 <a:ea typeface="Consolas" pitchFamily="34" charset="-122"/>
                 <a:cs typeface="Consolas" pitchFamily="34" charset="-120"/>
               </a:rPr>
-              <a:t>  97  </a:t>
+              <a:t> 218  </a:t>
             </a:r>
             <a:pPr indent="0" marL="0">
               <a:lnSpc>
@@ -4552,17 +4138,54 @@
               <a:buNone/>
             </a:pPr>
             <a:r>
-              <a:rPr lang="en-US" sz="1100" dirty="0">
-                <a:solidFill>
-                  <a:srgbClr val="1F2933"/>
+              <a:rPr lang="en-US" sz="1000" b="1" dirty="0">
+                <a:solidFill>
+                  <a:srgbClr val="0F766E"/>
                 </a:solidFill>
                 <a:latin typeface="Consolas" pitchFamily="34" charset="0"/>
                 <a:ea typeface="Consolas" pitchFamily="34" charset="-122"/>
                 <a:cs typeface="Consolas" pitchFamily="34" charset="-120"/>
               </a:rPr>
-              <a:t>python3 pc/bmp_gray.py --convert-only</a:t>
-            </a:r>
-            <a:endParaRPr lang="en-US" sz="1100" dirty="0"/>
+              <a:t>run([sys.executable, "pc/demo_roundtrip.py", "--read-only"])</a:t>
+            </a:r>
+            <a:endParaRPr lang="en-US" sz="1000" dirty="0"/>
+          </a:p>
+          <a:p>
+            <a:pPr indent="0" marL="0">
+              <a:lnSpc>
+                <a:spcPct val="120000"/>
+              </a:lnSpc>
+              <a:buNone/>
+            </a:pPr>
+            <a:r>
+              <a:rPr lang="en-US" sz="1000" dirty="0">
+                <a:solidFill>
+                  <a:srgbClr val="8A94A3"/>
+                </a:solidFill>
+                <a:latin typeface="Consolas" pitchFamily="34" charset="0"/>
+                <a:ea typeface="Consolas" pitchFamily="34" charset="-122"/>
+                <a:cs typeface="Consolas" pitchFamily="34" charset="-120"/>
+              </a:rPr>
+              <a:t> 219  </a:t>
+            </a:r>
+            <a:pPr indent="0" marL="0">
+              <a:lnSpc>
+                <a:spcPct val="120000"/>
+              </a:lnSpc>
+              <a:buNone/>
+            </a:pPr>
+            <a:r>
+              <a:rPr lang="en-US" sz="1000" dirty="0">
+                <a:solidFill>
+                  <a:srgbClr val="1F2933"/>
+                </a:solidFill>
+                <a:latin typeface="Consolas" pitchFamily="34" charset="0"/>
+                <a:ea typeface="Consolas" pitchFamily="34" charset="-122"/>
+                <a:cs typeface="Consolas" pitchFamily="34" charset="-120"/>
+              </a:rPr>
+              <a:t>run([sys.executable, "pc/bmp_gray.py", "--convert-only"])</a:t>
+            </a:r>
+            <a:endParaRPr lang="en-US" sz="1000" dirty="0"/>
           </a:p>
         </p:txBody>
       </p:sp>
@@ -4581,7 +4204,7 @@
           </p:nvPr>
         </p:nvGraphicFramePr>
         <p:xfrm>
-          <a:off x="548640" y="4297680"/>
+          <a:off x="548640" y="4553712"/>
           <a:ext cx="6949440" cy="914400"/>
         </p:xfrm>
         <a:graphic>
@@ -4592,7 +4215,7 @@
                 <a:gridCol w="1828800"/>
                 <a:gridCol w="5120640"/>
               </a:tblGrid>
-              <a:tr h="384048">
+              <a:tr h="338328">
                 <a:tc>
                   <a:txBody>
                     <a:bodyPr/>
@@ -4602,7 +4225,7 @@
                         <a:buNone/>
                       </a:pPr>
                       <a:r>
-                        <a:rPr lang="en-US" sz="1400" b="1" dirty="0">
+                        <a:rPr lang="en-US" sz="1300" b="1" dirty="0">
                           <a:solidFill>
                             <a:srgbClr val="1F2933"/>
                           </a:solidFill>
@@ -4612,7 +4235,7 @@
                         </a:rPr>
                         <a:t>확인</a:t>
                       </a:r>
-                      <a:endParaRPr lang="en-US" sz="1400" dirty="0">
+                      <a:endParaRPr lang="en-US" sz="1300" dirty="0">
                         <a:latin typeface="Malgun Gothic" charset="0"/>
                         <a:ea typeface="Malgun Gothic" charset="0"/>
                         <a:cs typeface="Malgun Gothic" charset="0"/>
@@ -4670,7 +4293,7 @@
                         <a:buNone/>
                       </a:pPr>
                       <a:r>
-                        <a:rPr lang="en-US" sz="1400" b="1" dirty="0">
+                        <a:rPr lang="en-US" sz="1300" b="1" dirty="0">
                           <a:solidFill>
                             <a:srgbClr val="1F2933"/>
                           </a:solidFill>
@@ -4680,7 +4303,7 @@
                         </a:rPr>
                         <a:t>결과</a:t>
                       </a:r>
-                      <a:endParaRPr lang="en-US" sz="1400" dirty="0">
+                      <a:endParaRPr lang="en-US" sz="1300" dirty="0">
                         <a:latin typeface="Malgun Gothic" charset="0"/>
                         <a:ea typeface="Malgun Gothic" charset="0"/>
                         <a:cs typeface="Malgun Gothic" charset="0"/>
@@ -4730,7 +4353,7 @@
                   </a:tcPr>
                 </a:tc>
               </a:tr>
-              <a:tr h="384048">
+              <a:tr h="338328">
                 <a:tc>
                   <a:txBody>
                     <a:bodyPr/>
@@ -4740,7 +4363,7 @@
                         <a:buNone/>
                       </a:pPr>
                       <a:r>
-                        <a:rPr lang="en-US" sz="1400" dirty="0">
+                        <a:rPr lang="en-US" sz="1300" dirty="0">
                           <a:solidFill>
                             <a:srgbClr val="1F2933"/>
                           </a:solidFill>
@@ -4750,7 +4373,7 @@
                         </a:rPr>
                         <a:t>칩 직접 덤프</a:t>
                       </a:r>
-                      <a:endParaRPr lang="en-US" sz="1400" dirty="0">
+                      <a:endParaRPr lang="en-US" sz="1300" dirty="0">
                         <a:latin typeface="Malgun Gothic" charset="0"/>
                         <a:ea typeface="Malgun Gothic" charset="0"/>
                         <a:cs typeface="Malgun Gothic" charset="0"/>
@@ -4805,7 +4428,7 @@
                         <a:buNone/>
                       </a:pPr>
                       <a:r>
-                        <a:rPr lang="en-US" sz="1400" dirty="0">
+                        <a:rPr lang="en-US" sz="1300" dirty="0">
                           <a:solidFill>
                             <a:srgbClr val="1F2933"/>
                           </a:solidFill>
@@ -4815,7 +4438,7 @@
                         </a:rPr>
                         <a:t>0x90000000부터 3,145,782 B = 원본 BMP</a:t>
                       </a:r>
-                      <a:endParaRPr lang="en-US" sz="1400" dirty="0">
+                      <a:endParaRPr lang="en-US" sz="1300" dirty="0">
                         <a:latin typeface="Malgun Gothic" charset="0"/>
                         <a:ea typeface="Malgun Gothic" charset="0"/>
                         <a:cs typeface="Malgun Gothic" charset="0"/>
@@ -4862,7 +4485,7 @@
                   </a:tcPr>
                 </a:tc>
               </a:tr>
-              <a:tr h="384048">
+              <a:tr h="338328">
                 <a:tc>
                   <a:txBody>
                     <a:bodyPr/>
@@ -4872,7 +4495,7 @@
                         <a:buNone/>
                       </a:pPr>
                       <a:r>
-                        <a:rPr lang="en-US" sz="1400" dirty="0">
+                        <a:rPr lang="en-US" sz="1300" dirty="0">
                           <a:solidFill>
                             <a:srgbClr val="1F2933"/>
                           </a:solidFill>
@@ -4882,7 +4505,7 @@
                         </a:rPr>
                         <a:t>RAM 덮어쓰기</a:t>
                       </a:r>
-                      <a:endParaRPr lang="en-US" sz="1400" dirty="0">
+                      <a:endParaRPr lang="en-US" sz="1300" dirty="0">
                         <a:latin typeface="Malgun Gothic" charset="0"/>
                         <a:ea typeface="Malgun Gothic" charset="0"/>
                         <a:cs typeface="Malgun Gothic" charset="0"/>
@@ -4937,7 +4560,7 @@
                         <a:buNone/>
                       </a:pPr>
                       <a:r>
-                        <a:rPr lang="en-US" sz="1400" dirty="0">
+                        <a:rPr lang="en-US" sz="1300" dirty="0">
                           <a:solidFill>
                             <a:srgbClr val="1F2933"/>
                           </a:solidFill>
@@ -4947,7 +4570,7 @@
                         </a:rPr>
                         <a:t>처음·중간·끝 모두 0xA5 확인</a:t>
                       </a:r>
-                      <a:endParaRPr lang="en-US" sz="1400" dirty="0">
+                      <a:endParaRPr lang="en-US" sz="1300" dirty="0">
                         <a:latin typeface="Malgun Gothic" charset="0"/>
                         <a:ea typeface="Malgun Gothic" charset="0"/>
                         <a:cs typeface="Malgun Gothic" charset="0"/>
@@ -4994,7 +4617,7 @@
                   </a:tcPr>
                 </a:tc>
               </a:tr>
-              <a:tr h="384048">
+              <a:tr h="338328">
                 <a:tc>
                   <a:txBody>
                     <a:bodyPr/>
@@ -5004,7 +4627,7 @@
                         <a:buNone/>
                       </a:pPr>
                       <a:r>
-                        <a:rPr lang="en-US" sz="1400" dirty="0">
+                        <a:rPr lang="en-US" sz="1300" dirty="0">
                           <a:solidFill>
                             <a:srgbClr val="1F2933"/>
                           </a:solidFill>
@@ -5014,7 +4637,7 @@
                         </a:rPr>
                         <a:t>읽기 전용 복원</a:t>
                       </a:r>
-                      <a:endParaRPr lang="en-US" sz="1400" dirty="0">
+                      <a:endParaRPr lang="en-US" sz="1300" dirty="0">
                         <a:latin typeface="Malgun Gothic" charset="0"/>
                         <a:ea typeface="Malgun Gothic" charset="0"/>
                         <a:cs typeface="Malgun Gothic" charset="0"/>
@@ -5069,7 +4692,7 @@
                         <a:buNone/>
                       </a:pPr>
                       <a:r>
-                        <a:rPr lang="en-US" sz="1400" dirty="0">
+                        <a:rPr lang="en-US" sz="1300" dirty="0">
                           <a:solidFill>
                             <a:srgbClr val="1F2933"/>
                           </a:solidFill>
@@ -5079,7 +4702,7 @@
                         </a:rPr>
                         <a:t>전체 바이트 일치, 34.6 s</a:t>
                       </a:r>
-                      <a:endParaRPr lang="en-US" sz="1400" dirty="0">
+                      <a:endParaRPr lang="en-US" sz="1300" dirty="0">
                         <a:latin typeface="Malgun Gothic" charset="0"/>
                         <a:ea typeface="Malgun Gothic" charset="0"/>
                         <a:cs typeface="Malgun Gothic" charset="0"/>
@@ -5126,7 +4749,7 @@
                   </a:tcPr>
                 </a:tc>
               </a:tr>
-              <a:tr h="384048">
+              <a:tr h="338328">
                 <a:tc>
                   <a:txBody>
                     <a:bodyPr/>
@@ -5136,7 +4759,7 @@
                         <a:buNone/>
                       </a:pPr>
                       <a:r>
-                        <a:rPr lang="en-US" sz="1400" dirty="0">
+                        <a:rPr lang="en-US" sz="1300" dirty="0">
                           <a:solidFill>
                             <a:srgbClr val="1F2933"/>
                           </a:solidFill>
@@ -5146,7 +4769,7 @@
                         </a:rPr>
                         <a:t>Gray 변환만</a:t>
                       </a:r>
-                      <a:endParaRPr lang="en-US" sz="1400" dirty="0">
+                      <a:endParaRPr lang="en-US" sz="1300" dirty="0">
                         <a:latin typeface="Malgun Gothic" charset="0"/>
                         <a:ea typeface="Malgun Gothic" charset="0"/>
                         <a:cs typeface="Malgun Gothic" charset="0"/>
@@ -5201,7 +4824,7 @@
                         <a:buNone/>
                       </a:pPr>
                       <a:r>
-                        <a:rPr lang="en-US" sz="1400" dirty="0">
+                        <a:rPr lang="en-US" sz="1300" dirty="0">
                           <a:solidFill>
                             <a:srgbClr val="1F2933"/>
                           </a:solidFill>
@@ -5211,7 +4834,7 @@
                         </a:rPr>
                         <a:t>기준 변환과 일치, 20.9 s</a:t>
                       </a:r>
-                      <a:endParaRPr lang="en-US" sz="1400" dirty="0">
+                      <a:endParaRPr lang="en-US" sz="1300" dirty="0">
                         <a:latin typeface="Malgun Gothic" charset="0"/>
                         <a:ea typeface="Malgun Gothic" charset="0"/>
                         <a:cs typeface="Malgun Gothic" charset="0"/>
@@ -5270,7 +4893,7 @@
         </p:nvSpPr>
         <p:spPr>
           <a:xfrm>
-            <a:off x="7863840" y="4297680"/>
+            <a:off x="7863840" y="4553712"/>
             <a:ext cx="3776472" cy="1005840"/>
           </a:xfrm>
           <a:prstGeom prst="rect">
@@ -5337,7 +4960,7 @@
                 <a:ea typeface="Malgun Gothic" pitchFamily="34" charset="-122"/>
                 <a:cs typeface="Malgun Gothic" pitchFamily="34" charset="-120"/>
               </a:rPr>
-              <a:t>2026-10-15 run_all.sh 실행 · 출처: README.md</a:t>
+              <a:t>2026-10-15 run_all.py 실행 · 출처: README.md</a:t>
             </a:r>
             <a:endParaRPr lang="en-US" sz="1100" dirty="0"/>
           </a:p>
@@ -5451,7 +5074,7 @@
                 <a:ea typeface="Malgun Gothic" pitchFamily="34" charset="-122"/>
                 <a:cs typeface="Malgun Gothic" pitchFamily="34" charset="-120"/>
               </a:rPr>
-              <a:t>10월 15일 보드 실행 10회 모두 원본과 3,145,782 B가 일치했습니다</a:t>
+              <a:t>최신 실행에서 원본과 3,145,782 B가 모두 일치했습니다</a:t>
             </a:r>
             <a:endParaRPr lang="en-US" sz="2600" dirty="0"/>
           </a:p>
@@ -5702,10 +5325,9 @@
             <a:tbl>
               <a:tblPr/>
               <a:tblGrid>
-                <a:gridCol w="1508760"/>
-                <a:gridCol w="914400"/>
-                <a:gridCol w="1444752"/>
-                <a:gridCol w="1508760"/>
+                <a:gridCol w="1783080"/>
+                <a:gridCol w="2011680"/>
+                <a:gridCol w="1581912"/>
               </a:tblGrid>
               <a:tr h="566928">
                 <a:tc>
@@ -5726,74 +5348,6 @@
                           <a:cs typeface="Malgun Gothic" pitchFamily="34" charset="-120"/>
                         </a:rPr>
                         <a:t>실행</a:t>
-                      </a:r>
-                      <a:endParaRPr lang="en-US" sz="1400" dirty="0">
-                        <a:latin typeface="Malgun Gothic" charset="0"/>
-                        <a:ea typeface="Malgun Gothic" charset="0"/>
-                        <a:cs typeface="Malgun Gothic" charset="0"/>
-                      </a:endParaRPr>
-                    </a:p>
-                  </a:txBody>
-                  <a:tcPr marL="109728" marR="109728" marT="54864" marB="54864" anchor="ctr">
-                    <a:lnL w="9525" cap="flat" cmpd="sng" algn="ctr">
-                      <a:solidFill>
-                        <a:srgbClr val="D5DAE0"/>
-                      </a:solidFill>
-                      <a:prstDash val="solid"/>
-                      <a:round/>
-                      <a:headEnd type="none" w="med" len="med"/>
-                      <a:tailEnd type="none" w="med" len="med"/>
-                    </a:lnL>
-                    <a:lnR w="9525" cap="flat" cmpd="sng" algn="ctr">
-                      <a:solidFill>
-                        <a:srgbClr val="D5DAE0"/>
-                      </a:solidFill>
-                      <a:prstDash val="solid"/>
-                      <a:round/>
-                      <a:headEnd type="none" w="med" len="med"/>
-                      <a:tailEnd type="none" w="med" len="med"/>
-                    </a:lnR>
-                    <a:lnT w="9525" cap="flat" cmpd="sng" algn="ctr">
-                      <a:solidFill>
-                        <a:srgbClr val="D5DAE0"/>
-                      </a:solidFill>
-                      <a:prstDash val="solid"/>
-                      <a:round/>
-                      <a:headEnd type="none" w="med" len="med"/>
-                      <a:tailEnd type="none" w="med" len="med"/>
-                    </a:lnT>
-                    <a:lnB w="9525" cap="flat" cmpd="sng" algn="ctr">
-                      <a:solidFill>
-                        <a:srgbClr val="D5DAE0"/>
-                      </a:solidFill>
-                      <a:prstDash val="solid"/>
-                      <a:round/>
-                      <a:headEnd type="none" w="med" len="med"/>
-                      <a:tailEnd type="none" w="med" len="med"/>
-                    </a:lnB>
-                    <a:solidFill>
-                      <a:srgbClr val="F3F5F7"/>
-                    </a:solidFill>
-                  </a:tcPr>
-                </a:tc>
-                <a:tc>
-                  <a:txBody>
-                    <a:bodyPr/>
-                    <a:lstStyle/>
-                    <a:p>
-                      <a:pPr indent="0" marL="0">
-                        <a:buNone/>
-                      </a:pPr>
-                      <a:r>
-                        <a:rPr lang="en-US" sz="1400" b="1" dirty="0">
-                          <a:solidFill>
-                            <a:srgbClr val="1F2933"/>
-                          </a:solidFill>
-                          <a:latin typeface="Malgun Gothic" pitchFamily="34" charset="0"/>
-                          <a:ea typeface="Malgun Gothic" pitchFamily="34" charset="-122"/>
-                          <a:cs typeface="Malgun Gothic" pitchFamily="34" charset="-120"/>
-                        </a:rPr>
-                        <a:t>횟수</a:t>
                       </a:r>
                       <a:endParaRPr lang="en-US" sz="1400" dirty="0">
                         <a:latin typeface="Malgun Gothic" charset="0"/>
@@ -6056,71 +5610,6 @@
                         <a:buNone/>
                       </a:pPr>
                       <a:r>
-                        <a:rPr lang="en-US" sz="1400" dirty="0">
-                          <a:solidFill>
-                            <a:srgbClr val="1F2933"/>
-                          </a:solidFill>
-                          <a:latin typeface="Malgun Gothic" pitchFamily="34" charset="0"/>
-                          <a:ea typeface="Malgun Gothic" pitchFamily="34" charset="-122"/>
-                          <a:cs typeface="Malgun Gothic" pitchFamily="34" charset="-120"/>
-                        </a:rPr>
-                        <a:t>5회</a:t>
-                      </a:r>
-                      <a:endParaRPr lang="en-US" sz="1400" dirty="0">
-                        <a:latin typeface="Malgun Gothic" charset="0"/>
-                        <a:ea typeface="Malgun Gothic" charset="0"/>
-                        <a:cs typeface="Malgun Gothic" charset="0"/>
-                      </a:endParaRPr>
-                    </a:p>
-                  </a:txBody>
-                  <a:tcPr marL="109728" marR="109728" marT="54864" marB="54864" anchor="ctr">
-                    <a:lnL w="9525" cap="flat" cmpd="sng" algn="ctr">
-                      <a:solidFill>
-                        <a:srgbClr val="D5DAE0"/>
-                      </a:solidFill>
-                      <a:prstDash val="solid"/>
-                      <a:round/>
-                      <a:headEnd type="none" w="med" len="med"/>
-                      <a:tailEnd type="none" w="med" len="med"/>
-                    </a:lnL>
-                    <a:lnR w="9525" cap="flat" cmpd="sng" algn="ctr">
-                      <a:solidFill>
-                        <a:srgbClr val="D5DAE0"/>
-                      </a:solidFill>
-                      <a:prstDash val="solid"/>
-                      <a:round/>
-                      <a:headEnd type="none" w="med" len="med"/>
-                      <a:tailEnd type="none" w="med" len="med"/>
-                    </a:lnR>
-                    <a:lnT w="9525" cap="flat" cmpd="sng" algn="ctr">
-                      <a:solidFill>
-                        <a:srgbClr val="D5DAE0"/>
-                      </a:solidFill>
-                      <a:prstDash val="solid"/>
-                      <a:round/>
-                      <a:headEnd type="none" w="med" len="med"/>
-                      <a:tailEnd type="none" w="med" len="med"/>
-                    </a:lnT>
-                    <a:lnB w="9525" cap="flat" cmpd="sng" algn="ctr">
-                      <a:solidFill>
-                        <a:srgbClr val="D5DAE0"/>
-                      </a:solidFill>
-                      <a:prstDash val="solid"/>
-                      <a:round/>
-                      <a:headEnd type="none" w="med" len="med"/>
-                      <a:tailEnd type="none" w="med" len="med"/>
-                    </a:lnB>
-                  </a:tcPr>
-                </a:tc>
-                <a:tc>
-                  <a:txBody>
-                    <a:bodyPr/>
-                    <a:lstStyle/>
-                    <a:p>
-                      <a:pPr indent="0" marL="0">
-                        <a:buNone/>
-                      </a:pPr>
-                      <a:r>
                         <a:rPr lang="en-US" sz="1400" b="1" dirty="0">
                           <a:solidFill>
                             <a:srgbClr val="0F766E"/>
@@ -6129,7 +5618,7 @@
                           <a:ea typeface="Malgun Gothic" pitchFamily="34" charset="-122"/>
                           <a:cs typeface="Malgun Gothic" pitchFamily="34" charset="-120"/>
                         </a:rPr>
-                        <a:t>5회 모두 일치</a:t>
+                        <a:t>전체 바이트 일치</a:t>
                       </a:r>
                       <a:endParaRPr lang="en-US" sz="1400" dirty="0">
                         <a:latin typeface="Malgun Gothic" charset="0"/>
@@ -6194,7 +5683,7 @@
                           <a:ea typeface="Malgun Gothic" pitchFamily="34" charset="-122"/>
                           <a:cs typeface="Malgun Gothic" pitchFamily="34" charset="-120"/>
                         </a:rPr>
-                        <a:t>86.4–87.2 s</a:t>
+                        <a:t>86.5 s</a:t>
                       </a:r>
                       <a:endParaRPr lang="en-US" sz="1400" dirty="0">
                         <a:latin typeface="Malgun Gothic" charset="0"/>
@@ -6318,71 +5807,6 @@
                         <a:buNone/>
                       </a:pPr>
                       <a:r>
-                        <a:rPr lang="en-US" sz="1400" dirty="0">
-                          <a:solidFill>
-                            <a:srgbClr val="1F2933"/>
-                          </a:solidFill>
-                          <a:latin typeface="Malgun Gothic" pitchFamily="34" charset="0"/>
-                          <a:ea typeface="Malgun Gothic" pitchFamily="34" charset="-122"/>
-                          <a:cs typeface="Malgun Gothic" pitchFamily="34" charset="-120"/>
-                        </a:rPr>
-                        <a:t>5회</a:t>
-                      </a:r>
-                      <a:endParaRPr lang="en-US" sz="1400" dirty="0">
-                        <a:latin typeface="Malgun Gothic" charset="0"/>
-                        <a:ea typeface="Malgun Gothic" charset="0"/>
-                        <a:cs typeface="Malgun Gothic" charset="0"/>
-                      </a:endParaRPr>
-                    </a:p>
-                  </a:txBody>
-                  <a:tcPr marL="109728" marR="109728" marT="54864" marB="54864" anchor="ctr">
-                    <a:lnL w="9525" cap="flat" cmpd="sng" algn="ctr">
-                      <a:solidFill>
-                        <a:srgbClr val="D5DAE0"/>
-                      </a:solidFill>
-                      <a:prstDash val="solid"/>
-                      <a:round/>
-                      <a:headEnd type="none" w="med" len="med"/>
-                      <a:tailEnd type="none" w="med" len="med"/>
-                    </a:lnL>
-                    <a:lnR w="9525" cap="flat" cmpd="sng" algn="ctr">
-                      <a:solidFill>
-                        <a:srgbClr val="D5DAE0"/>
-                      </a:solidFill>
-                      <a:prstDash val="solid"/>
-                      <a:round/>
-                      <a:headEnd type="none" w="med" len="med"/>
-                      <a:tailEnd type="none" w="med" len="med"/>
-                    </a:lnR>
-                    <a:lnT w="9525" cap="flat" cmpd="sng" algn="ctr">
-                      <a:solidFill>
-                        <a:srgbClr val="D5DAE0"/>
-                      </a:solidFill>
-                      <a:prstDash val="solid"/>
-                      <a:round/>
-                      <a:headEnd type="none" w="med" len="med"/>
-                      <a:tailEnd type="none" w="med" len="med"/>
-                    </a:lnT>
-                    <a:lnB w="9525" cap="flat" cmpd="sng" algn="ctr">
-                      <a:solidFill>
-                        <a:srgbClr val="D5DAE0"/>
-                      </a:solidFill>
-                      <a:prstDash val="solid"/>
-                      <a:round/>
-                      <a:headEnd type="none" w="med" len="med"/>
-                      <a:tailEnd type="none" w="med" len="med"/>
-                    </a:lnB>
-                  </a:tcPr>
-                </a:tc>
-                <a:tc>
-                  <a:txBody>
-                    <a:bodyPr/>
-                    <a:lstStyle/>
-                    <a:p>
-                      <a:pPr indent="0" marL="0">
-                        <a:buNone/>
-                      </a:pPr>
-                      <a:r>
                         <a:rPr lang="en-US" sz="1400" b="1" dirty="0">
                           <a:solidFill>
                             <a:srgbClr val="0F766E"/>
@@ -6391,7 +5815,7 @@
                           <a:ea typeface="Malgun Gothic" pitchFamily="34" charset="-122"/>
                           <a:cs typeface="Malgun Gothic" pitchFamily="34" charset="-120"/>
                         </a:rPr>
-                        <a:t>5회 모두 일치</a:t>
+                        <a:t>전체 바이트 일치</a:t>
                       </a:r>
                       <a:endParaRPr lang="en-US" sz="1400" dirty="0">
                         <a:latin typeface="Malgun Gothic" charset="0"/>
@@ -6456,7 +5880,7 @@
                           <a:ea typeface="Malgun Gothic" pitchFamily="34" charset="-122"/>
                           <a:cs typeface="Malgun Gothic" pitchFamily="34" charset="-120"/>
                         </a:rPr>
-                        <a:t>34.6–35.3 s</a:t>
+                        <a:t>34.6 s</a:t>
                       </a:r>
                       <a:endParaRPr lang="en-US" sz="1400" dirty="0">
                         <a:latin typeface="Malgun Gothic" charset="0"/>
@@ -6580,71 +6004,6 @@
                         <a:buNone/>
                       </a:pPr>
                       <a:r>
-                        <a:rPr lang="en-US" sz="1400" dirty="0">
-                          <a:solidFill>
-                            <a:srgbClr val="1F2933"/>
-                          </a:solidFill>
-                          <a:latin typeface="Malgun Gothic" pitchFamily="34" charset="0"/>
-                          <a:ea typeface="Malgun Gothic" pitchFamily="34" charset="-122"/>
-                          <a:cs typeface="Malgun Gothic" pitchFamily="34" charset="-120"/>
-                        </a:rPr>
-                        <a:t>5회</a:t>
-                      </a:r>
-                      <a:endParaRPr lang="en-US" sz="1400" dirty="0">
-                        <a:latin typeface="Malgun Gothic" charset="0"/>
-                        <a:ea typeface="Malgun Gothic" charset="0"/>
-                        <a:cs typeface="Malgun Gothic" charset="0"/>
-                      </a:endParaRPr>
-                    </a:p>
-                  </a:txBody>
-                  <a:tcPr marL="109728" marR="109728" marT="54864" marB="54864" anchor="ctr">
-                    <a:lnL w="9525" cap="flat" cmpd="sng" algn="ctr">
-                      <a:solidFill>
-                        <a:srgbClr val="D5DAE0"/>
-                      </a:solidFill>
-                      <a:prstDash val="solid"/>
-                      <a:round/>
-                      <a:headEnd type="none" w="med" len="med"/>
-                      <a:tailEnd type="none" w="med" len="med"/>
-                    </a:lnL>
-                    <a:lnR w="9525" cap="flat" cmpd="sng" algn="ctr">
-                      <a:solidFill>
-                        <a:srgbClr val="D5DAE0"/>
-                      </a:solidFill>
-                      <a:prstDash val="solid"/>
-                      <a:round/>
-                      <a:headEnd type="none" w="med" len="med"/>
-                      <a:tailEnd type="none" w="med" len="med"/>
-                    </a:lnR>
-                    <a:lnT w="9525" cap="flat" cmpd="sng" algn="ctr">
-                      <a:solidFill>
-                        <a:srgbClr val="D5DAE0"/>
-                      </a:solidFill>
-                      <a:prstDash val="solid"/>
-                      <a:round/>
-                      <a:headEnd type="none" w="med" len="med"/>
-                      <a:tailEnd type="none" w="med" len="med"/>
-                    </a:lnT>
-                    <a:lnB w="9525" cap="flat" cmpd="sng" algn="ctr">
-                      <a:solidFill>
-                        <a:srgbClr val="D5DAE0"/>
-                      </a:solidFill>
-                      <a:prstDash val="solid"/>
-                      <a:round/>
-                      <a:headEnd type="none" w="med" len="med"/>
-                      <a:tailEnd type="none" w="med" len="med"/>
-                    </a:lnB>
-                  </a:tcPr>
-                </a:tc>
-                <a:tc>
-                  <a:txBody>
-                    <a:bodyPr/>
-                    <a:lstStyle/>
-                    <a:p>
-                      <a:pPr indent="0" marL="0">
-                        <a:buNone/>
-                      </a:pPr>
-                      <a:r>
                         <a:rPr lang="en-US" sz="1400" b="1" dirty="0">
                           <a:solidFill>
                             <a:srgbClr val="0F766E"/>
@@ -6780,7 +6139,7 @@
         <p:spPr>
           <a:xfrm>
             <a:off x="6263640" y="4251960"/>
-            <a:ext cx="5376672" cy="640080"/>
+            <a:ext cx="5376672" cy="685800"/>
           </a:xfrm>
           <a:prstGeom prst="rect">
             <a:avLst/>
@@ -6827,7 +6186,7 @@
                 <a:ea typeface="Malgun Gothic" pitchFamily="34" charset="-122"/>
                 <a:cs typeface="Malgun Gothic" pitchFamily="34" charset="-120"/>
               </a:rPr>
-              <a:t>저장 → 복원 86.4 s 중 MCU 저장 구간 51.4–51.9 s</a:t>
+              <a:t>프로젝트 스크립트와 별도로 shasum·cmp로도 복원 파일을 비교해 일치</a:t>
             </a:r>
             <a:endParaRPr lang="en-US" sz="1300" dirty="0"/>
           </a:p>
@@ -6866,7 +6225,7 @@
                 <a:ea typeface="Malgun Gothic" pitchFamily="34" charset="-122"/>
                 <a:cs typeface="Malgun Gothic" pitchFamily="34" charset="-120"/>
               </a:rPr>
-              <a:t>SHA-256 앞 8자리 표시, 전체 값은 발표자 노트 · 출처: pc/results/demo_report_20261015_*.json (10개)</a:t>
+              <a:t>SHA-256 앞 8자리 표시, 전체 값은 발표자 노트 · 출처: pc/results/demo_report_20261015_200146·200453.json, README.md</a:t>
             </a:r>
             <a:endParaRPr lang="en-US" sz="1200" dirty="0"/>
           </a:p>
@@ -6980,7 +6339,7 @@
                 <a:ea typeface="Malgun Gothic" pitchFamily="34" charset="-122"/>
                 <a:cs typeface="Malgun Gothic" pitchFamily="34" charset="-120"/>
               </a:rPr>
-              <a:t>전송 최적화: 수신과 Flash 쓰기를 겹치고, 백업 단계를 없앴습니다</a:t>
+              <a:t>현장 Demo: run_all.py 한 번으로 9단계를 차례로 실행합니다</a:t>
             </a:r>
             <a:endParaRPr lang="en-US" sz="2600" dirty="0"/>
           </a:p>
@@ -6989,2307 +6348,6 @@
       <p:graphicFrame>
         <p:nvGraphicFramePr>
           <p:cNvPr id="14" name="Table 0"/>
-          <p:cNvGraphicFramePr>
-            <a:graphicFrameLocks noGrp="1"/>
-          </p:cNvGraphicFramePr>
-          <p:nvPr>
-            <p:extLst>
-              <p:ext uri="{D42A27DB-BD31-4B8C-83A1-F6EECF244321}">
-                <p14:modId xmlns:p14="http://schemas.microsoft.com/office/powerpoint/2010/main" val="1579011935"/>
-              </p:ext>
-            </p:extLst>
-          </p:nvPr>
-        </p:nvGraphicFramePr>
-        <p:xfrm>
-          <a:off x="548640" y="1417320"/>
-          <a:ext cx="11091672" cy="914400"/>
-        </p:xfrm>
-        <a:graphic>
-          <a:graphicData uri="http://schemas.openxmlformats.org/drawingml/2006/table">
-            <a:tbl>
-              <a:tblPr/>
-              <a:tblGrid>
-                <a:gridCol w="3429000"/>
-                <a:gridCol w="3931920"/>
-                <a:gridCol w="3730752"/>
-              </a:tblGrid>
-              <a:tr h="640080">
-                <a:tc>
-                  <a:txBody>
-                    <a:bodyPr/>
-                    <a:lstStyle/>
-                    <a:p>
-                      <a:pPr indent="0" marL="0">
-                        <a:buNone/>
-                      </a:pPr>
-                      <a:r>
-                        <a:rPr lang="en-US" sz="1500" b="1" dirty="0">
-                          <a:solidFill>
-                            <a:srgbClr val="1F2933"/>
-                          </a:solidFill>
-                          <a:latin typeface="Malgun Gothic" pitchFamily="34" charset="0"/>
-                          <a:ea typeface="Malgun Gothic" pitchFamily="34" charset="-122"/>
-                          <a:cs typeface="Malgun Gothic" pitchFamily="34" charset="-120"/>
-                        </a:rPr>
-                        <a:t>제약</a:t>
-                      </a:r>
-                      <a:endParaRPr lang="en-US" sz="1500" dirty="0">
-                        <a:latin typeface="Malgun Gothic" charset="0"/>
-                        <a:ea typeface="Malgun Gothic" charset="0"/>
-                        <a:cs typeface="Malgun Gothic" charset="0"/>
-                      </a:endParaRPr>
-                    </a:p>
-                  </a:txBody>
-                  <a:tcPr marL="109728" marR="109728" marT="54864" marB="54864" anchor="ctr">
-                    <a:lnL w="9525" cap="flat" cmpd="sng" algn="ctr">
-                      <a:solidFill>
-                        <a:srgbClr val="D5DAE0"/>
-                      </a:solidFill>
-                      <a:prstDash val="solid"/>
-                      <a:round/>
-                      <a:headEnd type="none" w="med" len="med"/>
-                      <a:tailEnd type="none" w="med" len="med"/>
-                    </a:lnL>
-                    <a:lnR w="9525" cap="flat" cmpd="sng" algn="ctr">
-                      <a:solidFill>
-                        <a:srgbClr val="D5DAE0"/>
-                      </a:solidFill>
-                      <a:prstDash val="solid"/>
-                      <a:round/>
-                      <a:headEnd type="none" w="med" len="med"/>
-                      <a:tailEnd type="none" w="med" len="med"/>
-                    </a:lnR>
-                    <a:lnT w="9525" cap="flat" cmpd="sng" algn="ctr">
-                      <a:solidFill>
-                        <a:srgbClr val="D5DAE0"/>
-                      </a:solidFill>
-                      <a:prstDash val="solid"/>
-                      <a:round/>
-                      <a:headEnd type="none" w="med" len="med"/>
-                      <a:tailEnd type="none" w="med" len="med"/>
-                    </a:lnT>
-                    <a:lnB w="9525" cap="flat" cmpd="sng" algn="ctr">
-                      <a:solidFill>
-                        <a:srgbClr val="D5DAE0"/>
-                      </a:solidFill>
-                      <a:prstDash val="solid"/>
-                      <a:round/>
-                      <a:headEnd type="none" w="med" len="med"/>
-                      <a:tailEnd type="none" w="med" len="med"/>
-                    </a:lnB>
-                    <a:solidFill>
-                      <a:srgbClr val="F3F5F7"/>
-                    </a:solidFill>
-                  </a:tcPr>
-                </a:tc>
-                <a:tc>
-                  <a:txBody>
-                    <a:bodyPr/>
-                    <a:lstStyle/>
-                    <a:p>
-                      <a:pPr indent="0" marL="0">
-                        <a:buNone/>
-                      </a:pPr>
-                      <a:r>
-                        <a:rPr lang="en-US" sz="1500" b="1" dirty="0">
-                          <a:solidFill>
-                            <a:srgbClr val="1F2933"/>
-                          </a:solidFill>
-                          <a:latin typeface="Malgun Gothic" pitchFamily="34" charset="0"/>
-                          <a:ea typeface="Malgun Gothic" pitchFamily="34" charset="-122"/>
-                          <a:cs typeface="Malgun Gothic" pitchFamily="34" charset="-120"/>
-                        </a:rPr>
-                        <a:t>적용한 방법</a:t>
-                      </a:r>
-                      <a:endParaRPr lang="en-US" sz="1500" dirty="0">
-                        <a:latin typeface="Malgun Gothic" charset="0"/>
-                        <a:ea typeface="Malgun Gothic" charset="0"/>
-                        <a:cs typeface="Malgun Gothic" charset="0"/>
-                      </a:endParaRPr>
-                    </a:p>
-                  </a:txBody>
-                  <a:tcPr marL="109728" marR="109728" marT="54864" marB="54864" anchor="ctr">
-                    <a:lnL w="9525" cap="flat" cmpd="sng" algn="ctr">
-                      <a:solidFill>
-                        <a:srgbClr val="D5DAE0"/>
-                      </a:solidFill>
-                      <a:prstDash val="solid"/>
-                      <a:round/>
-                      <a:headEnd type="none" w="med" len="med"/>
-                      <a:tailEnd type="none" w="med" len="med"/>
-                    </a:lnL>
-                    <a:lnR w="9525" cap="flat" cmpd="sng" algn="ctr">
-                      <a:solidFill>
-                        <a:srgbClr val="D5DAE0"/>
-                      </a:solidFill>
-                      <a:prstDash val="solid"/>
-                      <a:round/>
-                      <a:headEnd type="none" w="med" len="med"/>
-                      <a:tailEnd type="none" w="med" len="med"/>
-                    </a:lnR>
-                    <a:lnT w="9525" cap="flat" cmpd="sng" algn="ctr">
-                      <a:solidFill>
-                        <a:srgbClr val="D5DAE0"/>
-                      </a:solidFill>
-                      <a:prstDash val="solid"/>
-                      <a:round/>
-                      <a:headEnd type="none" w="med" len="med"/>
-                      <a:tailEnd type="none" w="med" len="med"/>
-                    </a:lnT>
-                    <a:lnB w="9525" cap="flat" cmpd="sng" algn="ctr">
-                      <a:solidFill>
-                        <a:srgbClr val="D5DAE0"/>
-                      </a:solidFill>
-                      <a:prstDash val="solid"/>
-                      <a:round/>
-                      <a:headEnd type="none" w="med" len="med"/>
-                      <a:tailEnd type="none" w="med" len="med"/>
-                    </a:lnB>
-                    <a:solidFill>
-                      <a:srgbClr val="F3F5F7"/>
-                    </a:solidFill>
-                  </a:tcPr>
-                </a:tc>
-                <a:tc>
-                  <a:txBody>
-                    <a:bodyPr/>
-                    <a:lstStyle/>
-                    <a:p>
-                      <a:pPr indent="0" marL="0">
-                        <a:buNone/>
-                      </a:pPr>
-                      <a:r>
-                        <a:rPr lang="en-US" sz="1500" b="1" dirty="0">
-                          <a:solidFill>
-                            <a:srgbClr val="1F2933"/>
-                          </a:solidFill>
-                          <a:latin typeface="Malgun Gothic" pitchFamily="34" charset="0"/>
-                          <a:ea typeface="Malgun Gothic" pitchFamily="34" charset="-122"/>
-                          <a:cs typeface="Malgun Gothic" pitchFamily="34" charset="-120"/>
-                        </a:rPr>
-                        <a:t>확인된 효과</a:t>
-                      </a:r>
-                      <a:endParaRPr lang="en-US" sz="1500" dirty="0">
-                        <a:latin typeface="Malgun Gothic" charset="0"/>
-                        <a:ea typeface="Malgun Gothic" charset="0"/>
-                        <a:cs typeface="Malgun Gothic" charset="0"/>
-                      </a:endParaRPr>
-                    </a:p>
-                  </a:txBody>
-                  <a:tcPr marL="109728" marR="109728" marT="54864" marB="54864" anchor="ctr">
-                    <a:lnL w="9525" cap="flat" cmpd="sng" algn="ctr">
-                      <a:solidFill>
-                        <a:srgbClr val="D5DAE0"/>
-                      </a:solidFill>
-                      <a:prstDash val="solid"/>
-                      <a:round/>
-                      <a:headEnd type="none" w="med" len="med"/>
-                      <a:tailEnd type="none" w="med" len="med"/>
-                    </a:lnL>
-                    <a:lnR w="9525" cap="flat" cmpd="sng" algn="ctr">
-                      <a:solidFill>
-                        <a:srgbClr val="D5DAE0"/>
-                      </a:solidFill>
-                      <a:prstDash val="solid"/>
-                      <a:round/>
-                      <a:headEnd type="none" w="med" len="med"/>
-                      <a:tailEnd type="none" w="med" len="med"/>
-                    </a:lnR>
-                    <a:lnT w="9525" cap="flat" cmpd="sng" algn="ctr">
-                      <a:solidFill>
-                        <a:srgbClr val="D5DAE0"/>
-                      </a:solidFill>
-                      <a:prstDash val="solid"/>
-                      <a:round/>
-                      <a:headEnd type="none" w="med" len="med"/>
-                      <a:tailEnd type="none" w="med" len="med"/>
-                    </a:lnT>
-                    <a:lnB w="9525" cap="flat" cmpd="sng" algn="ctr">
-                      <a:solidFill>
-                        <a:srgbClr val="D5DAE0"/>
-                      </a:solidFill>
-                      <a:prstDash val="solid"/>
-                      <a:round/>
-                      <a:headEnd type="none" w="med" len="med"/>
-                      <a:tailEnd type="none" w="med" len="med"/>
-                    </a:lnB>
-                    <a:solidFill>
-                      <a:srgbClr val="F3F5F7"/>
-                    </a:solidFill>
-                  </a:tcPr>
-                </a:tc>
-              </a:tr>
-              <a:tr h="640080">
-                <a:tc>
-                  <a:txBody>
-                    <a:bodyPr/>
-                    <a:lstStyle/>
-                    <a:p>
-                      <a:pPr indent="0" marL="0">
-                        <a:buNone/>
-                      </a:pPr>
-                      <a:r>
-                        <a:rPr lang="en-US" sz="1500" dirty="0">
-                          <a:solidFill>
-                            <a:srgbClr val="1F2933"/>
-                          </a:solidFill>
-                          <a:latin typeface="Malgun Gothic" pitchFamily="34" charset="0"/>
-                          <a:ea typeface="Malgun Gothic" pitchFamily="34" charset="-122"/>
-                          <a:cs typeface="Malgun Gothic" pitchFamily="34" charset="-120"/>
-                        </a:rPr>
-                        <a:t>Flash 쓰기 중에도 UART 바이트가 계속 도착</a:t>
-                      </a:r>
-                      <a:endParaRPr lang="en-US" sz="1500" dirty="0">
-                        <a:latin typeface="Malgun Gothic" charset="0"/>
-                        <a:ea typeface="Malgun Gothic" charset="0"/>
-                        <a:cs typeface="Malgun Gothic" charset="0"/>
-                      </a:endParaRPr>
-                    </a:p>
-                  </a:txBody>
-                  <a:tcPr marL="109728" marR="109728" marT="54864" marB="54864" anchor="ctr">
-                    <a:lnL w="9525" cap="flat" cmpd="sng" algn="ctr">
-                      <a:solidFill>
-                        <a:srgbClr val="D5DAE0"/>
-                      </a:solidFill>
-                      <a:prstDash val="solid"/>
-                      <a:round/>
-                      <a:headEnd type="none" w="med" len="med"/>
-                      <a:tailEnd type="none" w="med" len="med"/>
-                    </a:lnL>
-                    <a:lnR w="9525" cap="flat" cmpd="sng" algn="ctr">
-                      <a:solidFill>
-                        <a:srgbClr val="D5DAE0"/>
-                      </a:solidFill>
-                      <a:prstDash val="solid"/>
-                      <a:round/>
-                      <a:headEnd type="none" w="med" len="med"/>
-                      <a:tailEnd type="none" w="med" len="med"/>
-                    </a:lnR>
-                    <a:lnT w="9525" cap="flat" cmpd="sng" algn="ctr">
-                      <a:solidFill>
-                        <a:srgbClr val="D5DAE0"/>
-                      </a:solidFill>
-                      <a:prstDash val="solid"/>
-                      <a:round/>
-                      <a:headEnd type="none" w="med" len="med"/>
-                      <a:tailEnd type="none" w="med" len="med"/>
-                    </a:lnT>
-                    <a:lnB w="9525" cap="flat" cmpd="sng" algn="ctr">
-                      <a:solidFill>
-                        <a:srgbClr val="D5DAE0"/>
-                      </a:solidFill>
-                      <a:prstDash val="solid"/>
-                      <a:round/>
-                      <a:headEnd type="none" w="med" len="med"/>
-                      <a:tailEnd type="none" w="med" len="med"/>
-                    </a:lnB>
-                  </a:tcPr>
-                </a:tc>
-                <a:tc>
-                  <a:txBody>
-                    <a:bodyPr/>
-                    <a:lstStyle/>
-                    <a:p>
-                      <a:pPr indent="0" marL="0">
-                        <a:buNone/>
-                      </a:pPr>
-                      <a:r>
-                        <a:rPr lang="en-US" sz="1500" dirty="0">
-                          <a:solidFill>
-                            <a:srgbClr val="1F2933"/>
-                          </a:solidFill>
-                          <a:latin typeface="Malgun Gothic" pitchFamily="34" charset="0"/>
-                          <a:ea typeface="Malgun Gothic" pitchFamily="34" charset="-122"/>
-                          <a:cs typeface="Malgun Gothic" pitchFamily="34" charset="-120"/>
-                        </a:rPr>
-                        <a:t>RX DMA 하드웨어 이중 버퍼 (4 KiB × 2)</a:t>
-                      </a:r>
-                      <a:endParaRPr lang="en-US" sz="1500" dirty="0">
-                        <a:latin typeface="Malgun Gothic" charset="0"/>
-                        <a:ea typeface="Malgun Gothic" charset="0"/>
-                        <a:cs typeface="Malgun Gothic" charset="0"/>
-                      </a:endParaRPr>
-                    </a:p>
-                  </a:txBody>
-                  <a:tcPr marL="109728" marR="109728" marT="54864" marB="54864" anchor="ctr">
-                    <a:lnL w="9525" cap="flat" cmpd="sng" algn="ctr">
-                      <a:solidFill>
-                        <a:srgbClr val="D5DAE0"/>
-                      </a:solidFill>
-                      <a:prstDash val="solid"/>
-                      <a:round/>
-                      <a:headEnd type="none" w="med" len="med"/>
-                      <a:tailEnd type="none" w="med" len="med"/>
-                    </a:lnL>
-                    <a:lnR w="9525" cap="flat" cmpd="sng" algn="ctr">
-                      <a:solidFill>
-                        <a:srgbClr val="D5DAE0"/>
-                      </a:solidFill>
-                      <a:prstDash val="solid"/>
-                      <a:round/>
-                      <a:headEnd type="none" w="med" len="med"/>
-                      <a:tailEnd type="none" w="med" len="med"/>
-                    </a:lnR>
-                    <a:lnT w="9525" cap="flat" cmpd="sng" algn="ctr">
-                      <a:solidFill>
-                        <a:srgbClr val="D5DAE0"/>
-                      </a:solidFill>
-                      <a:prstDash val="solid"/>
-                      <a:round/>
-                      <a:headEnd type="none" w="med" len="med"/>
-                      <a:tailEnd type="none" w="med" len="med"/>
-                    </a:lnT>
-                    <a:lnB w="9525" cap="flat" cmpd="sng" algn="ctr">
-                      <a:solidFill>
-                        <a:srgbClr val="D5DAE0"/>
-                      </a:solidFill>
-                      <a:prstDash val="solid"/>
-                      <a:round/>
-                      <a:headEnd type="none" w="med" len="med"/>
-                      <a:tailEnd type="none" w="med" len="med"/>
-                    </a:lnB>
-                  </a:tcPr>
-                </a:tc>
-                <a:tc>
-                  <a:txBody>
-                    <a:bodyPr/>
-                    <a:lstStyle/>
-                    <a:p>
-                      <a:pPr indent="0" marL="0">
-                        <a:buNone/>
-                      </a:pPr>
-                      <a:r>
-                        <a:rPr lang="en-US" sz="1500" dirty="0">
-                          <a:solidFill>
-                            <a:srgbClr val="1F2933"/>
-                          </a:solidFill>
-                          <a:latin typeface="Malgun Gothic" pitchFamily="34" charset="0"/>
-                          <a:ea typeface="Malgun Gothic" pitchFamily="34" charset="-122"/>
-                          <a:cs typeface="Malgun Gothic" pitchFamily="34" charset="-120"/>
-                        </a:rPr>
-                        <a:t>저장 5회 모두 버퍼 초과 0회</a:t>
-                      </a:r>
-                      <a:endParaRPr lang="en-US" sz="1500" dirty="0">
-                        <a:latin typeface="Malgun Gothic" charset="0"/>
-                        <a:ea typeface="Malgun Gothic" charset="0"/>
-                        <a:cs typeface="Malgun Gothic" charset="0"/>
-                      </a:endParaRPr>
-                    </a:p>
-                  </a:txBody>
-                  <a:tcPr marL="109728" marR="109728" marT="54864" marB="54864" anchor="ctr">
-                    <a:lnL w="9525" cap="flat" cmpd="sng" algn="ctr">
-                      <a:solidFill>
-                        <a:srgbClr val="D5DAE0"/>
-                      </a:solidFill>
-                      <a:prstDash val="solid"/>
-                      <a:round/>
-                      <a:headEnd type="none" w="med" len="med"/>
-                      <a:tailEnd type="none" w="med" len="med"/>
-                    </a:lnL>
-                    <a:lnR w="9525" cap="flat" cmpd="sng" algn="ctr">
-                      <a:solidFill>
-                        <a:srgbClr val="D5DAE0"/>
-                      </a:solidFill>
-                      <a:prstDash val="solid"/>
-                      <a:round/>
-                      <a:headEnd type="none" w="med" len="med"/>
-                      <a:tailEnd type="none" w="med" len="med"/>
-                    </a:lnR>
-                    <a:lnT w="9525" cap="flat" cmpd="sng" algn="ctr">
-                      <a:solidFill>
-                        <a:srgbClr val="D5DAE0"/>
-                      </a:solidFill>
-                      <a:prstDash val="solid"/>
-                      <a:round/>
-                      <a:headEnd type="none" w="med" len="med"/>
-                      <a:tailEnd type="none" w="med" len="med"/>
-                    </a:lnT>
-                    <a:lnB w="9525" cap="flat" cmpd="sng" algn="ctr">
-                      <a:solidFill>
-                        <a:srgbClr val="D5DAE0"/>
-                      </a:solidFill>
-                      <a:prstDash val="solid"/>
-                      <a:round/>
-                      <a:headEnd type="none" w="med" len="med"/>
-                      <a:tailEnd type="none" w="med" len="med"/>
-                    </a:lnB>
-                  </a:tcPr>
-                </a:tc>
-              </a:tr>
-              <a:tr h="640080">
-                <a:tc>
-                  <a:txBody>
-                    <a:bodyPr/>
-                    <a:lstStyle/>
-                    <a:p>
-                      <a:pPr indent="0" marL="0">
-                        <a:buNone/>
-                      </a:pPr>
-                      <a:r>
-                        <a:rPr lang="en-US" sz="1500" dirty="0">
-                          <a:solidFill>
-                            <a:srgbClr val="1F2933"/>
-                          </a:solidFill>
-                          <a:latin typeface="Malgun Gothic" pitchFamily="34" charset="0"/>
-                          <a:ea typeface="Malgun Gothic" pitchFamily="34" charset="-122"/>
-                          <a:cs typeface="Malgun Gothic" pitchFamily="34" charset="-120"/>
-                        </a:rPr>
-                        <a:t>청크마다 ACK를 기다리면 회선이 멈춤</a:t>
-                      </a:r>
-                      <a:endParaRPr lang="en-US" sz="1500" dirty="0">
-                        <a:latin typeface="Malgun Gothic" charset="0"/>
-                        <a:ea typeface="Malgun Gothic" charset="0"/>
-                        <a:cs typeface="Malgun Gothic" charset="0"/>
-                      </a:endParaRPr>
-                    </a:p>
-                  </a:txBody>
-                  <a:tcPr marL="109728" marR="109728" marT="54864" marB="54864" anchor="ctr">
-                    <a:lnL w="9525" cap="flat" cmpd="sng" algn="ctr">
-                      <a:solidFill>
-                        <a:srgbClr val="D5DAE0"/>
-                      </a:solidFill>
-                      <a:prstDash val="solid"/>
-                      <a:round/>
-                      <a:headEnd type="none" w="med" len="med"/>
-                      <a:tailEnd type="none" w="med" len="med"/>
-                    </a:lnL>
-                    <a:lnR w="9525" cap="flat" cmpd="sng" algn="ctr">
-                      <a:solidFill>
-                        <a:srgbClr val="D5DAE0"/>
-                      </a:solidFill>
-                      <a:prstDash val="solid"/>
-                      <a:round/>
-                      <a:headEnd type="none" w="med" len="med"/>
-                      <a:tailEnd type="none" w="med" len="med"/>
-                    </a:lnR>
-                    <a:lnT w="9525" cap="flat" cmpd="sng" algn="ctr">
-                      <a:solidFill>
-                        <a:srgbClr val="D5DAE0"/>
-                      </a:solidFill>
-                      <a:prstDash val="solid"/>
-                      <a:round/>
-                      <a:headEnd type="none" w="med" len="med"/>
-                      <a:tailEnd type="none" w="med" len="med"/>
-                    </a:lnT>
-                    <a:lnB w="9525" cap="flat" cmpd="sng" algn="ctr">
-                      <a:solidFill>
-                        <a:srgbClr val="D5DAE0"/>
-                      </a:solidFill>
-                      <a:prstDash val="solid"/>
-                      <a:round/>
-                      <a:headEnd type="none" w="med" len="med"/>
-                      <a:tailEnd type="none" w="med" len="med"/>
-                    </a:lnB>
-                  </a:tcPr>
-                </a:tc>
-                <a:tc>
-                  <a:txBody>
-                    <a:bodyPr/>
-                    <a:lstStyle/>
-                    <a:p>
-                      <a:pPr indent="0" marL="0">
-                        <a:buNone/>
-                      </a:pPr>
-                      <a:r>
-                        <a:rPr lang="en-US" sz="1500" dirty="0">
-                          <a:solidFill>
-                            <a:srgbClr val="1F2933"/>
-                          </a:solidFill>
-                          <a:latin typeface="Malgun Gothic" pitchFamily="34" charset="0"/>
-                          <a:ea typeface="Malgun Gothic" pitchFamily="34" charset="-122"/>
-                          <a:cs typeface="Malgun Gothic" pitchFamily="34" charset="-120"/>
-                        </a:rPr>
-                        <a:t>ACK 전에 다음 청크까지 전송 (최대 2청크)</a:t>
-                      </a:r>
-                      <a:endParaRPr lang="en-US" sz="1500" dirty="0">
-                        <a:latin typeface="Malgun Gothic" charset="0"/>
-                        <a:ea typeface="Malgun Gothic" charset="0"/>
-                        <a:cs typeface="Malgun Gothic" charset="0"/>
-                      </a:endParaRPr>
-                    </a:p>
-                  </a:txBody>
-                  <a:tcPr marL="109728" marR="109728" marT="54864" marB="54864" anchor="ctr">
-                    <a:lnL w="9525" cap="flat" cmpd="sng" algn="ctr">
-                      <a:solidFill>
-                        <a:srgbClr val="D5DAE0"/>
-                      </a:solidFill>
-                      <a:prstDash val="solid"/>
-                      <a:round/>
-                      <a:headEnd type="none" w="med" len="med"/>
-                      <a:tailEnd type="none" w="med" len="med"/>
-                    </a:lnL>
-                    <a:lnR w="9525" cap="flat" cmpd="sng" algn="ctr">
-                      <a:solidFill>
-                        <a:srgbClr val="D5DAE0"/>
-                      </a:solidFill>
-                      <a:prstDash val="solid"/>
-                      <a:round/>
-                      <a:headEnd type="none" w="med" len="med"/>
-                      <a:tailEnd type="none" w="med" len="med"/>
-                    </a:lnR>
-                    <a:lnT w="9525" cap="flat" cmpd="sng" algn="ctr">
-                      <a:solidFill>
-                        <a:srgbClr val="D5DAE0"/>
-                      </a:solidFill>
-                      <a:prstDash val="solid"/>
-                      <a:round/>
-                      <a:headEnd type="none" w="med" len="med"/>
-                      <a:tailEnd type="none" w="med" len="med"/>
-                    </a:lnT>
-                    <a:lnB w="9525" cap="flat" cmpd="sng" algn="ctr">
-                      <a:solidFill>
-                        <a:srgbClr val="D5DAE0"/>
-                      </a:solidFill>
-                      <a:prstDash val="solid"/>
-                      <a:round/>
-                      <a:headEnd type="none" w="med" len="med"/>
-                      <a:tailEnd type="none" w="med" len="med"/>
-                    </a:lnB>
-                  </a:tcPr>
-                </a:tc>
-                <a:tc>
-                  <a:txBody>
-                    <a:bodyPr/>
-                    <a:lstStyle/>
-                    <a:p>
-                      <a:pPr indent="0" marL="0">
-                        <a:buNone/>
-                      </a:pPr>
-                      <a:r>
-                        <a:rPr lang="en-US" sz="1500" i="1" dirty="0">
-                          <a:solidFill>
-                            <a:srgbClr val="5F6B7A"/>
-                          </a:solidFill>
-                          <a:latin typeface="Malgun Gothic" pitchFamily="34" charset="0"/>
-                          <a:ea typeface="Malgun Gothic" pitchFamily="34" charset="-122"/>
-                          <a:cs typeface="Malgun Gothic" pitchFamily="34" charset="-120"/>
-                        </a:rPr>
-                        <a:t>[자료 필요: 1청크 방식 대비 전송 시간]</a:t>
-                      </a:r>
-                      <a:endParaRPr lang="en-US" sz="1500" dirty="0">
-                        <a:latin typeface="Malgun Gothic" charset="0"/>
-                        <a:ea typeface="Malgun Gothic" charset="0"/>
-                        <a:cs typeface="Malgun Gothic" charset="0"/>
-                      </a:endParaRPr>
-                    </a:p>
-                  </a:txBody>
-                  <a:tcPr marL="109728" marR="109728" marT="54864" marB="54864" anchor="ctr">
-                    <a:lnL w="9525" cap="flat" cmpd="sng" algn="ctr">
-                      <a:solidFill>
-                        <a:srgbClr val="D5DAE0"/>
-                      </a:solidFill>
-                      <a:prstDash val="solid"/>
-                      <a:round/>
-                      <a:headEnd type="none" w="med" len="med"/>
-                      <a:tailEnd type="none" w="med" len="med"/>
-                    </a:lnL>
-                    <a:lnR w="9525" cap="flat" cmpd="sng" algn="ctr">
-                      <a:solidFill>
-                        <a:srgbClr val="D5DAE0"/>
-                      </a:solidFill>
-                      <a:prstDash val="solid"/>
-                      <a:round/>
-                      <a:headEnd type="none" w="med" len="med"/>
-                      <a:tailEnd type="none" w="med" len="med"/>
-                    </a:lnR>
-                    <a:lnT w="9525" cap="flat" cmpd="sng" algn="ctr">
-                      <a:solidFill>
-                        <a:srgbClr val="D5DAE0"/>
-                      </a:solidFill>
-                      <a:prstDash val="solid"/>
-                      <a:round/>
-                      <a:headEnd type="none" w="med" len="med"/>
-                      <a:tailEnd type="none" w="med" len="med"/>
-                    </a:lnT>
-                    <a:lnB w="9525" cap="flat" cmpd="sng" algn="ctr">
-                      <a:solidFill>
-                        <a:srgbClr val="D5DAE0"/>
-                      </a:solidFill>
-                      <a:prstDash val="solid"/>
-                      <a:round/>
-                      <a:headEnd type="none" w="med" len="med"/>
-                      <a:tailEnd type="none" w="med" len="med"/>
-                    </a:lnB>
-                  </a:tcPr>
-                </a:tc>
-              </a:tr>
-              <a:tr h="640080">
-                <a:tc>
-                  <a:txBody>
-                    <a:bodyPr/>
-                    <a:lstStyle/>
-                    <a:p>
-                      <a:pPr indent="0" marL="0">
-                        <a:buNone/>
-                      </a:pPr>
-                      <a:r>
-                        <a:rPr lang="en-US" sz="1500" dirty="0">
-                          <a:solidFill>
-                            <a:srgbClr val="1F2933"/>
-                          </a:solidFill>
-                          <a:latin typeface="Malgun Gothic" pitchFamily="34" charset="0"/>
-                          <a:ea typeface="Malgun Gothic" pitchFamily="34" charset="-122"/>
-                          <a:cs typeface="Malgun Gothic" pitchFamily="34" charset="-120"/>
-                        </a:rPr>
-                        <a:t>복원 데이터 송신 중 CPU 대기</a:t>
-                      </a:r>
-                      <a:endParaRPr lang="en-US" sz="1500" dirty="0">
-                        <a:latin typeface="Malgun Gothic" charset="0"/>
-                        <a:ea typeface="Malgun Gothic" charset="0"/>
-                        <a:cs typeface="Malgun Gothic" charset="0"/>
-                      </a:endParaRPr>
-                    </a:p>
-                  </a:txBody>
-                  <a:tcPr marL="109728" marR="109728" marT="54864" marB="54864" anchor="ctr">
-                    <a:lnL w="9525" cap="flat" cmpd="sng" algn="ctr">
-                      <a:solidFill>
-                        <a:srgbClr val="D5DAE0"/>
-                      </a:solidFill>
-                      <a:prstDash val="solid"/>
-                      <a:round/>
-                      <a:headEnd type="none" w="med" len="med"/>
-                      <a:tailEnd type="none" w="med" len="med"/>
-                    </a:lnL>
-                    <a:lnR w="9525" cap="flat" cmpd="sng" algn="ctr">
-                      <a:solidFill>
-                        <a:srgbClr val="D5DAE0"/>
-                      </a:solidFill>
-                      <a:prstDash val="solid"/>
-                      <a:round/>
-                      <a:headEnd type="none" w="med" len="med"/>
-                      <a:tailEnd type="none" w="med" len="med"/>
-                    </a:lnR>
-                    <a:lnT w="9525" cap="flat" cmpd="sng" algn="ctr">
-                      <a:solidFill>
-                        <a:srgbClr val="D5DAE0"/>
-                      </a:solidFill>
-                      <a:prstDash val="solid"/>
-                      <a:round/>
-                      <a:headEnd type="none" w="med" len="med"/>
-                      <a:tailEnd type="none" w="med" len="med"/>
-                    </a:lnT>
-                    <a:lnB w="9525" cap="flat" cmpd="sng" algn="ctr">
-                      <a:solidFill>
-                        <a:srgbClr val="D5DAE0"/>
-                      </a:solidFill>
-                      <a:prstDash val="solid"/>
-                      <a:round/>
-                      <a:headEnd type="none" w="med" len="med"/>
-                      <a:tailEnd type="none" w="med" len="med"/>
-                    </a:lnB>
-                  </a:tcPr>
-                </a:tc>
-                <a:tc>
-                  <a:txBody>
-                    <a:bodyPr/>
-                    <a:lstStyle/>
-                    <a:p>
-                      <a:pPr indent="0" marL="0">
-                        <a:buNone/>
-                      </a:pPr>
-                      <a:r>
-                        <a:rPr lang="en-US" sz="1500" dirty="0">
-                          <a:solidFill>
-                            <a:srgbClr val="1F2933"/>
-                          </a:solidFill>
-                          <a:latin typeface="Malgun Gothic" pitchFamily="34" charset="0"/>
-                          <a:ea typeface="Malgun Gothic" pitchFamily="34" charset="-122"/>
-                          <a:cs typeface="Malgun Gothic" pitchFamily="34" charset="-120"/>
-                        </a:rPr>
-                        <a:t>UART TX DMA 이중 버퍼 (4 KiB × 2)</a:t>
-                      </a:r>
-                      <a:endParaRPr lang="en-US" sz="1500" dirty="0">
-                        <a:latin typeface="Malgun Gothic" charset="0"/>
-                        <a:ea typeface="Malgun Gothic" charset="0"/>
-                        <a:cs typeface="Malgun Gothic" charset="0"/>
-                      </a:endParaRPr>
-                    </a:p>
-                  </a:txBody>
-                  <a:tcPr marL="109728" marR="109728" marT="54864" marB="54864" anchor="ctr">
-                    <a:lnL w="9525" cap="flat" cmpd="sng" algn="ctr">
-                      <a:solidFill>
-                        <a:srgbClr val="D5DAE0"/>
-                      </a:solidFill>
-                      <a:prstDash val="solid"/>
-                      <a:round/>
-                      <a:headEnd type="none" w="med" len="med"/>
-                      <a:tailEnd type="none" w="med" len="med"/>
-                    </a:lnL>
-                    <a:lnR w="9525" cap="flat" cmpd="sng" algn="ctr">
-                      <a:solidFill>
-                        <a:srgbClr val="D5DAE0"/>
-                      </a:solidFill>
-                      <a:prstDash val="solid"/>
-                      <a:round/>
-                      <a:headEnd type="none" w="med" len="med"/>
-                      <a:tailEnd type="none" w="med" len="med"/>
-                    </a:lnR>
-                    <a:lnT w="9525" cap="flat" cmpd="sng" algn="ctr">
-                      <a:solidFill>
-                        <a:srgbClr val="D5DAE0"/>
-                      </a:solidFill>
-                      <a:prstDash val="solid"/>
-                      <a:round/>
-                      <a:headEnd type="none" w="med" len="med"/>
-                      <a:tailEnd type="none" w="med" len="med"/>
-                    </a:lnT>
-                    <a:lnB w="9525" cap="flat" cmpd="sng" algn="ctr">
-                      <a:solidFill>
-                        <a:srgbClr val="D5DAE0"/>
-                      </a:solidFill>
-                      <a:prstDash val="solid"/>
-                      <a:round/>
-                      <a:headEnd type="none" w="med" len="med"/>
-                      <a:tailEnd type="none" w="med" len="med"/>
-                    </a:lnB>
-                  </a:tcPr>
-                </a:tc>
-                <a:tc>
-                  <a:txBody>
-                    <a:bodyPr/>
-                    <a:lstStyle/>
-                    <a:p>
-                      <a:pPr indent="0" marL="0">
-                        <a:buNone/>
-                      </a:pPr>
-                      <a:r>
-                        <a:rPr lang="en-US" sz="1500" dirty="0">
-                          <a:solidFill>
-                            <a:srgbClr val="1F2933"/>
-                          </a:solidFill>
-                          <a:latin typeface="Malgun Gothic" pitchFamily="34" charset="0"/>
-                          <a:ea typeface="Malgun Gothic" pitchFamily="34" charset="-122"/>
-                          <a:cs typeface="Malgun Gothic" pitchFamily="34" charset="-120"/>
-                        </a:rPr>
-                        <a:t>읽기 전용 복원 34.6 s, 회선 계산값 34.1 s</a:t>
-                      </a:r>
-                      <a:endParaRPr lang="en-US" sz="1500" dirty="0">
-                        <a:latin typeface="Malgun Gothic" charset="0"/>
-                        <a:ea typeface="Malgun Gothic" charset="0"/>
-                        <a:cs typeface="Malgun Gothic" charset="0"/>
-                      </a:endParaRPr>
-                    </a:p>
-                  </a:txBody>
-                  <a:tcPr marL="109728" marR="109728" marT="54864" marB="54864" anchor="ctr">
-                    <a:lnL w="9525" cap="flat" cmpd="sng" algn="ctr">
-                      <a:solidFill>
-                        <a:srgbClr val="D5DAE0"/>
-                      </a:solidFill>
-                      <a:prstDash val="solid"/>
-                      <a:round/>
-                      <a:headEnd type="none" w="med" len="med"/>
-                      <a:tailEnd type="none" w="med" len="med"/>
-                    </a:lnL>
-                    <a:lnR w="9525" cap="flat" cmpd="sng" algn="ctr">
-                      <a:solidFill>
-                        <a:srgbClr val="D5DAE0"/>
-                      </a:solidFill>
-                      <a:prstDash val="solid"/>
-                      <a:round/>
-                      <a:headEnd type="none" w="med" len="med"/>
-                      <a:tailEnd type="none" w="med" len="med"/>
-                    </a:lnR>
-                    <a:lnT w="9525" cap="flat" cmpd="sng" algn="ctr">
-                      <a:solidFill>
-                        <a:srgbClr val="D5DAE0"/>
-                      </a:solidFill>
-                      <a:prstDash val="solid"/>
-                      <a:round/>
-                      <a:headEnd type="none" w="med" len="med"/>
-                      <a:tailEnd type="none" w="med" len="med"/>
-                    </a:lnT>
-                    <a:lnB w="9525" cap="flat" cmpd="sng" algn="ctr">
-                      <a:solidFill>
-                        <a:srgbClr val="D5DAE0"/>
-                      </a:solidFill>
-                      <a:prstDash val="solid"/>
-                      <a:round/>
-                      <a:headEnd type="none" w="med" len="med"/>
-                      <a:tailEnd type="none" w="med" len="med"/>
-                    </a:lnB>
-                  </a:tcPr>
-                </a:tc>
-              </a:tr>
-              <a:tr h="640080">
-                <a:tc>
-                  <a:txBody>
-                    <a:bodyPr/>
-                    <a:lstStyle/>
-                    <a:p>
-                      <a:pPr indent="0" marL="0">
-                        <a:buNone/>
-                      </a:pPr>
-                      <a:r>
-                        <a:rPr lang="en-US" sz="1500" dirty="0">
-                          <a:solidFill>
-                            <a:srgbClr val="1F2933"/>
-                          </a:solidFill>
-                          <a:latin typeface="Malgun Gothic" pitchFamily="34" charset="0"/>
-                          <a:ea typeface="Malgun Gothic" pitchFamily="34" charset="-122"/>
-                          <a:cs typeface="Malgun Gothic" pitchFamily="34" charset="-120"/>
-                        </a:rPr>
-                        <a:t>저장 전 Flash 백업 읽기</a:t>
-                      </a:r>
-                      <a:endParaRPr lang="en-US" sz="1500" dirty="0">
-                        <a:latin typeface="Malgun Gothic" charset="0"/>
-                        <a:ea typeface="Malgun Gothic" charset="0"/>
-                        <a:cs typeface="Malgun Gothic" charset="0"/>
-                      </a:endParaRPr>
-                    </a:p>
-                  </a:txBody>
-                  <a:tcPr marL="109728" marR="109728" marT="54864" marB="54864" anchor="ctr">
-                    <a:lnL w="9525" cap="flat" cmpd="sng" algn="ctr">
-                      <a:solidFill>
-                        <a:srgbClr val="D5DAE0"/>
-                      </a:solidFill>
-                      <a:prstDash val="solid"/>
-                      <a:round/>
-                      <a:headEnd type="none" w="med" len="med"/>
-                      <a:tailEnd type="none" w="med" len="med"/>
-                    </a:lnL>
-                    <a:lnR w="9525" cap="flat" cmpd="sng" algn="ctr">
-                      <a:solidFill>
-                        <a:srgbClr val="D5DAE0"/>
-                      </a:solidFill>
-                      <a:prstDash val="solid"/>
-                      <a:round/>
-                      <a:headEnd type="none" w="med" len="med"/>
-                      <a:tailEnd type="none" w="med" len="med"/>
-                    </a:lnR>
-                    <a:lnT w="9525" cap="flat" cmpd="sng" algn="ctr">
-                      <a:solidFill>
-                        <a:srgbClr val="D5DAE0"/>
-                      </a:solidFill>
-                      <a:prstDash val="solid"/>
-                      <a:round/>
-                      <a:headEnd type="none" w="med" len="med"/>
-                      <a:tailEnd type="none" w="med" len="med"/>
-                    </a:lnT>
-                    <a:lnB w="9525" cap="flat" cmpd="sng" algn="ctr">
-                      <a:solidFill>
-                        <a:srgbClr val="D5DAE0"/>
-                      </a:solidFill>
-                      <a:prstDash val="solid"/>
-                      <a:round/>
-                      <a:headEnd type="none" w="med" len="med"/>
-                      <a:tailEnd type="none" w="med" len="med"/>
-                    </a:lnB>
-                  </a:tcPr>
-                </a:tc>
-                <a:tc>
-                  <a:txBody>
-                    <a:bodyPr/>
-                    <a:lstStyle/>
-                    <a:p>
-                      <a:pPr indent="0" marL="0">
-                        <a:buNone/>
-                      </a:pPr>
-                      <a:r>
-                        <a:rPr lang="en-US" sz="1500" dirty="0">
-                          <a:solidFill>
-                            <a:srgbClr val="1F2933"/>
-                          </a:solidFill>
-                          <a:latin typeface="Malgun Gothic" pitchFamily="34" charset="0"/>
-                          <a:ea typeface="Malgun Gothic" pitchFamily="34" charset="-122"/>
-                          <a:cs typeface="Malgun Gothic" pitchFamily="34" charset="-120"/>
-                        </a:rPr>
-                        <a:t>백업 단계 제거, 바로 삭제·쓰기</a:t>
-                      </a:r>
-                      <a:endParaRPr lang="en-US" sz="1500" dirty="0">
-                        <a:latin typeface="Malgun Gothic" charset="0"/>
-                        <a:ea typeface="Malgun Gothic" charset="0"/>
-                        <a:cs typeface="Malgun Gothic" charset="0"/>
-                      </a:endParaRPr>
-                    </a:p>
-                  </a:txBody>
-                  <a:tcPr marL="109728" marR="109728" marT="54864" marB="54864" anchor="ctr">
-                    <a:lnL w="9525" cap="flat" cmpd="sng" algn="ctr">
-                      <a:solidFill>
-                        <a:srgbClr val="D5DAE0"/>
-                      </a:solidFill>
-                      <a:prstDash val="solid"/>
-                      <a:round/>
-                      <a:headEnd type="none" w="med" len="med"/>
-                      <a:tailEnd type="none" w="med" len="med"/>
-                    </a:lnL>
-                    <a:lnR w="9525" cap="flat" cmpd="sng" algn="ctr">
-                      <a:solidFill>
-                        <a:srgbClr val="D5DAE0"/>
-                      </a:solidFill>
-                      <a:prstDash val="solid"/>
-                      <a:round/>
-                      <a:headEnd type="none" w="med" len="med"/>
-                      <a:tailEnd type="none" w="med" len="med"/>
-                    </a:lnR>
-                    <a:lnT w="9525" cap="flat" cmpd="sng" algn="ctr">
-                      <a:solidFill>
-                        <a:srgbClr val="D5DAE0"/>
-                      </a:solidFill>
-                      <a:prstDash val="solid"/>
-                      <a:round/>
-                      <a:headEnd type="none" w="med" len="med"/>
-                      <a:tailEnd type="none" w="med" len="med"/>
-                    </a:lnT>
-                    <a:lnB w="9525" cap="flat" cmpd="sng" algn="ctr">
-                      <a:solidFill>
-                        <a:srgbClr val="D5DAE0"/>
-                      </a:solidFill>
-                      <a:prstDash val="solid"/>
-                      <a:round/>
-                      <a:headEnd type="none" w="med" len="med"/>
-                      <a:tailEnd type="none" w="med" len="med"/>
-                    </a:lnB>
-                  </a:tcPr>
-                </a:tc>
-                <a:tc>
-                  <a:txBody>
-                    <a:bodyPr/>
-                    <a:lstStyle/>
-                    <a:p>
-                      <a:pPr indent="0" marL="0">
-                        <a:buNone/>
-                      </a:pPr>
-                      <a:r>
-                        <a:rPr lang="en-US" sz="1500" dirty="0">
-                          <a:solidFill>
-                            <a:srgbClr val="1F2933"/>
-                          </a:solidFill>
-                          <a:latin typeface="Malgun Gothic" pitchFamily="34" charset="0"/>
-                          <a:ea typeface="Malgun Gothic" pitchFamily="34" charset="-122"/>
-                          <a:cs typeface="Malgun Gothic" pitchFamily="34" charset="-120"/>
-                        </a:rPr>
-                        <a:t>Gray 전체 과정 116.96 s → 72.8 s</a:t>
-                      </a:r>
-                      <a:endParaRPr lang="en-US" sz="1500" dirty="0">
-                        <a:latin typeface="Malgun Gothic" charset="0"/>
-                        <a:ea typeface="Malgun Gothic" charset="0"/>
-                        <a:cs typeface="Malgun Gothic" charset="0"/>
-                      </a:endParaRPr>
-                    </a:p>
-                  </a:txBody>
-                  <a:tcPr marL="109728" marR="109728" marT="54864" marB="54864" anchor="ctr">
-                    <a:lnL w="9525" cap="flat" cmpd="sng" algn="ctr">
-                      <a:solidFill>
-                        <a:srgbClr val="D5DAE0"/>
-                      </a:solidFill>
-                      <a:prstDash val="solid"/>
-                      <a:round/>
-                      <a:headEnd type="none" w="med" len="med"/>
-                      <a:tailEnd type="none" w="med" len="med"/>
-                    </a:lnL>
-                    <a:lnR w="9525" cap="flat" cmpd="sng" algn="ctr">
-                      <a:solidFill>
-                        <a:srgbClr val="D5DAE0"/>
-                      </a:solidFill>
-                      <a:prstDash val="solid"/>
-                      <a:round/>
-                      <a:headEnd type="none" w="med" len="med"/>
-                      <a:tailEnd type="none" w="med" len="med"/>
-                    </a:lnR>
-                    <a:lnT w="9525" cap="flat" cmpd="sng" algn="ctr">
-                      <a:solidFill>
-                        <a:srgbClr val="D5DAE0"/>
-                      </a:solidFill>
-                      <a:prstDash val="solid"/>
-                      <a:round/>
-                      <a:headEnd type="none" w="med" len="med"/>
-                      <a:tailEnd type="none" w="med" len="med"/>
-                    </a:lnT>
-                    <a:lnB w="9525" cap="flat" cmpd="sng" algn="ctr">
-                      <a:solidFill>
-                        <a:srgbClr val="D5DAE0"/>
-                      </a:solidFill>
-                      <a:prstDash val="solid"/>
-                      <a:round/>
-                      <a:headEnd type="none" w="med" len="med"/>
-                      <a:tailEnd type="none" w="med" len="med"/>
-                    </a:lnB>
-                  </a:tcPr>
-                </a:tc>
-              </a:tr>
-              <a:tr h="640080">
-                <a:tc>
-                  <a:txBody>
-                    <a:bodyPr/>
-                    <a:lstStyle/>
-                    <a:p>
-                      <a:pPr indent="0" marL="0">
-                        <a:buNone/>
-                      </a:pPr>
-                      <a:r>
-                        <a:rPr lang="en-US" sz="1500" dirty="0">
-                          <a:solidFill>
-                            <a:srgbClr val="1F2933"/>
-                          </a:solidFill>
-                          <a:latin typeface="Malgun Gothic" pitchFamily="34" charset="0"/>
-                          <a:ea typeface="Malgun Gothic" pitchFamily="34" charset="-122"/>
-                          <a:cs typeface="Malgun Gothic" pitchFamily="34" charset="-120"/>
-                        </a:rPr>
-                        <a:t>이미지 3 MiB &gt; SRAM 320 KiB</a:t>
-                      </a:r>
-                      <a:endParaRPr lang="en-US" sz="1500" dirty="0">
-                        <a:latin typeface="Malgun Gothic" charset="0"/>
-                        <a:ea typeface="Malgun Gothic" charset="0"/>
-                        <a:cs typeface="Malgun Gothic" charset="0"/>
-                      </a:endParaRPr>
-                    </a:p>
-                  </a:txBody>
-                  <a:tcPr marL="109728" marR="109728" marT="54864" marB="54864" anchor="ctr">
-                    <a:lnL w="9525" cap="flat" cmpd="sng" algn="ctr">
-                      <a:solidFill>
-                        <a:srgbClr val="D5DAE0"/>
-                      </a:solidFill>
-                      <a:prstDash val="solid"/>
-                      <a:round/>
-                      <a:headEnd type="none" w="med" len="med"/>
-                      <a:tailEnd type="none" w="med" len="med"/>
-                    </a:lnL>
-                    <a:lnR w="9525" cap="flat" cmpd="sng" algn="ctr">
-                      <a:solidFill>
-                        <a:srgbClr val="D5DAE0"/>
-                      </a:solidFill>
-                      <a:prstDash val="solid"/>
-                      <a:round/>
-                      <a:headEnd type="none" w="med" len="med"/>
-                      <a:tailEnd type="none" w="med" len="med"/>
-                    </a:lnR>
-                    <a:lnT w="9525" cap="flat" cmpd="sng" algn="ctr">
-                      <a:solidFill>
-                        <a:srgbClr val="D5DAE0"/>
-                      </a:solidFill>
-                      <a:prstDash val="solid"/>
-                      <a:round/>
-                      <a:headEnd type="none" w="med" len="med"/>
-                      <a:tailEnd type="none" w="med" len="med"/>
-                    </a:lnT>
-                    <a:lnB w="9525" cap="flat" cmpd="sng" algn="ctr">
-                      <a:solidFill>
-                        <a:srgbClr val="D5DAE0"/>
-                      </a:solidFill>
-                      <a:prstDash val="solid"/>
-                      <a:round/>
-                      <a:headEnd type="none" w="med" len="med"/>
-                      <a:tailEnd type="none" w="med" len="med"/>
-                    </a:lnB>
-                  </a:tcPr>
-                </a:tc>
-                <a:tc>
-                  <a:txBody>
-                    <a:bodyPr/>
-                    <a:lstStyle/>
-                    <a:p>
-                      <a:pPr indent="0" marL="0">
-                        <a:buNone/>
-                      </a:pPr>
-                      <a:r>
-                        <a:rPr lang="en-US" sz="1500" dirty="0">
-                          <a:solidFill>
-                            <a:srgbClr val="1F2933"/>
-                          </a:solidFill>
-                          <a:latin typeface="Malgun Gothic" pitchFamily="34" charset="0"/>
-                          <a:ea typeface="Malgun Gothic" pitchFamily="34" charset="-122"/>
-                          <a:cs typeface="Malgun Gothic" pitchFamily="34" charset="-120"/>
-                        </a:rPr>
-                        <a:t>청크 버퍼 재사용, 이미지 전체를 RAM에 두지 않음</a:t>
-                      </a:r>
-                      <a:endParaRPr lang="en-US" sz="1500" dirty="0">
-                        <a:latin typeface="Malgun Gothic" charset="0"/>
-                        <a:ea typeface="Malgun Gothic" charset="0"/>
-                        <a:cs typeface="Malgun Gothic" charset="0"/>
-                      </a:endParaRPr>
-                    </a:p>
-                  </a:txBody>
-                  <a:tcPr marL="109728" marR="109728" marT="54864" marB="54864" anchor="ctr">
-                    <a:lnL w="9525" cap="flat" cmpd="sng" algn="ctr">
-                      <a:solidFill>
-                        <a:srgbClr val="D5DAE0"/>
-                      </a:solidFill>
-                      <a:prstDash val="solid"/>
-                      <a:round/>
-                      <a:headEnd type="none" w="med" len="med"/>
-                      <a:tailEnd type="none" w="med" len="med"/>
-                    </a:lnL>
-                    <a:lnR w="9525" cap="flat" cmpd="sng" algn="ctr">
-                      <a:solidFill>
-                        <a:srgbClr val="D5DAE0"/>
-                      </a:solidFill>
-                      <a:prstDash val="solid"/>
-                      <a:round/>
-                      <a:headEnd type="none" w="med" len="med"/>
-                      <a:tailEnd type="none" w="med" len="med"/>
-                    </a:lnR>
-                    <a:lnT w="9525" cap="flat" cmpd="sng" algn="ctr">
-                      <a:solidFill>
-                        <a:srgbClr val="D5DAE0"/>
-                      </a:solidFill>
-                      <a:prstDash val="solid"/>
-                      <a:round/>
-                      <a:headEnd type="none" w="med" len="med"/>
-                      <a:tailEnd type="none" w="med" len="med"/>
-                    </a:lnT>
-                    <a:lnB w="9525" cap="flat" cmpd="sng" algn="ctr">
-                      <a:solidFill>
-                        <a:srgbClr val="D5DAE0"/>
-                      </a:solidFill>
-                      <a:prstDash val="solid"/>
-                      <a:round/>
-                      <a:headEnd type="none" w="med" len="med"/>
-                      <a:tailEnd type="none" w="med" len="med"/>
-                    </a:lnB>
-                  </a:tcPr>
-                </a:tc>
-                <a:tc>
-                  <a:txBody>
-                    <a:bodyPr/>
-                    <a:lstStyle/>
-                    <a:p>
-                      <a:pPr indent="0" marL="0">
-                        <a:buNone/>
-                      </a:pPr>
-                      <a:r>
-                        <a:rPr lang="en-US" sz="1500" dirty="0">
-                          <a:solidFill>
-                            <a:srgbClr val="1F2933"/>
-                          </a:solidFill>
-                          <a:latin typeface="Malgun Gothic" pitchFamily="34" charset="0"/>
-                          <a:ea typeface="Malgun Gothic" pitchFamily="34" charset="-122"/>
-                          <a:cs typeface="Malgun Gothic" pitchFamily="34" charset="-120"/>
-                        </a:rPr>
-                        <a:t>3,145,782 B 저장·복원 일치</a:t>
-                      </a:r>
-                      <a:endParaRPr lang="en-US" sz="1500" dirty="0">
-                        <a:latin typeface="Malgun Gothic" charset="0"/>
-                        <a:ea typeface="Malgun Gothic" charset="0"/>
-                        <a:cs typeface="Malgun Gothic" charset="0"/>
-                      </a:endParaRPr>
-                    </a:p>
-                  </a:txBody>
-                  <a:tcPr marL="109728" marR="109728" marT="54864" marB="54864" anchor="ctr">
-                    <a:lnL w="9525" cap="flat" cmpd="sng" algn="ctr">
-                      <a:solidFill>
-                        <a:srgbClr val="D5DAE0"/>
-                      </a:solidFill>
-                      <a:prstDash val="solid"/>
-                      <a:round/>
-                      <a:headEnd type="none" w="med" len="med"/>
-                      <a:tailEnd type="none" w="med" len="med"/>
-                    </a:lnL>
-                    <a:lnR w="9525" cap="flat" cmpd="sng" algn="ctr">
-                      <a:solidFill>
-                        <a:srgbClr val="D5DAE0"/>
-                      </a:solidFill>
-                      <a:prstDash val="solid"/>
-                      <a:round/>
-                      <a:headEnd type="none" w="med" len="med"/>
-                      <a:tailEnd type="none" w="med" len="med"/>
-                    </a:lnR>
-                    <a:lnT w="9525" cap="flat" cmpd="sng" algn="ctr">
-                      <a:solidFill>
-                        <a:srgbClr val="D5DAE0"/>
-                      </a:solidFill>
-                      <a:prstDash val="solid"/>
-                      <a:round/>
-                      <a:headEnd type="none" w="med" len="med"/>
-                      <a:tailEnd type="none" w="med" len="med"/>
-                    </a:lnT>
-                    <a:lnB w="9525" cap="flat" cmpd="sng" algn="ctr">
-                      <a:solidFill>
-                        <a:srgbClr val="D5DAE0"/>
-                      </a:solidFill>
-                      <a:prstDash val="solid"/>
-                      <a:round/>
-                      <a:headEnd type="none" w="med" len="med"/>
-                      <a:tailEnd type="none" w="med" len="med"/>
-                    </a:lnB>
-                  </a:tcPr>
-                </a:tc>
-              </a:tr>
-              <a:tr h="640080">
-                <a:tc>
-                  <a:txBody>
-                    <a:bodyPr/>
-                    <a:lstStyle/>
-                    <a:p>
-                      <a:pPr indent="0" marL="0">
-                        <a:buNone/>
-                      </a:pPr>
-                      <a:r>
-                        <a:rPr lang="en-US" sz="1500" dirty="0">
-                          <a:solidFill>
-                            <a:srgbClr val="1F2933"/>
-                          </a:solidFill>
-                          <a:latin typeface="Malgun Gothic" pitchFamily="34" charset="0"/>
-                          <a:ea typeface="Malgun Gothic" pitchFamily="34" charset="-122"/>
-                          <a:cs typeface="Malgun Gothic" pitchFamily="34" charset="-120"/>
-                        </a:rPr>
-                        <a:t>Gray 출력의 UART 전송량</a:t>
-                      </a:r>
-                      <a:endParaRPr lang="en-US" sz="1500" dirty="0">
-                        <a:latin typeface="Malgun Gothic" charset="0"/>
-                        <a:ea typeface="Malgun Gothic" charset="0"/>
-                        <a:cs typeface="Malgun Gothic" charset="0"/>
-                      </a:endParaRPr>
-                    </a:p>
-                  </a:txBody>
-                  <a:tcPr marL="109728" marR="109728" marT="54864" marB="54864" anchor="ctr">
-                    <a:lnL w="9525" cap="flat" cmpd="sng" algn="ctr">
-                      <a:solidFill>
-                        <a:srgbClr val="D5DAE0"/>
-                      </a:solidFill>
-                      <a:prstDash val="solid"/>
-                      <a:round/>
-                      <a:headEnd type="none" w="med" len="med"/>
-                      <a:tailEnd type="none" w="med" len="med"/>
-                    </a:lnL>
-                    <a:lnR w="9525" cap="flat" cmpd="sng" algn="ctr">
-                      <a:solidFill>
-                        <a:srgbClr val="D5DAE0"/>
-                      </a:solidFill>
-                      <a:prstDash val="solid"/>
-                      <a:round/>
-                      <a:headEnd type="none" w="med" len="med"/>
-                      <a:tailEnd type="none" w="med" len="med"/>
-                    </a:lnR>
-                    <a:lnT w="9525" cap="flat" cmpd="sng" algn="ctr">
-                      <a:solidFill>
-                        <a:srgbClr val="D5DAE0"/>
-                      </a:solidFill>
-                      <a:prstDash val="solid"/>
-                      <a:round/>
-                      <a:headEnd type="none" w="med" len="med"/>
-                      <a:tailEnd type="none" w="med" len="med"/>
-                    </a:lnT>
-                    <a:lnB w="9525" cap="flat" cmpd="sng" algn="ctr">
-                      <a:solidFill>
-                        <a:srgbClr val="D5DAE0"/>
-                      </a:solidFill>
-                      <a:prstDash val="solid"/>
-                      <a:round/>
-                      <a:headEnd type="none" w="med" len="med"/>
-                      <a:tailEnd type="none" w="med" len="med"/>
-                    </a:lnB>
-                  </a:tcPr>
-                </a:tc>
-                <a:tc>
-                  <a:txBody>
-                    <a:bodyPr/>
-                    <a:lstStyle/>
-                    <a:p>
-                      <a:pPr indent="0" marL="0">
-                        <a:buNone/>
-                      </a:pPr>
-                      <a:r>
-                        <a:rPr lang="en-US" sz="1500" dirty="0">
-                          <a:solidFill>
-                            <a:srgbClr val="1F2933"/>
-                          </a:solidFill>
-                          <a:latin typeface="Malgun Gothic" pitchFamily="34" charset="0"/>
-                          <a:ea typeface="Malgun Gothic" pitchFamily="34" charset="-122"/>
-                          <a:cs typeface="Malgun Gothic" pitchFamily="34" charset="-120"/>
-                        </a:rPr>
-                        <a:t>출력을 8비트 Gray로 고정</a:t>
-                      </a:r>
-                      <a:endParaRPr lang="en-US" sz="1500" dirty="0">
-                        <a:latin typeface="Malgun Gothic" charset="0"/>
-                        <a:ea typeface="Malgun Gothic" charset="0"/>
-                        <a:cs typeface="Malgun Gothic" charset="0"/>
-                      </a:endParaRPr>
-                    </a:p>
-                  </a:txBody>
-                  <a:tcPr marL="109728" marR="109728" marT="54864" marB="54864" anchor="ctr">
-                    <a:lnL w="9525" cap="flat" cmpd="sng" algn="ctr">
-                      <a:solidFill>
-                        <a:srgbClr val="D5DAE0"/>
-                      </a:solidFill>
-                      <a:prstDash val="solid"/>
-                      <a:round/>
-                      <a:headEnd type="none" w="med" len="med"/>
-                      <a:tailEnd type="none" w="med" len="med"/>
-                    </a:lnL>
-                    <a:lnR w="9525" cap="flat" cmpd="sng" algn="ctr">
-                      <a:solidFill>
-                        <a:srgbClr val="D5DAE0"/>
-                      </a:solidFill>
-                      <a:prstDash val="solid"/>
-                      <a:round/>
-                      <a:headEnd type="none" w="med" len="med"/>
-                      <a:tailEnd type="none" w="med" len="med"/>
-                    </a:lnR>
-                    <a:lnT w="9525" cap="flat" cmpd="sng" algn="ctr">
-                      <a:solidFill>
-                        <a:srgbClr val="D5DAE0"/>
-                      </a:solidFill>
-                      <a:prstDash val="solid"/>
-                      <a:round/>
-                      <a:headEnd type="none" w="med" len="med"/>
-                      <a:tailEnd type="none" w="med" len="med"/>
-                    </a:lnT>
-                    <a:lnB w="9525" cap="flat" cmpd="sng" algn="ctr">
-                      <a:solidFill>
-                        <a:srgbClr val="D5DAE0"/>
-                      </a:solidFill>
-                      <a:prstDash val="solid"/>
-                      <a:round/>
-                      <a:headEnd type="none" w="med" len="med"/>
-                      <a:tailEnd type="none" w="med" len="med"/>
-                    </a:lnB>
-                  </a:tcPr>
-                </a:tc>
-                <a:tc>
-                  <a:txBody>
-                    <a:bodyPr/>
-                    <a:lstStyle/>
-                    <a:p>
-                      <a:pPr indent="0" marL="0">
-                        <a:buNone/>
-                      </a:pPr>
-                      <a:r>
-                        <a:rPr lang="en-US" sz="1500" dirty="0">
-                          <a:solidFill>
-                            <a:srgbClr val="1F2933"/>
-                          </a:solidFill>
-                          <a:latin typeface="Malgun Gothic" pitchFamily="34" charset="0"/>
-                          <a:ea typeface="Malgun Gothic" pitchFamily="34" charset="-122"/>
-                          <a:cs typeface="Malgun Gothic" pitchFamily="34" charset="-120"/>
-                        </a:rPr>
-                        <a:t>전체 시간 23.9% 감소 (다음 장)</a:t>
-                      </a:r>
-                      <a:endParaRPr lang="en-US" sz="1500" dirty="0">
-                        <a:latin typeface="Malgun Gothic" charset="0"/>
-                        <a:ea typeface="Malgun Gothic" charset="0"/>
-                        <a:cs typeface="Malgun Gothic" charset="0"/>
-                      </a:endParaRPr>
-                    </a:p>
-                  </a:txBody>
-                  <a:tcPr marL="109728" marR="109728" marT="54864" marB="54864" anchor="ctr">
-                    <a:lnL w="9525" cap="flat" cmpd="sng" algn="ctr">
-                      <a:solidFill>
-                        <a:srgbClr val="D5DAE0"/>
-                      </a:solidFill>
-                      <a:prstDash val="solid"/>
-                      <a:round/>
-                      <a:headEnd type="none" w="med" len="med"/>
-                      <a:tailEnd type="none" w="med" len="med"/>
-                    </a:lnL>
-                    <a:lnR w="9525" cap="flat" cmpd="sng" algn="ctr">
-                      <a:solidFill>
-                        <a:srgbClr val="D5DAE0"/>
-                      </a:solidFill>
-                      <a:prstDash val="solid"/>
-                      <a:round/>
-                      <a:headEnd type="none" w="med" len="med"/>
-                      <a:tailEnd type="none" w="med" len="med"/>
-                    </a:lnR>
-                    <a:lnT w="9525" cap="flat" cmpd="sng" algn="ctr">
-                      <a:solidFill>
-                        <a:srgbClr val="D5DAE0"/>
-                      </a:solidFill>
-                      <a:prstDash val="solid"/>
-                      <a:round/>
-                      <a:headEnd type="none" w="med" len="med"/>
-                      <a:tailEnd type="none" w="med" len="med"/>
-                    </a:lnT>
-                    <a:lnB w="9525" cap="flat" cmpd="sng" algn="ctr">
-                      <a:solidFill>
-                        <a:srgbClr val="D5DAE0"/>
-                      </a:solidFill>
-                      <a:prstDash val="solid"/>
-                      <a:round/>
-                      <a:headEnd type="none" w="med" len="med"/>
-                      <a:tailEnd type="none" w="med" len="med"/>
-                    </a:lnB>
-                  </a:tcPr>
-                </a:tc>
-              </a:tr>
-            </a:tbl>
-          </a:graphicData>
-        </a:graphic>
-      </p:graphicFrame>
-      <p:sp>
-        <p:nvSpPr>
-          <p:cNvPr id="4" name="Text 1"/>
-          <p:cNvSpPr txBox="1"/>
-          <p:nvPr/>
-        </p:nvSpPr>
-        <p:spPr>
-          <a:xfrm>
-            <a:off x="548640" y="5989320"/>
-            <a:ext cx="11091672" cy="320040"/>
-          </a:xfrm>
-          <a:prstGeom prst="rect">
-            <a:avLst/>
-          </a:prstGeom>
-          <a:noFill/>
-          <a:ln/>
-        </p:spPr>
-        <p:txBody>
-          <a:bodyPr wrap="square" lIns="0" tIns="0" rIns="0" bIns="0" rtlCol="0" anchor="t"/>
-          <a:lstStyle/>
-          <a:p>
-            <a:pPr indent="0" marL="0">
-              <a:buNone/>
-            </a:pPr>
-            <a:r>
-              <a:rPr lang="en-US" sz="1200" dirty="0">
-                <a:solidFill>
-                  <a:srgbClr val="5F6B7A"/>
-                </a:solidFill>
-                <a:latin typeface="Malgun Gothic" pitchFamily="34" charset="0"/>
-                <a:ea typeface="Malgun Gothic" pitchFamily="34" charset="-122"/>
-                <a:cs typeface="Malgun Gothic" pitchFamily="34" charset="-120"/>
-              </a:rPr>
-              <a:t>회선 계산값: 3,145,782 B × 10 bit ÷ 921,600 bps = 34.13 s · 백업 제거 대가: 삭제 범위의 기존 Flash 내용은 덮어씀</a:t>
-            </a:r>
-            <a:endParaRPr lang="en-US" sz="1200" dirty="0"/>
-          </a:p>
-        </p:txBody>
-      </p:sp>
-      <p:sp>
-        <p:nvSpPr>
-          <p:cNvPr id="25" name="Slide Number Placeholder 0"/>
-          <p:cNvSpPr>
-            <a:spLocks noGrp="1"/>
-          </p:cNvSpPr>
-          <p:nvPr>
-            <p:ph type="sldNum" sz="quarter" idx="4294967295"/>
-          </p:nvPr>
-        </p:nvSpPr>
-        <p:spPr>
-          <a:xfrm>
-            <a:off x="11091672" y="6400800"/>
-            <a:ext cx="548640" cy="274320"/>
-          </a:xfrm>
-          <a:prstGeom prst="rect">
-            <a:avLst/>
-          </a:prstGeom>
-          <a:extLst>
-            <a:ext uri="{C572A759-6A51-4108-AA02-DFA0A04FC94B}">
-              <ma14:wrappingTextBoxFlag xmlns:ma14="http://schemas.microsoft.com/office/mac/drawingml/2011/main" val="0"/>
-            </a:ext>
-          </a:extLst>
-        </p:spPr>
-        <p:txBody>
-          <a:bodyPr/>
-          <a:lstStyle>
-            <a:lvl1pPr>
-              <a:defRPr sz="1000">
-                <a:solidFill>
-                  <a:srgbClr val="8A94A3"/>
-                </a:solidFill>
-                <a:latin typeface="Malgun Gothic"/>
-                <a:ea typeface="Malgun Gothic"/>
-                <a:cs typeface="Malgun Gothic"/>
-              </a:defRPr>
-            </a:lvl1pPr>
-          </a:lstStyle>
-          <a:p>
-            <a:pPr algn="r"/>
-            <a:fld id="{F7021451-1387-4CA6-816F-3879F97B5CBC}" type="slidenum">
-              <a:rPr b="0" lang="en-US"/>
-              <a:t>13</a:t>
-            </a:fld>
-            <a:endParaRPr lang="en-US"/>
-          </a:p>
-        </p:txBody>
-      </p:sp>
-    </p:spTree>
-  </p:cSld>
-  <p:clrMapOvr>
-    <a:masterClrMapping/>
-  </p:clrMapOvr>
-</p:sld>
-</file>
-
-<file path=ppt/slides/slide14.xml><?xml version="1.0" encoding="utf-8"?>
-<p:sld xmlns:a="http://schemas.openxmlformats.org/drawingml/2006/main" xmlns:r="http://schemas.openxmlformats.org/officeDocument/2006/relationships" xmlns:p="http://schemas.openxmlformats.org/presentationml/2006/main">
-  <p:cSld name="Slide 14">
-    <p:spTree>
-      <p:nvGrpSpPr>
-        <p:cNvPr id="1" name=""/>
-        <p:cNvGrpSpPr/>
-        <p:nvPr/>
-      </p:nvGrpSpPr>
-      <p:grpSpPr>
-        <a:xfrm>
-          <a:off x="0" y="0"/>
-          <a:ext cx="0" cy="0"/>
-          <a:chOff x="0" y="0"/>
-          <a:chExt cx="0" cy="0"/>
-        </a:xfrm>
-      </p:grpSpPr>
-      <p:sp>
-        <p:nvSpPr>
-          <p:cNvPr id="2" name="Text 0"/>
-          <p:cNvSpPr/>
-          <p:nvPr>
-            <p:ph idx="100" type="title" hasCustomPrompt="1"/>
-          </p:nvPr>
-        </p:nvSpPr>
-        <p:spPr>
-          <a:xfrm>
-            <a:off x="548640" y="320040"/>
-            <a:ext cx="11091672" cy="868680"/>
-          </a:xfrm>
-          <a:prstGeom prst="rect">
-            <a:avLst/>
-          </a:prstGeom>
-          <a:noFill/>
-          <a:ln/>
-        </p:spPr>
-        <p:txBody>
-          <a:bodyPr wrap="square" lIns="0" tIns="0" rIns="0" bIns="0" rtlCol="0" anchor="ctr"/>
-          <a:lstStyle/>
-          <a:p>
-            <a:pPr algn="l" indent="0" marL="0">
-              <a:buNone/>
-            </a:pPr>
-            <a:r>
-              <a:rPr lang="en-US" sz="2600" b="1" dirty="0">
-                <a:solidFill>
-                  <a:srgbClr val="1F2933"/>
-                </a:solidFill>
-                <a:latin typeface="Malgun Gothic" pitchFamily="34" charset="0"/>
-                <a:ea typeface="Malgun Gothic" pitchFamily="34" charset="-122"/>
-                <a:cs typeface="Malgun Gothic" pitchFamily="34" charset="-120"/>
-              </a:rPr>
-              <a:t>8비트 Gray 출력으로 전체 시간이 95.60 s에서 72.77 s로 줄었습니다</a:t>
-            </a:r>
-            <a:endParaRPr lang="en-US" sz="2600" dirty="0"/>
-          </a:p>
-        </p:txBody>
-      </p:sp>
-      <p:graphicFrame>
-        <p:nvGraphicFramePr>
-          <p:cNvPr id="3" name="Chart 0" descr=""/>
-          <p:cNvGraphicFramePr/>
-          <p:nvPr/>
-        </p:nvGraphicFramePr>
-        <p:xfrm>
-          <a:off x="548640" y="1417320"/>
-          <a:ext cx="6309360" cy="3749040"/>
-        </p:xfrm>
-        <a:graphic xmlns:a="http://schemas.openxmlformats.org/drawingml/2006/main">
-          <a:graphicData uri="http://schemas.openxmlformats.org/drawingml/2006/chart">
-            <c:chart xmlns:c="http://schemas.openxmlformats.org/drawingml/2006/chart" r:id="rId1"/>
-          </a:graphicData>
-        </a:graphic>
-      </p:graphicFrame>
-      <p:sp>
-        <p:nvSpPr>
-          <p:cNvPr id="4" name="Text 1"/>
-          <p:cNvSpPr txBox="1"/>
-          <p:nvPr/>
-        </p:nvSpPr>
-        <p:spPr>
-          <a:xfrm>
-            <a:off x="7315200" y="1508760"/>
-            <a:ext cx="4297680" cy="274320"/>
-          </a:xfrm>
-          <a:prstGeom prst="rect">
-            <a:avLst/>
-          </a:prstGeom>
-          <a:noFill/>
-          <a:ln/>
-        </p:spPr>
-        <p:txBody>
-          <a:bodyPr wrap="square" lIns="0" tIns="0" rIns="0" bIns="0" rtlCol="0" anchor="t"/>
-          <a:lstStyle/>
-          <a:p>
-            <a:pPr indent="0" marL="0">
-              <a:buNone/>
-            </a:pPr>
-            <a:r>
-              <a:rPr lang="en-US" sz="1400" b="1" dirty="0">
-                <a:solidFill>
-                  <a:srgbClr val="5F6B7A"/>
-                </a:solidFill>
-                <a:latin typeface="Malgun Gothic" pitchFamily="34" charset="0"/>
-                <a:ea typeface="Malgun Gothic" pitchFamily="34" charset="-122"/>
-                <a:cs typeface="Malgun Gothic" pitchFamily="34" charset="-120"/>
-              </a:rPr>
-              <a:t>출력 크기</a:t>
-            </a:r>
-            <a:endParaRPr lang="en-US" sz="1400" dirty="0"/>
-          </a:p>
-        </p:txBody>
-      </p:sp>
-      <p:sp>
-        <p:nvSpPr>
-          <p:cNvPr id="5" name="Text 2"/>
-          <p:cNvSpPr txBox="1"/>
-          <p:nvPr/>
-        </p:nvSpPr>
-        <p:spPr>
-          <a:xfrm>
-            <a:off x="7315200" y="1828800"/>
-            <a:ext cx="4297680" cy="457200"/>
-          </a:xfrm>
-          <a:prstGeom prst="rect">
-            <a:avLst/>
-          </a:prstGeom>
-          <a:noFill/>
-          <a:ln/>
-        </p:spPr>
-        <p:txBody>
-          <a:bodyPr wrap="square" lIns="0" tIns="0" rIns="0" bIns="0" rtlCol="0" anchor="t"/>
-          <a:lstStyle/>
-          <a:p>
-            <a:pPr indent="0" marL="0">
-              <a:buNone/>
-            </a:pPr>
-            <a:r>
-              <a:rPr lang="en-US" sz="2200" b="1" dirty="0">
-                <a:solidFill>
-                  <a:srgbClr val="1F2933"/>
-                </a:solidFill>
-                <a:latin typeface="Malgun Gothic" pitchFamily="34" charset="0"/>
-                <a:ea typeface="Malgun Gothic" pitchFamily="34" charset="-122"/>
-                <a:cs typeface="Malgun Gothic" pitchFamily="34" charset="-120"/>
-              </a:rPr>
-              <a:t>3,145,782 B → 1,049,654 B</a:t>
-            </a:r>
-            <a:endParaRPr lang="en-US" sz="2200" dirty="0"/>
-          </a:p>
-        </p:txBody>
-      </p:sp>
-      <p:sp>
-        <p:nvSpPr>
-          <p:cNvPr id="6" name="Text 3"/>
-          <p:cNvSpPr txBox="1"/>
-          <p:nvPr/>
-        </p:nvSpPr>
-        <p:spPr>
-          <a:xfrm>
-            <a:off x="7315200" y="2286000"/>
-            <a:ext cx="4297680" cy="274320"/>
-          </a:xfrm>
-          <a:prstGeom prst="rect">
-            <a:avLst/>
-          </a:prstGeom>
-          <a:noFill/>
-          <a:ln/>
-        </p:spPr>
-        <p:txBody>
-          <a:bodyPr wrap="square" lIns="0" tIns="0" rIns="0" bIns="0" rtlCol="0" anchor="t"/>
-          <a:lstStyle/>
-          <a:p>
-            <a:pPr indent="0" marL="0">
-              <a:buNone/>
-            </a:pPr>
-            <a:r>
-              <a:rPr lang="en-US" sz="1400" dirty="0">
-                <a:solidFill>
-                  <a:srgbClr val="5F6B7A"/>
-                </a:solidFill>
-                <a:latin typeface="Malgun Gothic" pitchFamily="34" charset="0"/>
-                <a:ea typeface="Malgun Gothic" pitchFamily="34" charset="-122"/>
-                <a:cs typeface="Malgun Gothic" pitchFamily="34" charset="-120"/>
-              </a:rPr>
-              <a:t>줄어든 바이트 2,096,128 B</a:t>
-            </a:r>
-            <a:endParaRPr lang="en-US" sz="1400" dirty="0"/>
-          </a:p>
-        </p:txBody>
-      </p:sp>
-      <p:graphicFrame>
-        <p:nvGraphicFramePr>
-          <p:cNvPr id="15" name="Table 0"/>
-          <p:cNvGraphicFramePr>
-            <a:graphicFrameLocks noGrp="1"/>
-          </p:cNvGraphicFramePr>
-          <p:nvPr>
-            <p:extLst>
-              <p:ext uri="{D42A27DB-BD31-4B8C-83A1-F6EECF244321}">
-                <p14:modId xmlns:p14="http://schemas.microsoft.com/office/powerpoint/2010/main" val="1579011935"/>
-              </p:ext>
-            </p:extLst>
-          </p:nvPr>
-        </p:nvGraphicFramePr>
-        <p:xfrm>
-          <a:off x="7315200" y="2834640"/>
-          <a:ext cx="4325112" cy="914400"/>
-        </p:xfrm>
-        <a:graphic>
-          <a:graphicData uri="http://schemas.openxmlformats.org/drawingml/2006/table">
-            <a:tbl>
-              <a:tblPr/>
-              <a:tblGrid>
-                <a:gridCol w="1828800"/>
-                <a:gridCol w="2496312"/>
-              </a:tblGrid>
-              <a:tr h="0">
-                <a:tc>
-                  <a:txBody>
-                    <a:bodyPr/>
-                    <a:lstStyle/>
-                    <a:p>
-                      <a:pPr indent="0" marL="0">
-                        <a:buNone/>
-                      </a:pPr>
-                      <a:r>
-                        <a:rPr lang="en-US" sz="1400" b="1" dirty="0">
-                          <a:solidFill>
-                            <a:srgbClr val="1F2933"/>
-                          </a:solidFill>
-                          <a:latin typeface="Malgun Gothic" pitchFamily="34" charset="0"/>
-                          <a:ea typeface="Malgun Gothic" pitchFamily="34" charset="-122"/>
-                          <a:cs typeface="Malgun Gothic" pitchFamily="34" charset="-120"/>
-                        </a:rPr>
-                        <a:t>측정 감소</a:t>
-                      </a:r>
-                      <a:endParaRPr lang="en-US" sz="1400" dirty="0">
-                        <a:latin typeface="Malgun Gothic" charset="0"/>
-                        <a:ea typeface="Malgun Gothic" charset="0"/>
-                        <a:cs typeface="Malgun Gothic" charset="0"/>
-                      </a:endParaRPr>
-                    </a:p>
-                  </a:txBody>
-                  <a:tcPr marL="109728" marR="109728" marT="54864" marB="54864" anchor="ctr">
-                    <a:lnL w="9525" cap="flat" cmpd="sng" algn="ctr">
-                      <a:solidFill>
-                        <a:srgbClr val="D5DAE0"/>
-                      </a:solidFill>
-                      <a:prstDash val="solid"/>
-                      <a:round/>
-                      <a:headEnd type="none" w="med" len="med"/>
-                      <a:tailEnd type="none" w="med" len="med"/>
-                    </a:lnL>
-                    <a:lnR w="9525" cap="flat" cmpd="sng" algn="ctr">
-                      <a:solidFill>
-                        <a:srgbClr val="D5DAE0"/>
-                      </a:solidFill>
-                      <a:prstDash val="solid"/>
-                      <a:round/>
-                      <a:headEnd type="none" w="med" len="med"/>
-                      <a:tailEnd type="none" w="med" len="med"/>
-                    </a:lnR>
-                    <a:lnT w="9525" cap="flat" cmpd="sng" algn="ctr">
-                      <a:solidFill>
-                        <a:srgbClr val="D5DAE0"/>
-                      </a:solidFill>
-                      <a:prstDash val="solid"/>
-                      <a:round/>
-                      <a:headEnd type="none" w="med" len="med"/>
-                      <a:tailEnd type="none" w="med" len="med"/>
-                    </a:lnT>
-                    <a:lnB w="9525" cap="flat" cmpd="sng" algn="ctr">
-                      <a:solidFill>
-                        <a:srgbClr val="D5DAE0"/>
-                      </a:solidFill>
-                      <a:prstDash val="solid"/>
-                      <a:round/>
-                      <a:headEnd type="none" w="med" len="med"/>
-                      <a:tailEnd type="none" w="med" len="med"/>
-                    </a:lnB>
-                    <a:solidFill>
-                      <a:srgbClr val="F3F5F7"/>
-                    </a:solidFill>
-                  </a:tcPr>
-                </a:tc>
-                <a:tc>
-                  <a:txBody>
-                    <a:bodyPr/>
-                    <a:lstStyle/>
-                    <a:p>
-                      <a:pPr indent="0" marL="0">
-                        <a:buNone/>
-                      </a:pPr>
-                      <a:r>
-                        <a:rPr lang="en-US" sz="1400" b="1" dirty="0">
-                          <a:solidFill>
-                            <a:srgbClr val="0F766E"/>
-                          </a:solidFill>
-                          <a:latin typeface="Malgun Gothic" pitchFamily="34" charset="0"/>
-                          <a:ea typeface="Malgun Gothic" pitchFamily="34" charset="-122"/>
-                          <a:cs typeface="Malgun Gothic" pitchFamily="34" charset="-120"/>
-                        </a:rPr>
-                        <a:t>22.83 s</a:t>
-                      </a:r>
-                      <a:endParaRPr lang="en-US" sz="1400" dirty="0">
-                        <a:latin typeface="Malgun Gothic" charset="0"/>
-                        <a:ea typeface="Malgun Gothic" charset="0"/>
-                        <a:cs typeface="Malgun Gothic" charset="0"/>
-                      </a:endParaRPr>
-                    </a:p>
-                  </a:txBody>
-                  <a:tcPr marL="109728" marR="109728" marT="54864" marB="54864" anchor="ctr">
-                    <a:lnL w="9525" cap="flat" cmpd="sng" algn="ctr">
-                      <a:solidFill>
-                        <a:srgbClr val="D5DAE0"/>
-                      </a:solidFill>
-                      <a:prstDash val="solid"/>
-                      <a:round/>
-                      <a:headEnd type="none" w="med" len="med"/>
-                      <a:tailEnd type="none" w="med" len="med"/>
-                    </a:lnL>
-                    <a:lnR w="9525" cap="flat" cmpd="sng" algn="ctr">
-                      <a:solidFill>
-                        <a:srgbClr val="D5DAE0"/>
-                      </a:solidFill>
-                      <a:prstDash val="solid"/>
-                      <a:round/>
-                      <a:headEnd type="none" w="med" len="med"/>
-                      <a:tailEnd type="none" w="med" len="med"/>
-                    </a:lnR>
-                    <a:lnT w="9525" cap="flat" cmpd="sng" algn="ctr">
-                      <a:solidFill>
-                        <a:srgbClr val="D5DAE0"/>
-                      </a:solidFill>
-                      <a:prstDash val="solid"/>
-                      <a:round/>
-                      <a:headEnd type="none" w="med" len="med"/>
-                      <a:tailEnd type="none" w="med" len="med"/>
-                    </a:lnT>
-                    <a:lnB w="9525" cap="flat" cmpd="sng" algn="ctr">
-                      <a:solidFill>
-                        <a:srgbClr val="D5DAE0"/>
-                      </a:solidFill>
-                      <a:prstDash val="solid"/>
-                      <a:round/>
-                      <a:headEnd type="none" w="med" len="med"/>
-                      <a:tailEnd type="none" w="med" len="med"/>
-                    </a:lnB>
-                  </a:tcPr>
-                </a:tc>
-              </a:tr>
-              <a:tr h="0">
-                <a:tc>
-                  <a:txBody>
-                    <a:bodyPr/>
-                    <a:lstStyle/>
-                    <a:p>
-                      <a:pPr indent="0" marL="0">
-                        <a:buNone/>
-                      </a:pPr>
-                      <a:r>
-                        <a:rPr lang="en-US" sz="1400" b="1" dirty="0">
-                          <a:solidFill>
-                            <a:srgbClr val="1F2933"/>
-                          </a:solidFill>
-                          <a:latin typeface="Malgun Gothic" pitchFamily="34" charset="0"/>
-                          <a:ea typeface="Malgun Gothic" pitchFamily="34" charset="-122"/>
-                          <a:cs typeface="Malgun Gothic" pitchFamily="34" charset="-120"/>
-                        </a:rPr>
-                        <a:t>계산: 줄어든 바이트의</a:t>
-                      </a:r>
-                      <a:endParaRPr lang="en-US" sz="1400" dirty="0">
-                        <a:latin typeface="Malgun Gothic" charset="0"/>
-                        <a:ea typeface="Malgun Gothic" charset="0"/>
-                        <a:cs typeface="Malgun Gothic" charset="0"/>
-                      </a:endParaRPr>
-                    </a:p>
-                    <a:p>
-                      <a:pPr indent="0" marL="0">
-                        <a:buNone/>
-                      </a:pPr>
-                      <a:r>
-                        <a:rPr lang="en-US" sz="1400" b="1" dirty="0">
-                          <a:solidFill>
-                            <a:srgbClr val="1F2933"/>
-                          </a:solidFill>
-                          <a:latin typeface="Malgun Gothic" pitchFamily="34" charset="0"/>
-                          <a:ea typeface="Malgun Gothic" pitchFamily="34" charset="-122"/>
-                          <a:cs typeface="Malgun Gothic" pitchFamily="34" charset="-120"/>
-                        </a:rPr>
-                        <a:t>UART 전송 시간</a:t>
-                      </a:r>
-                      <a:endParaRPr lang="en-US" sz="1400" dirty="0">
-                        <a:latin typeface="Malgun Gothic" charset="0"/>
-                        <a:ea typeface="Malgun Gothic" charset="0"/>
-                        <a:cs typeface="Malgun Gothic" charset="0"/>
-                      </a:endParaRPr>
-                    </a:p>
-                  </a:txBody>
-                  <a:tcPr marL="109728" marR="109728" marT="54864" marB="54864" anchor="ctr">
-                    <a:lnL w="9525" cap="flat" cmpd="sng" algn="ctr">
-                      <a:solidFill>
-                        <a:srgbClr val="D5DAE0"/>
-                      </a:solidFill>
-                      <a:prstDash val="solid"/>
-                      <a:round/>
-                      <a:headEnd type="none" w="med" len="med"/>
-                      <a:tailEnd type="none" w="med" len="med"/>
-                    </a:lnL>
-                    <a:lnR w="9525" cap="flat" cmpd="sng" algn="ctr">
-                      <a:solidFill>
-                        <a:srgbClr val="D5DAE0"/>
-                      </a:solidFill>
-                      <a:prstDash val="solid"/>
-                      <a:round/>
-                      <a:headEnd type="none" w="med" len="med"/>
-                      <a:tailEnd type="none" w="med" len="med"/>
-                    </a:lnR>
-                    <a:lnT w="9525" cap="flat" cmpd="sng" algn="ctr">
-                      <a:solidFill>
-                        <a:srgbClr val="D5DAE0"/>
-                      </a:solidFill>
-                      <a:prstDash val="solid"/>
-                      <a:round/>
-                      <a:headEnd type="none" w="med" len="med"/>
-                      <a:tailEnd type="none" w="med" len="med"/>
-                    </a:lnT>
-                    <a:lnB w="9525" cap="flat" cmpd="sng" algn="ctr">
-                      <a:solidFill>
-                        <a:srgbClr val="D5DAE0"/>
-                      </a:solidFill>
-                      <a:prstDash val="solid"/>
-                      <a:round/>
-                      <a:headEnd type="none" w="med" len="med"/>
-                      <a:tailEnd type="none" w="med" len="med"/>
-                    </a:lnB>
-                    <a:solidFill>
-                      <a:srgbClr val="F3F5F7"/>
-                    </a:solidFill>
-                  </a:tcPr>
-                </a:tc>
-                <a:tc>
-                  <a:txBody>
-                    <a:bodyPr/>
-                    <a:lstStyle/>
-                    <a:p>
-                      <a:pPr indent="0" marL="0">
-                        <a:buNone/>
-                      </a:pPr>
-                      <a:r>
-                        <a:rPr lang="en-US" sz="1400" dirty="0">
-                          <a:solidFill>
-                            <a:srgbClr val="1F2933"/>
-                          </a:solidFill>
-                          <a:latin typeface="Malgun Gothic" pitchFamily="34" charset="0"/>
-                          <a:ea typeface="Malgun Gothic" pitchFamily="34" charset="-122"/>
-                          <a:cs typeface="Malgun Gothic" pitchFamily="34" charset="-120"/>
-                        </a:rPr>
-                        <a:t>2,096,128 B × 10 bit</a:t>
-                      </a:r>
-                      <a:endParaRPr lang="en-US" sz="1400" dirty="0">
-                        <a:latin typeface="Malgun Gothic" charset="0"/>
-                        <a:ea typeface="Malgun Gothic" charset="0"/>
-                        <a:cs typeface="Malgun Gothic" charset="0"/>
-                      </a:endParaRPr>
-                    </a:p>
-                    <a:p>
-                      <a:pPr indent="0" marL="0">
-                        <a:buNone/>
-                      </a:pPr>
-                      <a:r>
-                        <a:rPr lang="en-US" sz="1400" dirty="0">
-                          <a:solidFill>
-                            <a:srgbClr val="1F2933"/>
-                          </a:solidFill>
-                          <a:latin typeface="Malgun Gothic" pitchFamily="34" charset="0"/>
-                          <a:ea typeface="Malgun Gothic" pitchFamily="34" charset="-122"/>
-                          <a:cs typeface="Malgun Gothic" pitchFamily="34" charset="-120"/>
-                        </a:rPr>
-                        <a:t>÷ 921,600 bps = 22.74 s</a:t>
-                      </a:r>
-                      <a:endParaRPr lang="en-US" sz="1400" dirty="0">
-                        <a:latin typeface="Malgun Gothic" charset="0"/>
-                        <a:ea typeface="Malgun Gothic" charset="0"/>
-                        <a:cs typeface="Malgun Gothic" charset="0"/>
-                      </a:endParaRPr>
-                    </a:p>
-                  </a:txBody>
-                  <a:tcPr marL="109728" marR="109728" marT="54864" marB="54864" anchor="ctr">
-                    <a:lnL w="9525" cap="flat" cmpd="sng" algn="ctr">
-                      <a:solidFill>
-                        <a:srgbClr val="D5DAE0"/>
-                      </a:solidFill>
-                      <a:prstDash val="solid"/>
-                      <a:round/>
-                      <a:headEnd type="none" w="med" len="med"/>
-                      <a:tailEnd type="none" w="med" len="med"/>
-                    </a:lnL>
-                    <a:lnR w="9525" cap="flat" cmpd="sng" algn="ctr">
-                      <a:solidFill>
-                        <a:srgbClr val="D5DAE0"/>
-                      </a:solidFill>
-                      <a:prstDash val="solid"/>
-                      <a:round/>
-                      <a:headEnd type="none" w="med" len="med"/>
-                      <a:tailEnd type="none" w="med" len="med"/>
-                    </a:lnR>
-                    <a:lnT w="9525" cap="flat" cmpd="sng" algn="ctr">
-                      <a:solidFill>
-                        <a:srgbClr val="D5DAE0"/>
-                      </a:solidFill>
-                      <a:prstDash val="solid"/>
-                      <a:round/>
-                      <a:headEnd type="none" w="med" len="med"/>
-                      <a:tailEnd type="none" w="med" len="med"/>
-                    </a:lnT>
-                    <a:lnB w="9525" cap="flat" cmpd="sng" algn="ctr">
-                      <a:solidFill>
-                        <a:srgbClr val="D5DAE0"/>
-                      </a:solidFill>
-                      <a:prstDash val="solid"/>
-                      <a:round/>
-                      <a:headEnd type="none" w="med" len="med"/>
-                      <a:tailEnd type="none" w="med" len="med"/>
-                    </a:lnB>
-                  </a:tcPr>
-                </a:tc>
-              </a:tr>
-            </a:tbl>
-          </a:graphicData>
-        </a:graphic>
-      </p:graphicFrame>
-      <p:sp>
-        <p:nvSpPr>
-          <p:cNvPr id="8" name="Text 4"/>
-          <p:cNvSpPr txBox="1"/>
-          <p:nvPr/>
-        </p:nvSpPr>
-        <p:spPr>
-          <a:xfrm>
-            <a:off x="7315200" y="4160520"/>
-            <a:ext cx="4325112" cy="365760"/>
-          </a:xfrm>
-          <a:prstGeom prst="rect">
-            <a:avLst/>
-          </a:prstGeom>
-          <a:noFill/>
-          <a:ln/>
-        </p:spPr>
-        <p:txBody>
-          <a:bodyPr wrap="square" lIns="0" tIns="0" rIns="0" bIns="0" rtlCol="0" anchor="t"/>
-          <a:lstStyle/>
-          <a:p>
-            <a:pPr indent="0" marL="0">
-              <a:buNone/>
-            </a:pPr>
-            <a:r>
-              <a:rPr lang="en-US" sz="1500" b="1" dirty="0">
-                <a:solidFill>
-                  <a:srgbClr val="1F2933"/>
-                </a:solidFill>
-                <a:latin typeface="Malgun Gothic" pitchFamily="34" charset="0"/>
-                <a:ea typeface="Malgun Gothic" pitchFamily="34" charset="-122"/>
-                <a:cs typeface="Malgun Gothic" pitchFamily="34" charset="-120"/>
-              </a:rPr>
-              <a:t>감소분 대부분이 UART 전송량 감소로 설명됩니다.</a:t>
-            </a:r>
-            <a:endParaRPr lang="en-US" sz="1500" dirty="0"/>
-          </a:p>
-        </p:txBody>
-      </p:sp>
-      <p:sp>
-        <p:nvSpPr>
-          <p:cNvPr id="9" name="Text 5"/>
-          <p:cNvSpPr txBox="1"/>
-          <p:nvPr/>
-        </p:nvSpPr>
-        <p:spPr>
-          <a:xfrm>
-            <a:off x="7315200" y="4617720"/>
-            <a:ext cx="4325112" cy="548640"/>
-          </a:xfrm>
-          <a:prstGeom prst="rect">
-            <a:avLst/>
-          </a:prstGeom>
-          <a:noFill/>
-          <a:ln/>
-        </p:spPr>
-        <p:txBody>
-          <a:bodyPr wrap="square" lIns="0" tIns="0" rIns="0" bIns="0" rtlCol="0" anchor="t"/>
-          <a:lstStyle/>
-          <a:p>
-            <a:pPr indent="0" marL="0">
-              <a:buNone/>
-            </a:pPr>
-            <a:r>
-              <a:rPr lang="en-US" sz="1300" dirty="0">
-                <a:solidFill>
-                  <a:srgbClr val="1F2933"/>
-                </a:solidFill>
-                <a:latin typeface="Malgun Gothic" pitchFamily="34" charset="0"/>
-                <a:ea typeface="Malgun Gothic" pitchFamily="34" charset="-122"/>
-                <a:cs typeface="Malgun Gothic" pitchFamily="34" charset="-120"/>
-              </a:rPr>
-              <a:t>10-15 재측정 (8비트, 전체 과정 6회): 72.20–72.78 s, 중앙값 72.58 s</a:t>
-            </a:r>
-            <a:endParaRPr lang="en-US" sz="1300" dirty="0"/>
-          </a:p>
-        </p:txBody>
-      </p:sp>
-      <p:sp>
-        <p:nvSpPr>
-          <p:cNvPr id="10" name="Text 6"/>
-          <p:cNvSpPr txBox="1"/>
-          <p:nvPr/>
-        </p:nvSpPr>
-        <p:spPr>
-          <a:xfrm>
-            <a:off x="548640" y="5394960"/>
-            <a:ext cx="11091672" cy="548640"/>
-          </a:xfrm>
-          <a:prstGeom prst="rect">
-            <a:avLst/>
-          </a:prstGeom>
-          <a:noFill/>
-          <a:ln/>
-        </p:spPr>
-        <p:txBody>
-          <a:bodyPr wrap="square" lIns="0" tIns="0" rIns="0" bIns="0" rtlCol="0" anchor="t"/>
-          <a:lstStyle/>
-          <a:p>
-            <a:pPr indent="0" marL="0">
-              <a:lnSpc>
-                <a:spcPct val="120000"/>
-              </a:lnSpc>
-              <a:buNone/>
-            </a:pPr>
-            <a:r>
-              <a:rPr lang="en-US" sz="1200" dirty="0">
-                <a:solidFill>
-                  <a:srgbClr val="5F6B7A"/>
-                </a:solidFill>
-                <a:latin typeface="Malgun Gothic" pitchFamily="34" charset="0"/>
-                <a:ea typeface="Malgun Gothic" pitchFamily="34" charset="-122"/>
-                <a:cs typeface="Malgun Gothic" pitchFamily="34" charset="-120"/>
-              </a:rPr>
-              <a:t>막대: 2026-10-13 각 1회 측정 · 921600 baud · 입력 전송 시작부터 Gray 마지막 바이트 수신까지 · 당시 백업 준비 44.18 s 제외</a:t>
-            </a:r>
-            <a:endParaRPr lang="en-US" sz="1200" dirty="0"/>
-          </a:p>
-          <a:p>
-            <a:pPr indent="0" marL="0">
-              <a:lnSpc>
-                <a:spcPct val="120000"/>
-              </a:lnSpc>
-              <a:buNone/>
-            </a:pPr>
-            <a:r>
-              <a:rPr lang="en-US" sz="1200" dirty="0">
-                <a:solidFill>
-                  <a:srgbClr val="5F6B7A"/>
-                </a:solidFill>
-                <a:latin typeface="Malgun Gothic" pitchFamily="34" charset="0"/>
-                <a:ea typeface="Malgun Gothic" pitchFamily="34" charset="-122"/>
-                <a:cs typeface="Malgun Gothic" pitchFamily="34" charset="-120"/>
-              </a:rPr>
-              <a:t>출처: pc/results/timings.csv</a:t>
-            </a:r>
-            <a:endParaRPr lang="en-US" sz="1200" dirty="0"/>
-          </a:p>
-        </p:txBody>
-      </p:sp>
-      <p:sp>
-        <p:nvSpPr>
-          <p:cNvPr id="25" name="Slide Number Placeholder 0"/>
-          <p:cNvSpPr>
-            <a:spLocks noGrp="1"/>
-          </p:cNvSpPr>
-          <p:nvPr>
-            <p:ph type="sldNum" sz="quarter" idx="4294967295"/>
-          </p:nvPr>
-        </p:nvSpPr>
-        <p:spPr>
-          <a:xfrm>
-            <a:off x="11091672" y="6400800"/>
-            <a:ext cx="548640" cy="274320"/>
-          </a:xfrm>
-          <a:prstGeom prst="rect">
-            <a:avLst/>
-          </a:prstGeom>
-          <a:extLst>
-            <a:ext uri="{C572A759-6A51-4108-AA02-DFA0A04FC94B}">
-              <ma14:wrappingTextBoxFlag xmlns:ma14="http://schemas.microsoft.com/office/mac/drawingml/2011/main" val="0"/>
-            </a:ext>
-          </a:extLst>
-        </p:spPr>
-        <p:txBody>
-          <a:bodyPr/>
-          <a:lstStyle>
-            <a:lvl1pPr>
-              <a:defRPr sz="1000">
-                <a:solidFill>
-                  <a:srgbClr val="8A94A3"/>
-                </a:solidFill>
-                <a:latin typeface="Malgun Gothic"/>
-                <a:ea typeface="Malgun Gothic"/>
-                <a:cs typeface="Malgun Gothic"/>
-              </a:defRPr>
-            </a:lvl1pPr>
-          </a:lstStyle>
-          <a:p>
-            <a:pPr algn="r"/>
-            <a:fld id="{F7021451-1387-4CA6-816F-3879F97B5CBC}" type="slidenum">
-              <a:rPr b="0" lang="en-US"/>
-              <a:t>14</a:t>
-            </a:fld>
-            <a:endParaRPr lang="en-US"/>
-          </a:p>
-        </p:txBody>
-      </p:sp>
-    </p:spTree>
-  </p:cSld>
-  <p:clrMapOvr>
-    <a:masterClrMapping/>
-  </p:clrMapOvr>
-</p:sld>
-</file>
-
-<file path=ppt/slides/slide15.xml><?xml version="1.0" encoding="utf-8"?>
-<p:sld xmlns:a="http://schemas.openxmlformats.org/drawingml/2006/main" xmlns:r="http://schemas.openxmlformats.org/officeDocument/2006/relationships" xmlns:p="http://schemas.openxmlformats.org/presentationml/2006/main">
-  <p:cSld name="Slide 15">
-    <p:spTree>
-      <p:nvGrpSpPr>
-        <p:cNvPr id="1" name=""/>
-        <p:cNvGrpSpPr/>
-        <p:nvPr/>
-      </p:nvGrpSpPr>
-      <p:grpSpPr>
-        <a:xfrm>
-          <a:off x="0" y="0"/>
-          <a:ext cx="0" cy="0"/>
-          <a:chOff x="0" y="0"/>
-          <a:chExt cx="0" cy="0"/>
-        </a:xfrm>
-      </p:grpSpPr>
-      <p:sp>
-        <p:nvSpPr>
-          <p:cNvPr id="2" name="Text 0"/>
-          <p:cNvSpPr/>
-          <p:nvPr>
-            <p:ph idx="100" type="title" hasCustomPrompt="1"/>
-          </p:nvPr>
-        </p:nvSpPr>
-        <p:spPr>
-          <a:xfrm>
-            <a:off x="548640" y="320040"/>
-            <a:ext cx="11091672" cy="868680"/>
-          </a:xfrm>
-          <a:prstGeom prst="rect">
-            <a:avLst/>
-          </a:prstGeom>
-          <a:noFill/>
-          <a:ln/>
-        </p:spPr>
-        <p:txBody>
-          <a:bodyPr wrap="square" lIns="0" tIns="0" rIns="0" bIns="0" rtlCol="0" anchor="ctr"/>
-          <a:lstStyle/>
-          <a:p>
-            <a:pPr algn="l" indent="0" marL="0">
-              <a:buNone/>
-            </a:pPr>
-            <a:r>
-              <a:rPr lang="en-US" sz="2600" b="1" dirty="0">
-                <a:solidFill>
-                  <a:srgbClr val="1F2933"/>
-                </a:solidFill>
-                <a:latin typeface="Malgun Gothic" pitchFamily="34" charset="0"/>
-                <a:ea typeface="Malgun Gothic" pitchFamily="34" charset="-122"/>
-                <a:cs typeface="Malgun Gothic" pitchFamily="34" charset="-120"/>
-              </a:rPr>
-              <a:t>현장 Demo: run_all.sh 한 번으로 9단계를 차례로 실행합니다</a:t>
-            </a:r>
-            <a:endParaRPr lang="en-US" sz="2600" dirty="0"/>
-          </a:p>
-        </p:txBody>
-      </p:sp>
-      <p:graphicFrame>
-        <p:nvGraphicFramePr>
-          <p:cNvPr id="16" name="Table 0"/>
           <p:cNvGraphicFramePr>
             <a:graphicFrameLocks noGrp="1"/>
           </p:cNvGraphicFramePr>
@@ -10456,7 +7514,7 @@
                           <a:ea typeface="Malgun Gothic" pitchFamily="34" charset="-122"/>
                           <a:cs typeface="Malgun Gothic" pitchFamily="34" charset="-120"/>
                         </a:rPr>
-                        <a:t>전체 일치, 86.4 s</a:t>
+                        <a:t>전체 일치, 86.5 s</a:t>
                       </a:r>
                       <a:endParaRPr lang="en-US" sz="1400" dirty="0">
                         <a:latin typeface="Malgun Gothic" charset="0"/>
@@ -11306,7 +8364,7 @@
         <p:spPr>
           <a:xfrm>
             <a:off x="7863840" y="1417320"/>
-            <a:ext cx="3776472" cy="2011680"/>
+            <a:ext cx="3776472" cy="2240280"/>
           </a:xfrm>
           <a:prstGeom prst="rect">
             <a:avLst/>
@@ -11331,7 +8389,7 @@
         <p:spPr>
           <a:xfrm>
             <a:off x="8092440" y="1600200"/>
-            <a:ext cx="3383280" cy="365760"/>
+            <a:ext cx="3474720" cy="365760"/>
           </a:xfrm>
           <a:prstGeom prst="rect">
             <a:avLst/>
@@ -11347,7 +8405,7 @@
               <a:buNone/>
             </a:pPr>
             <a:r>
-              <a:rPr lang="en-US" sz="1800" dirty="0">
+              <a:rPr lang="en-US" sz="1700" dirty="0">
                 <a:solidFill>
                   <a:srgbClr val="FFFFFF"/>
                 </a:solidFill>
@@ -11355,9 +8413,9 @@
                 <a:ea typeface="Consolas" pitchFamily="34" charset="-122"/>
                 <a:cs typeface="Consolas" pitchFamily="34" charset="-120"/>
               </a:rPr>
-              <a:t>$ ./run_all.sh</a:t>
-            </a:r>
-            <a:endParaRPr lang="en-US" sz="1800" dirty="0"/>
+              <a:t>$ python3 run_all.py</a:t>
+            </a:r>
+            <a:endParaRPr lang="en-US" sz="1700" dirty="0"/>
           </a:p>
         </p:txBody>
       </p:sp>
@@ -11369,8 +8427,8 @@
         </p:nvSpPr>
         <p:spPr>
           <a:xfrm>
-            <a:off x="8092440" y="2148840"/>
-            <a:ext cx="3383280" cy="640080"/>
+            <a:off x="8092440" y="2011680"/>
+            <a:ext cx="3474720" cy="320040"/>
           </a:xfrm>
           <a:prstGeom prst="rect">
             <a:avLst/>
@@ -11383,43 +8441,20 @@
           <a:lstStyle/>
           <a:p>
             <a:pPr indent="0" marL="0">
-              <a:lnSpc>
-                <a:spcPct val="120000"/>
-              </a:lnSpc>
-              <a:buNone/>
-            </a:pPr>
-            <a:r>
-              <a:rPr lang="en-US" sz="1400" dirty="0">
+              <a:buNone/>
+            </a:pPr>
+            <a:r>
+              <a:rPr lang="en-US" sz="1300" dirty="0">
                 <a:solidFill>
                   <a:srgbClr val="B7C2CE"/>
                 </a:solidFill>
-                <a:latin typeface="Malgun Gothic" pitchFamily="34" charset="0"/>
-                <a:ea typeface="Malgun Gothic" pitchFamily="34" charset="-122"/>
-                <a:cs typeface="Malgun Gothic" pitchFamily="34" charset="-120"/>
-              </a:rPr>
-              <a:t>모든 단계 PASS (247초)</a:t>
-            </a:r>
-            <a:endParaRPr lang="en-US" sz="1400" dirty="0"/>
-          </a:p>
-          <a:p>
-            <a:pPr indent="0" marL="0">
-              <a:lnSpc>
-                <a:spcPct val="120000"/>
-              </a:lnSpc>
-              <a:buNone/>
-            </a:pPr>
-            <a:r>
-              <a:rPr lang="en-US" sz="1400" dirty="0">
-                <a:solidFill>
-                  <a:srgbClr val="B7C2CE"/>
-                </a:solidFill>
-                <a:latin typeface="Malgun Gothic" pitchFamily="34" charset="0"/>
-                <a:ea typeface="Malgun Gothic" pitchFamily="34" charset="-122"/>
-                <a:cs typeface="Malgun Gothic" pitchFamily="34" charset="-120"/>
-              </a:rPr>
-              <a:t>2026-10-15</a:t>
-            </a:r>
-            <a:endParaRPr lang="en-US" sz="1400" dirty="0"/>
+                <a:latin typeface="Consolas" pitchFamily="34" charset="0"/>
+                <a:ea typeface="Consolas" pitchFamily="34" charset="-122"/>
+                <a:cs typeface="Consolas" pitchFamily="34" charset="-120"/>
+              </a:rPr>
+              <a:t>macOS: ./run_all.sh</a:t>
+            </a:r>
+            <a:endParaRPr lang="en-US" sz="1300" dirty="0"/>
           </a:p>
         </p:txBody>
       </p:sp>
@@ -11431,7 +8466,69 @@
         </p:nvSpPr>
         <p:spPr>
           <a:xfrm>
-            <a:off x="8092440" y="2788920"/>
+            <a:off x="8092440" y="2468880"/>
+            <a:ext cx="3383280" cy="548640"/>
+          </a:xfrm>
+          <a:prstGeom prst="rect">
+            <a:avLst/>
+          </a:prstGeom>
+          <a:noFill/>
+          <a:ln/>
+        </p:spPr>
+        <p:txBody>
+          <a:bodyPr wrap="square" lIns="0" tIns="0" rIns="0" bIns="0" rtlCol="0" anchor="t"/>
+          <a:lstStyle/>
+          <a:p>
+            <a:pPr indent="0" marL="0">
+              <a:lnSpc>
+                <a:spcPct val="120000"/>
+              </a:lnSpc>
+              <a:buNone/>
+            </a:pPr>
+            <a:r>
+              <a:rPr lang="en-US" sz="1400" dirty="0">
+                <a:solidFill>
+                  <a:srgbClr val="B7C2CE"/>
+                </a:solidFill>
+                <a:latin typeface="Malgun Gothic" pitchFamily="34" charset="0"/>
+                <a:ea typeface="Malgun Gothic" pitchFamily="34" charset="-122"/>
+                <a:cs typeface="Malgun Gothic" pitchFamily="34" charset="-120"/>
+              </a:rPr>
+              <a:t>모든 단계 PASS (전체 약 4분)</a:t>
+            </a:r>
+            <a:endParaRPr lang="en-US" sz="1400" dirty="0"/>
+          </a:p>
+          <a:p>
+            <a:pPr indent="0" marL="0">
+              <a:lnSpc>
+                <a:spcPct val="120000"/>
+              </a:lnSpc>
+              <a:buNone/>
+            </a:pPr>
+            <a:r>
+              <a:rPr lang="en-US" sz="1400" dirty="0">
+                <a:solidFill>
+                  <a:srgbClr val="B7C2CE"/>
+                </a:solidFill>
+                <a:latin typeface="Malgun Gothic" pitchFamily="34" charset="0"/>
+                <a:ea typeface="Malgun Gothic" pitchFamily="34" charset="-122"/>
+                <a:cs typeface="Malgun Gothic" pitchFamily="34" charset="-120"/>
+              </a:rPr>
+              <a:t>2026-10-15</a:t>
+            </a:r>
+            <a:endParaRPr lang="en-US" sz="1400" dirty="0"/>
+          </a:p>
+        </p:txBody>
+      </p:sp>
+      <p:sp>
+        <p:nvSpPr>
+          <p:cNvPr id="8" name="Text 5"/>
+          <p:cNvSpPr txBox="1"/>
+          <p:nvPr/>
+        </p:nvSpPr>
+        <p:spPr>
+          <a:xfrm>
+            <a:off x="8092440" y="3063240"/>
             <a:ext cx="3383280" cy="502920"/>
           </a:xfrm>
           <a:prstGeom prst="rect">
@@ -11464,13 +8561,13 @@
       </p:sp>
       <p:sp>
         <p:nvSpPr>
-          <p:cNvPr id="8" name="Shape 5"/>
+          <p:cNvPr id="9" name="Shape 6"/>
           <p:cNvSpPr/>
           <p:nvPr/>
         </p:nvSpPr>
         <p:spPr>
           <a:xfrm>
-            <a:off x="7863840" y="3749040"/>
+            <a:off x="7863840" y="3931920"/>
             <a:ext cx="3776472" cy="1371600"/>
           </a:xfrm>
           <a:prstGeom prst="rect">
@@ -11489,13 +8586,13 @@
       </p:sp>
       <p:sp>
         <p:nvSpPr>
-          <p:cNvPr id="9" name="Text 6"/>
+          <p:cNvPr id="10" name="Text 7"/>
           <p:cNvSpPr txBox="1"/>
           <p:nvPr/>
         </p:nvSpPr>
         <p:spPr>
           <a:xfrm>
-            <a:off x="8046720" y="3886200"/>
+            <a:off x="8046720" y="4069080"/>
             <a:ext cx="3429000" cy="1143000"/>
           </a:xfrm>
           <a:prstGeom prst="rect">
@@ -11591,7 +8688,7 @@
             <a:pPr algn="r"/>
             <a:fld id="{F7021451-1387-4CA6-816F-3879F97B5CBC}" type="slidenum">
               <a:rPr b="0" lang="en-US"/>
-              <a:t>15</a:t>
+              <a:t>13</a:t>
             </a:fld>
             <a:endParaRPr lang="en-US"/>
           </a:p>
@@ -13161,7 +10258,7 @@
                           <a:ea typeface="Malgun Gothic" pitchFamily="34" charset="-122"/>
                           <a:cs typeface="Malgun Gothic" pitchFamily="34" charset="-120"/>
                         </a:rPr>
-                        <a:t>저장·복원 5회 모두 전체 바이트 일치</a:t>
+                        <a:t>원본과 전체 바이트 일치</a:t>
                       </a:r>
                       <a:endParaRPr lang="en-US" sz="1500" dirty="0">
                         <a:latin typeface="Malgun Gothic" charset="0"/>
@@ -14104,7 +11201,7 @@
                 <a:ea typeface="Malgun Gothic" pitchFamily="34" charset="-122"/>
                 <a:cs typeface="Malgun Gothic" pitchFamily="34" charset="-120"/>
               </a:rPr>
-              <a:t>확인: 2026-10-15 최신 펌웨어(백업 단계 제거)를 다운로드한 뒤 run_all.sh로 실행한 결과 기준</a:t>
+              <a:t>확인: 2026-10-15 최신 펌웨어를 다운로드한 뒤 run_all.py로 실행한 결과 기준</a:t>
             </a:r>
             <a:endParaRPr lang="en-US" sz="1300" dirty="0"/>
           </a:p>
@@ -17135,7 +14232,7 @@
                 <a:ea typeface="Malgun Gothic" pitchFamily="34" charset="-122"/>
                 <a:cs typeface="Malgun Gothic" pitchFamily="34" charset="-120"/>
               </a:rPr>
-              <a:t>UART 수신: Flash에 쓰는 동안 다음 4 KiB를 DMA로 받습니다</a:t>
+              <a:t>UART 수신: 4 KiB DMA 이중 버퍼와 청크 단위 확인</a:t>
             </a:r>
             <a:endParaRPr lang="en-US" sz="2600" dirty="0"/>
           </a:p>
@@ -17149,8 +14246,8 @@
         </p:nvSpPr>
         <p:spPr>
           <a:xfrm>
-            <a:off x="548640" y="1828800"/>
-            <a:ext cx="1188720" cy="685800"/>
+            <a:off x="548640" y="1463040"/>
+            <a:ext cx="3657600" cy="320040"/>
           </a:xfrm>
           <a:prstGeom prst="rect">
             <a:avLst/>
@@ -17159,7 +14256,7 @@
           <a:ln/>
         </p:spPr>
         <p:txBody>
-          <a:bodyPr wrap="square" lIns="0" tIns="0" rIns="0" bIns="0" rtlCol="0" anchor="ctr"/>
+          <a:bodyPr wrap="square" lIns="0" tIns="0" rIns="0" bIns="0" rtlCol="0" anchor="t"/>
           <a:lstStyle/>
           <a:p>
             <a:pPr indent="0" marL="0">
@@ -17174,7 +14271,7 @@
                 <a:ea typeface="Malgun Gothic" pitchFamily="34" charset="-122"/>
                 <a:cs typeface="Malgun Gothic" pitchFamily="34" charset="-120"/>
               </a:rPr>
-              <a:t>DMA 수신</a:t>
+              <a:t>DMA 수신 버퍼</a:t>
             </a:r>
             <a:endParaRPr lang="en-US" sz="1500" dirty="0"/>
           </a:p>
@@ -17182,53 +14279,14 @@
       </p:sp>
       <p:sp>
         <p:nvSpPr>
-          <p:cNvPr id="4" name="Text 2"/>
-          <p:cNvSpPr txBox="1"/>
-          <p:nvPr/>
-        </p:nvSpPr>
-        <p:spPr>
-          <a:xfrm>
-            <a:off x="548640" y="2697480"/>
-            <a:ext cx="1188720" cy="685800"/>
-          </a:xfrm>
-          <a:prstGeom prst="rect">
-            <a:avLst/>
-          </a:prstGeom>
-          <a:noFill/>
-          <a:ln/>
-        </p:spPr>
-        <p:txBody>
-          <a:bodyPr wrap="square" lIns="0" tIns="0" rIns="0" bIns="0" rtlCol="0" anchor="ctr"/>
-          <a:lstStyle/>
-          <a:p>
-            <a:pPr indent="0" marL="0">
-              <a:buNone/>
-            </a:pPr>
-            <a:r>
-              <a:rPr lang="en-US" sz="1400" b="1" dirty="0">
-                <a:solidFill>
-                  <a:srgbClr val="1F2933"/>
-                </a:solidFill>
-                <a:latin typeface="Malgun Gothic" pitchFamily="34" charset="0"/>
-                <a:ea typeface="Malgun Gothic" pitchFamily="34" charset="-122"/>
-                <a:cs typeface="Malgun Gothic" pitchFamily="34" charset="-120"/>
-              </a:rPr>
-              <a:t>CPU 처리</a:t>
-            </a:r>
-            <a:endParaRPr lang="en-US" sz="1400" dirty="0"/>
-          </a:p>
-        </p:txBody>
-      </p:sp>
-      <p:sp>
-        <p:nvSpPr>
-          <p:cNvPr id="5" name="Shape 3"/>
+          <p:cNvPr id="4" name="Shape 2"/>
           <p:cNvSpPr/>
           <p:nvPr/>
         </p:nvSpPr>
         <p:spPr>
           <a:xfrm>
-            <a:off x="1828800" y="1828800"/>
-            <a:ext cx="1271016" cy="685800"/>
+            <a:off x="548640" y="1874520"/>
+            <a:ext cx="1618488" cy="640080"/>
           </a:xfrm>
           <a:prstGeom prst="rect">
             <a:avLst/>
@@ -17246,14 +14304,14 @@
       </p:sp>
       <p:sp>
         <p:nvSpPr>
-          <p:cNvPr id="6" name="Text 4"/>
+          <p:cNvPr id="5" name="Text 3"/>
           <p:cNvSpPr txBox="1"/>
           <p:nvPr/>
         </p:nvSpPr>
         <p:spPr>
           <a:xfrm>
-            <a:off x="1828800" y="1828800"/>
-            <a:ext cx="1271016" cy="685800"/>
+            <a:off x="548640" y="1874520"/>
+            <a:ext cx="1618488" cy="640080"/>
           </a:xfrm>
           <a:prstGeom prst="rect">
             <a:avLst/>
@@ -17269,7 +14327,7 @@
               <a:buNone/>
             </a:pPr>
             <a:r>
-              <a:rPr lang="en-US" sz="1500" b="1" dirty="0">
+              <a:rPr lang="en-US" sz="1400" b="1" dirty="0">
                 <a:solidFill>
                   <a:srgbClr val="FFFFFF"/>
                 </a:solidFill>
@@ -17277,22 +14335,22 @@
                 <a:ea typeface="Malgun Gothic" pitchFamily="34" charset="-122"/>
                 <a:cs typeface="Malgun Gothic" pitchFamily="34" charset="-120"/>
               </a:rPr>
-              <a:t>M0 수신</a:t>
-            </a:r>
-            <a:endParaRPr lang="en-US" sz="1500" dirty="0"/>
+              <a:t>M0 4,096 B</a:t>
+            </a:r>
+            <a:endParaRPr lang="en-US" sz="1400" dirty="0"/>
           </a:p>
         </p:txBody>
       </p:sp>
       <p:sp>
         <p:nvSpPr>
-          <p:cNvPr id="7" name="Shape 5"/>
+          <p:cNvPr id="6" name="Shape 4"/>
           <p:cNvSpPr/>
           <p:nvPr/>
         </p:nvSpPr>
         <p:spPr>
           <a:xfrm>
-            <a:off x="3154680" y="1828800"/>
-            <a:ext cx="1271016" cy="685800"/>
+            <a:off x="2221992" y="1874520"/>
+            <a:ext cx="1618488" cy="640080"/>
           </a:xfrm>
           <a:prstGeom prst="rect">
             <a:avLst/>
@@ -17310,14 +14368,14 @@
       </p:sp>
       <p:sp>
         <p:nvSpPr>
-          <p:cNvPr id="8" name="Text 6"/>
+          <p:cNvPr id="7" name="Text 5"/>
           <p:cNvSpPr txBox="1"/>
           <p:nvPr/>
         </p:nvSpPr>
         <p:spPr>
           <a:xfrm>
-            <a:off x="3154680" y="1828800"/>
-            <a:ext cx="1271016" cy="685800"/>
+            <a:off x="2221992" y="1874520"/>
+            <a:ext cx="1618488" cy="640080"/>
           </a:xfrm>
           <a:prstGeom prst="rect">
             <a:avLst/>
@@ -17333,7 +14391,7 @@
               <a:buNone/>
             </a:pPr>
             <a:r>
-              <a:rPr lang="en-US" sz="1500" b="1" dirty="0">
+              <a:rPr lang="en-US" sz="1400" b="1" dirty="0">
                 <a:solidFill>
                   <a:srgbClr val="0F766E"/>
                 </a:solidFill>
@@ -17341,22 +14399,22 @@
                 <a:ea typeface="Malgun Gothic" pitchFamily="34" charset="-122"/>
                 <a:cs typeface="Malgun Gothic" pitchFamily="34" charset="-120"/>
               </a:rPr>
-              <a:t>M1 수신</a:t>
-            </a:r>
-            <a:endParaRPr lang="en-US" sz="1500" dirty="0"/>
+              <a:t>M1 4,096 B</a:t>
+            </a:r>
+            <a:endParaRPr lang="en-US" sz="1400" dirty="0"/>
           </a:p>
         </p:txBody>
       </p:sp>
       <p:sp>
         <p:nvSpPr>
-          <p:cNvPr id="9" name="Shape 7"/>
+          <p:cNvPr id="8" name="Shape 6"/>
           <p:cNvSpPr/>
           <p:nvPr/>
         </p:nvSpPr>
         <p:spPr>
           <a:xfrm>
-            <a:off x="4480560" y="1828800"/>
-            <a:ext cx="1271016" cy="685800"/>
+            <a:off x="3895344" y="1874520"/>
+            <a:ext cx="1618488" cy="640080"/>
           </a:xfrm>
           <a:prstGeom prst="rect">
             <a:avLst/>
@@ -17374,14 +14432,14 @@
       </p:sp>
       <p:sp>
         <p:nvSpPr>
-          <p:cNvPr id="10" name="Text 8"/>
+          <p:cNvPr id="9" name="Text 7"/>
           <p:cNvSpPr txBox="1"/>
           <p:nvPr/>
         </p:nvSpPr>
         <p:spPr>
           <a:xfrm>
-            <a:off x="4480560" y="1828800"/>
-            <a:ext cx="1271016" cy="685800"/>
+            <a:off x="3895344" y="1874520"/>
+            <a:ext cx="1618488" cy="640080"/>
           </a:xfrm>
           <a:prstGeom prst="rect">
             <a:avLst/>
@@ -17397,7 +14455,7 @@
               <a:buNone/>
             </a:pPr>
             <a:r>
-              <a:rPr lang="en-US" sz="1500" b="1" dirty="0">
+              <a:rPr lang="en-US" sz="1400" b="1" dirty="0">
                 <a:solidFill>
                   <a:srgbClr val="FFFFFF"/>
                 </a:solidFill>
@@ -17405,22 +14463,22 @@
                 <a:ea typeface="Malgun Gothic" pitchFamily="34" charset="-122"/>
                 <a:cs typeface="Malgun Gothic" pitchFamily="34" charset="-120"/>
               </a:rPr>
-              <a:t>M0 수신</a:t>
-            </a:r>
-            <a:endParaRPr lang="en-US" sz="1500" dirty="0"/>
+              <a:t>M0 4,096 B</a:t>
+            </a:r>
+            <a:endParaRPr lang="en-US" sz="1400" dirty="0"/>
           </a:p>
         </p:txBody>
       </p:sp>
       <p:sp>
         <p:nvSpPr>
-          <p:cNvPr id="11" name="Shape 9"/>
+          <p:cNvPr id="10" name="Shape 8"/>
           <p:cNvSpPr/>
           <p:nvPr/>
         </p:nvSpPr>
         <p:spPr>
           <a:xfrm>
-            <a:off x="5806440" y="1828800"/>
-            <a:ext cx="1271016" cy="685800"/>
+            <a:off x="5568696" y="1874520"/>
+            <a:ext cx="1618488" cy="640080"/>
           </a:xfrm>
           <a:prstGeom prst="rect">
             <a:avLst/>
@@ -17438,14 +14496,14 @@
       </p:sp>
       <p:sp>
         <p:nvSpPr>
-          <p:cNvPr id="12" name="Text 10"/>
+          <p:cNvPr id="11" name="Text 9"/>
           <p:cNvSpPr txBox="1"/>
           <p:nvPr/>
         </p:nvSpPr>
         <p:spPr>
           <a:xfrm>
-            <a:off x="5806440" y="1828800"/>
-            <a:ext cx="1271016" cy="685800"/>
+            <a:off x="5568696" y="1874520"/>
+            <a:ext cx="1618488" cy="640080"/>
           </a:xfrm>
           <a:prstGeom prst="rect">
             <a:avLst/>
@@ -17461,7 +14519,7 @@
               <a:buNone/>
             </a:pPr>
             <a:r>
-              <a:rPr lang="en-US" sz="1500" b="1" dirty="0">
+              <a:rPr lang="en-US" sz="1400" b="1" dirty="0">
                 <a:solidFill>
                   <a:srgbClr val="0F766E"/>
                 </a:solidFill>
@@ -17469,30 +14527,110 @@
                 <a:ea typeface="Malgun Gothic" pitchFamily="34" charset="-122"/>
                 <a:cs typeface="Malgun Gothic" pitchFamily="34" charset="-120"/>
               </a:rPr>
-              <a:t>M1 수신</a:t>
-            </a:r>
-            <a:endParaRPr lang="en-US" sz="1500" dirty="0"/>
+              <a:t>M1 4,096 B</a:t>
+            </a:r>
+            <a:endParaRPr lang="en-US" sz="1400" dirty="0"/>
           </a:p>
         </p:txBody>
       </p:sp>
       <p:sp>
         <p:nvSpPr>
-          <p:cNvPr id="13" name="Shape 11"/>
+          <p:cNvPr id="12" name="Text 10"/>
+          <p:cNvSpPr txBox="1"/>
+          <p:nvPr/>
+        </p:nvSpPr>
+        <p:spPr>
+          <a:xfrm>
+            <a:off x="548640" y="2606040"/>
+            <a:ext cx="6675120" cy="320040"/>
+          </a:xfrm>
+          <a:prstGeom prst="rect">
+            <a:avLst/>
+          </a:prstGeom>
+          <a:noFill/>
+          <a:ln/>
+        </p:spPr>
+        <p:txBody>
+          <a:bodyPr wrap="square" lIns="0" tIns="0" rIns="0" bIns="0" rtlCol="0" anchor="t"/>
+          <a:lstStyle/>
+          <a:p>
+            <a:pPr indent="0" marL="0">
+              <a:buNone/>
+            </a:pPr>
+            <a:r>
+              <a:rPr lang="en-US" sz="1400" dirty="0">
+                <a:solidFill>
+                  <a:srgbClr val="5F6B7A"/>
+                </a:solidFill>
+                <a:latin typeface="Malgun Gothic" pitchFamily="34" charset="0"/>
+                <a:ea typeface="Malgun Gothic" pitchFamily="34" charset="-122"/>
+                <a:cs typeface="Malgun Gothic" pitchFamily="34" charset="-120"/>
+              </a:rPr>
+              <a:t>한쪽이 차면 하드웨어가 다른 쪽으로 전환 (DMA Double Buffer Mode)</a:t>
+            </a:r>
+            <a:endParaRPr lang="en-US" sz="1400" dirty="0"/>
+          </a:p>
+        </p:txBody>
+      </p:sp>
+      <p:sp>
+        <p:nvSpPr>
+          <p:cNvPr id="13" name="Text 11"/>
+          <p:cNvSpPr txBox="1"/>
+          <p:nvPr/>
+        </p:nvSpPr>
+        <p:spPr>
+          <a:xfrm>
+            <a:off x="548640" y="3291840"/>
+            <a:ext cx="4572000" cy="320040"/>
+          </a:xfrm>
+          <a:prstGeom prst="rect">
+            <a:avLst/>
+          </a:prstGeom>
+          <a:noFill/>
+          <a:ln/>
+        </p:spPr>
+        <p:txBody>
+          <a:bodyPr wrap="square" lIns="0" tIns="0" rIns="0" bIns="0" rtlCol="0" anchor="t"/>
+          <a:lstStyle/>
+          <a:p>
+            <a:pPr indent="0" marL="0">
+              <a:buNone/>
+            </a:pPr>
+            <a:r>
+              <a:rPr lang="en-US" sz="1500" b="1" dirty="0">
+                <a:solidFill>
+                  <a:srgbClr val="1F2933"/>
+                </a:solidFill>
+                <a:latin typeface="Malgun Gothic" pitchFamily="34" charset="0"/>
+                <a:ea typeface="Malgun Gothic" pitchFamily="34" charset="-122"/>
+                <a:cs typeface="Malgun Gothic" pitchFamily="34" charset="-120"/>
+              </a:rPr>
+              <a:t>청크 하나를 받은 뒤 펌웨어 처리</a:t>
+            </a:r>
+            <a:endParaRPr lang="en-US" sz="1500" dirty="0"/>
+          </a:p>
+        </p:txBody>
+      </p:sp>
+      <p:sp>
+        <p:nvSpPr>
+          <p:cNvPr id="14" name="Shape 12"/>
           <p:cNvSpPr/>
           <p:nvPr/>
         </p:nvSpPr>
         <p:spPr>
           <a:xfrm>
-            <a:off x="3154680" y="2697480"/>
-            <a:ext cx="1271016" cy="685800"/>
+            <a:off x="548640" y="3703320"/>
+            <a:ext cx="1152144" cy="868680"/>
           </a:xfrm>
-          <a:prstGeom prst="rect">
-            <a:avLst/>
+          <a:prstGeom prst="roundRect">
+            <a:avLst>
+              <a:gd name="adj" fmla="val 8421"/>
+            </a:avLst>
           </a:prstGeom>
           <a:solidFill>
             <a:srgbClr val="FFFFFF"/>
           </a:solidFill>
-          <a:ln w="19050">
+          <a:ln w="15875">
             <a:solidFill>
               <a:srgbClr val="0F766E"/>
             </a:solidFill>
@@ -17502,14 +14640,14 @@
       </p:sp>
       <p:sp>
         <p:nvSpPr>
-          <p:cNvPr id="14" name="Text 12"/>
+          <p:cNvPr id="15" name="Text 13"/>
           <p:cNvSpPr txBox="1"/>
           <p:nvPr/>
         </p:nvSpPr>
         <p:spPr>
           <a:xfrm>
-            <a:off x="3154680" y="2697480"/>
-            <a:ext cx="1271016" cy="685800"/>
+            <a:off x="594360" y="3703320"/>
+            <a:ext cx="1060704" cy="868680"/>
           </a:xfrm>
           <a:prstGeom prst="rect">
             <a:avLst/>
@@ -17522,86 +14660,49 @@
           <a:lstStyle/>
           <a:p>
             <a:pPr algn="ctr" indent="0" marL="0">
-              <a:buNone/>
-            </a:pPr>
-            <a:r>
-              <a:rPr lang="en-US" sz="1500" dirty="0">
-                <a:solidFill>
-                  <a:srgbClr val="0F766E"/>
+              <a:lnSpc>
+                <a:spcPct val="110000"/>
+              </a:lnSpc>
+              <a:buNone/>
+            </a:pPr>
+            <a:r>
+              <a:rPr lang="en-US" sz="1300" dirty="0">
+                <a:solidFill>
+                  <a:srgbClr val="1F2933"/>
                 </a:solidFill>
                 <a:latin typeface="Malgun Gothic" pitchFamily="34" charset="0"/>
                 <a:ea typeface="Malgun Gothic" pitchFamily="34" charset="-122"/>
                 <a:cs typeface="Malgun Gothic" pitchFamily="34" charset="-120"/>
               </a:rPr>
-              <a:t>M0 처리</a:t>
-            </a:r>
-            <a:endParaRPr lang="en-US" sz="1500" dirty="0"/>
+              <a:t>CRC 확인</a:t>
+            </a:r>
+            <a:endParaRPr lang="en-US" sz="1300" dirty="0"/>
           </a:p>
         </p:txBody>
       </p:sp>
       <p:sp>
         <p:nvSpPr>
-          <p:cNvPr id="15" name="Shape 13"/>
+          <p:cNvPr id="16" name="Shape 14"/>
           <p:cNvSpPr/>
           <p:nvPr/>
         </p:nvSpPr>
         <p:spPr>
           <a:xfrm>
-            <a:off x="4480560" y="2697480"/>
-            <a:ext cx="1271016" cy="685800"/>
+            <a:off x="1728216" y="4137660"/>
+            <a:ext cx="178308" cy="0"/>
           </a:xfrm>
-          <a:prstGeom prst="rect">
-            <a:avLst/>
-          </a:prstGeom>
-          <a:solidFill>
-            <a:srgbClr val="FFFFFF"/>
-          </a:solidFill>
-          <a:ln w="19050">
-            <a:solidFill>
-              <a:srgbClr val="9FCFC9"/>
-            </a:solidFill>
-            <a:prstDash val="solid"/>
-          </a:ln>
-        </p:spPr>
-      </p:sp>
-      <p:sp>
-        <p:nvSpPr>
-          <p:cNvPr id="16" name="Text 14"/>
-          <p:cNvSpPr txBox="1"/>
-          <p:nvPr/>
-        </p:nvSpPr>
-        <p:spPr>
-          <a:xfrm>
-            <a:off x="4480560" y="2697480"/>
-            <a:ext cx="1271016" cy="685800"/>
-          </a:xfrm>
-          <a:prstGeom prst="rect">
+          <a:prstGeom prst="line">
             <a:avLst/>
           </a:prstGeom>
           <a:noFill/>
-          <a:ln/>
+          <a:ln w="15875">
+            <a:solidFill>
+              <a:srgbClr val="5F6B7A"/>
+            </a:solidFill>
+            <a:prstDash val="solid"/>
+            <a:tailEnd type="triangle"/>
+          </a:ln>
         </p:spPr>
-        <p:txBody>
-          <a:bodyPr wrap="square" lIns="0" tIns="0" rIns="0" bIns="0" rtlCol="0" anchor="ctr"/>
-          <a:lstStyle/>
-          <a:p>
-            <a:pPr algn="ctr" indent="0" marL="0">
-              <a:buNone/>
-            </a:pPr>
-            <a:r>
-              <a:rPr lang="en-US" sz="1500" dirty="0">
-                <a:solidFill>
-                  <a:srgbClr val="0F766E"/>
-                </a:solidFill>
-                <a:latin typeface="Malgun Gothic" pitchFamily="34" charset="0"/>
-                <a:ea typeface="Malgun Gothic" pitchFamily="34" charset="-122"/>
-                <a:cs typeface="Malgun Gothic" pitchFamily="34" charset="-120"/>
-              </a:rPr>
-              <a:t>M1 처리</a:t>
-            </a:r>
-            <a:endParaRPr lang="en-US" sz="1500" dirty="0"/>
-          </a:p>
-        </p:txBody>
       </p:sp>
       <p:sp>
         <p:nvSpPr>
@@ -17611,16 +14712,18 @@
         </p:nvSpPr>
         <p:spPr>
           <a:xfrm>
-            <a:off x="5806440" y="2697480"/>
-            <a:ext cx="1271016" cy="685800"/>
+            <a:off x="1933956" y="3703320"/>
+            <a:ext cx="1152144" cy="868680"/>
           </a:xfrm>
-          <a:prstGeom prst="rect">
-            <a:avLst/>
+          <a:prstGeom prst="roundRect">
+            <a:avLst>
+              <a:gd name="adj" fmla="val 8421"/>
+            </a:avLst>
           </a:prstGeom>
           <a:solidFill>
             <a:srgbClr val="FFFFFF"/>
           </a:solidFill>
-          <a:ln w="19050">
+          <a:ln w="15875">
             <a:solidFill>
               <a:srgbClr val="0F766E"/>
             </a:solidFill>
@@ -17636,8 +14739,8 @@
         </p:nvSpPr>
         <p:spPr>
           <a:xfrm>
-            <a:off x="5806440" y="2697480"/>
-            <a:ext cx="1271016" cy="685800"/>
+            <a:off x="1979676" y="3703320"/>
+            <a:ext cx="1060704" cy="868680"/>
           </a:xfrm>
           <a:prstGeom prst="rect">
             <a:avLst/>
@@ -17650,20 +14753,43 @@
           <a:lstStyle/>
           <a:p>
             <a:pPr algn="ctr" indent="0" marL="0">
-              <a:buNone/>
-            </a:pPr>
-            <a:r>
-              <a:rPr lang="en-US" sz="1500" dirty="0">
-                <a:solidFill>
-                  <a:srgbClr val="0F766E"/>
+              <a:lnSpc>
+                <a:spcPct val="110000"/>
+              </a:lnSpc>
+              <a:buNone/>
+            </a:pPr>
+            <a:r>
+              <a:rPr lang="en-US" sz="1300" dirty="0">
+                <a:solidFill>
+                  <a:srgbClr val="1F2933"/>
                 </a:solidFill>
                 <a:latin typeface="Malgun Gothic" pitchFamily="34" charset="0"/>
                 <a:ea typeface="Malgun Gothic" pitchFamily="34" charset="-122"/>
                 <a:cs typeface="Malgun Gothic" pitchFamily="34" charset="-120"/>
               </a:rPr>
-              <a:t>M0 처리</a:t>
-            </a:r>
-            <a:endParaRPr lang="en-US" sz="1500" dirty="0"/>
+              <a:t>64 KiB 경계면</a:t>
+            </a:r>
+            <a:endParaRPr lang="en-US" sz="1300" dirty="0"/>
+          </a:p>
+          <a:p>
+            <a:pPr algn="ctr" indent="0" marL="0">
+              <a:lnSpc>
+                <a:spcPct val="110000"/>
+              </a:lnSpc>
+              <a:buNone/>
+            </a:pPr>
+            <a:r>
+              <a:rPr lang="en-US" sz="1300" dirty="0">
+                <a:solidFill>
+                  <a:srgbClr val="1F2933"/>
+                </a:solidFill>
+                <a:latin typeface="Malgun Gothic" pitchFamily="34" charset="0"/>
+                <a:ea typeface="Malgun Gothic" pitchFamily="34" charset="-122"/>
+                <a:cs typeface="Malgun Gothic" pitchFamily="34" charset="-120"/>
+              </a:rPr>
+              <a:t>블록 삭제</a:t>
+            </a:r>
+            <a:endParaRPr lang="en-US" sz="1300" dirty="0"/>
           </a:p>
         </p:txBody>
       </p:sp>
@@ -17675,16 +14801,16 @@
         </p:nvSpPr>
         <p:spPr>
           <a:xfrm>
-            <a:off x="1828800" y="3611880"/>
-            <a:ext cx="5248656" cy="0"/>
+            <a:off x="3113532" y="4137660"/>
+            <a:ext cx="178308" cy="0"/>
           </a:xfrm>
           <a:prstGeom prst="line">
             <a:avLst/>
           </a:prstGeom>
           <a:noFill/>
-          <a:ln w="12700">
+          <a:ln w="15875">
             <a:solidFill>
-              <a:srgbClr val="8A94A3"/>
+              <a:srgbClr val="5F6B7A"/>
             </a:solidFill>
             <a:prstDash val="solid"/>
             <a:tailEnd type="triangle"/>
@@ -17693,14 +14819,309 @@
       </p:sp>
       <p:sp>
         <p:nvSpPr>
-          <p:cNvPr id="20" name="Text 18"/>
+          <p:cNvPr id="20" name="Shape 18"/>
+          <p:cNvSpPr/>
+          <p:nvPr/>
+        </p:nvSpPr>
+        <p:spPr>
+          <a:xfrm>
+            <a:off x="3319272" y="3703320"/>
+            <a:ext cx="1152144" cy="868680"/>
+          </a:xfrm>
+          <a:prstGeom prst="roundRect">
+            <a:avLst>
+              <a:gd name="adj" fmla="val 8421"/>
+            </a:avLst>
+          </a:prstGeom>
+          <a:solidFill>
+            <a:srgbClr val="FFFFFF"/>
+          </a:solidFill>
+          <a:ln w="15875">
+            <a:solidFill>
+              <a:srgbClr val="0F766E"/>
+            </a:solidFill>
+            <a:prstDash val="solid"/>
+          </a:ln>
+        </p:spPr>
+      </p:sp>
+      <p:sp>
+        <p:nvSpPr>
+          <p:cNvPr id="21" name="Text 19"/>
           <p:cNvSpPr txBox="1"/>
           <p:nvPr/>
         </p:nvSpPr>
         <p:spPr>
           <a:xfrm>
-            <a:off x="7132320" y="3474720"/>
-            <a:ext cx="548640" cy="274320"/>
+            <a:off x="3364992" y="3703320"/>
+            <a:ext cx="1060704" cy="868680"/>
+          </a:xfrm>
+          <a:prstGeom prst="rect">
+            <a:avLst/>
+          </a:prstGeom>
+          <a:noFill/>
+          <a:ln/>
+        </p:spPr>
+        <p:txBody>
+          <a:bodyPr wrap="square" lIns="0" tIns="0" rIns="0" bIns="0" rtlCol="0" anchor="ctr"/>
+          <a:lstStyle/>
+          <a:p>
+            <a:pPr algn="ctr" indent="0" marL="0">
+              <a:lnSpc>
+                <a:spcPct val="110000"/>
+              </a:lnSpc>
+              <a:buNone/>
+            </a:pPr>
+            <a:r>
+              <a:rPr lang="en-US" sz="1300" dirty="0">
+                <a:solidFill>
+                  <a:srgbClr val="1F2933"/>
+                </a:solidFill>
+                <a:latin typeface="Malgun Gothic" pitchFamily="34" charset="0"/>
+                <a:ea typeface="Malgun Gothic" pitchFamily="34" charset="-122"/>
+                <a:cs typeface="Malgun Gothic" pitchFamily="34" charset="-120"/>
+              </a:rPr>
+              <a:t>256 B</a:t>
+            </a:r>
+            <a:endParaRPr lang="en-US" sz="1300" dirty="0"/>
+          </a:p>
+          <a:p>
+            <a:pPr algn="ctr" indent="0" marL="0">
+              <a:lnSpc>
+                <a:spcPct val="110000"/>
+              </a:lnSpc>
+              <a:buNone/>
+            </a:pPr>
+            <a:r>
+              <a:rPr lang="en-US" sz="1300" dirty="0">
+                <a:solidFill>
+                  <a:srgbClr val="1F2933"/>
+                </a:solidFill>
+                <a:latin typeface="Malgun Gothic" pitchFamily="34" charset="0"/>
+                <a:ea typeface="Malgun Gothic" pitchFamily="34" charset="-122"/>
+                <a:cs typeface="Malgun Gothic" pitchFamily="34" charset="-120"/>
+              </a:rPr>
+              <a:t>페이지 쓰기</a:t>
+            </a:r>
+            <a:endParaRPr lang="en-US" sz="1300" dirty="0"/>
+          </a:p>
+        </p:txBody>
+      </p:sp>
+      <p:sp>
+        <p:nvSpPr>
+          <p:cNvPr id="22" name="Shape 20"/>
+          <p:cNvSpPr/>
+          <p:nvPr/>
+        </p:nvSpPr>
+        <p:spPr>
+          <a:xfrm>
+            <a:off x="4498848" y="4137660"/>
+            <a:ext cx="178308" cy="0"/>
+          </a:xfrm>
+          <a:prstGeom prst="line">
+            <a:avLst/>
+          </a:prstGeom>
+          <a:noFill/>
+          <a:ln w="15875">
+            <a:solidFill>
+              <a:srgbClr val="5F6B7A"/>
+            </a:solidFill>
+            <a:prstDash val="solid"/>
+            <a:tailEnd type="triangle"/>
+          </a:ln>
+        </p:spPr>
+      </p:sp>
+      <p:sp>
+        <p:nvSpPr>
+          <p:cNvPr id="23" name="Shape 21"/>
+          <p:cNvSpPr/>
+          <p:nvPr/>
+        </p:nvSpPr>
+        <p:spPr>
+          <a:xfrm>
+            <a:off x="4704588" y="3703320"/>
+            <a:ext cx="1152144" cy="868680"/>
+          </a:xfrm>
+          <a:prstGeom prst="roundRect">
+            <a:avLst>
+              <a:gd name="adj" fmla="val 8421"/>
+            </a:avLst>
+          </a:prstGeom>
+          <a:solidFill>
+            <a:srgbClr val="FFFFFF"/>
+          </a:solidFill>
+          <a:ln w="15875">
+            <a:solidFill>
+              <a:srgbClr val="0F766E"/>
+            </a:solidFill>
+            <a:prstDash val="solid"/>
+          </a:ln>
+        </p:spPr>
+      </p:sp>
+      <p:sp>
+        <p:nvSpPr>
+          <p:cNvPr id="24" name="Text 22"/>
+          <p:cNvSpPr txBox="1"/>
+          <p:nvPr/>
+        </p:nvSpPr>
+        <p:spPr>
+          <a:xfrm>
+            <a:off x="4750308" y="3703320"/>
+            <a:ext cx="1060704" cy="868680"/>
+          </a:xfrm>
+          <a:prstGeom prst="rect">
+            <a:avLst/>
+          </a:prstGeom>
+          <a:noFill/>
+          <a:ln/>
+        </p:spPr>
+        <p:txBody>
+          <a:bodyPr wrap="square" lIns="0" tIns="0" rIns="0" bIns="0" rtlCol="0" anchor="ctr"/>
+          <a:lstStyle/>
+          <a:p>
+            <a:pPr algn="ctr" indent="0" marL="0">
+              <a:lnSpc>
+                <a:spcPct val="110000"/>
+              </a:lnSpc>
+              <a:buNone/>
+            </a:pPr>
+            <a:r>
+              <a:rPr lang="en-US" sz="1300" dirty="0">
+                <a:solidFill>
+                  <a:srgbClr val="1F2933"/>
+                </a:solidFill>
+                <a:latin typeface="Malgun Gothic" pitchFamily="34" charset="0"/>
+                <a:ea typeface="Malgun Gothic" pitchFamily="34" charset="-122"/>
+                <a:cs typeface="Malgun Gothic" pitchFamily="34" charset="-120"/>
+              </a:rPr>
+              <a:t>재읽기 비교</a:t>
+            </a:r>
+            <a:endParaRPr lang="en-US" sz="1300" dirty="0"/>
+          </a:p>
+          <a:p>
+            <a:pPr algn="ctr" indent="0" marL="0">
+              <a:lnSpc>
+                <a:spcPct val="110000"/>
+              </a:lnSpc>
+              <a:buNone/>
+            </a:pPr>
+            <a:r>
+              <a:rPr lang="en-US" sz="1300" dirty="0">
+                <a:solidFill>
+                  <a:srgbClr val="1F2933"/>
+                </a:solidFill>
+                <a:latin typeface="Malgun Gothic" pitchFamily="34" charset="0"/>
+                <a:ea typeface="Malgun Gothic" pitchFamily="34" charset="-122"/>
+                <a:cs typeface="Malgun Gothic" pitchFamily="34" charset="-120"/>
+              </a:rPr>
+              <a:t>(memcmp)</a:t>
+            </a:r>
+            <a:endParaRPr lang="en-US" sz="1300" dirty="0"/>
+          </a:p>
+        </p:txBody>
+      </p:sp>
+      <p:sp>
+        <p:nvSpPr>
+          <p:cNvPr id="25" name="Shape 23"/>
+          <p:cNvSpPr/>
+          <p:nvPr/>
+        </p:nvSpPr>
+        <p:spPr>
+          <a:xfrm>
+            <a:off x="5884164" y="4137660"/>
+            <a:ext cx="178308" cy="0"/>
+          </a:xfrm>
+          <a:prstGeom prst="line">
+            <a:avLst/>
+          </a:prstGeom>
+          <a:noFill/>
+          <a:ln w="15875">
+            <a:solidFill>
+              <a:srgbClr val="5F6B7A"/>
+            </a:solidFill>
+            <a:prstDash val="solid"/>
+            <a:tailEnd type="triangle"/>
+          </a:ln>
+        </p:spPr>
+      </p:sp>
+      <p:sp>
+        <p:nvSpPr>
+          <p:cNvPr id="26" name="Shape 24"/>
+          <p:cNvSpPr/>
+          <p:nvPr/>
+        </p:nvSpPr>
+        <p:spPr>
+          <a:xfrm>
+            <a:off x="6089904" y="3703320"/>
+            <a:ext cx="1152144" cy="868680"/>
+          </a:xfrm>
+          <a:prstGeom prst="roundRect">
+            <a:avLst>
+              <a:gd name="adj" fmla="val 8421"/>
+            </a:avLst>
+          </a:prstGeom>
+          <a:solidFill>
+            <a:srgbClr val="E3F1EF"/>
+          </a:solidFill>
+          <a:ln w="15875">
+            <a:solidFill>
+              <a:srgbClr val="0F766E"/>
+            </a:solidFill>
+            <a:prstDash val="solid"/>
+          </a:ln>
+        </p:spPr>
+      </p:sp>
+      <p:sp>
+        <p:nvSpPr>
+          <p:cNvPr id="27" name="Text 25"/>
+          <p:cNvSpPr txBox="1"/>
+          <p:nvPr/>
+        </p:nvSpPr>
+        <p:spPr>
+          <a:xfrm>
+            <a:off x="6135624" y="3703320"/>
+            <a:ext cx="1060704" cy="868680"/>
+          </a:xfrm>
+          <a:prstGeom prst="rect">
+            <a:avLst/>
+          </a:prstGeom>
+          <a:noFill/>
+          <a:ln/>
+        </p:spPr>
+        <p:txBody>
+          <a:bodyPr wrap="square" lIns="0" tIns="0" rIns="0" bIns="0" rtlCol="0" anchor="ctr"/>
+          <a:lstStyle/>
+          <a:p>
+            <a:pPr algn="ctr" indent="0" marL="0">
+              <a:lnSpc>
+                <a:spcPct val="110000"/>
+              </a:lnSpc>
+              <a:buNone/>
+            </a:pPr>
+            <a:r>
+              <a:rPr lang="en-US" sz="1300" dirty="0">
+                <a:solidFill>
+                  <a:srgbClr val="1F2933"/>
+                </a:solidFill>
+                <a:latin typeface="Malgun Gothic" pitchFamily="34" charset="0"/>
+                <a:ea typeface="Malgun Gothic" pitchFamily="34" charset="-122"/>
+                <a:cs typeface="Malgun Gothic" pitchFamily="34" charset="-120"/>
+              </a:rPr>
+              <a:t>ACK 송신</a:t>
+            </a:r>
+            <a:endParaRPr lang="en-US" sz="1300" dirty="0"/>
+          </a:p>
+        </p:txBody>
+      </p:sp>
+      <p:sp>
+        <p:nvSpPr>
+          <p:cNvPr id="28" name="Text 26"/>
+          <p:cNvSpPr txBox="1"/>
+          <p:nvPr/>
+        </p:nvSpPr>
+        <p:spPr>
+          <a:xfrm>
+            <a:off x="548640" y="4800600"/>
+            <a:ext cx="6675120" cy="320040"/>
           </a:xfrm>
           <a:prstGeom prst="rect">
             <a:avLst/>
@@ -17716,7 +15137,7 @@
               <a:buNone/>
             </a:pPr>
             <a:r>
-              <a:rPr lang="en-US" sz="1200" dirty="0">
+              <a:rPr lang="en-US" sz="1400" dirty="0">
                 <a:solidFill>
                   <a:srgbClr val="5F6B7A"/>
                 </a:solidFill>
@@ -17724,71 +15145,9 @@
                 <a:ea typeface="Malgun Gothic" pitchFamily="34" charset="-122"/>
                 <a:cs typeface="Malgun Gothic" pitchFamily="34" charset="-120"/>
               </a:rPr>
-              <a:t>시간</a:t>
-            </a:r>
-            <a:endParaRPr lang="en-US" sz="1200" dirty="0"/>
-          </a:p>
-        </p:txBody>
-      </p:sp>
-      <p:sp>
-        <p:nvSpPr>
-          <p:cNvPr id="21" name="Text 19"/>
-          <p:cNvSpPr txBox="1"/>
-          <p:nvPr/>
-        </p:nvSpPr>
-        <p:spPr>
-          <a:xfrm>
-            <a:off x="548640" y="4114800"/>
-            <a:ext cx="6675120" cy="1097280"/>
-          </a:xfrm>
-          <a:prstGeom prst="rect">
-            <a:avLst/>
-          </a:prstGeom>
-          <a:noFill/>
-          <a:ln/>
-        </p:spPr>
-        <p:txBody>
-          <a:bodyPr wrap="square" lIns="0" tIns="0" rIns="0" bIns="0" rtlCol="0" anchor="t"/>
-          <a:lstStyle/>
-          <a:p>
-            <a:pPr indent="0" marL="0">
-              <a:lnSpc>
-                <a:spcPct val="140000"/>
-              </a:lnSpc>
-              <a:buNone/>
-            </a:pPr>
-            <a:r>
-              <a:rPr lang="en-US" sz="1600" dirty="0">
-                <a:solidFill>
-                  <a:srgbClr val="5F6B7A"/>
-                </a:solidFill>
-                <a:latin typeface="Malgun Gothic" pitchFamily="34" charset="0"/>
-                <a:ea typeface="Malgun Gothic" pitchFamily="34" charset="-122"/>
-                <a:cs typeface="Malgun Gothic" pitchFamily="34" charset="-120"/>
-              </a:rPr>
-              <a:t>M0, M1은 각 4,096 B. 한쪽이 차면 하드웨어가 다른 쪽으로 전환합니다.</a:t>
-            </a:r>
-            <a:endParaRPr lang="en-US" sz="1600" dirty="0"/>
-          </a:p>
-          <a:p>
-            <a:pPr indent="0" marL="0">
-              <a:lnSpc>
-                <a:spcPct val="140000"/>
-              </a:lnSpc>
-              <a:buNone/>
-            </a:pPr>
-            <a:r>
-              <a:rPr lang="en-US" sz="1600" dirty="0">
-                <a:solidFill>
-                  <a:srgbClr val="5F6B7A"/>
-                </a:solidFill>
-                <a:latin typeface="Malgun Gothic" pitchFamily="34" charset="0"/>
-                <a:ea typeface="Malgun Gothic" pitchFamily="34" charset="-122"/>
-                <a:cs typeface="Malgun Gothic" pitchFamily="34" charset="-120"/>
-              </a:rPr>
-              <a:t>처리: CRC 확인 → (64 KiB 경계면) 블록 삭제 → 페이지 쓰기 → 재읽기 비교 → ACK</a:t>
-            </a:r>
-            <a:endParaRPr lang="en-US" sz="1600" dirty="0"/>
+              <a:t>어느 단계든 실패하면 ERROR를 보내고 중단합니다.</a:t>
+            </a:r>
+            <a:endParaRPr lang="en-US" sz="1400" dirty="0"/>
           </a:p>
         </p:txBody>
       </p:sp>
@@ -17807,7 +15166,7 @@
           </p:nvPr>
         </p:nvGraphicFramePr>
         <p:xfrm>
-          <a:off x="7680960" y="1783080"/>
+          <a:off x="7680960" y="1463040"/>
           <a:ext cx="3959352" cy="914400"/>
         </p:xfrm>
         <a:graphic>
@@ -18646,7 +16005,7 @@
                           <a:ea typeface="Malgun Gothic" pitchFamily="34" charset="-122"/>
                           <a:cs typeface="Malgun Gothic" pitchFamily="34" charset="-120"/>
                         </a:rPr>
-                        <a:t>흐름 제어</a:t>
+                        <a:t>청크 형식</a:t>
                       </a:r>
                       <a:endParaRPr lang="en-US" sz="1500" dirty="0">
                         <a:latin typeface="Malgun Gothic" charset="0"/>
@@ -18714,7 +16073,7 @@
                           <a:ea typeface="Malgun Gothic" pitchFamily="34" charset="-122"/>
                           <a:cs typeface="Malgun Gothic" pitchFamily="34" charset="-120"/>
                         </a:rPr>
-                        <a:t>청크 CRC와 ACK, 최대 2청크 전송</a:t>
+                        <a:t>CRC32 4 B + 데이터 최대 4,096 B</a:t>
                       </a:r>
                       <a:endParaRPr lang="en-US" sz="1500" dirty="0">
                         <a:latin typeface="Malgun Gothic" charset="0"/>
@@ -19659,7 +17018,7 @@
                 <a:ea typeface="Malgun Gothic" pitchFamily="34" charset="-122"/>
                 <a:cs typeface="Malgun Gothic" pitchFamily="34" charset="-120"/>
               </a:rPr>
-              <a:t>백업 없음</a:t>
+              <a:t>0x3F0000</a:t>
             </a:r>
             <a:endParaRPr lang="en-US" sz="2800" dirty="0"/>
           </a:p>
@@ -19701,7 +17060,7 @@
                 <a:ea typeface="Malgun Gothic" pitchFamily="34" charset="-122"/>
                 <a:cs typeface="Malgun Gothic" pitchFamily="34" charset="-120"/>
               </a:rPr>
-              <a:t>10-15 변경: 삭제 범위의</a:t>
+              <a:t>이미지 영역 상한</a:t>
             </a:r>
             <a:endParaRPr lang="en-US" sz="1400" dirty="0"/>
           </a:p>
@@ -19721,7 +17080,7 @@
                 <a:ea typeface="Malgun Gothic" pitchFamily="34" charset="-122"/>
                 <a:cs typeface="Malgun Gothic" pitchFamily="34" charset="-120"/>
               </a:rPr>
-              <a:t>기존 내용은 덮어씀</a:t>
+              <a:t>(IMAGE_LIMIT, 4 MiB 안)</a:t>
             </a:r>
             <a:endParaRPr lang="en-US" sz="1400" dirty="0"/>
           </a:p>
@@ -21030,7 +18389,7 @@
               <a:buNone/>
             </a:pPr>
             <a:r>
-              <a:rPr lang="en-US" sz="1100" b="1" dirty="0">
+              <a:rPr lang="en-US" sz="1150" b="1" dirty="0">
                 <a:solidFill>
                   <a:srgbClr val="5F6B7A"/>
                 </a:solidFill>
@@ -21038,9 +18397,9 @@
                 <a:ea typeface="Malgun Gothic" pitchFamily="34" charset="-122"/>
                 <a:cs typeface="Malgun Gothic" pitchFamily="34" charset="-120"/>
               </a:rPr>
-              <a:t>pc/bmp_store.py — send_file()</a:t>
-            </a:r>
-            <a:endParaRPr lang="en-US" sz="1100" dirty="0"/>
+              <a:t>Core/Src/uart_dma_rx.c</a:t>
+            </a:r>
+            <a:endParaRPr lang="en-US" sz="1150" dirty="0"/>
           </a:p>
           <a:p>
             <a:pPr indent="0" marL="0">
@@ -21050,7 +18409,7 @@
               <a:buNone/>
             </a:pPr>
             <a:r>
-              <a:rPr lang="en-US" sz="1100" dirty="0">
+              <a:rPr lang="en-US" sz="1150" dirty="0">
                 <a:solidFill>
                   <a:srgbClr val="8A94A3"/>
                 </a:solidFill>
@@ -21058,7 +18417,7 @@
                 <a:ea typeface="Consolas" pitchFamily="34" charset="-122"/>
                 <a:cs typeface="Consolas" pitchFamily="34" charset="-120"/>
               </a:rPr>
-              <a:t> 103  </a:t>
+              <a:t>  54  </a:t>
             </a:r>
             <a:pPr indent="0" marL="0">
               <a:lnSpc>
@@ -21067,17 +18426,17 @@
               <a:buNone/>
             </a:pPr>
             <a:r>
-              <a:rPr lang="en-US" sz="1100" dirty="0">
-                <a:solidFill>
-                  <a:srgbClr val="1F2933"/>
+              <a:rPr lang="en-US" sz="1150" b="1" dirty="0">
+                <a:solidFill>
+                  <a:srgbClr val="0F766E"/>
                 </a:solidFill>
                 <a:latin typeface="Consolas" pitchFamily="34" charset="0"/>
                 <a:ea typeface="Consolas" pitchFamily="34" charset="-122"/>
                 <a:cs typeface="Consolas" pitchFamily="34" charset="-120"/>
               </a:rPr>
-              <a:t># Two chunks in flight: receive buffer B can fill while A is stored.</a:t>
-            </a:r>
-            <a:endParaRPr lang="en-US" sz="1100" dirty="0"/>
+              <a:t>if (bank != (completed_blocks &amp; 1U))</a:t>
+            </a:r>
+            <a:endParaRPr lang="en-US" sz="1150" dirty="0"/>
           </a:p>
           <a:p>
             <a:pPr indent="0" marL="0">
@@ -21087,7 +18446,7 @@
               <a:buNone/>
             </a:pPr>
             <a:r>
-              <a:rPr lang="en-US" sz="1100" dirty="0">
+              <a:rPr lang="en-US" sz="1150" dirty="0">
                 <a:solidFill>
                   <a:srgbClr val="8A94A3"/>
                 </a:solidFill>
@@ -21095,7 +18454,7 @@
                 <a:ea typeface="Consolas" pitchFamily="34" charset="-122"/>
                 <a:cs typeface="Consolas" pitchFamily="34" charset="-120"/>
               </a:rPr>
-              <a:t> 104  </a:t>
+              <a:t>  55  </a:t>
             </a:r>
             <a:pPr indent="0" marL="0">
               <a:lnSpc>
@@ -21104,17 +18463,17 @@
               <a:buNone/>
             </a:pPr>
             <a:r>
-              <a:rPr lang="en-US" sz="1100" b="1" dirty="0">
-                <a:solidFill>
-                  <a:srgbClr val="0F766E"/>
+              <a:rPr lang="en-US" sz="1150" dirty="0">
+                <a:solidFill>
+                  <a:srgbClr val="1F2933"/>
                 </a:solidFill>
                 <a:latin typeface="Consolas" pitchFamily="34" charset="0"/>
                 <a:ea typeface="Consolas" pitchFamily="34" charset="-122"/>
                 <a:cs typeface="Consolas" pitchFamily="34" charset="-120"/>
               </a:rPr>
-              <a:t>while sent &lt; len(data) and len(pending) &lt; 2:</a:t>
-            </a:r>
-            <a:endParaRPr lang="en-US" sz="1100" dirty="0"/>
+              <a:t>{</a:t>
+            </a:r>
+            <a:endParaRPr lang="en-US" sz="1150" dirty="0"/>
           </a:p>
           <a:p>
             <a:pPr indent="0" marL="0">
@@ -21124,7 +18483,7 @@
               <a:buNone/>
             </a:pPr>
             <a:r>
-              <a:rPr lang="en-US" sz="1100" dirty="0">
+              <a:rPr lang="en-US" sz="1150" dirty="0">
                 <a:solidFill>
                   <a:srgbClr val="8A94A3"/>
                 </a:solidFill>
@@ -21132,11 +18491,8 @@
                 <a:ea typeface="Consolas" pitchFamily="34" charset="-122"/>
                 <a:cs typeface="Consolas" pitchFamily="34" charset="-120"/>
               </a:rPr>
-              <a:t>      ⋮</a:t>
-            </a:r>
-            <a:endParaRPr lang="en-US" sz="1100" dirty="0"/>
-          </a:p>
-          <a:p>
+              <a:t>  56  </a:t>
+            </a:r>
             <a:pPr indent="0" marL="0">
               <a:lnSpc>
                 <a:spcPct val="120000"/>
@@ -21144,16 +18500,19 @@
               <a:buNone/>
             </a:pPr>
             <a:r>
-              <a:rPr lang="en-US" sz="1100" dirty="0">
-                <a:solidFill>
-                  <a:srgbClr val="8A94A3"/>
+              <a:rPr lang="en-US" sz="1150" dirty="0">
+                <a:solidFill>
+                  <a:srgbClr val="1F2933"/>
                 </a:solidFill>
                 <a:latin typeface="Consolas" pitchFamily="34" charset="0"/>
                 <a:ea typeface="Consolas" pitchFamily="34" charset="-122"/>
                 <a:cs typeface="Consolas" pitchFamily="34" charset="-120"/>
               </a:rPr>
-              <a:t> 111  </a:t>
-            </a:r>
+              <a:t>  rx_error = 1;</a:t>
+            </a:r>
+            <a:endParaRPr lang="en-US" sz="1150" dirty="0"/>
+          </a:p>
+          <a:p>
             <a:pPr indent="0" marL="0">
               <a:lnSpc>
                 <a:spcPct val="120000"/>
@@ -21161,19 +18520,16 @@
               <a:buNone/>
             </a:pPr>
             <a:r>
-              <a:rPr lang="en-US" sz="1100" b="1" dirty="0">
-                <a:solidFill>
-                  <a:srgbClr val="0F766E"/>
+              <a:rPr lang="en-US" sz="1150" dirty="0">
+                <a:solidFill>
+                  <a:srgbClr val="8A94A3"/>
                 </a:solidFill>
                 <a:latin typeface="Consolas" pitchFamily="34" charset="0"/>
                 <a:ea typeface="Consolas" pitchFamily="34" charset="-122"/>
                 <a:cs typeface="Consolas" pitchFamily="34" charset="-120"/>
               </a:rPr>
-              <a:t>if line != f"ACK {expected}":</a:t>
-            </a:r>
-            <a:endParaRPr lang="en-US" sz="1100" dirty="0"/>
-          </a:p>
-          <a:p>
+              <a:t>  57  </a:t>
+            </a:r>
             <a:pPr indent="0" marL="0">
               <a:lnSpc>
                 <a:spcPct val="120000"/>
@@ -21181,6 +18537,325 @@
               <a:buNone/>
             </a:pPr>
             <a:r>
+              <a:rPr lang="en-US" sz="1150" dirty="0">
+                <a:solidFill>
+                  <a:srgbClr val="1F2933"/>
+                </a:solidFill>
+                <a:latin typeface="Consolas" pitchFamily="34" charset="0"/>
+                <a:ea typeface="Consolas" pitchFamily="34" charset="-122"/>
+                <a:cs typeface="Consolas" pitchFamily="34" charset="-120"/>
+              </a:rPr>
+              <a:t>  ++overrun_count;</a:t>
+            </a:r>
+            <a:endParaRPr lang="en-US" sz="1150" dirty="0"/>
+          </a:p>
+          <a:p>
+            <a:pPr indent="0" marL="0">
+              <a:lnSpc>
+                <a:spcPct val="120000"/>
+              </a:lnSpc>
+              <a:buNone/>
+            </a:pPr>
+            <a:r>
+              <a:rPr lang="en-US" sz="1150" dirty="0">
+                <a:solidFill>
+                  <a:srgbClr val="8A94A3"/>
+                </a:solidFill>
+                <a:latin typeface="Consolas" pitchFamily="34" charset="0"/>
+                <a:ea typeface="Consolas" pitchFamily="34" charset="-122"/>
+                <a:cs typeface="Consolas" pitchFamily="34" charset="-120"/>
+              </a:rPr>
+              <a:t>  58  </a:t>
+            </a:r>
+            <a:pPr indent="0" marL="0">
+              <a:lnSpc>
+                <a:spcPct val="120000"/>
+              </a:lnSpc>
+              <a:buNone/>
+            </a:pPr>
+            <a:r>
+              <a:rPr lang="en-US" sz="1150" dirty="0">
+                <a:solidFill>
+                  <a:srgbClr val="1F2933"/>
+                </a:solidFill>
+                <a:latin typeface="Consolas" pitchFamily="34" charset="0"/>
+                <a:ea typeface="Consolas" pitchFamily="34" charset="-122"/>
+                <a:cs typeface="Consolas" pitchFamily="34" charset="-120"/>
+              </a:rPr>
+              <a:t>}</a:t>
+            </a:r>
+            <a:endParaRPr lang="en-US" sz="1150" dirty="0"/>
+          </a:p>
+          <a:p>
+            <a:pPr indent="0" marL="0">
+              <a:lnSpc>
+                <a:spcPct val="120000"/>
+              </a:lnSpc>
+              <a:buNone/>
+            </a:pPr>
+            <a:r>
+              <a:rPr lang="en-US" sz="1150" dirty="0">
+                <a:solidFill>
+                  <a:srgbClr val="8A94A3"/>
+                </a:solidFill>
+                <a:latin typeface="Consolas" pitchFamily="34" charset="0"/>
+                <a:ea typeface="Consolas" pitchFamily="34" charset="-122"/>
+                <a:cs typeface="Consolas" pitchFamily="34" charset="-120"/>
+              </a:rPr>
+              <a:t>      ⋮</a:t>
+            </a:r>
+            <a:endParaRPr lang="en-US" sz="1150" dirty="0"/>
+          </a:p>
+          <a:p>
+            <a:pPr indent="0" marL="0">
+              <a:lnSpc>
+                <a:spcPct val="120000"/>
+              </a:lnSpc>
+              <a:buNone/>
+            </a:pPr>
+            <a:r>
+              <a:rPr lang="en-US" sz="1150" dirty="0">
+                <a:solidFill>
+                  <a:srgbClr val="8A94A3"/>
+                </a:solidFill>
+                <a:latin typeface="Consolas" pitchFamily="34" charset="0"/>
+                <a:ea typeface="Consolas" pitchFamily="34" charset="-122"/>
+                <a:cs typeface="Consolas" pitchFamily="34" charset="-120"/>
+              </a:rPr>
+              <a:t> 131  </a:t>
+            </a:r>
+            <a:pPr indent="0" marL="0">
+              <a:lnSpc>
+                <a:spcPct val="120000"/>
+              </a:lnSpc>
+              <a:buNone/>
+            </a:pPr>
+            <a:r>
+              <a:rPr lang="en-US" sz="1150" dirty="0">
+                <a:solidFill>
+                  <a:srgbClr val="1F2933"/>
+                </a:solidFill>
+                <a:latin typeface="Consolas" pitchFamily="34" charset="0"/>
+                <a:ea typeface="Consolas" pitchFamily="34" charset="-122"/>
+                <a:cs typeface="Consolas" pitchFamily="34" charset="-120"/>
+              </a:rPr>
+              <a:t>  uint32_t available = produced_count() - consumed;</a:t>
+            </a:r>
+            <a:endParaRPr lang="en-US" sz="1150" dirty="0"/>
+          </a:p>
+          <a:p>
+            <a:pPr indent="0" marL="0">
+              <a:lnSpc>
+                <a:spcPct val="120000"/>
+              </a:lnSpc>
+              <a:buNone/>
+            </a:pPr>
+            <a:r>
+              <a:rPr lang="en-US" sz="1150" dirty="0">
+                <a:solidFill>
+                  <a:srgbClr val="8A94A3"/>
+                </a:solidFill>
+                <a:latin typeface="Consolas" pitchFamily="34" charset="0"/>
+                <a:ea typeface="Consolas" pitchFamily="34" charset="-122"/>
+                <a:cs typeface="Consolas" pitchFamily="34" charset="-120"/>
+              </a:rPr>
+              <a:t> 134  </a:t>
+            </a:r>
+            <a:pPr indent="0" marL="0">
+              <a:lnSpc>
+                <a:spcPct val="120000"/>
+              </a:lnSpc>
+              <a:buNone/>
+            </a:pPr>
+            <a:r>
+              <a:rPr lang="en-US" sz="1150" b="1" dirty="0">
+                <a:solidFill>
+                  <a:srgbClr val="0F766E"/>
+                </a:solidFill>
+                <a:latin typeface="Consolas" pitchFamily="34" charset="0"/>
+                <a:ea typeface="Consolas" pitchFamily="34" charset="-122"/>
+                <a:cs typeface="Consolas" pitchFamily="34" charset="-120"/>
+              </a:rPr>
+              <a:t>  if (available &gt; TOTAL_BYTES)</a:t>
+            </a:r>
+            <a:endParaRPr lang="en-US" sz="1150" dirty="0"/>
+          </a:p>
+          <a:p>
+            <a:pPr indent="0" marL="0">
+              <a:lnSpc>
+                <a:spcPct val="120000"/>
+              </a:lnSpc>
+              <a:buNone/>
+            </a:pPr>
+            <a:r>
+              <a:rPr lang="en-US" sz="1150" dirty="0">
+                <a:solidFill>
+                  <a:srgbClr val="8A94A3"/>
+                </a:solidFill>
+                <a:latin typeface="Consolas" pitchFamily="34" charset="0"/>
+                <a:ea typeface="Consolas" pitchFamily="34" charset="-122"/>
+                <a:cs typeface="Consolas" pitchFamily="34" charset="-120"/>
+              </a:rPr>
+              <a:t> 136  </a:t>
+            </a:r>
+            <a:pPr indent="0" marL="0">
+              <a:lnSpc>
+                <a:spcPct val="120000"/>
+              </a:lnSpc>
+              <a:buNone/>
+            </a:pPr>
+            <a:r>
+              <a:rPr lang="en-US" sz="1150" dirty="0">
+                <a:solidFill>
+                  <a:srgbClr val="1F2933"/>
+                </a:solidFill>
+                <a:latin typeface="Consolas" pitchFamily="34" charset="0"/>
+                <a:ea typeface="Consolas" pitchFamily="34" charset="-122"/>
+                <a:cs typeface="Consolas" pitchFamily="34" charset="-120"/>
+              </a:rPr>
+              <a:t>    rx_error = 1;</a:t>
+            </a:r>
+            <a:endParaRPr lang="en-US" sz="1150" dirty="0"/>
+          </a:p>
+          <a:p>
+            <a:pPr indent="0" marL="0">
+              <a:lnSpc>
+                <a:spcPct val="120000"/>
+              </a:lnSpc>
+              <a:buNone/>
+            </a:pPr>
+            <a:r>
+              <a:rPr lang="en-US" sz="1150" dirty="0">
+                <a:solidFill>
+                  <a:srgbClr val="8A94A3"/>
+                </a:solidFill>
+                <a:latin typeface="Consolas" pitchFamily="34" charset="0"/>
+                <a:ea typeface="Consolas" pitchFamily="34" charset="-122"/>
+                <a:cs typeface="Consolas" pitchFamily="34" charset="-120"/>
+              </a:rPr>
+              <a:t> 137  </a:t>
+            </a:r>
+            <a:pPr indent="0" marL="0">
+              <a:lnSpc>
+                <a:spcPct val="120000"/>
+              </a:lnSpc>
+              <a:buNone/>
+            </a:pPr>
+            <a:r>
+              <a:rPr lang="en-US" sz="1150" dirty="0">
+                <a:solidFill>
+                  <a:srgbClr val="1F2933"/>
+                </a:solidFill>
+                <a:latin typeface="Consolas" pitchFamily="34" charset="0"/>
+                <a:ea typeface="Consolas" pitchFamily="34" charset="-122"/>
+                <a:cs typeface="Consolas" pitchFamily="34" charset="-120"/>
+              </a:rPr>
+              <a:t>    ++overrun_count;</a:t>
+            </a:r>
+            <a:endParaRPr lang="en-US" sz="1150" dirty="0"/>
+          </a:p>
+          <a:p>
+            <a:pPr indent="0" marL="0">
+              <a:lnSpc>
+                <a:spcPct val="120000"/>
+              </a:lnSpc>
+              <a:buNone/>
+            </a:pPr>
+            <a:r>
+              <a:rPr lang="en-US" sz="1150" dirty="0">
+                <a:solidFill>
+                  <a:srgbClr val="8A94A3"/>
+                </a:solidFill>
+                <a:latin typeface="Consolas" pitchFamily="34" charset="0"/>
+                <a:ea typeface="Consolas" pitchFamily="34" charset="-122"/>
+                <a:cs typeface="Consolas" pitchFamily="34" charset="-120"/>
+              </a:rPr>
+              <a:t>      ⋮</a:t>
+            </a:r>
+            <a:endParaRPr lang="en-US" sz="1150" dirty="0"/>
+          </a:p>
+          <a:p>
+            <a:pPr indent="0" marL="0">
+              <a:lnSpc>
+                <a:spcPct val="120000"/>
+              </a:lnSpc>
+              <a:buNone/>
+            </a:pPr>
+            <a:r>
+              <a:rPr lang="en-US" sz="1150" dirty="0">
+                <a:solidFill>
+                  <a:srgbClr val="8A94A3"/>
+                </a:solidFill>
+                <a:latin typeface="Consolas" pitchFamily="34" charset="0"/>
+                <a:ea typeface="Consolas" pitchFamily="34" charset="-122"/>
+                <a:cs typeface="Consolas" pitchFamily="34" charset="-120"/>
+              </a:rPr>
+              <a:t> 151  </a:t>
+            </a:r>
+            <a:pPr indent="0" marL="0">
+              <a:lnSpc>
+                <a:spcPct val="120000"/>
+              </a:lnSpc>
+              <a:buNone/>
+            </a:pPr>
+            <a:r>
+              <a:rPr lang="en-US" sz="1150" dirty="0">
+                <a:solidFill>
+                  <a:srgbClr val="1F2933"/>
+                </a:solidFill>
+                <a:latin typeface="Consolas" pitchFamily="34" charset="0"/>
+                <a:ea typeface="Consolas" pitchFamily="34" charset="-122"/>
+                <a:cs typeface="Consolas" pitchFamily="34" charset="-120"/>
+              </a:rPr>
+              <a:t>    /* Fail rather than accept a copy that DMA may have overwritten. */</a:t>
+            </a:r>
+            <a:endParaRPr lang="en-US" sz="1150" dirty="0"/>
+          </a:p>
+          <a:p>
+            <a:pPr indent="0" marL="0">
+              <a:lnSpc>
+                <a:spcPct val="120000"/>
+              </a:lnSpc>
+              <a:buNone/>
+            </a:pPr>
+            <a:r>
+              <a:rPr lang="en-US" sz="1150" dirty="0">
+                <a:solidFill>
+                  <a:srgbClr val="8A94A3"/>
+                </a:solidFill>
+                <a:latin typeface="Consolas" pitchFamily="34" charset="0"/>
+                <a:ea typeface="Consolas" pitchFamily="34" charset="-122"/>
+                <a:cs typeface="Consolas" pitchFamily="34" charset="-120"/>
+              </a:rPr>
+              <a:t> 152  </a:t>
+            </a:r>
+            <a:pPr indent="0" marL="0">
+              <a:lnSpc>
+                <a:spcPct val="120000"/>
+              </a:lnSpc>
+              <a:buNone/>
+            </a:pPr>
+            <a:r>
+              <a:rPr lang="en-US" sz="1150" b="1" dirty="0">
+                <a:solidFill>
+                  <a:srgbClr val="0F766E"/>
+                </a:solidFill>
+                <a:latin typeface="Consolas" pitchFamily="34" charset="0"/>
+                <a:ea typeface="Consolas" pitchFamily="34" charset="-122"/>
+                <a:cs typeface="Consolas" pitchFamily="34" charset="-120"/>
+              </a:rPr>
+              <a:t>    if (produced_count() - consumed &gt; TOTAL_BYTES)</a:t>
+            </a:r>
+            <a:endParaRPr lang="en-US" sz="1150" dirty="0"/>
+          </a:p>
+          <a:p>
+            <a:pPr indent="0" marL="0">
+              <a:lnSpc>
+                <a:spcPct val="120000"/>
+              </a:lnSpc>
+              <a:buNone/>
+            </a:pPr>
+            <a:r>
               <a:rPr lang="en-US" sz="600" dirty="0">
                 <a:solidFill>
                   <a:srgbClr val="000000"/>
@@ -21188,7 +18863,7 @@
               </a:rPr>
               <a:t> </a:t>
             </a:r>
-            <a:endParaRPr lang="en-US" sz="1100" dirty="0"/>
+            <a:endParaRPr lang="en-US" sz="1150" dirty="0"/>
           </a:p>
           <a:p>
             <a:pPr indent="0" marL="0">
@@ -21198,7 +18873,7 @@
               <a:buNone/>
             </a:pPr>
             <a:r>
-              <a:rPr lang="en-US" sz="1100" b="1" dirty="0">
+              <a:rPr lang="en-US" sz="1150" b="1" dirty="0">
                 <a:solidFill>
                   <a:srgbClr val="5F6B7A"/>
                 </a:solidFill>
@@ -21206,9 +18881,9 @@
                 <a:ea typeface="Malgun Gothic" pitchFamily="34" charset="-122"/>
                 <a:cs typeface="Malgun Gothic" pitchFamily="34" charset="-120"/>
               </a:rPr>
-              <a:t>Core/Src/uart_dma_rx.c</a:t>
-            </a:r>
-            <a:endParaRPr lang="en-US" sz="1100" dirty="0"/>
+              <a:t>pc/demo_roundtrip.py</a:t>
+            </a:r>
+            <a:endParaRPr lang="en-US" sz="1150" dirty="0"/>
           </a:p>
           <a:p>
             <a:pPr indent="0" marL="0">
@@ -21218,7 +18893,7 @@
               <a:buNone/>
             </a:pPr>
             <a:r>
-              <a:rPr lang="en-US" sz="1100" dirty="0">
+              <a:rPr lang="en-US" sz="1150" dirty="0">
                 <a:solidFill>
                   <a:srgbClr val="8A94A3"/>
                 </a:solidFill>
@@ -21235,17 +18910,17 @@
               <a:buNone/>
             </a:pPr>
             <a:r>
-              <a:rPr lang="en-US" sz="1100" b="1" dirty="0">
-                <a:solidFill>
-                  <a:srgbClr val="0F766E"/>
+              <a:rPr lang="en-US" sz="1150" dirty="0">
+                <a:solidFill>
+                  <a:srgbClr val="1F2933"/>
                 </a:solidFill>
                 <a:latin typeface="Consolas" pitchFamily="34" charset="0"/>
                 <a:ea typeface="Consolas" pitchFamily="34" charset="-122"/>
                 <a:cs typeface="Consolas" pitchFamily="34" charset="-120"/>
               </a:rPr>
-              <a:t>if (bank != (completed_blocks &amp; 1U))</a:t>
-            </a:r>
-            <a:endParaRPr lang="en-US" sz="1100" dirty="0"/>
+              <a:t>a, b, overruns = dma_stats(port)</a:t>
+            </a:r>
+            <a:endParaRPr lang="en-US" sz="1150" dirty="0"/>
           </a:p>
           <a:p>
             <a:pPr indent="0" marL="0">
@@ -21255,7 +18930,7 @@
               <a:buNone/>
             </a:pPr>
             <a:r>
-              <a:rPr lang="en-US" sz="1100" dirty="0">
+              <a:rPr lang="en-US" sz="1150" dirty="0">
                 <a:solidFill>
                   <a:srgbClr val="8A94A3"/>
                 </a:solidFill>
@@ -21263,7 +18938,7 @@
                 <a:ea typeface="Consolas" pitchFamily="34" charset="-122"/>
                 <a:cs typeface="Consolas" pitchFamily="34" charset="-120"/>
               </a:rPr>
-              <a:t>  57  </a:t>
+              <a:t>  55  </a:t>
             </a:r>
             <a:pPr indent="0" marL="0">
               <a:lnSpc>
@@ -21272,353 +18947,17 @@
               <a:buNone/>
             </a:pPr>
             <a:r>
-              <a:rPr lang="en-US" sz="1100" dirty="0">
-                <a:solidFill>
-                  <a:srgbClr val="1F2933"/>
+              <a:rPr lang="en-US" sz="1150" b="1" dirty="0">
+                <a:solidFill>
+                  <a:srgbClr val="0F766E"/>
                 </a:solidFill>
                 <a:latin typeface="Consolas" pitchFamily="34" charset="0"/>
                 <a:ea typeface="Consolas" pitchFamily="34" charset="-122"/>
                 <a:cs typeface="Consolas" pitchFamily="34" charset="-120"/>
               </a:rPr>
-              <a:t>  ++overrun_count;</a:t>
-            </a:r>
-            <a:endParaRPr lang="en-US" sz="1100" dirty="0"/>
-          </a:p>
-          <a:p>
-            <a:pPr indent="0" marL="0">
-              <a:lnSpc>
-                <a:spcPct val="120000"/>
-              </a:lnSpc>
-              <a:buNone/>
-            </a:pPr>
-            <a:r>
-              <a:rPr lang="en-US" sz="1100" dirty="0">
-                <a:solidFill>
-                  <a:srgbClr val="8A94A3"/>
-                </a:solidFill>
-                <a:latin typeface="Consolas" pitchFamily="34" charset="0"/>
-                <a:ea typeface="Consolas" pitchFamily="34" charset="-122"/>
-                <a:cs typeface="Consolas" pitchFamily="34" charset="-120"/>
-              </a:rPr>
-              <a:t>      ⋮</a:t>
-            </a:r>
-            <a:endParaRPr lang="en-US" sz="1100" dirty="0"/>
-          </a:p>
-          <a:p>
-            <a:pPr indent="0" marL="0">
-              <a:lnSpc>
-                <a:spcPct val="120000"/>
-              </a:lnSpc>
-              <a:buNone/>
-            </a:pPr>
-            <a:r>
-              <a:rPr lang="en-US" sz="1100" dirty="0">
-                <a:solidFill>
-                  <a:srgbClr val="8A94A3"/>
-                </a:solidFill>
-                <a:latin typeface="Consolas" pitchFamily="34" charset="0"/>
-                <a:ea typeface="Consolas" pitchFamily="34" charset="-122"/>
-                <a:cs typeface="Consolas" pitchFamily="34" charset="-120"/>
-              </a:rPr>
-              <a:t> 131  </a:t>
-            </a:r>
-            <a:pPr indent="0" marL="0">
-              <a:lnSpc>
-                <a:spcPct val="120000"/>
-              </a:lnSpc>
-              <a:buNone/>
-            </a:pPr>
-            <a:r>
-              <a:rPr lang="en-US" sz="1100" dirty="0">
-                <a:solidFill>
-                  <a:srgbClr val="1F2933"/>
-                </a:solidFill>
-                <a:latin typeface="Consolas" pitchFamily="34" charset="0"/>
-                <a:ea typeface="Consolas" pitchFamily="34" charset="-122"/>
-                <a:cs typeface="Consolas" pitchFamily="34" charset="-120"/>
-              </a:rPr>
-              <a:t>  uint32_t available = produced_count() - consumed;</a:t>
-            </a:r>
-            <a:endParaRPr lang="en-US" sz="1100" dirty="0"/>
-          </a:p>
-          <a:p>
-            <a:pPr indent="0" marL="0">
-              <a:lnSpc>
-                <a:spcPct val="120000"/>
-              </a:lnSpc>
-              <a:buNone/>
-            </a:pPr>
-            <a:r>
-              <a:rPr lang="en-US" sz="1100" dirty="0">
-                <a:solidFill>
-                  <a:srgbClr val="8A94A3"/>
-                </a:solidFill>
-                <a:latin typeface="Consolas" pitchFamily="34" charset="0"/>
-                <a:ea typeface="Consolas" pitchFamily="34" charset="-122"/>
-                <a:cs typeface="Consolas" pitchFamily="34" charset="-120"/>
-              </a:rPr>
-              <a:t> 134  </a:t>
-            </a:r>
-            <a:pPr indent="0" marL="0">
-              <a:lnSpc>
-                <a:spcPct val="120000"/>
-              </a:lnSpc>
-              <a:buNone/>
-            </a:pPr>
-            <a:r>
-              <a:rPr lang="en-US" sz="1100" b="1" dirty="0">
-                <a:solidFill>
-                  <a:srgbClr val="0F766E"/>
-                </a:solidFill>
-                <a:latin typeface="Consolas" pitchFamily="34" charset="0"/>
-                <a:ea typeface="Consolas" pitchFamily="34" charset="-122"/>
-                <a:cs typeface="Consolas" pitchFamily="34" charset="-120"/>
-              </a:rPr>
-              <a:t>  if (available &gt; TOTAL_BYTES)</a:t>
-            </a:r>
-            <a:endParaRPr lang="en-US" sz="1100" dirty="0"/>
-          </a:p>
-          <a:p>
-            <a:pPr indent="0" marL="0">
-              <a:lnSpc>
-                <a:spcPct val="120000"/>
-              </a:lnSpc>
-              <a:buNone/>
-            </a:pPr>
-            <a:r>
-              <a:rPr lang="en-US" sz="1100" dirty="0">
-                <a:solidFill>
-                  <a:srgbClr val="8A94A3"/>
-                </a:solidFill>
-                <a:latin typeface="Consolas" pitchFamily="34" charset="0"/>
-                <a:ea typeface="Consolas" pitchFamily="34" charset="-122"/>
-                <a:cs typeface="Consolas" pitchFamily="34" charset="-120"/>
-              </a:rPr>
-              <a:t> 137  </a:t>
-            </a:r>
-            <a:pPr indent="0" marL="0">
-              <a:lnSpc>
-                <a:spcPct val="120000"/>
-              </a:lnSpc>
-              <a:buNone/>
-            </a:pPr>
-            <a:r>
-              <a:rPr lang="en-US" sz="1100" dirty="0">
-                <a:solidFill>
-                  <a:srgbClr val="1F2933"/>
-                </a:solidFill>
-                <a:latin typeface="Consolas" pitchFamily="34" charset="0"/>
-                <a:ea typeface="Consolas" pitchFamily="34" charset="-122"/>
-                <a:cs typeface="Consolas" pitchFamily="34" charset="-120"/>
-              </a:rPr>
-              <a:t>    ++overrun_count;</a:t>
-            </a:r>
-            <a:endParaRPr lang="en-US" sz="1100" dirty="0"/>
-          </a:p>
-          <a:p>
-            <a:pPr indent="0" marL="0">
-              <a:lnSpc>
-                <a:spcPct val="120000"/>
-              </a:lnSpc>
-              <a:buNone/>
-            </a:pPr>
-            <a:r>
-              <a:rPr lang="en-US" sz="1100" dirty="0">
-                <a:solidFill>
-                  <a:srgbClr val="8A94A3"/>
-                </a:solidFill>
-                <a:latin typeface="Consolas" pitchFamily="34" charset="0"/>
-                <a:ea typeface="Consolas" pitchFamily="34" charset="-122"/>
-                <a:cs typeface="Consolas" pitchFamily="34" charset="-120"/>
-              </a:rPr>
-              <a:t>      ⋮</a:t>
-            </a:r>
-            <a:endParaRPr lang="en-US" sz="1100" dirty="0"/>
-          </a:p>
-          <a:p>
-            <a:pPr indent="0" marL="0">
-              <a:lnSpc>
-                <a:spcPct val="120000"/>
-              </a:lnSpc>
-              <a:buNone/>
-            </a:pPr>
-            <a:r>
-              <a:rPr lang="en-US" sz="1100" dirty="0">
-                <a:solidFill>
-                  <a:srgbClr val="8A94A3"/>
-                </a:solidFill>
-                <a:latin typeface="Consolas" pitchFamily="34" charset="0"/>
-                <a:ea typeface="Consolas" pitchFamily="34" charset="-122"/>
-                <a:cs typeface="Consolas" pitchFamily="34" charset="-120"/>
-              </a:rPr>
-              <a:t> 151  </a:t>
-            </a:r>
-            <a:pPr indent="0" marL="0">
-              <a:lnSpc>
-                <a:spcPct val="120000"/>
-              </a:lnSpc>
-              <a:buNone/>
-            </a:pPr>
-            <a:r>
-              <a:rPr lang="en-US" sz="1100" dirty="0">
-                <a:solidFill>
-                  <a:srgbClr val="1F2933"/>
-                </a:solidFill>
-                <a:latin typeface="Consolas" pitchFamily="34" charset="0"/>
-                <a:ea typeface="Consolas" pitchFamily="34" charset="-122"/>
-                <a:cs typeface="Consolas" pitchFamily="34" charset="-120"/>
-              </a:rPr>
-              <a:t>    /* Fail rather than accept a copy that DMA may have overwritten. */</a:t>
-            </a:r>
-            <a:endParaRPr lang="en-US" sz="1100" dirty="0"/>
-          </a:p>
-          <a:p>
-            <a:pPr indent="0" marL="0">
-              <a:lnSpc>
-                <a:spcPct val="120000"/>
-              </a:lnSpc>
-              <a:buNone/>
-            </a:pPr>
-            <a:r>
-              <a:rPr lang="en-US" sz="1100" dirty="0">
-                <a:solidFill>
-                  <a:srgbClr val="8A94A3"/>
-                </a:solidFill>
-                <a:latin typeface="Consolas" pitchFamily="34" charset="0"/>
-                <a:ea typeface="Consolas" pitchFamily="34" charset="-122"/>
-                <a:cs typeface="Consolas" pitchFamily="34" charset="-120"/>
-              </a:rPr>
-              <a:t> 152  </a:t>
-            </a:r>
-            <a:pPr indent="0" marL="0">
-              <a:lnSpc>
-                <a:spcPct val="120000"/>
-              </a:lnSpc>
-              <a:buNone/>
-            </a:pPr>
-            <a:r>
-              <a:rPr lang="en-US" sz="1100" b="1" dirty="0">
-                <a:solidFill>
-                  <a:srgbClr val="0F766E"/>
-                </a:solidFill>
-                <a:latin typeface="Consolas" pitchFamily="34" charset="0"/>
-                <a:ea typeface="Consolas" pitchFamily="34" charset="-122"/>
-                <a:cs typeface="Consolas" pitchFamily="34" charset="-120"/>
-              </a:rPr>
-              <a:t>    if (produced_count() - consumed &gt; TOTAL_BYTES)</a:t>
-            </a:r>
-            <a:endParaRPr lang="en-US" sz="1100" dirty="0"/>
-          </a:p>
-          <a:p>
-            <a:pPr indent="0" marL="0">
-              <a:lnSpc>
-                <a:spcPct val="120000"/>
-              </a:lnSpc>
-              <a:buNone/>
-            </a:pPr>
-            <a:r>
-              <a:rPr lang="en-US" sz="600" dirty="0">
-                <a:solidFill>
-                  <a:srgbClr val="000000"/>
-                </a:solidFill>
-              </a:rPr>
-              <a:t> </a:t>
-            </a:r>
-            <a:endParaRPr lang="en-US" sz="1100" dirty="0"/>
-          </a:p>
-          <a:p>
-            <a:pPr indent="0" marL="0">
-              <a:lnSpc>
-                <a:spcPct val="120000"/>
-              </a:lnSpc>
-              <a:buNone/>
-            </a:pPr>
-            <a:r>
-              <a:rPr lang="en-US" sz="1100" b="1" dirty="0">
-                <a:solidFill>
-                  <a:srgbClr val="5F6B7A"/>
-                </a:solidFill>
-                <a:latin typeface="Malgun Gothic" pitchFamily="34" charset="0"/>
-                <a:ea typeface="Malgun Gothic" pitchFamily="34" charset="-122"/>
-                <a:cs typeface="Malgun Gothic" pitchFamily="34" charset="-120"/>
-              </a:rPr>
-              <a:t>pc/demo_roundtrip.py</a:t>
-            </a:r>
-            <a:endParaRPr lang="en-US" sz="1100" dirty="0"/>
-          </a:p>
-          <a:p>
-            <a:pPr indent="0" marL="0">
-              <a:lnSpc>
-                <a:spcPct val="120000"/>
-              </a:lnSpc>
-              <a:buNone/>
-            </a:pPr>
-            <a:r>
-              <a:rPr lang="en-US" sz="1100" dirty="0">
-                <a:solidFill>
-                  <a:srgbClr val="8A94A3"/>
-                </a:solidFill>
-                <a:latin typeface="Consolas" pitchFamily="34" charset="0"/>
-                <a:ea typeface="Consolas" pitchFamily="34" charset="-122"/>
-                <a:cs typeface="Consolas" pitchFamily="34" charset="-120"/>
-              </a:rPr>
-              <a:t>  54  </a:t>
-            </a:r>
-            <a:pPr indent="0" marL="0">
-              <a:lnSpc>
-                <a:spcPct val="120000"/>
-              </a:lnSpc>
-              <a:buNone/>
-            </a:pPr>
-            <a:r>
-              <a:rPr lang="en-US" sz="1100" dirty="0">
-                <a:solidFill>
-                  <a:srgbClr val="1F2933"/>
-                </a:solidFill>
-                <a:latin typeface="Consolas" pitchFamily="34" charset="0"/>
-                <a:ea typeface="Consolas" pitchFamily="34" charset="-122"/>
-                <a:cs typeface="Consolas" pitchFamily="34" charset="-120"/>
-              </a:rPr>
-              <a:t>a, b, overruns = dma_stats(port)</a:t>
-            </a:r>
-            <a:endParaRPr lang="en-US" sz="1100" dirty="0"/>
-          </a:p>
-          <a:p>
-            <a:pPr indent="0" marL="0">
-              <a:lnSpc>
-                <a:spcPct val="120000"/>
-              </a:lnSpc>
-              <a:buNone/>
-            </a:pPr>
-            <a:r>
-              <a:rPr lang="en-US" sz="1100" dirty="0">
-                <a:solidFill>
-                  <a:srgbClr val="8A94A3"/>
-                </a:solidFill>
-                <a:latin typeface="Consolas" pitchFamily="34" charset="0"/>
-                <a:ea typeface="Consolas" pitchFamily="34" charset="-122"/>
-                <a:cs typeface="Consolas" pitchFamily="34" charset="-120"/>
-              </a:rPr>
-              <a:t>  55  </a:t>
-            </a:r>
-            <a:pPr indent="0" marL="0">
-              <a:lnSpc>
-                <a:spcPct val="120000"/>
-              </a:lnSpc>
-              <a:buNone/>
-            </a:pPr>
-            <a:r>
-              <a:rPr lang="en-US" sz="1100" b="1" dirty="0">
-                <a:solidFill>
-                  <a:srgbClr val="0F766E"/>
-                </a:solidFill>
-                <a:latin typeface="Consolas" pitchFamily="34" charset="0"/>
-                <a:ea typeface="Consolas" pitchFamily="34" charset="-122"/>
-                <a:cs typeface="Consolas" pitchFamily="34" charset="-120"/>
-              </a:rPr>
               <a:t>if overruns: raise TestError("DMA 버퍼 초과가 발생했습니다.")</a:t>
             </a:r>
-            <a:endParaRPr lang="en-US" sz="1100" dirty="0"/>
+            <a:endParaRPr lang="en-US" sz="1150" dirty="0"/>
           </a:p>
         </p:txBody>
       </p:sp>
@@ -21658,49 +18997,6 @@
                 <a:ea typeface="Malgun Gothic" pitchFamily="34" charset="-122"/>
                 <a:cs typeface="Malgun Gothic" pitchFamily="34" charset="-120"/>
               </a:rPr>
-              <a:t>bmp_store.py 104행</a:t>
-            </a:r>
-            <a:endParaRPr lang="en-US" sz="1600" dirty="0"/>
-          </a:p>
-          <a:p>
-            <a:pPr indent="0" marL="0">
-              <a:lnSpc>
-                <a:spcPct val="110000"/>
-              </a:lnSpc>
-              <a:spcAft>
-                <a:spcPts val="900"/>
-              </a:spcAft>
-              <a:buNone/>
-            </a:pPr>
-            <a:r>
-              <a:rPr lang="en-US" sz="1400" dirty="0">
-                <a:solidFill>
-                  <a:srgbClr val="1F2933"/>
-                </a:solidFill>
-                <a:latin typeface="Malgun Gothic" pitchFamily="34" charset="0"/>
-                <a:ea typeface="Malgun Gothic" pitchFamily="34" charset="-122"/>
-                <a:cs typeface="Malgun Gothic" pitchFamily="34" charset="-120"/>
-              </a:rPr>
-              <a:t>PC는 ACK를 받지 않은 청크를 최대 2개까지만 보냄 (수신 버퍼 2개)</a:t>
-            </a:r>
-            <a:endParaRPr lang="en-US" sz="1600" dirty="0"/>
-          </a:p>
-          <a:p>
-            <a:pPr indent="0" marL="0">
-              <a:lnSpc>
-                <a:spcPct val="110000"/>
-              </a:lnSpc>
-              <a:buNone/>
-            </a:pPr>
-            <a:r>
-              <a:rPr lang="en-US" sz="1300" b="1" dirty="0">
-                <a:solidFill>
-                  <a:srgbClr val="0F766E"/>
-                </a:solidFill>
-                <a:latin typeface="Malgun Gothic" pitchFamily="34" charset="0"/>
-                <a:ea typeface="Malgun Gothic" pitchFamily="34" charset="-122"/>
-                <a:cs typeface="Malgun Gothic" pitchFamily="34" charset="-120"/>
-              </a:rPr>
               <a:t>uart_dma_rx.c 54행</a:t>
             </a:r>
             <a:endParaRPr lang="en-US" sz="1600" dirty="0"/>
@@ -21824,8 +19120,8 @@
         </p:nvSpPr>
         <p:spPr>
           <a:xfrm>
-            <a:off x="8412480" y="5074920"/>
-            <a:ext cx="3227832" cy="1097280"/>
+            <a:off x="8412480" y="4937760"/>
+            <a:ext cx="3227832" cy="1234440"/>
           </a:xfrm>
           <a:prstGeom prst="rect">
             <a:avLst/>
@@ -21849,8 +19145,8 @@
         </p:nvSpPr>
         <p:spPr>
           <a:xfrm>
-            <a:off x="8549640" y="5148072"/>
-            <a:ext cx="2971800" cy="960120"/>
+            <a:off x="8549640" y="5029200"/>
+            <a:ext cx="3017520" cy="1051560"/>
           </a:xfrm>
           <a:prstGeom prst="rect">
             <a:avLst/>
@@ -21877,7 +19173,7 @@
                 <a:ea typeface="Malgun Gothic" pitchFamily="34" charset="-122"/>
                 <a:cs typeface="Malgun Gothic" pitchFamily="34" charset="-120"/>
               </a:rPr>
-              <a:t>기록된 값 (2026-10-15 저장 5회)</a:t>
+              <a:t>최신 저장 실행 (2026-10-15 20:01)</a:t>
             </a:r>
             <a:endParaRPr lang="en-US" sz="1600" dirty="0"/>
           </a:p>
@@ -21909,7 +19205,7 @@
               <a:buNone/>
             </a:pPr>
             <a:r>
-              <a:rPr lang="en-US" sz="1100" dirty="0">
+              <a:rPr lang="en-US" sz="1000" dirty="0">
                 <a:solidFill>
                   <a:srgbClr val="5F6B7A"/>
                 </a:solidFill>
@@ -21917,7 +19213,7 @@
                 <a:ea typeface="Malgun Gothic" pitchFamily="34" charset="-122"/>
                 <a:cs typeface="Malgun Gothic" pitchFamily="34" charset="-120"/>
               </a:rPr>
-              <a:t>demo_report_20261015_*.json</a:t>
+              <a:t>demo_report_20261015_200146_452196.json</a:t>
             </a:r>
             <a:endParaRPr lang="en-US" sz="1600" dirty="0"/>
           </a:p>
